--- a/report/CS221_Xử-Lý-NNTN_slide.pptx
+++ b/report/CS221_Xử-Lý-NNTN_slide.pptx
@@ -1359,7 +1359,7 @@
           <a:lstStyle/>
           <a:p>
             <a:r>
-              <a:t>Tập dữ liệu có 20.000 bình luận, hai cột: văn bản và nhãn. Đây là hai cột text và label của gói ATSH-NLP-20k, trích từ dự án ATSH-ABSA của Phạm Xuân Vĩnh Hà ở UIT; nhóm em chỉ dùng cho học tập theo đúng điều kiện của tác giả. Ba lớp lệch nhau: tích cực gần một nửa, trung tính chỉ 17%. Con số 17% này sẽ quay lại ở phần kết quả, vì trung tính là lớp yếu nhất. Ba điều nhóm em nói thẳng. Thứ nhất, mọi bình luận đều về một chương trình, nên mô hình học cả tên thí sinh làm tín hiệu. Thứ hai, tỉ lệ ba lớp là do tác giả lấy mẫu lại: dữ liệu gốc khoảng 88% tích cực, tác giả giữ hết trung tính, lấy đúng 7.000 tiêu cực rồi bù tích cực cho đủ 20.000; vì vậy số 7.000 tròn, và tỉ lệ này không phải tỉ lệ thật trên YouTube. Thứ ba, nhãn là nhãn silver do mô hình ngôn ngữ lớn gán theo từng đối tượng và khía cạnh rồi gộp lại, chưa có người kiểm từng dòng; chính tác giả ghi trung tính là lớp nhiễu nhất. Phần đọc tay 150 bình luận ở cuối bài cũng là để kiểm chất lượng nhãn.</a:t>
+              <a:t>Tập dữ liệu có 20.000 bình luận, hai cột: văn bản và nhãn. Đây là hai cột text và label của gói ATSH-NLP-20k, trích từ dự án ATSH-ABSA ở UIT; nhóm em chỉ dùng cho học tập theo đúng điều kiện của tác giả. Ba lớp lệch nhau: tích cực gần một nửa, trung tính chỉ 17%. Con số 17% này sẽ quay lại ở phần kết quả, vì trung tính là lớp yếu nhất. Ba điều nhóm em nói thẳng. Thứ nhất, mọi bình luận đều về một chương trình, nên mô hình học cả tên thí sinh làm tín hiệu. Thứ hai, tỉ lệ ba lớp là do tác giả lấy mẫu lại: dữ liệu gốc khoảng 88% tích cực, tác giả giữ hết trung tính, lấy đúng 7.000 tiêu cực rồi bù tích cực cho đủ 20.000; vì vậy số 7.000 tròn, và tỉ lệ này không phải tỉ lệ thật trên YouTube. Thứ ba, nhãn là nhãn silver do mô hình ngôn ngữ lớn gán theo từng đối tượng và khía cạnh rồi gộp lại, chưa có người kiểm từng dòng; chính tác giả ghi trung tính là lớp nhiễu nhất. Phần đọc tay 150 bình luận ở cuối bài cũng là để kiểm chất lượng nhãn.</a:t>
             </a:r>
           </a:p>
         </p:txBody>
@@ -5686,8 +5686,8 @@
         </p:blipFill>
         <p:spPr>
           <a:xfrm>
-            <a:off x="6108192" y="1810512"/>
-            <a:ext cx="5257800" cy="4423092"/>
+            <a:off x="6142866" y="1810512"/>
+            <a:ext cx="5282634" cy="4443983"/>
           </a:xfrm>
           <a:prstGeom prst="rect">
             <a:avLst/>
@@ -7126,8 +7126,8 @@
         </p:blipFill>
         <p:spPr>
           <a:xfrm>
-            <a:off x="5577840" y="1847088"/>
-            <a:ext cx="5879592" cy="3674745"/>
+            <a:off x="4983480" y="1810512"/>
+            <a:ext cx="6476695" cy="4047934"/>
           </a:xfrm>
           <a:prstGeom prst="rect">
             <a:avLst/>
@@ -7148,7 +7148,7 @@
         <p:spPr>
           <a:xfrm>
             <a:off x="731520" y="1901952"/>
-            <a:ext cx="4617720" cy="4315968"/>
+            <a:ext cx="4023360" cy="4315968"/>
           </a:xfrm>
           <a:prstGeom prst="rect">
             <a:avLst/>
@@ -9387,7 +9387,7 @@
         <p:spPr>
           <a:xfrm>
             <a:off x="731520" y="1810512"/>
-            <a:ext cx="10728655" cy="4572000"/>
+            <a:ext cx="10728655" cy="4443983"/>
           </a:xfrm>
           <a:prstGeom prst="rect">
             <a:avLst/>
@@ -9620,7 +9620,7 @@
                 </a:solidFill>
                 <a:latin typeface="Calibri"/>
               </a:rPr>
-              <a:t>Dữ liệu được cung cấp bởi dự án ATSH-ABSA (Phạm Xuân Vĩnh Hà, UIT), chỉ dùng cho mục đích học tập. Gói ATSH-NLP-20k.</a:t>
+              <a:t>Dữ liệu được cung cấp bởi dự án ATSH-ABSA (UIT), chỉ dùng cho mục đích học tập. Gói ATSH-NLP-20k.</a:t>
             </a:r>
           </a:p>
         </p:txBody>
@@ -11405,91 +11405,6 @@
         <p:nvPr/>
       </p:nvGrpSpPr>
       <p:grpSpPr/>
-      <p:pic>
-        <p:nvPicPr>
-          <p:cNvPr id="2" name="Picture 1" descr="pipeline_slate.png"/>
-          <p:cNvPicPr>
-            <a:picLocks noChangeAspect="1"/>
-          </p:cNvPicPr>
-          <p:nvPr/>
-        </p:nvPicPr>
-        <p:blipFill>
-          <a:blip r:embed="rId2"/>
-          <a:stretch>
-            <a:fillRect/>
-          </a:stretch>
-        </p:blipFill>
-        <p:spPr>
-          <a:xfrm>
-            <a:off x="0" y="0"/>
-            <a:ext cx="12191695" cy="6858000"/>
-          </a:xfrm>
-          <a:prstGeom prst="rect">
-            <a:avLst/>
-          </a:prstGeom>
-        </p:spPr>
-      </p:pic>
-      <p:sp>
-        <p:nvSpPr>
-          <p:cNvPr id="3" name="TextBox 2"/>
-          <p:cNvSpPr txBox="1"/>
-          <p:nvPr/>
-        </p:nvSpPr>
-        <p:spPr>
-          <a:xfrm>
-            <a:off x="10545775" y="6291072"/>
-            <a:ext cx="914400" cy="274320"/>
-          </a:xfrm>
-          <a:prstGeom prst="rect">
-            <a:avLst/>
-          </a:prstGeom>
-          <a:noFill/>
-        </p:spPr>
-        <p:txBody>
-          <a:bodyPr wrap="square" lIns="0" rIns="0" tIns="0" bIns="0">
-            <a:spAutoFit/>
-          </a:bodyPr>
-          <a:lstStyle/>
-          <a:p>
-            <a:pPr algn="r"/>
-            <a:r>
-              <a:rPr sz="1100" b="0" i="0">
-                <a:solidFill>
-                  <a:srgbClr val="8296B0"/>
-                </a:solidFill>
-                <a:latin typeface="Calibri"/>
-              </a:rPr>
-              <a:t>3</a:t>
-            </a:r>
-          </a:p>
-        </p:txBody>
-      </p:sp>
-    </p:spTree>
-  </p:cSld>
-  <p:clrMapOvr>
-    <a:masterClrMapping/>
-  </p:clrMapOvr>
-</p:sld>
-</file>
-
-<file path=ppt/slides/slide4.xml><?xml version="1.0" encoding="utf-8"?>
-<p:sld xmlns:a="http://schemas.openxmlformats.org/drawingml/2006/main" xmlns:p="http://schemas.openxmlformats.org/presentationml/2006/main" xmlns:r="http://schemas.openxmlformats.org/officeDocument/2006/relationships">
-  <p:cSld>
-    <p:bg>
-      <p:bgPr>
-        <a:solidFill>
-          <a:srgbClr val="1E293B"/>
-        </a:solidFill>
-        <a:effectLst/>
-      </p:bgPr>
-    </p:bg>
-    <p:spTree>
-      <p:nvGrpSpPr>
-        <p:cNvPr id="1" name=""/>
-        <p:cNvGrpSpPr/>
-        <p:nvPr/>
-      </p:nvGrpSpPr>
-      <p:grpSpPr/>
       <p:sp>
         <p:nvSpPr>
           <p:cNvPr id="2" name="TextBox 1"/>
@@ -11519,7 +11434,7 @@
                 </a:solidFill>
                 <a:latin typeface="Calibri"/>
               </a:rPr>
-              <a:t>BƯỚC 1 · DỮ LIỆU</a:t>
+              <a:t>TỔNG QUAN</a:t>
             </a:r>
           </a:p>
         </p:txBody>
@@ -11558,7 +11473,7 @@
                 </a:solidFill>
                 <a:latin typeface="Calibri Light"/>
               </a:rPr>
-              <a:t>20.000 bình luận có nhãn về một chương trình</a:t>
+              <a:t>Pipeline năm bước theo bài giảng, mỗi bước một module</a:t>
             </a:r>
           </a:p>
         </p:txBody>
@@ -11637,512 +11552,35 @@
                 </a:solidFill>
                 <a:latin typeface="Calibri"/>
               </a:rPr>
-              <a:t>4</a:t>
-            </a:r>
-          </a:p>
-        </p:txBody>
-      </p:sp>
-      <p:graphicFrame>
-        <p:nvGraphicFramePr>
-          <p:cNvPr id="6" name="Table 5"/>
-          <p:cNvGraphicFramePr>
-            <a:graphicFrameLocks noGrp="1"/>
-          </p:cNvGraphicFramePr>
+              <a:t>3</a:t>
+            </a:r>
+          </a:p>
+        </p:txBody>
+      </p:sp>
+      <p:pic>
+        <p:nvPicPr>
+          <p:cNvPr id="6" name="Picture 5" descr="pipeline_slate_body.png"/>
+          <p:cNvPicPr>
+            <a:picLocks noChangeAspect="1"/>
+          </p:cNvPicPr>
           <p:nvPr/>
-        </p:nvGraphicFramePr>
-        <p:xfrm>
-          <a:off x="731520" y="1874519"/>
-          <a:ext cx="5029200" cy="2779776"/>
-        </p:xfrm>
-        <a:graphic>
-          <a:graphicData uri="http://schemas.openxmlformats.org/drawingml/2006/table">
-            <a:tbl>
-              <a:tblPr>
-                <a:tableStyleId>{2D5ABB26-0587-4C30-8999-92F81FD0307C}</a:tableStyleId>
-              </a:tblPr>
-              <a:tblGrid>
-                <a:gridCol w="2286000"/>
-                <a:gridCol w="1371600"/>
-                <a:gridCol w="1371600"/>
-              </a:tblGrid>
-              <a:tr h="585216">
-                <a:tc>
-                  <a:txBody>
-                    <a:bodyPr wrap="square"/>
-                    <a:lstStyle/>
-                    <a:p>
-                      <a:pPr algn="l"/>
-                      <a:r>
-                        <a:rPr sz="1500" b="1" i="0">
-                          <a:solidFill>
-                            <a:srgbClr val="5EEAD4"/>
-                          </a:solidFill>
-                          <a:latin typeface="Calibri"/>
-                        </a:rPr>
-                        <a:t>Nhãn</a:t>
-                      </a:r>
-                    </a:p>
-                  </a:txBody>
-                  <a:tcPr anchor="ctr" marL="100584" marR="100584" marT="36576" marB="36576">
-                    <a:solidFill>
-                      <a:srgbClr val="334155"/>
-                    </a:solidFill>
-                  </a:tcPr>
-                </a:tc>
-                <a:tc>
-                  <a:txBody>
-                    <a:bodyPr wrap="square"/>
-                    <a:lstStyle/>
-                    <a:p>
-                      <a:pPr algn="r"/>
-                      <a:r>
-                        <a:rPr sz="1500" b="1" i="0">
-                          <a:solidFill>
-                            <a:srgbClr val="5EEAD4"/>
-                          </a:solidFill>
-                          <a:latin typeface="Calibri"/>
-                        </a:rPr>
-                        <a:t>Số dòng</a:t>
-                      </a:r>
-                    </a:p>
-                  </a:txBody>
-                  <a:tcPr anchor="ctr" marL="100584" marR="100584" marT="36576" marB="36576">
-                    <a:solidFill>
-                      <a:srgbClr val="334155"/>
-                    </a:solidFill>
-                  </a:tcPr>
-                </a:tc>
-                <a:tc>
-                  <a:txBody>
-                    <a:bodyPr wrap="square"/>
-                    <a:lstStyle/>
-                    <a:p>
-                      <a:pPr algn="r"/>
-                      <a:r>
-                        <a:rPr sz="1500" b="1" i="0">
-                          <a:solidFill>
-                            <a:srgbClr val="5EEAD4"/>
-                          </a:solidFill>
-                          <a:latin typeface="Calibri"/>
-                        </a:rPr>
-                        <a:t>Tỉ lệ</a:t>
-                      </a:r>
-                    </a:p>
-                  </a:txBody>
-                  <a:tcPr anchor="ctr" marL="100584" marR="100584" marT="36576" marB="36576">
-                    <a:solidFill>
-                      <a:srgbClr val="334155"/>
-                    </a:solidFill>
-                  </a:tcPr>
-                </a:tc>
-              </a:tr>
-              <a:tr h="548640">
-                <a:tc>
-                  <a:txBody>
-                    <a:bodyPr wrap="square"/>
-                    <a:lstStyle/>
-                    <a:p>
-                      <a:pPr algn="l"/>
-                      <a:r>
-                        <a:rPr sz="1500" b="0" i="0">
-                          <a:solidFill>
-                            <a:srgbClr val="CBD5E1"/>
-                          </a:solidFill>
-                          <a:latin typeface="Calibri"/>
-                        </a:rPr>
-                        <a:t>Tiêu cực (0)</a:t>
-                      </a:r>
-                    </a:p>
-                  </a:txBody>
-                  <a:tcPr anchor="ctr" marL="100584" marR="100584" marT="36576" marB="36576">
-                    <a:solidFill>
-                      <a:srgbClr val="243247"/>
-                    </a:solidFill>
-                  </a:tcPr>
-                </a:tc>
-                <a:tc>
-                  <a:txBody>
-                    <a:bodyPr wrap="square"/>
-                    <a:lstStyle/>
-                    <a:p>
-                      <a:pPr algn="r"/>
-                      <a:r>
-                        <a:rPr sz="1500" b="0" i="0">
-                          <a:solidFill>
-                            <a:srgbClr val="CBD5E1"/>
-                          </a:solidFill>
-                          <a:latin typeface="Calibri"/>
-                        </a:rPr>
-                        <a:t>7.000</a:t>
-                      </a:r>
-                    </a:p>
-                  </a:txBody>
-                  <a:tcPr anchor="ctr" marL="100584" marR="100584" marT="36576" marB="36576">
-                    <a:solidFill>
-                      <a:srgbClr val="243247"/>
-                    </a:solidFill>
-                  </a:tcPr>
-                </a:tc>
-                <a:tc>
-                  <a:txBody>
-                    <a:bodyPr wrap="square"/>
-                    <a:lstStyle/>
-                    <a:p>
-                      <a:pPr algn="r"/>
-                      <a:r>
-                        <a:rPr sz="1500" b="0" i="0">
-                          <a:solidFill>
-                            <a:srgbClr val="CBD5E1"/>
-                          </a:solidFill>
-                          <a:latin typeface="Calibri"/>
-                        </a:rPr>
-                        <a:t>35,0%</a:t>
-                      </a:r>
-                    </a:p>
-                  </a:txBody>
-                  <a:tcPr anchor="ctr" marL="100584" marR="100584" marT="36576" marB="36576">
-                    <a:solidFill>
-                      <a:srgbClr val="243247"/>
-                    </a:solidFill>
-                  </a:tcPr>
-                </a:tc>
-              </a:tr>
-              <a:tr h="548640">
-                <a:tc>
-                  <a:txBody>
-                    <a:bodyPr wrap="square"/>
-                    <a:lstStyle/>
-                    <a:p>
-                      <a:pPr algn="l"/>
-                      <a:r>
-                        <a:rPr sz="1500" b="0" i="0">
-                          <a:solidFill>
-                            <a:srgbClr val="CBD5E1"/>
-                          </a:solidFill>
-                          <a:latin typeface="Calibri"/>
-                        </a:rPr>
-                        <a:t>Trung tính (1)</a:t>
-                      </a:r>
-                    </a:p>
-                  </a:txBody>
-                  <a:tcPr anchor="ctr" marL="100584" marR="100584" marT="36576" marB="36576">
-                    <a:solidFill>
-                      <a:srgbClr val="2B3A50"/>
-                    </a:solidFill>
-                  </a:tcPr>
-                </a:tc>
-                <a:tc>
-                  <a:txBody>
-                    <a:bodyPr wrap="square"/>
-                    <a:lstStyle/>
-                    <a:p>
-                      <a:pPr algn="r"/>
-                      <a:r>
-                        <a:rPr sz="1500" b="0" i="0">
-                          <a:solidFill>
-                            <a:srgbClr val="CBD5E1"/>
-                          </a:solidFill>
-                          <a:latin typeface="Calibri"/>
-                        </a:rPr>
-                        <a:t>3.409</a:t>
-                      </a:r>
-                    </a:p>
-                  </a:txBody>
-                  <a:tcPr anchor="ctr" marL="100584" marR="100584" marT="36576" marB="36576">
-                    <a:solidFill>
-                      <a:srgbClr val="2B3A50"/>
-                    </a:solidFill>
-                  </a:tcPr>
-                </a:tc>
-                <a:tc>
-                  <a:txBody>
-                    <a:bodyPr wrap="square"/>
-                    <a:lstStyle/>
-                    <a:p>
-                      <a:pPr algn="r"/>
-                      <a:r>
-                        <a:rPr sz="1500" b="0" i="0">
-                          <a:solidFill>
-                            <a:srgbClr val="CBD5E1"/>
-                          </a:solidFill>
-                          <a:latin typeface="Calibri"/>
-                        </a:rPr>
-                        <a:t>17,0%</a:t>
-                      </a:r>
-                    </a:p>
-                  </a:txBody>
-                  <a:tcPr anchor="ctr" marL="100584" marR="100584" marT="36576" marB="36576">
-                    <a:solidFill>
-                      <a:srgbClr val="2B3A50"/>
-                    </a:solidFill>
-                  </a:tcPr>
-                </a:tc>
-              </a:tr>
-              <a:tr h="548640">
-                <a:tc>
-                  <a:txBody>
-                    <a:bodyPr wrap="square"/>
-                    <a:lstStyle/>
-                    <a:p>
-                      <a:pPr algn="l"/>
-                      <a:r>
-                        <a:rPr sz="1500" b="0" i="0">
-                          <a:solidFill>
-                            <a:srgbClr val="CBD5E1"/>
-                          </a:solidFill>
-                          <a:latin typeface="Calibri"/>
-                        </a:rPr>
-                        <a:t>Tích cực (2)</a:t>
-                      </a:r>
-                    </a:p>
-                  </a:txBody>
-                  <a:tcPr anchor="ctr" marL="100584" marR="100584" marT="36576" marB="36576">
-                    <a:solidFill>
-                      <a:srgbClr val="243247"/>
-                    </a:solidFill>
-                  </a:tcPr>
-                </a:tc>
-                <a:tc>
-                  <a:txBody>
-                    <a:bodyPr wrap="square"/>
-                    <a:lstStyle/>
-                    <a:p>
-                      <a:pPr algn="r"/>
-                      <a:r>
-                        <a:rPr sz="1500" b="0" i="0">
-                          <a:solidFill>
-                            <a:srgbClr val="CBD5E1"/>
-                          </a:solidFill>
-                          <a:latin typeface="Calibri"/>
-                        </a:rPr>
-                        <a:t>9.591</a:t>
-                      </a:r>
-                    </a:p>
-                  </a:txBody>
-                  <a:tcPr anchor="ctr" marL="100584" marR="100584" marT="36576" marB="36576">
-                    <a:solidFill>
-                      <a:srgbClr val="243247"/>
-                    </a:solidFill>
-                  </a:tcPr>
-                </a:tc>
-                <a:tc>
-                  <a:txBody>
-                    <a:bodyPr wrap="square"/>
-                    <a:lstStyle/>
-                    <a:p>
-                      <a:pPr algn="r"/>
-                      <a:r>
-                        <a:rPr sz="1500" b="0" i="0">
-                          <a:solidFill>
-                            <a:srgbClr val="CBD5E1"/>
-                          </a:solidFill>
-                          <a:latin typeface="Calibri"/>
-                        </a:rPr>
-                        <a:t>48,0%</a:t>
-                      </a:r>
-                    </a:p>
-                  </a:txBody>
-                  <a:tcPr anchor="ctr" marL="100584" marR="100584" marT="36576" marB="36576">
-                    <a:solidFill>
-                      <a:srgbClr val="243247"/>
-                    </a:solidFill>
-                  </a:tcPr>
-                </a:tc>
-              </a:tr>
-              <a:tr h="548640">
-                <a:tc>
-                  <a:txBody>
-                    <a:bodyPr wrap="square"/>
-                    <a:lstStyle/>
-                    <a:p>
-                      <a:pPr algn="l"/>
-                      <a:r>
-                        <a:rPr sz="1500" b="0" i="0">
-                          <a:solidFill>
-                            <a:srgbClr val="CBD5E1"/>
-                          </a:solidFill>
-                          <a:latin typeface="Calibri"/>
-                        </a:rPr>
-                        <a:t>Tổng, sau tiền xử lý</a:t>
-                      </a:r>
-                    </a:p>
-                  </a:txBody>
-                  <a:tcPr anchor="ctr" marL="100584" marR="100584" marT="36576" marB="36576">
-                    <a:solidFill>
-                      <a:srgbClr val="2B3A50"/>
-                    </a:solidFill>
-                  </a:tcPr>
-                </a:tc>
-                <a:tc>
-                  <a:txBody>
-                    <a:bodyPr wrap="square"/>
-                    <a:lstStyle/>
-                    <a:p>
-                      <a:pPr algn="r"/>
-                      <a:r>
-                        <a:rPr sz="1500" b="0" i="0">
-                          <a:solidFill>
-                            <a:srgbClr val="CBD5E1"/>
-                          </a:solidFill>
-                          <a:latin typeface="Calibri"/>
-                        </a:rPr>
-                        <a:t>19.997</a:t>
-                      </a:r>
-                    </a:p>
-                  </a:txBody>
-                  <a:tcPr anchor="ctr" marL="100584" marR="100584" marT="36576" marB="36576">
-                    <a:solidFill>
-                      <a:srgbClr val="2B3A50"/>
-                    </a:solidFill>
-                  </a:tcPr>
-                </a:tc>
-                <a:tc>
-                  <a:txBody>
-                    <a:bodyPr wrap="square"/>
-                    <a:lstStyle/>
-                    <a:p>
-                      <a:pPr algn="r"/>
-                      <a:r>
-                        <a:rPr sz="1500" b="0" i="0">
-                          <a:solidFill>
-                            <a:srgbClr val="CBD5E1"/>
-                          </a:solidFill>
-                          <a:latin typeface="Calibri"/>
-                        </a:rPr>
-                        <a:t>3 dòng rỗng</a:t>
-                      </a:r>
-                    </a:p>
-                  </a:txBody>
-                  <a:tcPr anchor="ctr" marL="100584" marR="100584" marT="36576" marB="36576">
-                    <a:solidFill>
-                      <a:srgbClr val="2B3A50"/>
-                    </a:solidFill>
-                  </a:tcPr>
-                </a:tc>
-              </a:tr>
-            </a:tbl>
-          </a:graphicData>
-        </a:graphic>
-      </p:graphicFrame>
-      <p:sp>
-        <p:nvSpPr>
-          <p:cNvPr id="7" name="TextBox 6"/>
-          <p:cNvSpPr txBox="1"/>
-          <p:nvPr/>
-        </p:nvSpPr>
+        </p:nvPicPr>
+        <p:blipFill>
+          <a:blip r:embed="rId2"/>
+          <a:stretch>
+            <a:fillRect/>
+          </a:stretch>
+        </p:blipFill>
         <p:spPr>
           <a:xfrm>
-            <a:off x="6263640" y="1874519"/>
-            <a:ext cx="5212080" cy="4343400"/>
+            <a:off x="847714" y="1810512"/>
+            <a:ext cx="10496266" cy="4443983"/>
           </a:xfrm>
           <a:prstGeom prst="rect">
             <a:avLst/>
           </a:prstGeom>
-          <a:noFill/>
         </p:spPr>
-        <p:txBody>
-          <a:bodyPr wrap="square" lIns="0" rIns="0" tIns="0" bIns="0">
-            <a:spAutoFit/>
-          </a:bodyPr>
-          <a:lstStyle/>
-          <a:p>
-            <a:pPr marL="219456" indent="-219456">
-              <a:lnSpc>
-                <a:spcPct val="118000"/>
-              </a:lnSpc>
-              <a:spcAft>
-                <a:spcPts val="2000"/>
-              </a:spcAft>
-              <a:buClr>
-                <a:srgbClr val="2DD4BF"/>
-              </a:buClr>
-              <a:buFont typeface="Arial"/>
-              <a:buChar char="•"/>
-            </a:pPr>
-            <a:r>
-              <a:rPr sz="1750" b="0" i="0">
-                <a:solidFill>
-                  <a:srgbClr val="CBD5E1"/>
-                </a:solidFill>
-                <a:latin typeface="Calibri"/>
-              </a:rPr>
-              <a:t>Gói ATSH-NLP-20k, dự án ATSH-ABSA (Phạm Xuân Vĩnh Hà, UIT); bình luận về Anh Trai Say Hi mùa 1, tập 1 đến 14</a:t>
-            </a:r>
-          </a:p>
-          <a:p>
-            <a:pPr marL="219456" indent="-219456">
-              <a:lnSpc>
-                <a:spcPct val="118000"/>
-              </a:lnSpc>
-              <a:spcAft>
-                <a:spcPts val="2000"/>
-              </a:spcAft>
-              <a:buClr>
-                <a:srgbClr val="2DD4BF"/>
-              </a:buClr>
-              <a:buFont typeface="Arial"/>
-              <a:buChar char="•"/>
-            </a:pPr>
-            <a:r>
-              <a:rPr sz="1750" b="0" i="0">
-                <a:solidFill>
-                  <a:srgbClr val="CBD5E1"/>
-                </a:solidFill>
-                <a:latin typeface="Calibri"/>
-              </a:rPr>
-              <a:t>Nhãn silver do mô hình ngôn ngữ lớn gán theo đối tượng và khía cạnh rồi gộp; chưa kiểm tay, trung tính nhiễu nhất</a:t>
-            </a:r>
-          </a:p>
-          <a:p>
-            <a:pPr marL="219456" indent="-219456">
-              <a:lnSpc>
-                <a:spcPct val="118000"/>
-              </a:lnSpc>
-              <a:spcAft>
-                <a:spcPts val="2000"/>
-              </a:spcAft>
-              <a:buClr>
-                <a:srgbClr val="2DD4BF"/>
-              </a:buClr>
-              <a:buFont typeface="Arial"/>
-              <a:buChar char="•"/>
-            </a:pPr>
-            <a:r>
-              <a:rPr sz="1750" b="0" i="0">
-                <a:solidFill>
-                  <a:srgbClr val="CBD5E1"/>
-                </a:solidFill>
-                <a:latin typeface="Calibri"/>
-              </a:rPr>
-              <a:t>Tác giả lấy mẫu lại từ dữ liệu gốc khoảng 88% tích cực; tỉ lệ nhãn không phải tỉ lệ thật trên YouTube</a:t>
-            </a:r>
-          </a:p>
-          <a:p>
-            <a:pPr marL="219456" indent="-219456">
-              <a:lnSpc>
-                <a:spcPct val="118000"/>
-              </a:lnSpc>
-              <a:spcAft>
-                <a:spcPts val="2000"/>
-              </a:spcAft>
-              <a:buClr>
-                <a:srgbClr val="2DD4BF"/>
-              </a:buClr>
-              <a:buFont typeface="Arial"/>
-              <a:buChar char="•"/>
-            </a:pPr>
-            <a:r>
-              <a:rPr sz="1750" b="0" i="0">
-                <a:solidFill>
-                  <a:srgbClr val="CBD5E1"/>
-                </a:solidFill>
-                <a:latin typeface="Calibri"/>
-              </a:rPr>
-              <a:t>Một chương trình duy nhất; chỉ dùng cho học tập, không công bố lại</a:t>
-            </a:r>
-          </a:p>
-        </p:txBody>
-      </p:sp>
+      </p:pic>
     </p:spTree>
   </p:cSld>
   <p:clrMapOvr>
@@ -12151,7 +11589,7 @@
 </p:sld>
 </file>
 
-<file path=ppt/slides/slide5.xml><?xml version="1.0" encoding="utf-8"?>
+<file path=ppt/slides/slide4.xml><?xml version="1.0" encoding="utf-8"?>
 <p:sld xmlns:a="http://schemas.openxmlformats.org/drawingml/2006/main" xmlns:p="http://schemas.openxmlformats.org/presentationml/2006/main" xmlns:r="http://schemas.openxmlformats.org/officeDocument/2006/relationships">
   <p:cSld>
     <p:bg>
@@ -12198,7 +11636,7 @@
                 </a:solidFill>
                 <a:latin typeface="Calibri"/>
               </a:rPr>
-              <a:t>BƯỚC 2 · TIỀN XỬ LÝ</a:t>
+              <a:t>BƯỚC 1 · DỮ LIỆU</a:t>
             </a:r>
           </a:p>
         </p:txBody>
@@ -12237,7 +11675,7 @@
                 </a:solidFill>
                 <a:latin typeface="Calibri Light"/>
               </a:rPr>
-              <a:t>Tách từ trước, hạ chữ thường sau</a:t>
+              <a:t>20.000 bình luận có nhãn về một chương trình</a:t>
             </a:r>
           </a:p>
         </p:txBody>
@@ -12316,21 +11754,403 @@
                 </a:solidFill>
                 <a:latin typeface="Calibri"/>
               </a:rPr>
-              <a:t>5</a:t>
-            </a:r>
-          </a:p>
-        </p:txBody>
-      </p:sp>
-      <p:sp>
-        <p:nvSpPr>
-          <p:cNvPr id="6" name="TextBox 5"/>
+              <a:t>4</a:t>
+            </a:r>
+          </a:p>
+        </p:txBody>
+      </p:sp>
+      <p:graphicFrame>
+        <p:nvGraphicFramePr>
+          <p:cNvPr id="6" name="Table 5"/>
+          <p:cNvGraphicFramePr>
+            <a:graphicFrameLocks noGrp="1"/>
+          </p:cNvGraphicFramePr>
+          <p:nvPr/>
+        </p:nvGraphicFramePr>
+        <p:xfrm>
+          <a:off x="731520" y="1874519"/>
+          <a:ext cx="5029200" cy="2779776"/>
+        </p:xfrm>
+        <a:graphic>
+          <a:graphicData uri="http://schemas.openxmlformats.org/drawingml/2006/table">
+            <a:tbl>
+              <a:tblPr>
+                <a:tableStyleId>{2D5ABB26-0587-4C30-8999-92F81FD0307C}</a:tableStyleId>
+              </a:tblPr>
+              <a:tblGrid>
+                <a:gridCol w="2286000"/>
+                <a:gridCol w="1371600"/>
+                <a:gridCol w="1371600"/>
+              </a:tblGrid>
+              <a:tr h="585216">
+                <a:tc>
+                  <a:txBody>
+                    <a:bodyPr wrap="square"/>
+                    <a:lstStyle/>
+                    <a:p>
+                      <a:pPr algn="l"/>
+                      <a:r>
+                        <a:rPr sz="1500" b="1" i="0">
+                          <a:solidFill>
+                            <a:srgbClr val="5EEAD4"/>
+                          </a:solidFill>
+                          <a:latin typeface="Calibri"/>
+                        </a:rPr>
+                        <a:t>Nhãn</a:t>
+                      </a:r>
+                    </a:p>
+                  </a:txBody>
+                  <a:tcPr anchor="ctr" marL="100584" marR="100584" marT="36576" marB="36576">
+                    <a:solidFill>
+                      <a:srgbClr val="334155"/>
+                    </a:solidFill>
+                  </a:tcPr>
+                </a:tc>
+                <a:tc>
+                  <a:txBody>
+                    <a:bodyPr wrap="square"/>
+                    <a:lstStyle/>
+                    <a:p>
+                      <a:pPr algn="r"/>
+                      <a:r>
+                        <a:rPr sz="1500" b="1" i="0">
+                          <a:solidFill>
+                            <a:srgbClr val="5EEAD4"/>
+                          </a:solidFill>
+                          <a:latin typeface="Calibri"/>
+                        </a:rPr>
+                        <a:t>Số dòng</a:t>
+                      </a:r>
+                    </a:p>
+                  </a:txBody>
+                  <a:tcPr anchor="ctr" marL="100584" marR="100584" marT="36576" marB="36576">
+                    <a:solidFill>
+                      <a:srgbClr val="334155"/>
+                    </a:solidFill>
+                  </a:tcPr>
+                </a:tc>
+                <a:tc>
+                  <a:txBody>
+                    <a:bodyPr wrap="square"/>
+                    <a:lstStyle/>
+                    <a:p>
+                      <a:pPr algn="r"/>
+                      <a:r>
+                        <a:rPr sz="1500" b="1" i="0">
+                          <a:solidFill>
+                            <a:srgbClr val="5EEAD4"/>
+                          </a:solidFill>
+                          <a:latin typeface="Calibri"/>
+                        </a:rPr>
+                        <a:t>Tỉ lệ</a:t>
+                      </a:r>
+                    </a:p>
+                  </a:txBody>
+                  <a:tcPr anchor="ctr" marL="100584" marR="100584" marT="36576" marB="36576">
+                    <a:solidFill>
+                      <a:srgbClr val="334155"/>
+                    </a:solidFill>
+                  </a:tcPr>
+                </a:tc>
+              </a:tr>
+              <a:tr h="548640">
+                <a:tc>
+                  <a:txBody>
+                    <a:bodyPr wrap="square"/>
+                    <a:lstStyle/>
+                    <a:p>
+                      <a:pPr algn="l"/>
+                      <a:r>
+                        <a:rPr sz="1500" b="0" i="0">
+                          <a:solidFill>
+                            <a:srgbClr val="CBD5E1"/>
+                          </a:solidFill>
+                          <a:latin typeface="Calibri"/>
+                        </a:rPr>
+                        <a:t>Tiêu cực (0)</a:t>
+                      </a:r>
+                    </a:p>
+                  </a:txBody>
+                  <a:tcPr anchor="ctr" marL="100584" marR="100584" marT="36576" marB="36576">
+                    <a:solidFill>
+                      <a:srgbClr val="243247"/>
+                    </a:solidFill>
+                  </a:tcPr>
+                </a:tc>
+                <a:tc>
+                  <a:txBody>
+                    <a:bodyPr wrap="square"/>
+                    <a:lstStyle/>
+                    <a:p>
+                      <a:pPr algn="r"/>
+                      <a:r>
+                        <a:rPr sz="1500" b="0" i="0">
+                          <a:solidFill>
+                            <a:srgbClr val="CBD5E1"/>
+                          </a:solidFill>
+                          <a:latin typeface="Calibri"/>
+                        </a:rPr>
+                        <a:t>7.000</a:t>
+                      </a:r>
+                    </a:p>
+                  </a:txBody>
+                  <a:tcPr anchor="ctr" marL="100584" marR="100584" marT="36576" marB="36576">
+                    <a:solidFill>
+                      <a:srgbClr val="243247"/>
+                    </a:solidFill>
+                  </a:tcPr>
+                </a:tc>
+                <a:tc>
+                  <a:txBody>
+                    <a:bodyPr wrap="square"/>
+                    <a:lstStyle/>
+                    <a:p>
+                      <a:pPr algn="r"/>
+                      <a:r>
+                        <a:rPr sz="1500" b="0" i="0">
+                          <a:solidFill>
+                            <a:srgbClr val="CBD5E1"/>
+                          </a:solidFill>
+                          <a:latin typeface="Calibri"/>
+                        </a:rPr>
+                        <a:t>35,0%</a:t>
+                      </a:r>
+                    </a:p>
+                  </a:txBody>
+                  <a:tcPr anchor="ctr" marL="100584" marR="100584" marT="36576" marB="36576">
+                    <a:solidFill>
+                      <a:srgbClr val="243247"/>
+                    </a:solidFill>
+                  </a:tcPr>
+                </a:tc>
+              </a:tr>
+              <a:tr h="548640">
+                <a:tc>
+                  <a:txBody>
+                    <a:bodyPr wrap="square"/>
+                    <a:lstStyle/>
+                    <a:p>
+                      <a:pPr algn="l"/>
+                      <a:r>
+                        <a:rPr sz="1500" b="0" i="0">
+                          <a:solidFill>
+                            <a:srgbClr val="CBD5E1"/>
+                          </a:solidFill>
+                          <a:latin typeface="Calibri"/>
+                        </a:rPr>
+                        <a:t>Trung tính (1)</a:t>
+                      </a:r>
+                    </a:p>
+                  </a:txBody>
+                  <a:tcPr anchor="ctr" marL="100584" marR="100584" marT="36576" marB="36576">
+                    <a:solidFill>
+                      <a:srgbClr val="2B3A50"/>
+                    </a:solidFill>
+                  </a:tcPr>
+                </a:tc>
+                <a:tc>
+                  <a:txBody>
+                    <a:bodyPr wrap="square"/>
+                    <a:lstStyle/>
+                    <a:p>
+                      <a:pPr algn="r"/>
+                      <a:r>
+                        <a:rPr sz="1500" b="0" i="0">
+                          <a:solidFill>
+                            <a:srgbClr val="CBD5E1"/>
+                          </a:solidFill>
+                          <a:latin typeface="Calibri"/>
+                        </a:rPr>
+                        <a:t>3.409</a:t>
+                      </a:r>
+                    </a:p>
+                  </a:txBody>
+                  <a:tcPr anchor="ctr" marL="100584" marR="100584" marT="36576" marB="36576">
+                    <a:solidFill>
+                      <a:srgbClr val="2B3A50"/>
+                    </a:solidFill>
+                  </a:tcPr>
+                </a:tc>
+                <a:tc>
+                  <a:txBody>
+                    <a:bodyPr wrap="square"/>
+                    <a:lstStyle/>
+                    <a:p>
+                      <a:pPr algn="r"/>
+                      <a:r>
+                        <a:rPr sz="1500" b="0" i="0">
+                          <a:solidFill>
+                            <a:srgbClr val="CBD5E1"/>
+                          </a:solidFill>
+                          <a:latin typeface="Calibri"/>
+                        </a:rPr>
+                        <a:t>17,0%</a:t>
+                      </a:r>
+                    </a:p>
+                  </a:txBody>
+                  <a:tcPr anchor="ctr" marL="100584" marR="100584" marT="36576" marB="36576">
+                    <a:solidFill>
+                      <a:srgbClr val="2B3A50"/>
+                    </a:solidFill>
+                  </a:tcPr>
+                </a:tc>
+              </a:tr>
+              <a:tr h="548640">
+                <a:tc>
+                  <a:txBody>
+                    <a:bodyPr wrap="square"/>
+                    <a:lstStyle/>
+                    <a:p>
+                      <a:pPr algn="l"/>
+                      <a:r>
+                        <a:rPr sz="1500" b="0" i="0">
+                          <a:solidFill>
+                            <a:srgbClr val="CBD5E1"/>
+                          </a:solidFill>
+                          <a:latin typeface="Calibri"/>
+                        </a:rPr>
+                        <a:t>Tích cực (2)</a:t>
+                      </a:r>
+                    </a:p>
+                  </a:txBody>
+                  <a:tcPr anchor="ctr" marL="100584" marR="100584" marT="36576" marB="36576">
+                    <a:solidFill>
+                      <a:srgbClr val="243247"/>
+                    </a:solidFill>
+                  </a:tcPr>
+                </a:tc>
+                <a:tc>
+                  <a:txBody>
+                    <a:bodyPr wrap="square"/>
+                    <a:lstStyle/>
+                    <a:p>
+                      <a:pPr algn="r"/>
+                      <a:r>
+                        <a:rPr sz="1500" b="0" i="0">
+                          <a:solidFill>
+                            <a:srgbClr val="CBD5E1"/>
+                          </a:solidFill>
+                          <a:latin typeface="Calibri"/>
+                        </a:rPr>
+                        <a:t>9.591</a:t>
+                      </a:r>
+                    </a:p>
+                  </a:txBody>
+                  <a:tcPr anchor="ctr" marL="100584" marR="100584" marT="36576" marB="36576">
+                    <a:solidFill>
+                      <a:srgbClr val="243247"/>
+                    </a:solidFill>
+                  </a:tcPr>
+                </a:tc>
+                <a:tc>
+                  <a:txBody>
+                    <a:bodyPr wrap="square"/>
+                    <a:lstStyle/>
+                    <a:p>
+                      <a:pPr algn="r"/>
+                      <a:r>
+                        <a:rPr sz="1500" b="0" i="0">
+                          <a:solidFill>
+                            <a:srgbClr val="CBD5E1"/>
+                          </a:solidFill>
+                          <a:latin typeface="Calibri"/>
+                        </a:rPr>
+                        <a:t>48,0%</a:t>
+                      </a:r>
+                    </a:p>
+                  </a:txBody>
+                  <a:tcPr anchor="ctr" marL="100584" marR="100584" marT="36576" marB="36576">
+                    <a:solidFill>
+                      <a:srgbClr val="243247"/>
+                    </a:solidFill>
+                  </a:tcPr>
+                </a:tc>
+              </a:tr>
+              <a:tr h="548640">
+                <a:tc>
+                  <a:txBody>
+                    <a:bodyPr wrap="square"/>
+                    <a:lstStyle/>
+                    <a:p>
+                      <a:pPr algn="l"/>
+                      <a:r>
+                        <a:rPr sz="1500" b="0" i="0">
+                          <a:solidFill>
+                            <a:srgbClr val="CBD5E1"/>
+                          </a:solidFill>
+                          <a:latin typeface="Calibri"/>
+                        </a:rPr>
+                        <a:t>Tổng, sau tiền xử lý</a:t>
+                      </a:r>
+                    </a:p>
+                  </a:txBody>
+                  <a:tcPr anchor="ctr" marL="100584" marR="100584" marT="36576" marB="36576">
+                    <a:solidFill>
+                      <a:srgbClr val="2B3A50"/>
+                    </a:solidFill>
+                  </a:tcPr>
+                </a:tc>
+                <a:tc>
+                  <a:txBody>
+                    <a:bodyPr wrap="square"/>
+                    <a:lstStyle/>
+                    <a:p>
+                      <a:pPr algn="r"/>
+                      <a:r>
+                        <a:rPr sz="1500" b="0" i="0">
+                          <a:solidFill>
+                            <a:srgbClr val="CBD5E1"/>
+                          </a:solidFill>
+                          <a:latin typeface="Calibri"/>
+                        </a:rPr>
+                        <a:t>19.997</a:t>
+                      </a:r>
+                    </a:p>
+                  </a:txBody>
+                  <a:tcPr anchor="ctr" marL="100584" marR="100584" marT="36576" marB="36576">
+                    <a:solidFill>
+                      <a:srgbClr val="2B3A50"/>
+                    </a:solidFill>
+                  </a:tcPr>
+                </a:tc>
+                <a:tc>
+                  <a:txBody>
+                    <a:bodyPr wrap="square"/>
+                    <a:lstStyle/>
+                    <a:p>
+                      <a:pPr algn="r"/>
+                      <a:r>
+                        <a:rPr sz="1500" b="0" i="0">
+                          <a:solidFill>
+                            <a:srgbClr val="CBD5E1"/>
+                          </a:solidFill>
+                          <a:latin typeface="Calibri"/>
+                        </a:rPr>
+                        <a:t>3 dòng rỗng</a:t>
+                      </a:r>
+                    </a:p>
+                  </a:txBody>
+                  <a:tcPr anchor="ctr" marL="100584" marR="100584" marT="36576" marB="36576">
+                    <a:solidFill>
+                      <a:srgbClr val="2B3A50"/>
+                    </a:solidFill>
+                  </a:tcPr>
+                </a:tc>
+              </a:tr>
+            </a:tbl>
+          </a:graphicData>
+        </a:graphic>
+      </p:graphicFrame>
+      <p:sp>
+        <p:nvSpPr>
+          <p:cNvPr id="7" name="TextBox 6"/>
           <p:cNvSpPr txBox="1"/>
           <p:nvPr/>
         </p:nvSpPr>
         <p:spPr>
           <a:xfrm>
-            <a:off x="731520" y="1810512"/>
-            <a:ext cx="10728655" cy="4407407"/>
+            <a:off x="6263640" y="1874519"/>
+            <a:ext cx="5212080" cy="4343400"/>
           </a:xfrm>
           <a:prstGeom prst="rect">
             <a:avLst/>
@@ -12357,22 +12177,13 @@
               <a:buChar char="•"/>
             </a:pPr>
             <a:r>
-              <a:rPr sz="1700" b="1" i="0">
-                <a:solidFill>
-                  <a:srgbClr val="F8FAFC"/>
+              <a:rPr sz="1750" b="0" i="0">
+                <a:solidFill>
+                  <a:srgbClr val="CBD5E1"/>
                 </a:solidFill>
                 <a:latin typeface="Calibri"/>
               </a:rPr>
-              <a:t>Thứ tự trong mã: </a:t>
-            </a:r>
-            <a:r>
-              <a:rPr sz="1700" b="0" i="0">
-                <a:solidFill>
-                  <a:srgbClr val="CBD5E1"/>
-                </a:solidFill>
-                <a:latin typeface="Calibri"/>
-              </a:rPr>
-              <a:t>chuẩn hóa NFC, bỏ URL, bỏ ký hiệu @ và #, thay dấu câu và emoji bằng khoảng trắng, rút chữ lặp (luônnnn thành luôn), chuẩn hóa teencode, tách từ bằng pyvi, cuối cùng mới hạ chữ thường</a:t>
+              <a:t>Gói ATSH-NLP-20k, dự án ATSH-ABSA (UIT); bình luận về Anh Trai Say Hi mùa 1, tập 1 đến 14</a:t>
             </a:r>
           </a:p>
           <a:p>
@@ -12390,58 +12201,13 @@
               <a:buChar char="•"/>
             </a:pPr>
             <a:r>
-              <a:rPr sz="1700" b="1" i="0">
-                <a:solidFill>
-                  <a:srgbClr val="F8FAFC"/>
+              <a:rPr sz="1750" b="0" i="0">
+                <a:solidFill>
+                  <a:srgbClr val="CBD5E1"/>
                 </a:solidFill>
                 <a:latin typeface="Calibri"/>
               </a:rPr>
-              <a:t>Vì sao thứ tự đó: </a:t>
-            </a:r>
-            <a:r>
-              <a:rPr sz="1700" b="0" i="0">
-                <a:solidFill>
-                  <a:srgbClr val="CBD5E1"/>
-                </a:solidFill>
-                <a:latin typeface="Calibri"/>
-              </a:rPr>
-              <a:t>pyvi phân biệt chữ hoa khi ghép tên riêng. </a:t>
-            </a:r>
-            <a:r>
-              <a:rPr sz="1700" b="0" i="1">
-                <a:solidFill>
-                  <a:srgbClr val="5EEAD4"/>
-                </a:solidFill>
-                <a:latin typeface="Calibri"/>
-              </a:rPr>
-              <a:t>Đông Hùng hát</a:t>
-            </a:r>
-            <a:r>
-              <a:rPr sz="1700" b="0" i="0">
-                <a:solidFill>
-                  <a:srgbClr val="CBD5E1"/>
-                </a:solidFill>
-                <a:latin typeface="Calibri"/>
-              </a:rPr>
-              <a:t> cho </a:t>
-            </a:r>
-            <a:r>
-              <a:rPr sz="1700" b="0" i="1">
-                <a:solidFill>
-                  <a:srgbClr val="5EEAD4"/>
-                </a:solidFill>
-                <a:latin typeface="Calibri"/>
-              </a:rPr>
-              <a:t>Đông_Hùng hát</a:t>
-            </a:r>
-            <a:r>
-              <a:rPr sz="1700" b="0" i="0">
-                <a:solidFill>
-                  <a:srgbClr val="CBD5E1"/>
-                </a:solidFill>
-                <a:latin typeface="Calibri"/>
-              </a:rPr>
-              <a:t>; đã hạ chữ thường thì thành ba token rời</a:t>
+              <a:t>Nhãn silver do mô hình ngôn ngữ lớn gán theo đối tượng và khía cạnh rồi gộp; chưa kiểm tay, trung tính nhiễu nhất</a:t>
             </a:r>
           </a:p>
           <a:p>
@@ -12459,31 +12225,13 @@
               <a:buChar char="•"/>
             </a:pPr>
             <a:r>
-              <a:rPr sz="1700" b="0" i="0">
+              <a:rPr sz="1750" b="0" i="0">
                 <a:solidFill>
                   <a:srgbClr val="CBD5E1"/>
                 </a:solidFill>
                 <a:latin typeface="Calibri"/>
               </a:rPr>
-              <a:t>Từ điển teencode chỉ sửa chính tả </a:t>
-            </a:r>
-            <a:r>
-              <a:rPr sz="1700" b="0" i="1">
-                <a:solidFill>
-                  <a:srgbClr val="CBD5E1"/>
-                </a:solidFill>
-                <a:latin typeface="Calibri"/>
-              </a:rPr>
-              <a:t>(ko, hok, khong thành không)</a:t>
-            </a:r>
-            <a:r>
-              <a:rPr sz="1700" b="0" i="0">
-                <a:solidFill>
-                  <a:srgbClr val="CBD5E1"/>
-                </a:solidFill>
-                <a:latin typeface="Calibri"/>
-              </a:rPr>
-              <a:t>, không dịch tiếng lóng sang từ cảm xúc. Bản cũ có ok thành tốt, vcl thành rất: đó là gán nhãn trước khi mô hình học</a:t>
+              <a:t>Tác giả lấy mẫu lại từ dữ liệu gốc khoảng 88% tích cực; tỉ lệ nhãn không phải tỉ lệ thật trên YouTube</a:t>
             </a:r>
           </a:p>
           <a:p>
@@ -12501,31 +12249,13 @@
               <a:buChar char="•"/>
             </a:pPr>
             <a:r>
-              <a:rPr sz="1700" b="0" i="0">
+              <a:rPr sz="1750" b="0" i="0">
                 <a:solidFill>
                   <a:srgbClr val="CBD5E1"/>
                 </a:solidFill>
                 <a:latin typeface="Calibri"/>
               </a:rPr>
-              <a:t>236 từ dừng chỉ dùng cho từ khóa chủ đề, vì </a:t>
-            </a:r>
-            <a:r>
-              <a:rPr sz="1700" b="0" i="1">
-                <a:solidFill>
-                  <a:srgbClr val="5EEAD4"/>
-                </a:solidFill>
-                <a:latin typeface="Calibri"/>
-              </a:rPr>
-              <a:t>không</a:t>
-            </a:r>
-            <a:r>
-              <a:rPr sz="1700" b="0" i="0">
-                <a:solidFill>
-                  <a:srgbClr val="CBD5E1"/>
-                </a:solidFill>
-                <a:latin typeface="Calibri"/>
-              </a:rPr>
-              <a:t> nằm trong danh sách và là đặc trưng mạnh nhất của lớp tiêu cực (+2,93)</a:t>
+              <a:t>Một chương trình duy nhất; chỉ dùng cho học tập, không công bố lại</a:t>
             </a:r>
           </a:p>
         </p:txBody>
@@ -12538,7 +12268,7 @@
 </p:sld>
 </file>
 
-<file path=ppt/slides/slide6.xml><?xml version="1.0" encoding="utf-8"?>
+<file path=ppt/slides/slide5.xml><?xml version="1.0" encoding="utf-8"?>
 <p:sld xmlns:a="http://schemas.openxmlformats.org/drawingml/2006/main" xmlns:p="http://schemas.openxmlformats.org/presentationml/2006/main" xmlns:r="http://schemas.openxmlformats.org/officeDocument/2006/relationships">
   <p:cSld>
     <p:bg>
@@ -12585,7 +12315,7 @@
                 </a:solidFill>
                 <a:latin typeface="Calibri"/>
               </a:rPr>
-              <a:t>BƯỚC 2 · THÍ NGHIỆM</a:t>
+              <a:t>BƯỚC 2 · TIỀN XỬ LÝ</a:t>
             </a:r>
           </a:p>
         </p:txBody>
@@ -12624,7 +12354,7 @@
                 </a:solidFill>
                 <a:latin typeface="Calibri Light"/>
               </a:rPr>
-              <a:t>Đổi tiền xử lý không đổi điểm cảm xúc, nhưng đổi từ khóa chủ đề</a:t>
+              <a:t>Tách từ trước, hạ chữ thường sau</a:t>
             </a:r>
           </a:p>
         </p:txBody>
@@ -12703,635 +12433,21 @@
                 </a:solidFill>
                 <a:latin typeface="Calibri"/>
               </a:rPr>
-              <a:t>6</a:t>
-            </a:r>
-          </a:p>
-        </p:txBody>
-      </p:sp>
-      <p:graphicFrame>
-        <p:nvGraphicFramePr>
-          <p:cNvPr id="6" name="Table 5"/>
-          <p:cNvGraphicFramePr>
-            <a:graphicFrameLocks noGrp="1"/>
-          </p:cNvGraphicFramePr>
-          <p:nvPr/>
-        </p:nvGraphicFramePr>
-        <p:xfrm>
-          <a:off x="731520" y="1874519"/>
-          <a:ext cx="10765231" cy="2139696"/>
-        </p:xfrm>
-        <a:graphic>
-          <a:graphicData uri="http://schemas.openxmlformats.org/drawingml/2006/table">
-            <a:tbl>
-              <a:tblPr>
-                <a:tableStyleId>{2D5ABB26-0587-4C30-8999-92F81FD0307C}</a:tableStyleId>
-              </a:tblPr>
-              <a:tblGrid>
-                <a:gridCol w="1828800"/>
-                <a:gridCol w="822960"/>
-                <a:gridCol w="2834640"/>
-                <a:gridCol w="2834640"/>
-                <a:gridCol w="2444191"/>
-              </a:tblGrid>
-              <a:tr h="457200">
-                <a:tc>
-                  <a:txBody>
-                    <a:bodyPr wrap="square"/>
-                    <a:lstStyle/>
-                    <a:p>
-                      <a:pPr algn="l"/>
-                      <a:r>
-                        <a:rPr sz="1350" b="1" i="0">
-                          <a:solidFill>
-                            <a:srgbClr val="5EEAD4"/>
-                          </a:solidFill>
-                          <a:latin typeface="Calibri"/>
-                        </a:rPr>
-                        <a:t>Tiền xử lý</a:t>
-                      </a:r>
-                    </a:p>
-                  </a:txBody>
-                  <a:tcPr anchor="ctr" marL="100584" marR="100584" marT="36576" marB="36576">
-                    <a:solidFill>
-                      <a:srgbClr val="334155"/>
-                    </a:solidFill>
-                  </a:tcPr>
-                </a:tc>
-                <a:tc>
-                  <a:txBody>
-                    <a:bodyPr wrap="square"/>
-                    <a:lstStyle/>
-                    <a:p>
-                      <a:pPr algn="l"/>
-                      <a:r>
-                        <a:rPr sz="1350" b="1" i="0">
-                          <a:solidFill>
-                            <a:srgbClr val="5EEAD4"/>
-                          </a:solidFill>
-                          <a:latin typeface="Calibri"/>
-                        </a:rPr>
-                        <a:t>C</a:t>
-                      </a:r>
-                    </a:p>
-                  </a:txBody>
-                  <a:tcPr anchor="ctr" marL="100584" marR="100584" marT="36576" marB="36576">
-                    <a:solidFill>
-                      <a:srgbClr val="334155"/>
-                    </a:solidFill>
-                  </a:tcPr>
-                </a:tc>
-                <a:tc>
-                  <a:txBody>
-                    <a:bodyPr wrap="square"/>
-                    <a:lstStyle/>
-                    <a:p>
-                      <a:pPr algn="r"/>
-                      <a:r>
-                        <a:rPr sz="1350" b="1" i="0">
-                          <a:solidFill>
-                            <a:srgbClr val="5EEAD4"/>
-                          </a:solidFill>
-                          <a:latin typeface="Calibri"/>
-                        </a:rPr>
-                        <a:t>Tỉ lệ dự đoán đúng</a:t>
-                      </a:r>
-                    </a:p>
-                  </a:txBody>
-                  <a:tcPr anchor="ctr" marL="100584" marR="100584" marT="36576" marB="36576">
-                    <a:solidFill>
-                      <a:srgbClr val="334155"/>
-                    </a:solidFill>
-                  </a:tcPr>
-                </a:tc>
-                <a:tc>
-                  <a:txBody>
-                    <a:bodyPr wrap="square"/>
-                    <a:lstStyle/>
-                    <a:p>
-                      <a:pPr algn="r"/>
-                      <a:r>
-                        <a:rPr sz="1350" b="1" i="0">
-                          <a:solidFill>
-                            <a:srgbClr val="5EEAD4"/>
-                          </a:solidFill>
-                          <a:latin typeface="Calibri"/>
-                        </a:rPr>
-                        <a:t>Macro-F1</a:t>
-                      </a:r>
-                    </a:p>
-                  </a:txBody>
-                  <a:tcPr anchor="ctr" marL="100584" marR="100584" marT="36576" marB="36576">
-                    <a:solidFill>
-                      <a:srgbClr val="334155"/>
-                    </a:solidFill>
-                  </a:tcPr>
-                </a:tc>
-                <a:tc>
-                  <a:txBody>
-                    <a:bodyPr wrap="square"/>
-                    <a:lstStyle/>
-                    <a:p>
-                      <a:pPr algn="r"/>
-                      <a:r>
-                        <a:rPr sz="1350" b="1" i="0">
-                          <a:solidFill>
-                            <a:srgbClr val="5EEAD4"/>
-                          </a:solidFill>
-                          <a:latin typeface="Calibri"/>
-                        </a:rPr>
-                        <a:t>F1 trung tính</a:t>
-                      </a:r>
-                    </a:p>
-                  </a:txBody>
-                  <a:tcPr anchor="ctr" marL="100584" marR="100584" marT="36576" marB="36576">
-                    <a:solidFill>
-                      <a:srgbClr val="334155"/>
-                    </a:solidFill>
-                  </a:tcPr>
-                </a:tc>
-              </a:tr>
-              <a:tr h="420624">
-                <a:tc>
-                  <a:txBody>
-                    <a:bodyPr wrap="square"/>
-                    <a:lstStyle/>
-                    <a:p>
-                      <a:pPr algn="l"/>
-                      <a:r>
-                        <a:rPr sz="1350" b="0" i="0">
-                          <a:solidFill>
-                            <a:srgbClr val="CBD5E1"/>
-                          </a:solidFill>
-                          <a:latin typeface="Calibri"/>
-                        </a:rPr>
-                        <a:t>Cũ</a:t>
-                      </a:r>
-                    </a:p>
-                  </a:txBody>
-                  <a:tcPr anchor="ctr" marL="100584" marR="100584" marT="36576" marB="36576">
-                    <a:solidFill>
-                      <a:srgbClr val="243247"/>
-                    </a:solidFill>
-                  </a:tcPr>
-                </a:tc>
-                <a:tc>
-                  <a:txBody>
-                    <a:bodyPr wrap="square"/>
-                    <a:lstStyle/>
-                    <a:p>
-                      <a:pPr algn="l"/>
-                      <a:r>
-                        <a:rPr sz="1350" b="0" i="0">
-                          <a:solidFill>
-                            <a:srgbClr val="CBD5E1"/>
-                          </a:solidFill>
-                          <a:latin typeface="Calibri"/>
-                        </a:rPr>
-                        <a:t>0,3</a:t>
-                      </a:r>
-                    </a:p>
-                  </a:txBody>
-                  <a:tcPr anchor="ctr" marL="100584" marR="100584" marT="36576" marB="36576">
-                    <a:solidFill>
-                      <a:srgbClr val="243247"/>
-                    </a:solidFill>
-                  </a:tcPr>
-                </a:tc>
-                <a:tc>
-                  <a:txBody>
-                    <a:bodyPr wrap="square"/>
-                    <a:lstStyle/>
-                    <a:p>
-                      <a:pPr algn="r"/>
-                      <a:r>
-                        <a:rPr sz="1350" b="0" i="0">
-                          <a:solidFill>
-                            <a:srgbClr val="CBD5E1"/>
-                          </a:solidFill>
-                          <a:latin typeface="Calibri"/>
-                        </a:rPr>
-                        <a:t>77,58% ± 0,47</a:t>
-                      </a:r>
-                    </a:p>
-                  </a:txBody>
-                  <a:tcPr anchor="ctr" marL="100584" marR="100584" marT="36576" marB="36576">
-                    <a:solidFill>
-                      <a:srgbClr val="243247"/>
-                    </a:solidFill>
-                  </a:tcPr>
-                </a:tc>
-                <a:tc>
-                  <a:txBody>
-                    <a:bodyPr wrap="square"/>
-                    <a:lstStyle/>
-                    <a:p>
-                      <a:pPr algn="r"/>
-                      <a:r>
-                        <a:rPr sz="1350" b="0" i="0">
-                          <a:solidFill>
-                            <a:srgbClr val="CBD5E1"/>
-                          </a:solidFill>
-                          <a:latin typeface="Calibri"/>
-                        </a:rPr>
-                        <a:t>0,7199 ± 0,0052</a:t>
-                      </a:r>
-                    </a:p>
-                  </a:txBody>
-                  <a:tcPr anchor="ctr" marL="100584" marR="100584" marT="36576" marB="36576">
-                    <a:solidFill>
-                      <a:srgbClr val="243247"/>
-                    </a:solidFill>
-                  </a:tcPr>
-                </a:tc>
-                <a:tc>
-                  <a:txBody>
-                    <a:bodyPr wrap="square"/>
-                    <a:lstStyle/>
-                    <a:p>
-                      <a:pPr algn="r"/>
-                      <a:r>
-                        <a:rPr sz="1350" b="0" i="0">
-                          <a:solidFill>
-                            <a:srgbClr val="CBD5E1"/>
-                          </a:solidFill>
-                          <a:latin typeface="Calibri"/>
-                        </a:rPr>
-                        <a:t>0,5218</a:t>
-                      </a:r>
-                    </a:p>
-                  </a:txBody>
-                  <a:tcPr anchor="ctr" marL="100584" marR="100584" marT="36576" marB="36576">
-                    <a:solidFill>
-                      <a:srgbClr val="243247"/>
-                    </a:solidFill>
-                  </a:tcPr>
-                </a:tc>
-              </a:tr>
-              <a:tr h="420624">
-                <a:tc>
-                  <a:txBody>
-                    <a:bodyPr wrap="square"/>
-                    <a:lstStyle/>
-                    <a:p>
-                      <a:pPr algn="l"/>
-                      <a:r>
-                        <a:rPr sz="1350" b="0" i="0">
-                          <a:solidFill>
-                            <a:srgbClr val="CBD5E1"/>
-                          </a:solidFill>
-                          <a:latin typeface="Calibri"/>
-                        </a:rPr>
-                        <a:t>Mới</a:t>
-                      </a:r>
-                    </a:p>
-                  </a:txBody>
-                  <a:tcPr anchor="ctr" marL="100584" marR="100584" marT="36576" marB="36576">
-                    <a:solidFill>
-                      <a:srgbClr val="2B3A50"/>
-                    </a:solidFill>
-                  </a:tcPr>
-                </a:tc>
-                <a:tc>
-                  <a:txBody>
-                    <a:bodyPr wrap="square"/>
-                    <a:lstStyle/>
-                    <a:p>
-                      <a:pPr algn="l"/>
-                      <a:r>
-                        <a:rPr sz="1350" b="0" i="0">
-                          <a:solidFill>
-                            <a:srgbClr val="CBD5E1"/>
-                          </a:solidFill>
-                          <a:latin typeface="Calibri"/>
-                        </a:rPr>
-                        <a:t>0,3</a:t>
-                      </a:r>
-                    </a:p>
-                  </a:txBody>
-                  <a:tcPr anchor="ctr" marL="100584" marR="100584" marT="36576" marB="36576">
-                    <a:solidFill>
-                      <a:srgbClr val="2B3A50"/>
-                    </a:solidFill>
-                  </a:tcPr>
-                </a:tc>
-                <a:tc>
-                  <a:txBody>
-                    <a:bodyPr wrap="square"/>
-                    <a:lstStyle/>
-                    <a:p>
-                      <a:pPr algn="r"/>
-                      <a:r>
-                        <a:rPr sz="1350" b="0" i="0">
-                          <a:solidFill>
-                            <a:srgbClr val="CBD5E1"/>
-                          </a:solidFill>
-                          <a:latin typeface="Calibri"/>
-                        </a:rPr>
-                        <a:t>77,58% ± 0,50</a:t>
-                      </a:r>
-                    </a:p>
-                  </a:txBody>
-                  <a:tcPr anchor="ctr" marL="100584" marR="100584" marT="36576" marB="36576">
-                    <a:solidFill>
-                      <a:srgbClr val="2B3A50"/>
-                    </a:solidFill>
-                  </a:tcPr>
-                </a:tc>
-                <a:tc>
-                  <a:txBody>
-                    <a:bodyPr wrap="square"/>
-                    <a:lstStyle/>
-                    <a:p>
-                      <a:pPr algn="r"/>
-                      <a:r>
-                        <a:rPr sz="1350" b="0" i="0">
-                          <a:solidFill>
-                            <a:srgbClr val="CBD5E1"/>
-                          </a:solidFill>
-                          <a:latin typeface="Calibri"/>
-                        </a:rPr>
-                        <a:t>0,7200 ± 0,0041</a:t>
-                      </a:r>
-                    </a:p>
-                  </a:txBody>
-                  <a:tcPr anchor="ctr" marL="100584" marR="100584" marT="36576" marB="36576">
-                    <a:solidFill>
-                      <a:srgbClr val="2B3A50"/>
-                    </a:solidFill>
-                  </a:tcPr>
-                </a:tc>
-                <a:tc>
-                  <a:txBody>
-                    <a:bodyPr wrap="square"/>
-                    <a:lstStyle/>
-                    <a:p>
-                      <a:pPr algn="r"/>
-                      <a:r>
-                        <a:rPr sz="1350" b="0" i="0">
-                          <a:solidFill>
-                            <a:srgbClr val="CBD5E1"/>
-                          </a:solidFill>
-                          <a:latin typeface="Calibri"/>
-                        </a:rPr>
-                        <a:t>0,5222</a:t>
-                      </a:r>
-                    </a:p>
-                  </a:txBody>
-                  <a:tcPr anchor="ctr" marL="100584" marR="100584" marT="36576" marB="36576">
-                    <a:solidFill>
-                      <a:srgbClr val="2B3A50"/>
-                    </a:solidFill>
-                  </a:tcPr>
-                </a:tc>
-              </a:tr>
-              <a:tr h="420624">
-                <a:tc>
-                  <a:txBody>
-                    <a:bodyPr wrap="square"/>
-                    <a:lstStyle/>
-                    <a:p>
-                      <a:pPr algn="l"/>
-                      <a:r>
-                        <a:rPr sz="1350" b="0" i="0">
-                          <a:solidFill>
-                            <a:srgbClr val="CBD5E1"/>
-                          </a:solidFill>
-                          <a:latin typeface="Calibri"/>
-                        </a:rPr>
-                        <a:t>Cũ</a:t>
-                      </a:r>
-                    </a:p>
-                  </a:txBody>
-                  <a:tcPr anchor="ctr" marL="100584" marR="100584" marT="36576" marB="36576">
-                    <a:solidFill>
-                      <a:srgbClr val="243247"/>
-                    </a:solidFill>
-                  </a:tcPr>
-                </a:tc>
-                <a:tc>
-                  <a:txBody>
-                    <a:bodyPr wrap="square"/>
-                    <a:lstStyle/>
-                    <a:p>
-                      <a:pPr algn="l"/>
-                      <a:r>
-                        <a:rPr sz="1350" b="0" i="0">
-                          <a:solidFill>
-                            <a:srgbClr val="CBD5E1"/>
-                          </a:solidFill>
-                          <a:latin typeface="Calibri"/>
-                        </a:rPr>
-                        <a:t>1,0</a:t>
-                      </a:r>
-                    </a:p>
-                  </a:txBody>
-                  <a:tcPr anchor="ctr" marL="100584" marR="100584" marT="36576" marB="36576">
-                    <a:solidFill>
-                      <a:srgbClr val="243247"/>
-                    </a:solidFill>
-                  </a:tcPr>
-                </a:tc>
-                <a:tc>
-                  <a:txBody>
-                    <a:bodyPr wrap="square"/>
-                    <a:lstStyle/>
-                    <a:p>
-                      <a:pPr algn="r"/>
-                      <a:r>
-                        <a:rPr sz="1350" b="0" i="0">
-                          <a:solidFill>
-                            <a:srgbClr val="CBD5E1"/>
-                          </a:solidFill>
-                          <a:latin typeface="Calibri"/>
-                        </a:rPr>
-                        <a:t>76,61% ± 0,40</a:t>
-                      </a:r>
-                    </a:p>
-                  </a:txBody>
-                  <a:tcPr anchor="ctr" marL="100584" marR="100584" marT="36576" marB="36576">
-                    <a:solidFill>
-                      <a:srgbClr val="243247"/>
-                    </a:solidFill>
-                  </a:tcPr>
-                </a:tc>
-                <a:tc>
-                  <a:txBody>
-                    <a:bodyPr wrap="square"/>
-                    <a:lstStyle/>
-                    <a:p>
-                      <a:pPr algn="r"/>
-                      <a:r>
-                        <a:rPr sz="1350" b="0" i="0">
-                          <a:solidFill>
-                            <a:srgbClr val="CBD5E1"/>
-                          </a:solidFill>
-                          <a:latin typeface="Calibri"/>
-                        </a:rPr>
-                        <a:t>0,7079 ± 0,0052</a:t>
-                      </a:r>
-                    </a:p>
-                  </a:txBody>
-                  <a:tcPr anchor="ctr" marL="100584" marR="100584" marT="36576" marB="36576">
-                    <a:solidFill>
-                      <a:srgbClr val="243247"/>
-                    </a:solidFill>
-                  </a:tcPr>
-                </a:tc>
-                <a:tc>
-                  <a:txBody>
-                    <a:bodyPr wrap="square"/>
-                    <a:lstStyle/>
-                    <a:p>
-                      <a:pPr algn="r"/>
-                      <a:r>
-                        <a:rPr sz="1350" b="0" i="0">
-                          <a:solidFill>
-                            <a:srgbClr val="CBD5E1"/>
-                          </a:solidFill>
-                          <a:latin typeface="Calibri"/>
-                        </a:rPr>
-                        <a:t>0,5004</a:t>
-                      </a:r>
-                    </a:p>
-                  </a:txBody>
-                  <a:tcPr anchor="ctr" marL="100584" marR="100584" marT="36576" marB="36576">
-                    <a:solidFill>
-                      <a:srgbClr val="243247"/>
-                    </a:solidFill>
-                  </a:tcPr>
-                </a:tc>
-              </a:tr>
-              <a:tr h="420624">
-                <a:tc>
-                  <a:txBody>
-                    <a:bodyPr wrap="square"/>
-                    <a:lstStyle/>
-                    <a:p>
-                      <a:pPr algn="l"/>
-                      <a:r>
-                        <a:rPr sz="1350" b="0" i="0">
-                          <a:solidFill>
-                            <a:srgbClr val="CBD5E1"/>
-                          </a:solidFill>
-                          <a:latin typeface="Calibri"/>
-                        </a:rPr>
-                        <a:t>Mới</a:t>
-                      </a:r>
-                    </a:p>
-                  </a:txBody>
-                  <a:tcPr anchor="ctr" marL="100584" marR="100584" marT="36576" marB="36576">
-                    <a:solidFill>
-                      <a:srgbClr val="2B3A50"/>
-                    </a:solidFill>
-                  </a:tcPr>
-                </a:tc>
-                <a:tc>
-                  <a:txBody>
-                    <a:bodyPr wrap="square"/>
-                    <a:lstStyle/>
-                    <a:p>
-                      <a:pPr algn="l"/>
-                      <a:r>
-                        <a:rPr sz="1350" b="0" i="0">
-                          <a:solidFill>
-                            <a:srgbClr val="CBD5E1"/>
-                          </a:solidFill>
-                          <a:latin typeface="Calibri"/>
-                        </a:rPr>
-                        <a:t>1,0</a:t>
-                      </a:r>
-                    </a:p>
-                  </a:txBody>
-                  <a:tcPr anchor="ctr" marL="100584" marR="100584" marT="36576" marB="36576">
-                    <a:solidFill>
-                      <a:srgbClr val="2B3A50"/>
-                    </a:solidFill>
-                  </a:tcPr>
-                </a:tc>
-                <a:tc>
-                  <a:txBody>
-                    <a:bodyPr wrap="square"/>
-                    <a:lstStyle/>
-                    <a:p>
-                      <a:pPr algn="r"/>
-                      <a:r>
-                        <a:rPr sz="1350" b="0" i="0">
-                          <a:solidFill>
-                            <a:srgbClr val="CBD5E1"/>
-                          </a:solidFill>
-                          <a:latin typeface="Calibri"/>
-                        </a:rPr>
-                        <a:t>76,57% ± 0,43</a:t>
-                      </a:r>
-                    </a:p>
-                  </a:txBody>
-                  <a:tcPr anchor="ctr" marL="100584" marR="100584" marT="36576" marB="36576">
-                    <a:solidFill>
-                      <a:srgbClr val="2B3A50"/>
-                    </a:solidFill>
-                  </a:tcPr>
-                </a:tc>
-                <a:tc>
-                  <a:txBody>
-                    <a:bodyPr wrap="square"/>
-                    <a:lstStyle/>
-                    <a:p>
-                      <a:pPr algn="r"/>
-                      <a:r>
-                        <a:rPr sz="1350" b="0" i="0">
-                          <a:solidFill>
-                            <a:srgbClr val="CBD5E1"/>
-                          </a:solidFill>
-                          <a:latin typeface="Calibri"/>
-                        </a:rPr>
-                        <a:t>0,7075 ± 0,0053</a:t>
-                      </a:r>
-                    </a:p>
-                  </a:txBody>
-                  <a:tcPr anchor="ctr" marL="100584" marR="100584" marT="36576" marB="36576">
-                    <a:solidFill>
-                      <a:srgbClr val="2B3A50"/>
-                    </a:solidFill>
-                  </a:tcPr>
-                </a:tc>
-                <a:tc>
-                  <a:txBody>
-                    <a:bodyPr wrap="square"/>
-                    <a:lstStyle/>
-                    <a:p>
-                      <a:pPr algn="r"/>
-                      <a:r>
-                        <a:rPr sz="1350" b="0" i="0">
-                          <a:solidFill>
-                            <a:srgbClr val="CBD5E1"/>
-                          </a:solidFill>
-                          <a:latin typeface="Calibri"/>
-                        </a:rPr>
-                        <a:t>0,5007</a:t>
-                      </a:r>
-                    </a:p>
-                  </a:txBody>
-                  <a:tcPr anchor="ctr" marL="100584" marR="100584" marT="36576" marB="36576">
-                    <a:solidFill>
-                      <a:srgbClr val="2B3A50"/>
-                    </a:solidFill>
-                  </a:tcPr>
-                </a:tc>
-              </a:tr>
-            </a:tbl>
-          </a:graphicData>
-        </a:graphic>
-      </p:graphicFrame>
-      <p:sp>
-        <p:nvSpPr>
-          <p:cNvPr id="7" name="TextBox 6"/>
+              <a:t>5</a:t>
+            </a:r>
+          </a:p>
+        </p:txBody>
+      </p:sp>
+      <p:sp>
+        <p:nvSpPr>
+          <p:cNvPr id="6" name="TextBox 5"/>
           <p:cNvSpPr txBox="1"/>
           <p:nvPr/>
         </p:nvSpPr>
         <p:spPr>
           <a:xfrm>
-            <a:off x="731520" y="4370832"/>
-            <a:ext cx="10728655" cy="1847087"/>
+            <a:off x="731520" y="1810512"/>
+            <a:ext cx="10728655" cy="4407407"/>
           </a:xfrm>
           <a:prstGeom prst="rect">
             <a:avLst/>
@@ -13349,7 +12465,7 @@
                 <a:spcPct val="118000"/>
               </a:lnSpc>
               <a:spcAft>
-                <a:spcPts val="1400"/>
+                <a:spcPts val="2000"/>
               </a:spcAft>
               <a:buClr>
                 <a:srgbClr val="2DD4BF"/>
@@ -13358,13 +12474,22 @@
               <a:buChar char="•"/>
             </a:pPr>
             <a:r>
-              <a:rPr sz="1600" b="0" i="0">
+              <a:rPr sz="1700" b="1" i="0">
+                <a:solidFill>
+                  <a:srgbClr val="F8FAFC"/>
+                </a:solidFill>
+                <a:latin typeface="Calibri"/>
+              </a:rPr>
+              <a:t>Thứ tự trong mã: </a:t>
+            </a:r>
+            <a:r>
+              <a:rPr sz="1700" b="0" i="0">
                 <a:solidFill>
                   <a:srgbClr val="CBD5E1"/>
                 </a:solidFill>
                 <a:latin typeface="Calibri"/>
               </a:rPr>
-              <a:t>Cùng TF-IDF và LinearSVC, năm hạt giống chia tập (0 đến 4), trên bình luận của tập dữ liệu</a:t>
+              <a:t>chuẩn hóa NFC, bỏ URL, bỏ ký hiệu @ và #, thay dấu câu và emoji bằng khoảng trắng, rút chữ lặp (luônnnn thành luôn), chuẩn hóa teencode, tách từ bằng pyvi, cuối cùng mới hạ chữ thường</a:t>
             </a:r>
           </a:p>
           <a:p>
@@ -13373,7 +12498,7 @@
                 <a:spcPct val="118000"/>
               </a:lnSpc>
               <a:spcAft>
-                <a:spcPts val="1400"/>
+                <a:spcPts val="2000"/>
               </a:spcAft>
               <a:buClr>
                 <a:srgbClr val="2DD4BF"/>
@@ -13382,13 +12507,58 @@
               <a:buChar char="•"/>
             </a:pPr>
             <a:r>
-              <a:rPr sz="1600" b="0" i="0">
+              <a:rPr sz="1700" b="1" i="0">
+                <a:solidFill>
+                  <a:srgbClr val="F8FAFC"/>
+                </a:solidFill>
+                <a:latin typeface="Calibri"/>
+              </a:rPr>
+              <a:t>Vì sao thứ tự đó: </a:t>
+            </a:r>
+            <a:r>
+              <a:rPr sz="1700" b="0" i="0">
                 <a:solidFill>
                   <a:srgbClr val="CBD5E1"/>
                 </a:solidFill>
                 <a:latin typeface="Calibri"/>
               </a:rPr>
-              <a:t>Mọi chênh lệch nằm trong một độ lệch chuẩn: với bộ phân loại, thay đổi là trung tính</a:t>
+              <a:t>pyvi phân biệt chữ hoa khi ghép tên riêng. </a:t>
+            </a:r>
+            <a:r>
+              <a:rPr sz="1700" b="0" i="1">
+                <a:solidFill>
+                  <a:srgbClr val="5EEAD4"/>
+                </a:solidFill>
+                <a:latin typeface="Calibri"/>
+              </a:rPr>
+              <a:t>Đông Hùng hát</a:t>
+            </a:r>
+            <a:r>
+              <a:rPr sz="1700" b="0" i="0">
+                <a:solidFill>
+                  <a:srgbClr val="CBD5E1"/>
+                </a:solidFill>
+                <a:latin typeface="Calibri"/>
+              </a:rPr>
+              <a:t> cho </a:t>
+            </a:r>
+            <a:r>
+              <a:rPr sz="1700" b="0" i="1">
+                <a:solidFill>
+                  <a:srgbClr val="5EEAD4"/>
+                </a:solidFill>
+                <a:latin typeface="Calibri"/>
+              </a:rPr>
+              <a:t>Đông_Hùng hát</a:t>
+            </a:r>
+            <a:r>
+              <a:rPr sz="1700" b="0" i="0">
+                <a:solidFill>
+                  <a:srgbClr val="CBD5E1"/>
+                </a:solidFill>
+                <a:latin typeface="Calibri"/>
+              </a:rPr>
+              <a:t>; đã hạ chữ thường thì thành ba token rời</a:t>
             </a:r>
           </a:p>
           <a:p>
@@ -13397,7 +12567,7 @@
                 <a:spcPct val="118000"/>
               </a:lnSpc>
               <a:spcAft>
-                <a:spcPts val="1400"/>
+                <a:spcPts val="2000"/>
               </a:spcAft>
               <a:buClr>
                 <a:srgbClr val="2DD4BF"/>
@@ -13406,13 +12576,73 @@
               <a:buChar char="•"/>
             </a:pPr>
             <a:r>
-              <a:rPr sz="1600" b="0" i="0">
+              <a:rPr sz="1700" b="0" i="0">
                 <a:solidFill>
                   <a:srgbClr val="CBD5E1"/>
                 </a:solidFill>
                 <a:latin typeface="Calibri"/>
               </a:rPr>
-              <a:t>Giữ bản mới vì tên riêng thành một token trong từ khóa chủ đề và từ điển không áp sắc thái lên dữ liệu</a:t>
+              <a:t>Từ điển teencode chỉ sửa chính tả </a:t>
+            </a:r>
+            <a:r>
+              <a:rPr sz="1700" b="0" i="1">
+                <a:solidFill>
+                  <a:srgbClr val="CBD5E1"/>
+                </a:solidFill>
+                <a:latin typeface="Calibri"/>
+              </a:rPr>
+              <a:t>(ko, hok, khong thành không)</a:t>
+            </a:r>
+            <a:r>
+              <a:rPr sz="1700" b="0" i="0">
+                <a:solidFill>
+                  <a:srgbClr val="CBD5E1"/>
+                </a:solidFill>
+                <a:latin typeface="Calibri"/>
+              </a:rPr>
+              <a:t>, không dịch tiếng lóng sang từ cảm xúc. Bản cũ có ok thành tốt, vcl thành rất: đó là gán nhãn trước khi mô hình học</a:t>
+            </a:r>
+          </a:p>
+          <a:p>
+            <a:pPr marL="219456" indent="-219456">
+              <a:lnSpc>
+                <a:spcPct val="118000"/>
+              </a:lnSpc>
+              <a:spcAft>
+                <a:spcPts val="2000"/>
+              </a:spcAft>
+              <a:buClr>
+                <a:srgbClr val="2DD4BF"/>
+              </a:buClr>
+              <a:buFont typeface="Arial"/>
+              <a:buChar char="•"/>
+            </a:pPr>
+            <a:r>
+              <a:rPr sz="1700" b="0" i="0">
+                <a:solidFill>
+                  <a:srgbClr val="CBD5E1"/>
+                </a:solidFill>
+                <a:latin typeface="Calibri"/>
+              </a:rPr>
+              <a:t>236 từ dừng chỉ dùng cho từ khóa chủ đề, vì </a:t>
+            </a:r>
+            <a:r>
+              <a:rPr sz="1700" b="0" i="1">
+                <a:solidFill>
+                  <a:srgbClr val="5EEAD4"/>
+                </a:solidFill>
+                <a:latin typeface="Calibri"/>
+              </a:rPr>
+              <a:t>không</a:t>
+            </a:r>
+            <a:r>
+              <a:rPr sz="1700" b="0" i="0">
+                <a:solidFill>
+                  <a:srgbClr val="CBD5E1"/>
+                </a:solidFill>
+                <a:latin typeface="Calibri"/>
+              </a:rPr>
+              <a:t> nằm trong danh sách và là đặc trưng mạnh nhất của lớp tiêu cực (+2,93)</a:t>
             </a:r>
           </a:p>
         </p:txBody>
@@ -13425,7 +12655,7 @@
 </p:sld>
 </file>
 
-<file path=ppt/slides/slide7.xml><?xml version="1.0" encoding="utf-8"?>
+<file path=ppt/slides/slide6.xml><?xml version="1.0" encoding="utf-8"?>
 <p:sld xmlns:a="http://schemas.openxmlformats.org/drawingml/2006/main" xmlns:p="http://schemas.openxmlformats.org/presentationml/2006/main" xmlns:r="http://schemas.openxmlformats.org/officeDocument/2006/relationships">
   <p:cSld>
     <p:bg>
@@ -13472,7 +12702,7 @@
                 </a:solidFill>
                 <a:latin typeface="Calibri"/>
               </a:rPr>
-              <a:t>BƯỚC 3 · BIỂU DIỄN</a:t>
+              <a:t>BƯỚC 2 · THÍ NGHIỆM</a:t>
             </a:r>
           </a:p>
         </p:txBody>
@@ -13511,7 +12741,7 @@
                 </a:solidFill>
                 <a:latin typeface="Calibri Light"/>
               </a:rPr>
-              <a:t>TF-IDF cho cảm xúc, vector câu 768 chiều cho chủ đề</a:t>
+              <a:t>Đổi tiền xử lý không đổi điểm cảm xúc, nhưng đổi từ khóa chủ đề</a:t>
             </a:r>
           </a:p>
         </p:txBody>
@@ -13590,6 +12820,893 @@
                 </a:solidFill>
                 <a:latin typeface="Calibri"/>
               </a:rPr>
+              <a:t>6</a:t>
+            </a:r>
+          </a:p>
+        </p:txBody>
+      </p:sp>
+      <p:graphicFrame>
+        <p:nvGraphicFramePr>
+          <p:cNvPr id="6" name="Table 5"/>
+          <p:cNvGraphicFramePr>
+            <a:graphicFrameLocks noGrp="1"/>
+          </p:cNvGraphicFramePr>
+          <p:nvPr/>
+        </p:nvGraphicFramePr>
+        <p:xfrm>
+          <a:off x="731520" y="1874519"/>
+          <a:ext cx="10765231" cy="2139696"/>
+        </p:xfrm>
+        <a:graphic>
+          <a:graphicData uri="http://schemas.openxmlformats.org/drawingml/2006/table">
+            <a:tbl>
+              <a:tblPr>
+                <a:tableStyleId>{2D5ABB26-0587-4C30-8999-92F81FD0307C}</a:tableStyleId>
+              </a:tblPr>
+              <a:tblGrid>
+                <a:gridCol w="1828800"/>
+                <a:gridCol w="822960"/>
+                <a:gridCol w="2834640"/>
+                <a:gridCol w="2834640"/>
+                <a:gridCol w="2444191"/>
+              </a:tblGrid>
+              <a:tr h="457200">
+                <a:tc>
+                  <a:txBody>
+                    <a:bodyPr wrap="square"/>
+                    <a:lstStyle/>
+                    <a:p>
+                      <a:pPr algn="l"/>
+                      <a:r>
+                        <a:rPr sz="1350" b="1" i="0">
+                          <a:solidFill>
+                            <a:srgbClr val="5EEAD4"/>
+                          </a:solidFill>
+                          <a:latin typeface="Calibri"/>
+                        </a:rPr>
+                        <a:t>Tiền xử lý</a:t>
+                      </a:r>
+                    </a:p>
+                  </a:txBody>
+                  <a:tcPr anchor="ctr" marL="100584" marR="100584" marT="36576" marB="36576">
+                    <a:solidFill>
+                      <a:srgbClr val="334155"/>
+                    </a:solidFill>
+                  </a:tcPr>
+                </a:tc>
+                <a:tc>
+                  <a:txBody>
+                    <a:bodyPr wrap="square"/>
+                    <a:lstStyle/>
+                    <a:p>
+                      <a:pPr algn="l"/>
+                      <a:r>
+                        <a:rPr sz="1350" b="1" i="0">
+                          <a:solidFill>
+                            <a:srgbClr val="5EEAD4"/>
+                          </a:solidFill>
+                          <a:latin typeface="Calibri"/>
+                        </a:rPr>
+                        <a:t>C</a:t>
+                      </a:r>
+                    </a:p>
+                  </a:txBody>
+                  <a:tcPr anchor="ctr" marL="100584" marR="100584" marT="36576" marB="36576">
+                    <a:solidFill>
+                      <a:srgbClr val="334155"/>
+                    </a:solidFill>
+                  </a:tcPr>
+                </a:tc>
+                <a:tc>
+                  <a:txBody>
+                    <a:bodyPr wrap="square"/>
+                    <a:lstStyle/>
+                    <a:p>
+                      <a:pPr algn="r"/>
+                      <a:r>
+                        <a:rPr sz="1350" b="1" i="0">
+                          <a:solidFill>
+                            <a:srgbClr val="5EEAD4"/>
+                          </a:solidFill>
+                          <a:latin typeface="Calibri"/>
+                        </a:rPr>
+                        <a:t>Tỉ lệ dự đoán đúng</a:t>
+                      </a:r>
+                    </a:p>
+                  </a:txBody>
+                  <a:tcPr anchor="ctr" marL="100584" marR="100584" marT="36576" marB="36576">
+                    <a:solidFill>
+                      <a:srgbClr val="334155"/>
+                    </a:solidFill>
+                  </a:tcPr>
+                </a:tc>
+                <a:tc>
+                  <a:txBody>
+                    <a:bodyPr wrap="square"/>
+                    <a:lstStyle/>
+                    <a:p>
+                      <a:pPr algn="r"/>
+                      <a:r>
+                        <a:rPr sz="1350" b="1" i="0">
+                          <a:solidFill>
+                            <a:srgbClr val="5EEAD4"/>
+                          </a:solidFill>
+                          <a:latin typeface="Calibri"/>
+                        </a:rPr>
+                        <a:t>Macro-F1</a:t>
+                      </a:r>
+                    </a:p>
+                  </a:txBody>
+                  <a:tcPr anchor="ctr" marL="100584" marR="100584" marT="36576" marB="36576">
+                    <a:solidFill>
+                      <a:srgbClr val="334155"/>
+                    </a:solidFill>
+                  </a:tcPr>
+                </a:tc>
+                <a:tc>
+                  <a:txBody>
+                    <a:bodyPr wrap="square"/>
+                    <a:lstStyle/>
+                    <a:p>
+                      <a:pPr algn="r"/>
+                      <a:r>
+                        <a:rPr sz="1350" b="1" i="0">
+                          <a:solidFill>
+                            <a:srgbClr val="5EEAD4"/>
+                          </a:solidFill>
+                          <a:latin typeface="Calibri"/>
+                        </a:rPr>
+                        <a:t>F1 trung tính</a:t>
+                      </a:r>
+                    </a:p>
+                  </a:txBody>
+                  <a:tcPr anchor="ctr" marL="100584" marR="100584" marT="36576" marB="36576">
+                    <a:solidFill>
+                      <a:srgbClr val="334155"/>
+                    </a:solidFill>
+                  </a:tcPr>
+                </a:tc>
+              </a:tr>
+              <a:tr h="420624">
+                <a:tc>
+                  <a:txBody>
+                    <a:bodyPr wrap="square"/>
+                    <a:lstStyle/>
+                    <a:p>
+                      <a:pPr algn="l"/>
+                      <a:r>
+                        <a:rPr sz="1350" b="0" i="0">
+                          <a:solidFill>
+                            <a:srgbClr val="CBD5E1"/>
+                          </a:solidFill>
+                          <a:latin typeface="Calibri"/>
+                        </a:rPr>
+                        <a:t>Cũ</a:t>
+                      </a:r>
+                    </a:p>
+                  </a:txBody>
+                  <a:tcPr anchor="ctr" marL="100584" marR="100584" marT="36576" marB="36576">
+                    <a:solidFill>
+                      <a:srgbClr val="243247"/>
+                    </a:solidFill>
+                  </a:tcPr>
+                </a:tc>
+                <a:tc>
+                  <a:txBody>
+                    <a:bodyPr wrap="square"/>
+                    <a:lstStyle/>
+                    <a:p>
+                      <a:pPr algn="l"/>
+                      <a:r>
+                        <a:rPr sz="1350" b="0" i="0">
+                          <a:solidFill>
+                            <a:srgbClr val="CBD5E1"/>
+                          </a:solidFill>
+                          <a:latin typeface="Calibri"/>
+                        </a:rPr>
+                        <a:t>0,3</a:t>
+                      </a:r>
+                    </a:p>
+                  </a:txBody>
+                  <a:tcPr anchor="ctr" marL="100584" marR="100584" marT="36576" marB="36576">
+                    <a:solidFill>
+                      <a:srgbClr val="243247"/>
+                    </a:solidFill>
+                  </a:tcPr>
+                </a:tc>
+                <a:tc>
+                  <a:txBody>
+                    <a:bodyPr wrap="square"/>
+                    <a:lstStyle/>
+                    <a:p>
+                      <a:pPr algn="r"/>
+                      <a:r>
+                        <a:rPr sz="1350" b="0" i="0">
+                          <a:solidFill>
+                            <a:srgbClr val="CBD5E1"/>
+                          </a:solidFill>
+                          <a:latin typeface="Calibri"/>
+                        </a:rPr>
+                        <a:t>77,58% ± 0,47</a:t>
+                      </a:r>
+                    </a:p>
+                  </a:txBody>
+                  <a:tcPr anchor="ctr" marL="100584" marR="100584" marT="36576" marB="36576">
+                    <a:solidFill>
+                      <a:srgbClr val="243247"/>
+                    </a:solidFill>
+                  </a:tcPr>
+                </a:tc>
+                <a:tc>
+                  <a:txBody>
+                    <a:bodyPr wrap="square"/>
+                    <a:lstStyle/>
+                    <a:p>
+                      <a:pPr algn="r"/>
+                      <a:r>
+                        <a:rPr sz="1350" b="0" i="0">
+                          <a:solidFill>
+                            <a:srgbClr val="CBD5E1"/>
+                          </a:solidFill>
+                          <a:latin typeface="Calibri"/>
+                        </a:rPr>
+                        <a:t>0,7199 ± 0,0052</a:t>
+                      </a:r>
+                    </a:p>
+                  </a:txBody>
+                  <a:tcPr anchor="ctr" marL="100584" marR="100584" marT="36576" marB="36576">
+                    <a:solidFill>
+                      <a:srgbClr val="243247"/>
+                    </a:solidFill>
+                  </a:tcPr>
+                </a:tc>
+                <a:tc>
+                  <a:txBody>
+                    <a:bodyPr wrap="square"/>
+                    <a:lstStyle/>
+                    <a:p>
+                      <a:pPr algn="r"/>
+                      <a:r>
+                        <a:rPr sz="1350" b="0" i="0">
+                          <a:solidFill>
+                            <a:srgbClr val="CBD5E1"/>
+                          </a:solidFill>
+                          <a:latin typeface="Calibri"/>
+                        </a:rPr>
+                        <a:t>0,5218</a:t>
+                      </a:r>
+                    </a:p>
+                  </a:txBody>
+                  <a:tcPr anchor="ctr" marL="100584" marR="100584" marT="36576" marB="36576">
+                    <a:solidFill>
+                      <a:srgbClr val="243247"/>
+                    </a:solidFill>
+                  </a:tcPr>
+                </a:tc>
+              </a:tr>
+              <a:tr h="420624">
+                <a:tc>
+                  <a:txBody>
+                    <a:bodyPr wrap="square"/>
+                    <a:lstStyle/>
+                    <a:p>
+                      <a:pPr algn="l"/>
+                      <a:r>
+                        <a:rPr sz="1350" b="0" i="0">
+                          <a:solidFill>
+                            <a:srgbClr val="CBD5E1"/>
+                          </a:solidFill>
+                          <a:latin typeface="Calibri"/>
+                        </a:rPr>
+                        <a:t>Mới</a:t>
+                      </a:r>
+                    </a:p>
+                  </a:txBody>
+                  <a:tcPr anchor="ctr" marL="100584" marR="100584" marT="36576" marB="36576">
+                    <a:solidFill>
+                      <a:srgbClr val="2B3A50"/>
+                    </a:solidFill>
+                  </a:tcPr>
+                </a:tc>
+                <a:tc>
+                  <a:txBody>
+                    <a:bodyPr wrap="square"/>
+                    <a:lstStyle/>
+                    <a:p>
+                      <a:pPr algn="l"/>
+                      <a:r>
+                        <a:rPr sz="1350" b="0" i="0">
+                          <a:solidFill>
+                            <a:srgbClr val="CBD5E1"/>
+                          </a:solidFill>
+                          <a:latin typeface="Calibri"/>
+                        </a:rPr>
+                        <a:t>0,3</a:t>
+                      </a:r>
+                    </a:p>
+                  </a:txBody>
+                  <a:tcPr anchor="ctr" marL="100584" marR="100584" marT="36576" marB="36576">
+                    <a:solidFill>
+                      <a:srgbClr val="2B3A50"/>
+                    </a:solidFill>
+                  </a:tcPr>
+                </a:tc>
+                <a:tc>
+                  <a:txBody>
+                    <a:bodyPr wrap="square"/>
+                    <a:lstStyle/>
+                    <a:p>
+                      <a:pPr algn="r"/>
+                      <a:r>
+                        <a:rPr sz="1350" b="0" i="0">
+                          <a:solidFill>
+                            <a:srgbClr val="CBD5E1"/>
+                          </a:solidFill>
+                          <a:latin typeface="Calibri"/>
+                        </a:rPr>
+                        <a:t>77,58% ± 0,50</a:t>
+                      </a:r>
+                    </a:p>
+                  </a:txBody>
+                  <a:tcPr anchor="ctr" marL="100584" marR="100584" marT="36576" marB="36576">
+                    <a:solidFill>
+                      <a:srgbClr val="2B3A50"/>
+                    </a:solidFill>
+                  </a:tcPr>
+                </a:tc>
+                <a:tc>
+                  <a:txBody>
+                    <a:bodyPr wrap="square"/>
+                    <a:lstStyle/>
+                    <a:p>
+                      <a:pPr algn="r"/>
+                      <a:r>
+                        <a:rPr sz="1350" b="0" i="0">
+                          <a:solidFill>
+                            <a:srgbClr val="CBD5E1"/>
+                          </a:solidFill>
+                          <a:latin typeface="Calibri"/>
+                        </a:rPr>
+                        <a:t>0,7200 ± 0,0041</a:t>
+                      </a:r>
+                    </a:p>
+                  </a:txBody>
+                  <a:tcPr anchor="ctr" marL="100584" marR="100584" marT="36576" marB="36576">
+                    <a:solidFill>
+                      <a:srgbClr val="2B3A50"/>
+                    </a:solidFill>
+                  </a:tcPr>
+                </a:tc>
+                <a:tc>
+                  <a:txBody>
+                    <a:bodyPr wrap="square"/>
+                    <a:lstStyle/>
+                    <a:p>
+                      <a:pPr algn="r"/>
+                      <a:r>
+                        <a:rPr sz="1350" b="0" i="0">
+                          <a:solidFill>
+                            <a:srgbClr val="CBD5E1"/>
+                          </a:solidFill>
+                          <a:latin typeface="Calibri"/>
+                        </a:rPr>
+                        <a:t>0,5222</a:t>
+                      </a:r>
+                    </a:p>
+                  </a:txBody>
+                  <a:tcPr anchor="ctr" marL="100584" marR="100584" marT="36576" marB="36576">
+                    <a:solidFill>
+                      <a:srgbClr val="2B3A50"/>
+                    </a:solidFill>
+                  </a:tcPr>
+                </a:tc>
+              </a:tr>
+              <a:tr h="420624">
+                <a:tc>
+                  <a:txBody>
+                    <a:bodyPr wrap="square"/>
+                    <a:lstStyle/>
+                    <a:p>
+                      <a:pPr algn="l"/>
+                      <a:r>
+                        <a:rPr sz="1350" b="0" i="0">
+                          <a:solidFill>
+                            <a:srgbClr val="CBD5E1"/>
+                          </a:solidFill>
+                          <a:latin typeface="Calibri"/>
+                        </a:rPr>
+                        <a:t>Cũ</a:t>
+                      </a:r>
+                    </a:p>
+                  </a:txBody>
+                  <a:tcPr anchor="ctr" marL="100584" marR="100584" marT="36576" marB="36576">
+                    <a:solidFill>
+                      <a:srgbClr val="243247"/>
+                    </a:solidFill>
+                  </a:tcPr>
+                </a:tc>
+                <a:tc>
+                  <a:txBody>
+                    <a:bodyPr wrap="square"/>
+                    <a:lstStyle/>
+                    <a:p>
+                      <a:pPr algn="l"/>
+                      <a:r>
+                        <a:rPr sz="1350" b="0" i="0">
+                          <a:solidFill>
+                            <a:srgbClr val="CBD5E1"/>
+                          </a:solidFill>
+                          <a:latin typeface="Calibri"/>
+                        </a:rPr>
+                        <a:t>1,0</a:t>
+                      </a:r>
+                    </a:p>
+                  </a:txBody>
+                  <a:tcPr anchor="ctr" marL="100584" marR="100584" marT="36576" marB="36576">
+                    <a:solidFill>
+                      <a:srgbClr val="243247"/>
+                    </a:solidFill>
+                  </a:tcPr>
+                </a:tc>
+                <a:tc>
+                  <a:txBody>
+                    <a:bodyPr wrap="square"/>
+                    <a:lstStyle/>
+                    <a:p>
+                      <a:pPr algn="r"/>
+                      <a:r>
+                        <a:rPr sz="1350" b="0" i="0">
+                          <a:solidFill>
+                            <a:srgbClr val="CBD5E1"/>
+                          </a:solidFill>
+                          <a:latin typeface="Calibri"/>
+                        </a:rPr>
+                        <a:t>76,61% ± 0,40</a:t>
+                      </a:r>
+                    </a:p>
+                  </a:txBody>
+                  <a:tcPr anchor="ctr" marL="100584" marR="100584" marT="36576" marB="36576">
+                    <a:solidFill>
+                      <a:srgbClr val="243247"/>
+                    </a:solidFill>
+                  </a:tcPr>
+                </a:tc>
+                <a:tc>
+                  <a:txBody>
+                    <a:bodyPr wrap="square"/>
+                    <a:lstStyle/>
+                    <a:p>
+                      <a:pPr algn="r"/>
+                      <a:r>
+                        <a:rPr sz="1350" b="0" i="0">
+                          <a:solidFill>
+                            <a:srgbClr val="CBD5E1"/>
+                          </a:solidFill>
+                          <a:latin typeface="Calibri"/>
+                        </a:rPr>
+                        <a:t>0,7079 ± 0,0052</a:t>
+                      </a:r>
+                    </a:p>
+                  </a:txBody>
+                  <a:tcPr anchor="ctr" marL="100584" marR="100584" marT="36576" marB="36576">
+                    <a:solidFill>
+                      <a:srgbClr val="243247"/>
+                    </a:solidFill>
+                  </a:tcPr>
+                </a:tc>
+                <a:tc>
+                  <a:txBody>
+                    <a:bodyPr wrap="square"/>
+                    <a:lstStyle/>
+                    <a:p>
+                      <a:pPr algn="r"/>
+                      <a:r>
+                        <a:rPr sz="1350" b="0" i="0">
+                          <a:solidFill>
+                            <a:srgbClr val="CBD5E1"/>
+                          </a:solidFill>
+                          <a:latin typeface="Calibri"/>
+                        </a:rPr>
+                        <a:t>0,5004</a:t>
+                      </a:r>
+                    </a:p>
+                  </a:txBody>
+                  <a:tcPr anchor="ctr" marL="100584" marR="100584" marT="36576" marB="36576">
+                    <a:solidFill>
+                      <a:srgbClr val="243247"/>
+                    </a:solidFill>
+                  </a:tcPr>
+                </a:tc>
+              </a:tr>
+              <a:tr h="420624">
+                <a:tc>
+                  <a:txBody>
+                    <a:bodyPr wrap="square"/>
+                    <a:lstStyle/>
+                    <a:p>
+                      <a:pPr algn="l"/>
+                      <a:r>
+                        <a:rPr sz="1350" b="0" i="0">
+                          <a:solidFill>
+                            <a:srgbClr val="CBD5E1"/>
+                          </a:solidFill>
+                          <a:latin typeface="Calibri"/>
+                        </a:rPr>
+                        <a:t>Mới</a:t>
+                      </a:r>
+                    </a:p>
+                  </a:txBody>
+                  <a:tcPr anchor="ctr" marL="100584" marR="100584" marT="36576" marB="36576">
+                    <a:solidFill>
+                      <a:srgbClr val="2B3A50"/>
+                    </a:solidFill>
+                  </a:tcPr>
+                </a:tc>
+                <a:tc>
+                  <a:txBody>
+                    <a:bodyPr wrap="square"/>
+                    <a:lstStyle/>
+                    <a:p>
+                      <a:pPr algn="l"/>
+                      <a:r>
+                        <a:rPr sz="1350" b="0" i="0">
+                          <a:solidFill>
+                            <a:srgbClr val="CBD5E1"/>
+                          </a:solidFill>
+                          <a:latin typeface="Calibri"/>
+                        </a:rPr>
+                        <a:t>1,0</a:t>
+                      </a:r>
+                    </a:p>
+                  </a:txBody>
+                  <a:tcPr anchor="ctr" marL="100584" marR="100584" marT="36576" marB="36576">
+                    <a:solidFill>
+                      <a:srgbClr val="2B3A50"/>
+                    </a:solidFill>
+                  </a:tcPr>
+                </a:tc>
+                <a:tc>
+                  <a:txBody>
+                    <a:bodyPr wrap="square"/>
+                    <a:lstStyle/>
+                    <a:p>
+                      <a:pPr algn="r"/>
+                      <a:r>
+                        <a:rPr sz="1350" b="0" i="0">
+                          <a:solidFill>
+                            <a:srgbClr val="CBD5E1"/>
+                          </a:solidFill>
+                          <a:latin typeface="Calibri"/>
+                        </a:rPr>
+                        <a:t>76,57% ± 0,43</a:t>
+                      </a:r>
+                    </a:p>
+                  </a:txBody>
+                  <a:tcPr anchor="ctr" marL="100584" marR="100584" marT="36576" marB="36576">
+                    <a:solidFill>
+                      <a:srgbClr val="2B3A50"/>
+                    </a:solidFill>
+                  </a:tcPr>
+                </a:tc>
+                <a:tc>
+                  <a:txBody>
+                    <a:bodyPr wrap="square"/>
+                    <a:lstStyle/>
+                    <a:p>
+                      <a:pPr algn="r"/>
+                      <a:r>
+                        <a:rPr sz="1350" b="0" i="0">
+                          <a:solidFill>
+                            <a:srgbClr val="CBD5E1"/>
+                          </a:solidFill>
+                          <a:latin typeface="Calibri"/>
+                        </a:rPr>
+                        <a:t>0,7075 ± 0,0053</a:t>
+                      </a:r>
+                    </a:p>
+                  </a:txBody>
+                  <a:tcPr anchor="ctr" marL="100584" marR="100584" marT="36576" marB="36576">
+                    <a:solidFill>
+                      <a:srgbClr val="2B3A50"/>
+                    </a:solidFill>
+                  </a:tcPr>
+                </a:tc>
+                <a:tc>
+                  <a:txBody>
+                    <a:bodyPr wrap="square"/>
+                    <a:lstStyle/>
+                    <a:p>
+                      <a:pPr algn="r"/>
+                      <a:r>
+                        <a:rPr sz="1350" b="0" i="0">
+                          <a:solidFill>
+                            <a:srgbClr val="CBD5E1"/>
+                          </a:solidFill>
+                          <a:latin typeface="Calibri"/>
+                        </a:rPr>
+                        <a:t>0,5007</a:t>
+                      </a:r>
+                    </a:p>
+                  </a:txBody>
+                  <a:tcPr anchor="ctr" marL="100584" marR="100584" marT="36576" marB="36576">
+                    <a:solidFill>
+                      <a:srgbClr val="2B3A50"/>
+                    </a:solidFill>
+                  </a:tcPr>
+                </a:tc>
+              </a:tr>
+            </a:tbl>
+          </a:graphicData>
+        </a:graphic>
+      </p:graphicFrame>
+      <p:sp>
+        <p:nvSpPr>
+          <p:cNvPr id="7" name="TextBox 6"/>
+          <p:cNvSpPr txBox="1"/>
+          <p:nvPr/>
+        </p:nvSpPr>
+        <p:spPr>
+          <a:xfrm>
+            <a:off x="731520" y="4370832"/>
+            <a:ext cx="10728655" cy="1847087"/>
+          </a:xfrm>
+          <a:prstGeom prst="rect">
+            <a:avLst/>
+          </a:prstGeom>
+          <a:noFill/>
+        </p:spPr>
+        <p:txBody>
+          <a:bodyPr wrap="square" lIns="0" rIns="0" tIns="0" bIns="0">
+            <a:spAutoFit/>
+          </a:bodyPr>
+          <a:lstStyle/>
+          <a:p>
+            <a:pPr marL="219456" indent="-219456">
+              <a:lnSpc>
+                <a:spcPct val="118000"/>
+              </a:lnSpc>
+              <a:spcAft>
+                <a:spcPts val="1400"/>
+              </a:spcAft>
+              <a:buClr>
+                <a:srgbClr val="2DD4BF"/>
+              </a:buClr>
+              <a:buFont typeface="Arial"/>
+              <a:buChar char="•"/>
+            </a:pPr>
+            <a:r>
+              <a:rPr sz="1600" b="0" i="0">
+                <a:solidFill>
+                  <a:srgbClr val="CBD5E1"/>
+                </a:solidFill>
+                <a:latin typeface="Calibri"/>
+              </a:rPr>
+              <a:t>Cùng TF-IDF và LinearSVC, năm hạt giống chia tập (0 đến 4), trên bình luận của tập dữ liệu</a:t>
+            </a:r>
+          </a:p>
+          <a:p>
+            <a:pPr marL="219456" indent="-219456">
+              <a:lnSpc>
+                <a:spcPct val="118000"/>
+              </a:lnSpc>
+              <a:spcAft>
+                <a:spcPts val="1400"/>
+              </a:spcAft>
+              <a:buClr>
+                <a:srgbClr val="2DD4BF"/>
+              </a:buClr>
+              <a:buFont typeface="Arial"/>
+              <a:buChar char="•"/>
+            </a:pPr>
+            <a:r>
+              <a:rPr sz="1600" b="0" i="0">
+                <a:solidFill>
+                  <a:srgbClr val="CBD5E1"/>
+                </a:solidFill>
+                <a:latin typeface="Calibri"/>
+              </a:rPr>
+              <a:t>Mọi chênh lệch nằm trong một độ lệch chuẩn: với bộ phân loại, thay đổi là trung tính</a:t>
+            </a:r>
+          </a:p>
+          <a:p>
+            <a:pPr marL="219456" indent="-219456">
+              <a:lnSpc>
+                <a:spcPct val="118000"/>
+              </a:lnSpc>
+              <a:spcAft>
+                <a:spcPts val="1400"/>
+              </a:spcAft>
+              <a:buClr>
+                <a:srgbClr val="2DD4BF"/>
+              </a:buClr>
+              <a:buFont typeface="Arial"/>
+              <a:buChar char="•"/>
+            </a:pPr>
+            <a:r>
+              <a:rPr sz="1600" b="0" i="0">
+                <a:solidFill>
+                  <a:srgbClr val="CBD5E1"/>
+                </a:solidFill>
+                <a:latin typeface="Calibri"/>
+              </a:rPr>
+              <a:t>Giữ bản mới vì tên riêng thành một token trong từ khóa chủ đề và từ điển không áp sắc thái lên dữ liệu</a:t>
+            </a:r>
+          </a:p>
+        </p:txBody>
+      </p:sp>
+    </p:spTree>
+  </p:cSld>
+  <p:clrMapOvr>
+    <a:masterClrMapping/>
+  </p:clrMapOvr>
+</p:sld>
+</file>
+
+<file path=ppt/slides/slide7.xml><?xml version="1.0" encoding="utf-8"?>
+<p:sld xmlns:a="http://schemas.openxmlformats.org/drawingml/2006/main" xmlns:p="http://schemas.openxmlformats.org/presentationml/2006/main" xmlns:r="http://schemas.openxmlformats.org/officeDocument/2006/relationships">
+  <p:cSld>
+    <p:bg>
+      <p:bgPr>
+        <a:solidFill>
+          <a:srgbClr val="1E293B"/>
+        </a:solidFill>
+        <a:effectLst/>
+      </p:bgPr>
+    </p:bg>
+    <p:spTree>
+      <p:nvGrpSpPr>
+        <p:cNvPr id="1" name=""/>
+        <p:cNvGrpSpPr/>
+        <p:nvPr/>
+      </p:nvGrpSpPr>
+      <p:grpSpPr/>
+      <p:sp>
+        <p:nvSpPr>
+          <p:cNvPr id="2" name="TextBox 1"/>
+          <p:cNvSpPr txBox="1"/>
+          <p:nvPr/>
+        </p:nvSpPr>
+        <p:spPr>
+          <a:xfrm>
+            <a:off x="731520" y="329184"/>
+            <a:ext cx="10728655" cy="237744"/>
+          </a:xfrm>
+          <a:prstGeom prst="rect">
+            <a:avLst/>
+          </a:prstGeom>
+          <a:noFill/>
+        </p:spPr>
+        <p:txBody>
+          <a:bodyPr wrap="square" lIns="0" rIns="0" tIns="0" bIns="0">
+            <a:spAutoFit/>
+          </a:bodyPr>
+          <a:lstStyle/>
+          <a:p>
+            <a:r>
+              <a:rPr sz="1050" b="1" i="0" spc="120">
+                <a:solidFill>
+                  <a:srgbClr val="2DD4BF"/>
+                </a:solidFill>
+                <a:latin typeface="Calibri"/>
+              </a:rPr>
+              <a:t>BƯỚC 3 · BIỂU DIỄN</a:t>
+            </a:r>
+          </a:p>
+        </p:txBody>
+      </p:sp>
+      <p:sp>
+        <p:nvSpPr>
+          <p:cNvPr id="3" name="TextBox 2"/>
+          <p:cNvSpPr txBox="1"/>
+          <p:nvPr/>
+        </p:nvSpPr>
+        <p:spPr>
+          <a:xfrm>
+            <a:off x="731520" y="603504"/>
+            <a:ext cx="10728655" cy="868680"/>
+          </a:xfrm>
+          <a:prstGeom prst="rect">
+            <a:avLst/>
+          </a:prstGeom>
+          <a:noFill/>
+        </p:spPr>
+        <p:txBody>
+          <a:bodyPr wrap="square" lIns="0" rIns="0" tIns="0" bIns="0">
+            <a:spAutoFit/>
+          </a:bodyPr>
+          <a:lstStyle/>
+          <a:p>
+            <a:pPr>
+              <a:lnSpc>
+                <a:spcPct val="95000"/>
+              </a:lnSpc>
+            </a:pPr>
+            <a:r>
+              <a:rPr sz="2900" b="1" i="0">
+                <a:solidFill>
+                  <a:srgbClr val="F8FAFC"/>
+                </a:solidFill>
+                <a:latin typeface="Calibri Light"/>
+              </a:rPr>
+              <a:t>TF-IDF cho cảm xúc, vector câu 768 chiều cho chủ đề</a:t>
+            </a:r>
+          </a:p>
+        </p:txBody>
+      </p:sp>
+      <p:sp>
+        <p:nvSpPr>
+          <p:cNvPr id="4" name="Rectangle 3"/>
+          <p:cNvSpPr/>
+          <p:nvPr/>
+        </p:nvSpPr>
+        <p:spPr>
+          <a:xfrm>
+            <a:off x="731520" y="1463040"/>
+            <a:ext cx="777240" cy="47548"/>
+          </a:xfrm>
+          <a:prstGeom prst="rect">
+            <a:avLst/>
+          </a:prstGeom>
+          <a:solidFill>
+            <a:srgbClr val="2DD4BF"/>
+          </a:solidFill>
+          <a:ln>
+            <a:noFill/>
+          </a:ln>
+          <a:effectLst/>
+        </p:spPr>
+        <p:style>
+          <a:lnRef idx="1">
+            <a:schemeClr val="accent1"/>
+          </a:lnRef>
+          <a:fillRef idx="3">
+            <a:schemeClr val="accent1"/>
+          </a:fillRef>
+          <a:effectRef idx="2">
+            <a:schemeClr val="accent1"/>
+          </a:effectRef>
+          <a:fontRef idx="minor">
+            <a:schemeClr val="lt1"/>
+          </a:fontRef>
+        </p:style>
+        <p:txBody>
+          <a:bodyPr rtlCol="0" anchor="ctr"/>
+          <a:lstStyle/>
+          <a:p>
+            <a:pPr algn="ctr"/>
+          </a:p>
+        </p:txBody>
+      </p:sp>
+      <p:sp>
+        <p:nvSpPr>
+          <p:cNvPr id="5" name="TextBox 4"/>
+          <p:cNvSpPr txBox="1"/>
+          <p:nvPr/>
+        </p:nvSpPr>
+        <p:spPr>
+          <a:xfrm>
+            <a:off x="10545775" y="6291072"/>
+            <a:ext cx="914400" cy="274320"/>
+          </a:xfrm>
+          <a:prstGeom prst="rect">
+            <a:avLst/>
+          </a:prstGeom>
+          <a:noFill/>
+        </p:spPr>
+        <p:txBody>
+          <a:bodyPr wrap="square" lIns="0" rIns="0" tIns="0" bIns="0">
+            <a:spAutoFit/>
+          </a:bodyPr>
+          <a:lstStyle/>
+          <a:p>
+            <a:pPr algn="r"/>
+            <a:r>
+              <a:rPr sz="1100" b="0" i="0">
+                <a:solidFill>
+                  <a:srgbClr val="8296B0"/>
+                </a:solidFill>
+                <a:latin typeface="Calibri"/>
+              </a:rPr>
               <a:t>7</a:t>
             </a:r>
           </a:p>
@@ -13830,9 +13947,161 @@
         <p:nvPr/>
       </p:nvGrpSpPr>
       <p:grpSpPr/>
+      <p:sp>
+        <p:nvSpPr>
+          <p:cNvPr id="2" name="TextBox 1"/>
+          <p:cNvSpPr txBox="1"/>
+          <p:nvPr/>
+        </p:nvSpPr>
+        <p:spPr>
+          <a:xfrm>
+            <a:off x="731520" y="329184"/>
+            <a:ext cx="10728655" cy="237744"/>
+          </a:xfrm>
+          <a:prstGeom prst="rect">
+            <a:avLst/>
+          </a:prstGeom>
+          <a:noFill/>
+        </p:spPr>
+        <p:txBody>
+          <a:bodyPr wrap="square" lIns="0" rIns="0" tIns="0" bIns="0">
+            <a:spAutoFit/>
+          </a:bodyPr>
+          <a:lstStyle/>
+          <a:p>
+            <a:r>
+              <a:rPr sz="1050" b="1" i="0" spc="120">
+                <a:solidFill>
+                  <a:srgbClr val="2DD4BF"/>
+                </a:solidFill>
+                <a:latin typeface="Calibri"/>
+              </a:rPr>
+              <a:t>BƯỚC 5 · ĐÁNH GIÁ</a:t>
+            </a:r>
+          </a:p>
+        </p:txBody>
+      </p:sp>
+      <p:sp>
+        <p:nvSpPr>
+          <p:cNvPr id="3" name="TextBox 2"/>
+          <p:cNvSpPr txBox="1"/>
+          <p:nvPr/>
+        </p:nvSpPr>
+        <p:spPr>
+          <a:xfrm>
+            <a:off x="731520" y="603504"/>
+            <a:ext cx="10728655" cy="868680"/>
+          </a:xfrm>
+          <a:prstGeom prst="rect">
+            <a:avLst/>
+          </a:prstGeom>
+          <a:noFill/>
+        </p:spPr>
+        <p:txBody>
+          <a:bodyPr wrap="square" lIns="0" rIns="0" tIns="0" bIns="0">
+            <a:spAutoFit/>
+          </a:bodyPr>
+          <a:lstStyle/>
+          <a:p>
+            <a:pPr>
+              <a:lnSpc>
+                <a:spcPct val="95000"/>
+              </a:lnSpc>
+            </a:pPr>
+            <a:r>
+              <a:rPr sz="2900" b="1" i="0">
+                <a:solidFill>
+                  <a:srgbClr val="F8FAFC"/>
+                </a:solidFill>
+                <a:latin typeface="Calibri Light"/>
+              </a:rPr>
+              <a:t>Chọn trên tập huấn luyện, chấm một lần trên tập kiểm tra</a:t>
+            </a:r>
+          </a:p>
+        </p:txBody>
+      </p:sp>
+      <p:sp>
+        <p:nvSpPr>
+          <p:cNvPr id="4" name="Rectangle 3"/>
+          <p:cNvSpPr/>
+          <p:nvPr/>
+        </p:nvSpPr>
+        <p:spPr>
+          <a:xfrm>
+            <a:off x="731520" y="1463040"/>
+            <a:ext cx="777240" cy="47548"/>
+          </a:xfrm>
+          <a:prstGeom prst="rect">
+            <a:avLst/>
+          </a:prstGeom>
+          <a:solidFill>
+            <a:srgbClr val="2DD4BF"/>
+          </a:solidFill>
+          <a:ln>
+            <a:noFill/>
+          </a:ln>
+          <a:effectLst/>
+        </p:spPr>
+        <p:style>
+          <a:lnRef idx="1">
+            <a:schemeClr val="accent1"/>
+          </a:lnRef>
+          <a:fillRef idx="3">
+            <a:schemeClr val="accent1"/>
+          </a:fillRef>
+          <a:effectRef idx="2">
+            <a:schemeClr val="accent1"/>
+          </a:effectRef>
+          <a:fontRef idx="minor">
+            <a:schemeClr val="lt1"/>
+          </a:fontRef>
+        </p:style>
+        <p:txBody>
+          <a:bodyPr rtlCol="0" anchor="ctr"/>
+          <a:lstStyle/>
+          <a:p>
+            <a:pPr algn="ctr"/>
+          </a:p>
+        </p:txBody>
+      </p:sp>
+      <p:sp>
+        <p:nvSpPr>
+          <p:cNvPr id="5" name="TextBox 4"/>
+          <p:cNvSpPr txBox="1"/>
+          <p:nvPr/>
+        </p:nvSpPr>
+        <p:spPr>
+          <a:xfrm>
+            <a:off x="10545775" y="6291072"/>
+            <a:ext cx="914400" cy="274320"/>
+          </a:xfrm>
+          <a:prstGeom prst="rect">
+            <a:avLst/>
+          </a:prstGeom>
+          <a:noFill/>
+        </p:spPr>
+        <p:txBody>
+          <a:bodyPr wrap="square" lIns="0" rIns="0" tIns="0" bIns="0">
+            <a:spAutoFit/>
+          </a:bodyPr>
+          <a:lstStyle/>
+          <a:p>
+            <a:pPr algn="r"/>
+            <a:r>
+              <a:rPr sz="1100" b="0" i="0">
+                <a:solidFill>
+                  <a:srgbClr val="8296B0"/>
+                </a:solidFill>
+                <a:latin typeface="Calibri"/>
+              </a:rPr>
+              <a:t>8</a:t>
+            </a:r>
+          </a:p>
+        </p:txBody>
+      </p:sp>
       <p:pic>
         <p:nvPicPr>
-          <p:cNvPr id="2" name="Picture 1" descr="evaluation_slate.png"/>
+          <p:cNvPr id="6" name="Picture 5" descr="evaluation_slate_body.png"/>
           <p:cNvPicPr>
             <a:picLocks noChangeAspect="1"/>
           </p:cNvPicPr>
@@ -13846,49 +14115,14 @@
         </p:blipFill>
         <p:spPr>
           <a:xfrm>
-            <a:off x="0" y="0"/>
-            <a:ext cx="12191695" cy="6858000"/>
+            <a:off x="1324817" y="1810512"/>
+            <a:ext cx="9542060" cy="4443983"/>
           </a:xfrm>
           <a:prstGeom prst="rect">
             <a:avLst/>
           </a:prstGeom>
         </p:spPr>
       </p:pic>
-      <p:sp>
-        <p:nvSpPr>
-          <p:cNvPr id="3" name="TextBox 2"/>
-          <p:cNvSpPr txBox="1"/>
-          <p:nvPr/>
-        </p:nvSpPr>
-        <p:spPr>
-          <a:xfrm>
-            <a:off x="10545775" y="6291072"/>
-            <a:ext cx="914400" cy="274320"/>
-          </a:xfrm>
-          <a:prstGeom prst="rect">
-            <a:avLst/>
-          </a:prstGeom>
-          <a:noFill/>
-        </p:spPr>
-        <p:txBody>
-          <a:bodyPr wrap="square" lIns="0" rIns="0" tIns="0" bIns="0">
-            <a:spAutoFit/>
-          </a:bodyPr>
-          <a:lstStyle/>
-          <a:p>
-            <a:pPr algn="r"/>
-            <a:r>
-              <a:rPr sz="1100" b="0" i="0">
-                <a:solidFill>
-                  <a:srgbClr val="8296B0"/>
-                </a:solidFill>
-                <a:latin typeface="Calibri"/>
-              </a:rPr>
-              <a:t>8</a:t>
-            </a:r>
-          </a:p>
-        </p:txBody>
-      </p:sp>
     </p:spTree>
   </p:cSld>
   <p:clrMapOvr>

--- a/report/CS221_Xử-Lý-NNTN_slide.pptx
+++ b/report/CS221_Xử-Lý-NNTN_slide.pptx
@@ -4,27 +4,30 @@
   <p:sldMasterIdLst>
     <p:sldMasterId id="2147483648" r:id="rId1"/>
   </p:sldMasterIdLst>
+  <p:notesMasterIdLst>
+    <p:notesMasterId r:id="rId20"/>
+  </p:notesMasterIdLst>
   <p:sldIdLst>
-    <p:sldId id="256" r:id="rId7"/>
-    <p:sldId id="257" r:id="rId9"/>
-    <p:sldId id="258" r:id="rId10"/>
-    <p:sldId id="259" r:id="rId11"/>
-    <p:sldId id="260" r:id="rId12"/>
-    <p:sldId id="261" r:id="rId13"/>
-    <p:sldId id="262" r:id="rId14"/>
-    <p:sldId id="263" r:id="rId15"/>
-    <p:sldId id="264" r:id="rId16"/>
-    <p:sldId id="265" r:id="rId17"/>
-    <p:sldId id="266" r:id="rId18"/>
-    <p:sldId id="267" r:id="rId19"/>
-    <p:sldId id="268" r:id="rId20"/>
-    <p:sldId id="269" r:id="rId21"/>
-    <p:sldId id="270" r:id="rId22"/>
-    <p:sldId id="271" r:id="rId23"/>
-    <p:sldId id="272" r:id="rId24"/>
-    <p:sldId id="273" r:id="rId25"/>
+    <p:sldId id="256" r:id="rId2"/>
+    <p:sldId id="257" r:id="rId3"/>
+    <p:sldId id="258" r:id="rId4"/>
+    <p:sldId id="259" r:id="rId5"/>
+    <p:sldId id="260" r:id="rId6"/>
+    <p:sldId id="261" r:id="rId7"/>
+    <p:sldId id="262" r:id="rId8"/>
+    <p:sldId id="263" r:id="rId9"/>
+    <p:sldId id="264" r:id="rId10"/>
+    <p:sldId id="265" r:id="rId11"/>
+    <p:sldId id="266" r:id="rId12"/>
+    <p:sldId id="267" r:id="rId13"/>
+    <p:sldId id="268" r:id="rId14"/>
+    <p:sldId id="269" r:id="rId15"/>
+    <p:sldId id="270" r:id="rId16"/>
+    <p:sldId id="271" r:id="rId17"/>
+    <p:sldId id="272" r:id="rId18"/>
+    <p:sldId id="273" r:id="rId19"/>
   </p:sldIdLst>
-  <p:sldSz cx="12191695" cy="6858000" type="screen4x3"/>
+  <p:sldSz cx="12192000" cy="6858000"/>
   <p:notesSz cx="6858000" cy="9144000"/>
   <p:defaultTextStyle>
     <a:defPPr>
@@ -121,11 +124,27 @@
       </a:defRPr>
     </a:lvl9pPr>
   </p:defaultTextStyle>
+  <p:extLst>
+    <p:ext uri="{EFAFB233-063F-42B5-8137-9DF3F51BA10A}">
+      <p15:sldGuideLst xmlns:p15="http://schemas.microsoft.com/office/powerpoint/2012/main">
+        <p15:guide id="1" orient="horz" pos="2160">
+          <p15:clr>
+            <a:srgbClr val="A4A3A4"/>
+          </p15:clr>
+        </p15:guide>
+        <p15:guide id="2" pos="2880">
+          <p15:clr>
+            <a:srgbClr val="A4A3A4"/>
+          </p15:clr>
+        </p15:guide>
+      </p15:sldGuideLst>
+    </p:ext>
+  </p:extLst>
 </p:presentation>
 </file>
 
 <file path=ppt/notesMasters/notesMaster1.xml><?xml version="1.0" encoding="utf-8"?>
-<p:notesMaster xmlns:a="http://schemas.openxmlformats.org/drawingml/2006/main" xmlns:p="http://schemas.openxmlformats.org/presentationml/2006/main" xmlns:r="http://schemas.openxmlformats.org/officeDocument/2006/relationships">
+<p:notesMaster xmlns:a="http://schemas.openxmlformats.org/drawingml/2006/main" xmlns:r="http://schemas.openxmlformats.org/officeDocument/2006/relationships" xmlns:p="http://schemas.openxmlformats.org/presentationml/2006/main">
   <p:cSld>
     <p:bg>
       <p:bgRef idx="1001">
@@ -146,241 +165,16 @@
           <a:chExt cx="0" cy="0"/>
         </a:xfrm>
       </p:grpSpPr>
-      <p:sp>
-        <p:nvSpPr>
-          <p:cNvPr id="2" name="Header Placeholder 1"/>
-          <p:cNvSpPr>
-            <a:spLocks noGrp="1"/>
-          </p:cNvSpPr>
-          <p:nvPr>
-            <p:ph type="hdr" sz="quarter"/>
-          </p:nvPr>
-        </p:nvSpPr>
-        <p:spPr>
-          <a:xfrm>
-            <a:off x="0" y="0"/>
-            <a:ext cx="2971800" cy="457200"/>
-          </a:xfrm>
-          <a:prstGeom prst="rect">
-            <a:avLst/>
-          </a:prstGeom>
-        </p:spPr>
-        <p:txBody>
-          <a:bodyPr vert="horz" lIns="91440" tIns="45720" rIns="91440" bIns="45720" rtlCol="0"/>
-          <a:lstStyle>
-            <a:lvl1pPr algn="l">
-              <a:defRPr sz="1200"/>
-            </a:lvl1pPr>
-          </a:lstStyle>
-          <a:p>
-            <a:endParaRPr lang="en-US"/>
-          </a:p>
-        </p:txBody>
-      </p:sp>
-      <p:sp>
-        <p:nvSpPr>
-          <p:cNvPr id="3" name="Date Placeholder 2"/>
-          <p:cNvSpPr>
-            <a:spLocks noGrp="1"/>
-          </p:cNvSpPr>
-          <p:nvPr>
-            <p:ph type="dt" idx="1"/>
-          </p:nvPr>
-        </p:nvSpPr>
-        <p:spPr>
-          <a:xfrm>
-            <a:off x="3884613" y="0"/>
-            <a:ext cx="2971800" cy="457200"/>
-          </a:xfrm>
-          <a:prstGeom prst="rect">
-            <a:avLst/>
-          </a:prstGeom>
-        </p:spPr>
-        <p:txBody>
-          <a:bodyPr vert="horz" lIns="91440" tIns="45720" rIns="91440" bIns="45720" rtlCol="0"/>
-          <a:lstStyle>
-            <a:lvl1pPr algn="r">
-              <a:defRPr sz="1200"/>
-            </a:lvl1pPr>
-          </a:lstStyle>
-          <a:p>
-            <a:fld id="{0F89C1C7-3DCD-1040-A9CF-14679D8B5DDD}" type="datetimeFigureOut">
-              <a:rPr lang="en-US" smtClean="0"/>
-              <a:t>10/17/16</a:t>
-            </a:fld>
-            <a:endParaRPr lang="en-US"/>
-          </a:p>
-        </p:txBody>
-      </p:sp>
-      <p:sp>
-        <p:nvSpPr>
-          <p:cNvPr id="4" name="Slide Image Placeholder 3"/>
-          <p:cNvSpPr>
-            <a:spLocks noGrp="1" noRot="1" noChangeAspect="1"/>
-          </p:cNvSpPr>
-          <p:nvPr>
-            <p:ph type="sldImg" idx="2"/>
-          </p:nvPr>
-        </p:nvSpPr>
-        <p:spPr>
-          <a:xfrm>
-            <a:off x="1143000" y="685800"/>
-            <a:ext cx="4572000" cy="3429000"/>
-          </a:xfrm>
-          <a:prstGeom prst="rect">
-            <a:avLst/>
-          </a:prstGeom>
-          <a:noFill/>
-          <a:ln w="12700">
-            <a:solidFill>
-              <a:prstClr val="black"/>
-            </a:solidFill>
-          </a:ln>
-        </p:spPr>
-        <p:txBody>
-          <a:bodyPr vert="horz" lIns="91440" tIns="45720" rIns="91440" bIns="45720" rtlCol="0" anchor="ctr"/>
-          <a:lstStyle/>
-          <a:p>
-            <a:endParaRPr lang="en-US"/>
-          </a:p>
-        </p:txBody>
-      </p:sp>
-      <p:sp>
-        <p:nvSpPr>
-          <p:cNvPr id="5" name="Notes Placeholder 4"/>
-          <p:cNvSpPr>
-            <a:spLocks noGrp="1"/>
-          </p:cNvSpPr>
-          <p:nvPr>
-            <p:ph type="body" sz="quarter" idx="3"/>
-          </p:nvPr>
-        </p:nvSpPr>
-        <p:spPr>
-          <a:xfrm>
-            <a:off x="685800" y="4343400"/>
-            <a:ext cx="5486400" cy="4114800"/>
-          </a:xfrm>
-          <a:prstGeom prst="rect">
-            <a:avLst/>
-          </a:prstGeom>
-        </p:spPr>
-        <p:txBody>
-          <a:bodyPr vert="horz" lIns="91440" tIns="45720" rIns="91440" bIns="45720" rtlCol="0"/>
-          <a:lstStyle/>
-          <a:p>
-            <a:pPr lvl="0"/>
-            <a:r>
-              <a:rPr lang="en-US" smtClean="0"/>
-              <a:t>Click to edit Master text styles</a:t>
-            </a:r>
-          </a:p>
-          <a:p>
-            <a:pPr lvl="1"/>
-            <a:r>
-              <a:rPr lang="en-US" smtClean="0"/>
-              <a:t>Second level</a:t>
-            </a:r>
-          </a:p>
-          <a:p>
-            <a:pPr lvl="2"/>
-            <a:r>
-              <a:rPr lang="en-US" smtClean="0"/>
-              <a:t>Third level</a:t>
-            </a:r>
-          </a:p>
-          <a:p>
-            <a:pPr lvl="3"/>
-            <a:r>
-              <a:rPr lang="en-US" smtClean="0"/>
-              <a:t>Fourth level</a:t>
-            </a:r>
-          </a:p>
-          <a:p>
-            <a:pPr lvl="4"/>
-            <a:r>
-              <a:rPr lang="en-US" smtClean="0"/>
-              <a:t>Fifth level</a:t>
-            </a:r>
-            <a:endParaRPr lang="en-US"/>
-          </a:p>
-        </p:txBody>
-      </p:sp>
-      <p:sp>
-        <p:nvSpPr>
-          <p:cNvPr id="6" name="Footer Placeholder 5"/>
-          <p:cNvSpPr>
-            <a:spLocks noGrp="1"/>
-          </p:cNvSpPr>
-          <p:nvPr>
-            <p:ph type="ftr" sz="quarter" idx="4"/>
-          </p:nvPr>
-        </p:nvSpPr>
-        <p:spPr>
-          <a:xfrm>
-            <a:off x="0" y="8685213"/>
-            <a:ext cx="2971800" cy="457200"/>
-          </a:xfrm>
-          <a:prstGeom prst="rect">
-            <a:avLst/>
-          </a:prstGeom>
-        </p:spPr>
-        <p:txBody>
-          <a:bodyPr vert="horz" lIns="91440" tIns="45720" rIns="91440" bIns="45720" rtlCol="0" anchor="b"/>
-          <a:lstStyle>
-            <a:lvl1pPr algn="l">
-              <a:defRPr sz="1200"/>
-            </a:lvl1pPr>
-          </a:lstStyle>
-          <a:p>
-            <a:endParaRPr lang="en-US"/>
-          </a:p>
-        </p:txBody>
-      </p:sp>
-      <p:sp>
-        <p:nvSpPr>
-          <p:cNvPr id="7" name="Slide Number Placeholder 6"/>
-          <p:cNvSpPr>
-            <a:spLocks noGrp="1"/>
-          </p:cNvSpPr>
-          <p:nvPr>
-            <p:ph type="sldNum" sz="quarter" idx="5"/>
-          </p:nvPr>
-        </p:nvSpPr>
-        <p:spPr>
-          <a:xfrm>
-            <a:off x="3884613" y="8685213"/>
-            <a:ext cx="2971800" cy="457200"/>
-          </a:xfrm>
-          <a:prstGeom prst="rect">
-            <a:avLst/>
-          </a:prstGeom>
-        </p:spPr>
-        <p:txBody>
-          <a:bodyPr vert="horz" lIns="91440" tIns="45720" rIns="91440" bIns="45720" rtlCol="0" anchor="b"/>
-          <a:lstStyle>
-            <a:lvl1pPr algn="r">
-              <a:defRPr sz="1200"/>
-            </a:lvl1pPr>
-          </a:lstStyle>
-          <a:p>
-            <a:fld id="{BB5E49A5-4136-284D-997B-48E1D791AD67}" type="slidenum">
-              <a:rPr lang="en-US" smtClean="0"/>
-              <a:t>‹#›</a:t>
-            </a:fld>
-            <a:endParaRPr lang="en-US"/>
-          </a:p>
-        </p:txBody>
-      </p:sp>
     </p:spTree>
     <p:extLst>
       <p:ext uri="{BB962C8B-B14F-4D97-AF65-F5344CB8AC3E}">
-        <p14:creationId xmlns:p14="http://schemas.microsoft.com/office/powerpoint/2010/main" val="2623252185"/>
+        <p14:creationId xmlns:p14="http://schemas.microsoft.com/office/powerpoint/2010/main" val="2161705441"/>
       </p:ext>
     </p:extLst>
   </p:cSld>
   <p:clrMap bg1="lt1" tx1="dk1" bg2="lt2" tx2="dk2" accent1="accent1" accent2="accent2" accent3="accent3" accent4="accent4" accent5="accent5" accent6="accent6" hlink="hlink" folHlink="folHlink"/>
   <p:notesStyle>
-    <a:lvl1pPr marL="0" algn="l" defTabSz="457200" rtl="0" eaLnBrk="1" latinLnBrk="0" hangingPunct="1">
+    <a:lvl1pPr marL="0" algn="l" defTabSz="914400" rtl="0" eaLnBrk="1" latinLnBrk="0" hangingPunct="1">
       <a:defRPr sz="1200" kern="1200">
         <a:solidFill>
           <a:schemeClr val="tx1"/>
@@ -390,7 +184,7 @@
         <a:cs typeface="+mn-cs"/>
       </a:defRPr>
     </a:lvl1pPr>
-    <a:lvl2pPr marL="457200" algn="l" defTabSz="457200" rtl="0" eaLnBrk="1" latinLnBrk="0" hangingPunct="1">
+    <a:lvl2pPr marL="457200" algn="l" defTabSz="914400" rtl="0" eaLnBrk="1" latinLnBrk="0" hangingPunct="1">
       <a:defRPr sz="1200" kern="1200">
         <a:solidFill>
           <a:schemeClr val="tx1"/>
@@ -400,7 +194,7 @@
         <a:cs typeface="+mn-cs"/>
       </a:defRPr>
     </a:lvl2pPr>
-    <a:lvl3pPr marL="914400" algn="l" defTabSz="457200" rtl="0" eaLnBrk="1" latinLnBrk="0" hangingPunct="1">
+    <a:lvl3pPr marL="914400" algn="l" defTabSz="914400" rtl="0" eaLnBrk="1" latinLnBrk="0" hangingPunct="1">
       <a:defRPr sz="1200" kern="1200">
         <a:solidFill>
           <a:schemeClr val="tx1"/>
@@ -410,7 +204,7 @@
         <a:cs typeface="+mn-cs"/>
       </a:defRPr>
     </a:lvl3pPr>
-    <a:lvl4pPr marL="1371600" algn="l" defTabSz="457200" rtl="0" eaLnBrk="1" latinLnBrk="0" hangingPunct="1">
+    <a:lvl4pPr marL="1371600" algn="l" defTabSz="914400" rtl="0" eaLnBrk="1" latinLnBrk="0" hangingPunct="1">
       <a:defRPr sz="1200" kern="1200">
         <a:solidFill>
           <a:schemeClr val="tx1"/>
@@ -420,7 +214,7 @@
         <a:cs typeface="+mn-cs"/>
       </a:defRPr>
     </a:lvl4pPr>
-    <a:lvl5pPr marL="1828800" algn="l" defTabSz="457200" rtl="0" eaLnBrk="1" latinLnBrk="0" hangingPunct="1">
+    <a:lvl5pPr marL="1828800" algn="l" defTabSz="914400" rtl="0" eaLnBrk="1" latinLnBrk="0" hangingPunct="1">
       <a:defRPr sz="1200" kern="1200">
         <a:solidFill>
           <a:schemeClr val="tx1"/>
@@ -430,7 +224,7 @@
         <a:cs typeface="+mn-cs"/>
       </a:defRPr>
     </a:lvl5pPr>
-    <a:lvl6pPr marL="2286000" algn="l" defTabSz="457200" rtl="0" eaLnBrk="1" latinLnBrk="0" hangingPunct="1">
+    <a:lvl6pPr marL="2286000" algn="l" defTabSz="914400" rtl="0" eaLnBrk="1" latinLnBrk="0" hangingPunct="1">
       <a:defRPr sz="1200" kern="1200">
         <a:solidFill>
           <a:schemeClr val="tx1"/>
@@ -440,7 +234,7 @@
         <a:cs typeface="+mn-cs"/>
       </a:defRPr>
     </a:lvl6pPr>
-    <a:lvl7pPr marL="2743200" algn="l" defTabSz="457200" rtl="0" eaLnBrk="1" latinLnBrk="0" hangingPunct="1">
+    <a:lvl7pPr marL="2743200" algn="l" defTabSz="914400" rtl="0" eaLnBrk="1" latinLnBrk="0" hangingPunct="1">
       <a:defRPr sz="1200" kern="1200">
         <a:solidFill>
           <a:schemeClr val="tx1"/>
@@ -450,7 +244,7 @@
         <a:cs typeface="+mn-cs"/>
       </a:defRPr>
     </a:lvl7pPr>
-    <a:lvl8pPr marL="3200400" algn="l" defTabSz="457200" rtl="0" eaLnBrk="1" latinLnBrk="0" hangingPunct="1">
+    <a:lvl8pPr marL="3200400" algn="l" defTabSz="914400" rtl="0" eaLnBrk="1" latinLnBrk="0" hangingPunct="1">
       <a:defRPr sz="1200" kern="1200">
         <a:solidFill>
           <a:schemeClr val="tx1"/>
@@ -460,7 +254,7 @@
         <a:cs typeface="+mn-cs"/>
       </a:defRPr>
     </a:lvl8pPr>
-    <a:lvl9pPr marL="3657600" algn="l" defTabSz="457200" rtl="0" eaLnBrk="1" latinLnBrk="0" hangingPunct="1">
+    <a:lvl9pPr marL="3657600" algn="l" defTabSz="914400" rtl="0" eaLnBrk="1" latinLnBrk="0" hangingPunct="1">
       <a:defRPr sz="1200" kern="1200">
         <a:solidFill>
           <a:schemeClr val="tx1"/>
@@ -475,7 +269,7 @@
 </file>
 
 <file path=ppt/notesSlides/notesSlide1.xml><?xml version="1.0" encoding="utf-8"?>
-<p:notes xmlns:a="http://schemas.openxmlformats.org/drawingml/2006/main" xmlns:p="http://schemas.openxmlformats.org/presentationml/2006/main" xmlns:r="http://schemas.openxmlformats.org/officeDocument/2006/relationships">
+<p:notes xmlns:a="http://schemas.openxmlformats.org/drawingml/2006/main" xmlns:r="http://schemas.openxmlformats.org/officeDocument/2006/relationships" xmlns:p="http://schemas.openxmlformats.org/presentationml/2006/main">
   <p:cSld>
     <p:spTree>
       <p:nvGrpSpPr>
@@ -495,7 +289,7 @@
         <p:nvSpPr>
           <p:cNvPr id="2" name="Slide Image Placeholder 1"/>
           <p:cNvSpPr>
-            <a:spLocks noGrp="1"/>
+            <a:spLocks noGrp="1" noRot="1" noChangeAspect="1"/>
           </p:cNvSpPr>
           <p:nvPr>
             <p:ph type="sldImg" idx="2"/>
@@ -510,7 +304,7 @@
             <a:spLocks noGrp="1"/>
           </p:cNvSpPr>
           <p:nvPr>
-            <p:ph type="body" idx="3" sz="quarter"/>
+            <p:ph type="body" sz="quarter" idx="3"/>
           </p:nvPr>
         </p:nvSpPr>
         <p:spPr/>
@@ -531,7 +325,7 @@
             <a:spLocks noGrp="1"/>
           </p:cNvSpPr>
           <p:nvPr>
-            <p:ph type="sldNum" idx="5" sz="quarter"/>
+            <p:ph type="sldNum" sz="quarter" idx="5"/>
           </p:nvPr>
         </p:nvSpPr>
         <p:spPr/>
@@ -545,7 +339,7 @@
 </file>
 
 <file path=ppt/notesSlides/notesSlide10.xml><?xml version="1.0" encoding="utf-8"?>
-<p:notes xmlns:a="http://schemas.openxmlformats.org/drawingml/2006/main" xmlns:p="http://schemas.openxmlformats.org/presentationml/2006/main" xmlns:r="http://schemas.openxmlformats.org/officeDocument/2006/relationships">
+<p:notes xmlns:a="http://schemas.openxmlformats.org/drawingml/2006/main" xmlns:r="http://schemas.openxmlformats.org/officeDocument/2006/relationships" xmlns:p="http://schemas.openxmlformats.org/presentationml/2006/main">
   <p:cSld>
     <p:spTree>
       <p:nvGrpSpPr>
@@ -565,7 +359,7 @@
         <p:nvSpPr>
           <p:cNvPr id="2" name="Slide Image Placeholder 1"/>
           <p:cNvSpPr>
-            <a:spLocks noGrp="1"/>
+            <a:spLocks noGrp="1" noRot="1" noChangeAspect="1"/>
           </p:cNvSpPr>
           <p:nvPr>
             <p:ph type="sldImg" idx="2"/>
@@ -580,7 +374,7 @@
             <a:spLocks noGrp="1"/>
           </p:cNvSpPr>
           <p:nvPr>
-            <p:ph type="body" idx="3" sz="quarter"/>
+            <p:ph type="body" sz="quarter" idx="3"/>
           </p:nvPr>
         </p:nvSpPr>
         <p:spPr/>
@@ -601,7 +395,7 @@
             <a:spLocks noGrp="1"/>
           </p:cNvSpPr>
           <p:nvPr>
-            <p:ph type="sldNum" idx="5" sz="quarter"/>
+            <p:ph type="sldNum" sz="quarter" idx="5"/>
           </p:nvPr>
         </p:nvSpPr>
         <p:spPr/>
@@ -615,7 +409,7 @@
 </file>
 
 <file path=ppt/notesSlides/notesSlide11.xml><?xml version="1.0" encoding="utf-8"?>
-<p:notes xmlns:a="http://schemas.openxmlformats.org/drawingml/2006/main" xmlns:p="http://schemas.openxmlformats.org/presentationml/2006/main" xmlns:r="http://schemas.openxmlformats.org/officeDocument/2006/relationships">
+<p:notes xmlns:a="http://schemas.openxmlformats.org/drawingml/2006/main" xmlns:r="http://schemas.openxmlformats.org/officeDocument/2006/relationships" xmlns:p="http://schemas.openxmlformats.org/presentationml/2006/main">
   <p:cSld>
     <p:spTree>
       <p:nvGrpSpPr>
@@ -635,7 +429,7 @@
         <p:nvSpPr>
           <p:cNvPr id="2" name="Slide Image Placeholder 1"/>
           <p:cNvSpPr>
-            <a:spLocks noGrp="1"/>
+            <a:spLocks noGrp="1" noRot="1" noChangeAspect="1"/>
           </p:cNvSpPr>
           <p:nvPr>
             <p:ph type="sldImg" idx="2"/>
@@ -650,7 +444,7 @@
             <a:spLocks noGrp="1"/>
           </p:cNvSpPr>
           <p:nvPr>
-            <p:ph type="body" idx="3" sz="quarter"/>
+            <p:ph type="body" sz="quarter" idx="3"/>
           </p:nvPr>
         </p:nvSpPr>
         <p:spPr/>
@@ -671,7 +465,7 @@
             <a:spLocks noGrp="1"/>
           </p:cNvSpPr>
           <p:nvPr>
-            <p:ph type="sldNum" idx="5" sz="quarter"/>
+            <p:ph type="sldNum" sz="quarter" idx="5"/>
           </p:nvPr>
         </p:nvSpPr>
         <p:spPr/>
@@ -685,7 +479,7 @@
 </file>
 
 <file path=ppt/notesSlides/notesSlide12.xml><?xml version="1.0" encoding="utf-8"?>
-<p:notes xmlns:a="http://schemas.openxmlformats.org/drawingml/2006/main" xmlns:p="http://schemas.openxmlformats.org/presentationml/2006/main" xmlns:r="http://schemas.openxmlformats.org/officeDocument/2006/relationships">
+<p:notes xmlns:a="http://schemas.openxmlformats.org/drawingml/2006/main" xmlns:r="http://schemas.openxmlformats.org/officeDocument/2006/relationships" xmlns:p="http://schemas.openxmlformats.org/presentationml/2006/main">
   <p:cSld>
     <p:spTree>
       <p:nvGrpSpPr>
@@ -705,7 +499,7 @@
         <p:nvSpPr>
           <p:cNvPr id="2" name="Slide Image Placeholder 1"/>
           <p:cNvSpPr>
-            <a:spLocks noGrp="1"/>
+            <a:spLocks noGrp="1" noRot="1" noChangeAspect="1"/>
           </p:cNvSpPr>
           <p:nvPr>
             <p:ph type="sldImg" idx="2"/>
@@ -720,7 +514,7 @@
             <a:spLocks noGrp="1"/>
           </p:cNvSpPr>
           <p:nvPr>
-            <p:ph type="body" idx="3" sz="quarter"/>
+            <p:ph type="body" sz="quarter" idx="3"/>
           </p:nvPr>
         </p:nvSpPr>
         <p:spPr/>
@@ -741,7 +535,7 @@
             <a:spLocks noGrp="1"/>
           </p:cNvSpPr>
           <p:nvPr>
-            <p:ph type="sldNum" idx="5" sz="quarter"/>
+            <p:ph type="sldNum" sz="quarter" idx="5"/>
           </p:nvPr>
         </p:nvSpPr>
         <p:spPr/>
@@ -755,7 +549,7 @@
 </file>
 
 <file path=ppt/notesSlides/notesSlide13.xml><?xml version="1.0" encoding="utf-8"?>
-<p:notes xmlns:a="http://schemas.openxmlformats.org/drawingml/2006/main" xmlns:p="http://schemas.openxmlformats.org/presentationml/2006/main" xmlns:r="http://schemas.openxmlformats.org/officeDocument/2006/relationships">
+<p:notes xmlns:a="http://schemas.openxmlformats.org/drawingml/2006/main" xmlns:r="http://schemas.openxmlformats.org/officeDocument/2006/relationships" xmlns:p="http://schemas.openxmlformats.org/presentationml/2006/main">
   <p:cSld>
     <p:spTree>
       <p:nvGrpSpPr>
@@ -775,7 +569,7 @@
         <p:nvSpPr>
           <p:cNvPr id="2" name="Slide Image Placeholder 1"/>
           <p:cNvSpPr>
-            <a:spLocks noGrp="1"/>
+            <a:spLocks noGrp="1" noRot="1" noChangeAspect="1"/>
           </p:cNvSpPr>
           <p:nvPr>
             <p:ph type="sldImg" idx="2"/>
@@ -790,7 +584,7 @@
             <a:spLocks noGrp="1"/>
           </p:cNvSpPr>
           <p:nvPr>
-            <p:ph type="body" idx="3" sz="quarter"/>
+            <p:ph type="body" sz="quarter" idx="3"/>
           </p:nvPr>
         </p:nvSpPr>
         <p:spPr/>
@@ -811,7 +605,7 @@
             <a:spLocks noGrp="1"/>
           </p:cNvSpPr>
           <p:nvPr>
-            <p:ph type="sldNum" idx="5" sz="quarter"/>
+            <p:ph type="sldNum" sz="quarter" idx="5"/>
           </p:nvPr>
         </p:nvSpPr>
         <p:spPr/>
@@ -825,7 +619,7 @@
 </file>
 
 <file path=ppt/notesSlides/notesSlide14.xml><?xml version="1.0" encoding="utf-8"?>
-<p:notes xmlns:a="http://schemas.openxmlformats.org/drawingml/2006/main" xmlns:p="http://schemas.openxmlformats.org/presentationml/2006/main" xmlns:r="http://schemas.openxmlformats.org/officeDocument/2006/relationships">
+<p:notes xmlns:a="http://schemas.openxmlformats.org/drawingml/2006/main" xmlns:r="http://schemas.openxmlformats.org/officeDocument/2006/relationships" xmlns:p="http://schemas.openxmlformats.org/presentationml/2006/main">
   <p:cSld>
     <p:spTree>
       <p:nvGrpSpPr>
@@ -845,7 +639,7 @@
         <p:nvSpPr>
           <p:cNvPr id="2" name="Slide Image Placeholder 1"/>
           <p:cNvSpPr>
-            <a:spLocks noGrp="1"/>
+            <a:spLocks noGrp="1" noRot="1" noChangeAspect="1"/>
           </p:cNvSpPr>
           <p:nvPr>
             <p:ph type="sldImg" idx="2"/>
@@ -860,7 +654,7 @@
             <a:spLocks noGrp="1"/>
           </p:cNvSpPr>
           <p:nvPr>
-            <p:ph type="body" idx="3" sz="quarter"/>
+            <p:ph type="body" sz="quarter" idx="3"/>
           </p:nvPr>
         </p:nvSpPr>
         <p:spPr/>
@@ -881,7 +675,7 @@
             <a:spLocks noGrp="1"/>
           </p:cNvSpPr>
           <p:nvPr>
-            <p:ph type="sldNum" idx="5" sz="quarter"/>
+            <p:ph type="sldNum" sz="quarter" idx="5"/>
           </p:nvPr>
         </p:nvSpPr>
         <p:spPr/>
@@ -895,7 +689,7 @@
 </file>
 
 <file path=ppt/notesSlides/notesSlide15.xml><?xml version="1.0" encoding="utf-8"?>
-<p:notes xmlns:a="http://schemas.openxmlformats.org/drawingml/2006/main" xmlns:p="http://schemas.openxmlformats.org/presentationml/2006/main" xmlns:r="http://schemas.openxmlformats.org/officeDocument/2006/relationships">
+<p:notes xmlns:a="http://schemas.openxmlformats.org/drawingml/2006/main" xmlns:r="http://schemas.openxmlformats.org/officeDocument/2006/relationships" xmlns:p="http://schemas.openxmlformats.org/presentationml/2006/main">
   <p:cSld>
     <p:spTree>
       <p:nvGrpSpPr>
@@ -915,7 +709,7 @@
         <p:nvSpPr>
           <p:cNvPr id="2" name="Slide Image Placeholder 1"/>
           <p:cNvSpPr>
-            <a:spLocks noGrp="1"/>
+            <a:spLocks noGrp="1" noRot="1" noChangeAspect="1"/>
           </p:cNvSpPr>
           <p:nvPr>
             <p:ph type="sldImg" idx="2"/>
@@ -930,7 +724,7 @@
             <a:spLocks noGrp="1"/>
           </p:cNvSpPr>
           <p:nvPr>
-            <p:ph type="body" idx="3" sz="quarter"/>
+            <p:ph type="body" sz="quarter" idx="3"/>
           </p:nvPr>
         </p:nvSpPr>
         <p:spPr/>
@@ -951,7 +745,7 @@
             <a:spLocks noGrp="1"/>
           </p:cNvSpPr>
           <p:nvPr>
-            <p:ph type="sldNum" idx="5" sz="quarter"/>
+            <p:ph type="sldNum" sz="quarter" idx="5"/>
           </p:nvPr>
         </p:nvSpPr>
         <p:spPr/>
@@ -965,7 +759,7 @@
 </file>
 
 <file path=ppt/notesSlides/notesSlide16.xml><?xml version="1.0" encoding="utf-8"?>
-<p:notes xmlns:a="http://schemas.openxmlformats.org/drawingml/2006/main" xmlns:p="http://schemas.openxmlformats.org/presentationml/2006/main" xmlns:r="http://schemas.openxmlformats.org/officeDocument/2006/relationships">
+<p:notes xmlns:a="http://schemas.openxmlformats.org/drawingml/2006/main" xmlns:r="http://schemas.openxmlformats.org/officeDocument/2006/relationships" xmlns:p="http://schemas.openxmlformats.org/presentationml/2006/main">
   <p:cSld>
     <p:spTree>
       <p:nvGrpSpPr>
@@ -985,7 +779,7 @@
         <p:nvSpPr>
           <p:cNvPr id="2" name="Slide Image Placeholder 1"/>
           <p:cNvSpPr>
-            <a:spLocks noGrp="1"/>
+            <a:spLocks noGrp="1" noRot="1" noChangeAspect="1"/>
           </p:cNvSpPr>
           <p:nvPr>
             <p:ph type="sldImg" idx="2"/>
@@ -1000,7 +794,7 @@
             <a:spLocks noGrp="1"/>
           </p:cNvSpPr>
           <p:nvPr>
-            <p:ph type="body" idx="3" sz="quarter"/>
+            <p:ph type="body" sz="quarter" idx="3"/>
           </p:nvPr>
         </p:nvSpPr>
         <p:spPr/>
@@ -1021,7 +815,7 @@
             <a:spLocks noGrp="1"/>
           </p:cNvSpPr>
           <p:nvPr>
-            <p:ph type="sldNum" idx="5" sz="quarter"/>
+            <p:ph type="sldNum" sz="quarter" idx="5"/>
           </p:nvPr>
         </p:nvSpPr>
         <p:spPr/>
@@ -1035,7 +829,7 @@
 </file>
 
 <file path=ppt/notesSlides/notesSlide17.xml><?xml version="1.0" encoding="utf-8"?>
-<p:notes xmlns:a="http://schemas.openxmlformats.org/drawingml/2006/main" xmlns:p="http://schemas.openxmlformats.org/presentationml/2006/main" xmlns:r="http://schemas.openxmlformats.org/officeDocument/2006/relationships">
+<p:notes xmlns:a="http://schemas.openxmlformats.org/drawingml/2006/main" xmlns:r="http://schemas.openxmlformats.org/officeDocument/2006/relationships" xmlns:p="http://schemas.openxmlformats.org/presentationml/2006/main">
   <p:cSld>
     <p:spTree>
       <p:nvGrpSpPr>
@@ -1055,7 +849,7 @@
         <p:nvSpPr>
           <p:cNvPr id="2" name="Slide Image Placeholder 1"/>
           <p:cNvSpPr>
-            <a:spLocks noGrp="1"/>
+            <a:spLocks noGrp="1" noRot="1" noChangeAspect="1"/>
           </p:cNvSpPr>
           <p:nvPr>
             <p:ph type="sldImg" idx="2"/>
@@ -1070,7 +864,7 @@
             <a:spLocks noGrp="1"/>
           </p:cNvSpPr>
           <p:nvPr>
-            <p:ph type="body" idx="3" sz="quarter"/>
+            <p:ph type="body" sz="quarter" idx="3"/>
           </p:nvPr>
         </p:nvSpPr>
         <p:spPr/>
@@ -1091,7 +885,7 @@
             <a:spLocks noGrp="1"/>
           </p:cNvSpPr>
           <p:nvPr>
-            <p:ph type="sldNum" idx="5" sz="quarter"/>
+            <p:ph type="sldNum" sz="quarter" idx="5"/>
           </p:nvPr>
         </p:nvSpPr>
         <p:spPr/>
@@ -1105,7 +899,7 @@
 </file>
 
 <file path=ppt/notesSlides/notesSlide18.xml><?xml version="1.0" encoding="utf-8"?>
-<p:notes xmlns:a="http://schemas.openxmlformats.org/drawingml/2006/main" xmlns:p="http://schemas.openxmlformats.org/presentationml/2006/main" xmlns:r="http://schemas.openxmlformats.org/officeDocument/2006/relationships">
+<p:notes xmlns:a="http://schemas.openxmlformats.org/drawingml/2006/main" xmlns:r="http://schemas.openxmlformats.org/officeDocument/2006/relationships" xmlns:p="http://schemas.openxmlformats.org/presentationml/2006/main">
   <p:cSld>
     <p:spTree>
       <p:nvGrpSpPr>
@@ -1125,7 +919,7 @@
         <p:nvSpPr>
           <p:cNvPr id="2" name="Slide Image Placeholder 1"/>
           <p:cNvSpPr>
-            <a:spLocks noGrp="1"/>
+            <a:spLocks noGrp="1" noRot="1" noChangeAspect="1"/>
           </p:cNvSpPr>
           <p:nvPr>
             <p:ph type="sldImg" idx="2"/>
@@ -1140,7 +934,7 @@
             <a:spLocks noGrp="1"/>
           </p:cNvSpPr>
           <p:nvPr>
-            <p:ph type="body" idx="3" sz="quarter"/>
+            <p:ph type="body" sz="quarter" idx="3"/>
           </p:nvPr>
         </p:nvSpPr>
         <p:spPr/>
@@ -1161,7 +955,7 @@
             <a:spLocks noGrp="1"/>
           </p:cNvSpPr>
           <p:nvPr>
-            <p:ph type="sldNum" idx="5" sz="quarter"/>
+            <p:ph type="sldNum" sz="quarter" idx="5"/>
           </p:nvPr>
         </p:nvSpPr>
         <p:spPr/>
@@ -1175,7 +969,7 @@
 </file>
 
 <file path=ppt/notesSlides/notesSlide2.xml><?xml version="1.0" encoding="utf-8"?>
-<p:notes xmlns:a="http://schemas.openxmlformats.org/drawingml/2006/main" xmlns:p="http://schemas.openxmlformats.org/presentationml/2006/main" xmlns:r="http://schemas.openxmlformats.org/officeDocument/2006/relationships">
+<p:notes xmlns:a="http://schemas.openxmlformats.org/drawingml/2006/main" xmlns:r="http://schemas.openxmlformats.org/officeDocument/2006/relationships" xmlns:p="http://schemas.openxmlformats.org/presentationml/2006/main">
   <p:cSld>
     <p:spTree>
       <p:nvGrpSpPr>
@@ -1195,7 +989,7 @@
         <p:nvSpPr>
           <p:cNvPr id="2" name="Slide Image Placeholder 1"/>
           <p:cNvSpPr>
-            <a:spLocks noGrp="1"/>
+            <a:spLocks noGrp="1" noRot="1" noChangeAspect="1"/>
           </p:cNvSpPr>
           <p:nvPr>
             <p:ph type="sldImg" idx="2"/>
@@ -1210,7 +1004,7 @@
             <a:spLocks noGrp="1"/>
           </p:cNvSpPr>
           <p:nvPr>
-            <p:ph type="body" idx="3" sz="quarter"/>
+            <p:ph type="body" sz="quarter" idx="3"/>
           </p:nvPr>
         </p:nvSpPr>
         <p:spPr/>
@@ -1231,7 +1025,7 @@
             <a:spLocks noGrp="1"/>
           </p:cNvSpPr>
           <p:nvPr>
-            <p:ph type="sldNum" idx="5" sz="quarter"/>
+            <p:ph type="sldNum" sz="quarter" idx="5"/>
           </p:nvPr>
         </p:nvSpPr>
         <p:spPr/>
@@ -1245,7 +1039,7 @@
 </file>
 
 <file path=ppt/notesSlides/notesSlide3.xml><?xml version="1.0" encoding="utf-8"?>
-<p:notes xmlns:a="http://schemas.openxmlformats.org/drawingml/2006/main" xmlns:p="http://schemas.openxmlformats.org/presentationml/2006/main" xmlns:r="http://schemas.openxmlformats.org/officeDocument/2006/relationships">
+<p:notes xmlns:a="http://schemas.openxmlformats.org/drawingml/2006/main" xmlns:r="http://schemas.openxmlformats.org/officeDocument/2006/relationships" xmlns:p="http://schemas.openxmlformats.org/presentationml/2006/main">
   <p:cSld>
     <p:spTree>
       <p:nvGrpSpPr>
@@ -1265,7 +1059,7 @@
         <p:nvSpPr>
           <p:cNvPr id="2" name="Slide Image Placeholder 1"/>
           <p:cNvSpPr>
-            <a:spLocks noGrp="1"/>
+            <a:spLocks noGrp="1" noRot="1" noChangeAspect="1"/>
           </p:cNvSpPr>
           <p:nvPr>
             <p:ph type="sldImg" idx="2"/>
@@ -1280,7 +1074,7 @@
             <a:spLocks noGrp="1"/>
           </p:cNvSpPr>
           <p:nvPr>
-            <p:ph type="body" idx="3" sz="quarter"/>
+            <p:ph type="body" sz="quarter" idx="3"/>
           </p:nvPr>
         </p:nvSpPr>
         <p:spPr/>
@@ -1301,7 +1095,7 @@
             <a:spLocks noGrp="1"/>
           </p:cNvSpPr>
           <p:nvPr>
-            <p:ph type="sldNum" idx="5" sz="quarter"/>
+            <p:ph type="sldNum" sz="quarter" idx="5"/>
           </p:nvPr>
         </p:nvSpPr>
         <p:spPr/>
@@ -1315,7 +1109,7 @@
 </file>
 
 <file path=ppt/notesSlides/notesSlide4.xml><?xml version="1.0" encoding="utf-8"?>
-<p:notes xmlns:a="http://schemas.openxmlformats.org/drawingml/2006/main" xmlns:p="http://schemas.openxmlformats.org/presentationml/2006/main" xmlns:r="http://schemas.openxmlformats.org/officeDocument/2006/relationships">
+<p:notes xmlns:a="http://schemas.openxmlformats.org/drawingml/2006/main" xmlns:r="http://schemas.openxmlformats.org/officeDocument/2006/relationships" xmlns:p="http://schemas.openxmlformats.org/presentationml/2006/main">
   <p:cSld>
     <p:spTree>
       <p:nvGrpSpPr>
@@ -1335,7 +1129,7 @@
         <p:nvSpPr>
           <p:cNvPr id="2" name="Slide Image Placeholder 1"/>
           <p:cNvSpPr>
-            <a:spLocks noGrp="1"/>
+            <a:spLocks noGrp="1" noRot="1" noChangeAspect="1"/>
           </p:cNvSpPr>
           <p:nvPr>
             <p:ph type="sldImg" idx="2"/>
@@ -1350,7 +1144,7 @@
             <a:spLocks noGrp="1"/>
           </p:cNvSpPr>
           <p:nvPr>
-            <p:ph type="body" idx="3" sz="quarter"/>
+            <p:ph type="body" sz="quarter" idx="3"/>
           </p:nvPr>
         </p:nvSpPr>
         <p:spPr/>
@@ -1371,7 +1165,7 @@
             <a:spLocks noGrp="1"/>
           </p:cNvSpPr>
           <p:nvPr>
-            <p:ph type="sldNum" idx="5" sz="quarter"/>
+            <p:ph type="sldNum" sz="quarter" idx="5"/>
           </p:nvPr>
         </p:nvSpPr>
         <p:spPr/>
@@ -1385,7 +1179,7 @@
 </file>
 
 <file path=ppt/notesSlides/notesSlide5.xml><?xml version="1.0" encoding="utf-8"?>
-<p:notes xmlns:a="http://schemas.openxmlformats.org/drawingml/2006/main" xmlns:p="http://schemas.openxmlformats.org/presentationml/2006/main" xmlns:r="http://schemas.openxmlformats.org/officeDocument/2006/relationships">
+<p:notes xmlns:a="http://schemas.openxmlformats.org/drawingml/2006/main" xmlns:r="http://schemas.openxmlformats.org/officeDocument/2006/relationships" xmlns:p="http://schemas.openxmlformats.org/presentationml/2006/main">
   <p:cSld>
     <p:spTree>
       <p:nvGrpSpPr>
@@ -1405,7 +1199,7 @@
         <p:nvSpPr>
           <p:cNvPr id="2" name="Slide Image Placeholder 1"/>
           <p:cNvSpPr>
-            <a:spLocks noGrp="1"/>
+            <a:spLocks noGrp="1" noRot="1" noChangeAspect="1"/>
           </p:cNvSpPr>
           <p:nvPr>
             <p:ph type="sldImg" idx="2"/>
@@ -1420,7 +1214,7 @@
             <a:spLocks noGrp="1"/>
           </p:cNvSpPr>
           <p:nvPr>
-            <p:ph type="body" idx="3" sz="quarter"/>
+            <p:ph type="body" sz="quarter" idx="3"/>
           </p:nvPr>
         </p:nvSpPr>
         <p:spPr/>
@@ -1441,7 +1235,7 @@
             <a:spLocks noGrp="1"/>
           </p:cNvSpPr>
           <p:nvPr>
-            <p:ph type="sldNum" idx="5" sz="quarter"/>
+            <p:ph type="sldNum" sz="quarter" idx="5"/>
           </p:nvPr>
         </p:nvSpPr>
         <p:spPr/>
@@ -1455,7 +1249,7 @@
 </file>
 
 <file path=ppt/notesSlides/notesSlide6.xml><?xml version="1.0" encoding="utf-8"?>
-<p:notes xmlns:a="http://schemas.openxmlformats.org/drawingml/2006/main" xmlns:p="http://schemas.openxmlformats.org/presentationml/2006/main" xmlns:r="http://schemas.openxmlformats.org/officeDocument/2006/relationships">
+<p:notes xmlns:a="http://schemas.openxmlformats.org/drawingml/2006/main" xmlns:r="http://schemas.openxmlformats.org/officeDocument/2006/relationships" xmlns:p="http://schemas.openxmlformats.org/presentationml/2006/main">
   <p:cSld>
     <p:spTree>
       <p:nvGrpSpPr>
@@ -1475,7 +1269,7 @@
         <p:nvSpPr>
           <p:cNvPr id="2" name="Slide Image Placeholder 1"/>
           <p:cNvSpPr>
-            <a:spLocks noGrp="1"/>
+            <a:spLocks noGrp="1" noRot="1" noChangeAspect="1"/>
           </p:cNvSpPr>
           <p:nvPr>
             <p:ph type="sldImg" idx="2"/>
@@ -1490,7 +1284,7 @@
             <a:spLocks noGrp="1"/>
           </p:cNvSpPr>
           <p:nvPr>
-            <p:ph type="body" idx="3" sz="quarter"/>
+            <p:ph type="body" sz="quarter" idx="3"/>
           </p:nvPr>
         </p:nvSpPr>
         <p:spPr/>
@@ -1511,7 +1305,7 @@
             <a:spLocks noGrp="1"/>
           </p:cNvSpPr>
           <p:nvPr>
-            <p:ph type="sldNum" idx="5" sz="quarter"/>
+            <p:ph type="sldNum" sz="quarter" idx="5"/>
           </p:nvPr>
         </p:nvSpPr>
         <p:spPr/>
@@ -1525,7 +1319,7 @@
 </file>
 
 <file path=ppt/notesSlides/notesSlide7.xml><?xml version="1.0" encoding="utf-8"?>
-<p:notes xmlns:a="http://schemas.openxmlformats.org/drawingml/2006/main" xmlns:p="http://schemas.openxmlformats.org/presentationml/2006/main" xmlns:r="http://schemas.openxmlformats.org/officeDocument/2006/relationships">
+<p:notes xmlns:a="http://schemas.openxmlformats.org/drawingml/2006/main" xmlns:r="http://schemas.openxmlformats.org/officeDocument/2006/relationships" xmlns:p="http://schemas.openxmlformats.org/presentationml/2006/main">
   <p:cSld>
     <p:spTree>
       <p:nvGrpSpPr>
@@ -1545,7 +1339,7 @@
         <p:nvSpPr>
           <p:cNvPr id="2" name="Slide Image Placeholder 1"/>
           <p:cNvSpPr>
-            <a:spLocks noGrp="1"/>
+            <a:spLocks noGrp="1" noRot="1" noChangeAspect="1"/>
           </p:cNvSpPr>
           <p:nvPr>
             <p:ph type="sldImg" idx="2"/>
@@ -1560,7 +1354,7 @@
             <a:spLocks noGrp="1"/>
           </p:cNvSpPr>
           <p:nvPr>
-            <p:ph type="body" idx="3" sz="quarter"/>
+            <p:ph type="body" sz="quarter" idx="3"/>
           </p:nvPr>
         </p:nvSpPr>
         <p:spPr/>
@@ -1581,7 +1375,7 @@
             <a:spLocks noGrp="1"/>
           </p:cNvSpPr>
           <p:nvPr>
-            <p:ph type="sldNum" idx="5" sz="quarter"/>
+            <p:ph type="sldNum" sz="quarter" idx="5"/>
           </p:nvPr>
         </p:nvSpPr>
         <p:spPr/>
@@ -1595,7 +1389,7 @@
 </file>
 
 <file path=ppt/notesSlides/notesSlide8.xml><?xml version="1.0" encoding="utf-8"?>
-<p:notes xmlns:a="http://schemas.openxmlformats.org/drawingml/2006/main" xmlns:p="http://schemas.openxmlformats.org/presentationml/2006/main" xmlns:r="http://schemas.openxmlformats.org/officeDocument/2006/relationships">
+<p:notes xmlns:a="http://schemas.openxmlformats.org/drawingml/2006/main" xmlns:r="http://schemas.openxmlformats.org/officeDocument/2006/relationships" xmlns:p="http://schemas.openxmlformats.org/presentationml/2006/main">
   <p:cSld>
     <p:spTree>
       <p:nvGrpSpPr>
@@ -1615,7 +1409,7 @@
         <p:nvSpPr>
           <p:cNvPr id="2" name="Slide Image Placeholder 1"/>
           <p:cNvSpPr>
-            <a:spLocks noGrp="1"/>
+            <a:spLocks noGrp="1" noRot="1" noChangeAspect="1"/>
           </p:cNvSpPr>
           <p:nvPr>
             <p:ph type="sldImg" idx="2"/>
@@ -1630,7 +1424,7 @@
             <a:spLocks noGrp="1"/>
           </p:cNvSpPr>
           <p:nvPr>
-            <p:ph type="body" idx="3" sz="quarter"/>
+            <p:ph type="body" sz="quarter" idx="3"/>
           </p:nvPr>
         </p:nvSpPr>
         <p:spPr/>
@@ -1651,7 +1445,7 @@
             <a:spLocks noGrp="1"/>
           </p:cNvSpPr>
           <p:nvPr>
-            <p:ph type="sldNum" idx="5" sz="quarter"/>
+            <p:ph type="sldNum" sz="quarter" idx="5"/>
           </p:nvPr>
         </p:nvSpPr>
         <p:spPr/>
@@ -1665,7 +1459,7 @@
 </file>
 
 <file path=ppt/notesSlides/notesSlide9.xml><?xml version="1.0" encoding="utf-8"?>
-<p:notes xmlns:a="http://schemas.openxmlformats.org/drawingml/2006/main" xmlns:p="http://schemas.openxmlformats.org/presentationml/2006/main" xmlns:r="http://schemas.openxmlformats.org/officeDocument/2006/relationships">
+<p:notes xmlns:a="http://schemas.openxmlformats.org/drawingml/2006/main" xmlns:r="http://schemas.openxmlformats.org/officeDocument/2006/relationships" xmlns:p="http://schemas.openxmlformats.org/presentationml/2006/main">
   <p:cSld>
     <p:spTree>
       <p:nvGrpSpPr>
@@ -1685,7 +1479,7 @@
         <p:nvSpPr>
           <p:cNvPr id="2" name="Slide Image Placeholder 1"/>
           <p:cNvSpPr>
-            <a:spLocks noGrp="1"/>
+            <a:spLocks noGrp="1" noRot="1" noChangeAspect="1"/>
           </p:cNvSpPr>
           <p:nvPr>
             <p:ph type="sldImg" idx="2"/>
@@ -1700,7 +1494,7 @@
             <a:spLocks noGrp="1"/>
           </p:cNvSpPr>
           <p:nvPr>
-            <p:ph type="body" idx="3" sz="quarter"/>
+            <p:ph type="body" sz="quarter" idx="3"/>
           </p:nvPr>
         </p:nvSpPr>
         <p:spPr/>
@@ -1721,7 +1515,7 @@
             <a:spLocks noGrp="1"/>
           </p:cNvSpPr>
           <p:nvPr>
-            <p:ph type="sldNum" idx="5" sz="quarter"/>
+            <p:ph type="sldNum" sz="quarter" idx="5"/>
           </p:nvPr>
         </p:nvSpPr>
         <p:spPr/>
@@ -1772,10 +1566,9 @@
           <a:lstStyle/>
           <a:p>
             <a:r>
-              <a:rPr lang="en-US" smtClean="0"/>
+              <a:rPr lang="en-US"/>
               <a:t>Click to edit Master title style</a:t>
             </a:r>
-            <a:endParaRPr lang="en-US"/>
           </a:p>
         </p:txBody>
       </p:sp>
@@ -1891,10 +1684,9 @@
           </a:lstStyle>
           <a:p>
             <a:r>
-              <a:rPr lang="en-US" smtClean="0"/>
+              <a:rPr lang="en-US"/>
               <a:t>Click to edit Master subtitle style</a:t>
             </a:r>
-            <a:endParaRPr lang="en-US"/>
           </a:p>
         </p:txBody>
       </p:sp>
@@ -1915,7 +1707,7 @@
           <a:p>
             <a:fld id="{5BCAD085-E8A6-8845-BD4E-CB4CCA059FC4}" type="datetimeFigureOut">
               <a:rPr lang="en-US" smtClean="0"/>
-              <a:t>1/27/13</a:t>
+              <a:t>9/21/26</a:t>
             </a:fld>
             <a:endParaRPr lang="en-US"/>
           </a:p>
@@ -2009,10 +1801,9 @@
           <a:lstStyle/>
           <a:p>
             <a:r>
-              <a:rPr lang="en-US" smtClean="0"/>
+              <a:rPr lang="en-US"/>
               <a:t>Click to edit Master title style</a:t>
             </a:r>
-            <a:endParaRPr lang="en-US"/>
           </a:p>
         </p:txBody>
       </p:sp>
@@ -2033,38 +1824,37 @@
           <a:p>
             <a:pPr lvl="0"/>
             <a:r>
-              <a:rPr lang="en-US" smtClean="0"/>
+              <a:rPr lang="en-US"/>
               <a:t>Click to edit Master text styles</a:t>
             </a:r>
           </a:p>
           <a:p>
             <a:pPr lvl="1"/>
             <a:r>
-              <a:rPr lang="en-US" smtClean="0"/>
+              <a:rPr lang="en-US"/>
               <a:t>Second level</a:t>
             </a:r>
           </a:p>
           <a:p>
             <a:pPr lvl="2"/>
             <a:r>
-              <a:rPr lang="en-US" smtClean="0"/>
+              <a:rPr lang="en-US"/>
               <a:t>Third level</a:t>
             </a:r>
           </a:p>
           <a:p>
             <a:pPr lvl="3"/>
             <a:r>
-              <a:rPr lang="en-US" smtClean="0"/>
+              <a:rPr lang="en-US"/>
               <a:t>Fourth level</a:t>
             </a:r>
           </a:p>
           <a:p>
             <a:pPr lvl="4"/>
             <a:r>
-              <a:rPr lang="en-US" smtClean="0"/>
+              <a:rPr lang="en-US"/>
               <a:t>Fifth level</a:t>
             </a:r>
-            <a:endParaRPr lang="en-US"/>
           </a:p>
         </p:txBody>
       </p:sp>
@@ -2085,7 +1875,7 @@
           <a:p>
             <a:fld id="{5BCAD085-E8A6-8845-BD4E-CB4CCA059FC4}" type="datetimeFigureOut">
               <a:rPr lang="en-US" smtClean="0"/>
-              <a:t>1/27/13</a:t>
+              <a:t>9/21/26</a:t>
             </a:fld>
             <a:endParaRPr lang="en-US"/>
           </a:p>
@@ -2184,10 +1974,9 @@
           <a:lstStyle/>
           <a:p>
             <a:r>
-              <a:rPr lang="en-US" smtClean="0"/>
+              <a:rPr lang="en-US"/>
               <a:t>Click to edit Master title style</a:t>
             </a:r>
-            <a:endParaRPr lang="en-US"/>
           </a:p>
         </p:txBody>
       </p:sp>
@@ -2213,38 +2002,37 @@
           <a:p>
             <a:pPr lvl="0"/>
             <a:r>
-              <a:rPr lang="en-US" smtClean="0"/>
+              <a:rPr lang="en-US"/>
               <a:t>Click to edit Master text styles</a:t>
             </a:r>
           </a:p>
           <a:p>
             <a:pPr lvl="1"/>
             <a:r>
-              <a:rPr lang="en-US" smtClean="0"/>
+              <a:rPr lang="en-US"/>
               <a:t>Second level</a:t>
             </a:r>
           </a:p>
           <a:p>
             <a:pPr lvl="2"/>
             <a:r>
-              <a:rPr lang="en-US" smtClean="0"/>
+              <a:rPr lang="en-US"/>
               <a:t>Third level</a:t>
             </a:r>
           </a:p>
           <a:p>
             <a:pPr lvl="3"/>
             <a:r>
-              <a:rPr lang="en-US" smtClean="0"/>
+              <a:rPr lang="en-US"/>
               <a:t>Fourth level</a:t>
             </a:r>
           </a:p>
           <a:p>
             <a:pPr lvl="4"/>
             <a:r>
-              <a:rPr lang="en-US" smtClean="0"/>
+              <a:rPr lang="en-US"/>
               <a:t>Fifth level</a:t>
             </a:r>
-            <a:endParaRPr lang="en-US"/>
           </a:p>
         </p:txBody>
       </p:sp>
@@ -2265,7 +2053,7 @@
           <a:p>
             <a:fld id="{5BCAD085-E8A6-8845-BD4E-CB4CCA059FC4}" type="datetimeFigureOut">
               <a:rPr lang="en-US" smtClean="0"/>
-              <a:t>1/27/13</a:t>
+              <a:t>9/21/26</a:t>
             </a:fld>
             <a:endParaRPr lang="en-US"/>
           </a:p>
@@ -2359,10 +2147,9 @@
           <a:lstStyle/>
           <a:p>
             <a:r>
-              <a:rPr lang="en-US" smtClean="0"/>
+              <a:rPr lang="en-US"/>
               <a:t>Click to edit Master title style</a:t>
             </a:r>
-            <a:endParaRPr lang="en-US"/>
           </a:p>
         </p:txBody>
       </p:sp>
@@ -2383,38 +2170,37 @@
           <a:p>
             <a:pPr lvl="0"/>
             <a:r>
-              <a:rPr lang="en-US" smtClean="0"/>
+              <a:rPr lang="en-US"/>
               <a:t>Click to edit Master text styles</a:t>
             </a:r>
           </a:p>
           <a:p>
             <a:pPr lvl="1"/>
             <a:r>
-              <a:rPr lang="en-US" smtClean="0"/>
+              <a:rPr lang="en-US"/>
               <a:t>Second level</a:t>
             </a:r>
           </a:p>
           <a:p>
             <a:pPr lvl="2"/>
             <a:r>
-              <a:rPr lang="en-US" smtClean="0"/>
+              <a:rPr lang="en-US"/>
               <a:t>Third level</a:t>
             </a:r>
           </a:p>
           <a:p>
             <a:pPr lvl="3"/>
             <a:r>
-              <a:rPr lang="en-US" smtClean="0"/>
+              <a:rPr lang="en-US"/>
               <a:t>Fourth level</a:t>
             </a:r>
           </a:p>
           <a:p>
             <a:pPr lvl="4"/>
             <a:r>
-              <a:rPr lang="en-US" smtClean="0"/>
+              <a:rPr lang="en-US"/>
               <a:t>Fifth level</a:t>
             </a:r>
-            <a:endParaRPr lang="en-US"/>
           </a:p>
         </p:txBody>
       </p:sp>
@@ -2435,7 +2221,7 @@
           <a:p>
             <a:fld id="{5BCAD085-E8A6-8845-BD4E-CB4CCA059FC4}" type="datetimeFigureOut">
               <a:rPr lang="en-US" smtClean="0"/>
-              <a:t>1/27/13</a:t>
+              <a:t>9/21/26</a:t>
             </a:fld>
             <a:endParaRPr lang="en-US"/>
           </a:p>
@@ -2538,10 +2324,9 @@
           </a:lstStyle>
           <a:p>
             <a:r>
-              <a:rPr lang="en-US" smtClean="0"/>
+              <a:rPr lang="en-US"/>
               <a:t>Click to edit Master title style</a:t>
             </a:r>
-            <a:endParaRPr lang="en-US"/>
           </a:p>
         </p:txBody>
       </p:sp>
@@ -2658,7 +2443,7 @@
           <a:p>
             <a:pPr lvl="0"/>
             <a:r>
-              <a:rPr lang="en-US" smtClean="0"/>
+              <a:rPr lang="en-US"/>
               <a:t>Click to edit Master text styles</a:t>
             </a:r>
           </a:p>
@@ -2681,7 +2466,7 @@
           <a:p>
             <a:fld id="{5BCAD085-E8A6-8845-BD4E-CB4CCA059FC4}" type="datetimeFigureOut">
               <a:rPr lang="en-US" smtClean="0"/>
-              <a:t>1/27/13</a:t>
+              <a:t>9/21/26</a:t>
             </a:fld>
             <a:endParaRPr lang="en-US"/>
           </a:p>
@@ -2775,10 +2560,9 @@
           <a:lstStyle/>
           <a:p>
             <a:r>
-              <a:rPr lang="en-US" smtClean="0"/>
+              <a:rPr lang="en-US"/>
               <a:t>Click to edit Master title style</a:t>
             </a:r>
-            <a:endParaRPr lang="en-US"/>
           </a:p>
         </p:txBody>
       </p:sp>
@@ -2832,38 +2616,37 @@
           <a:p>
             <a:pPr lvl="0"/>
             <a:r>
-              <a:rPr lang="en-US" smtClean="0"/>
+              <a:rPr lang="en-US"/>
               <a:t>Click to edit Master text styles</a:t>
             </a:r>
           </a:p>
           <a:p>
             <a:pPr lvl="1"/>
             <a:r>
-              <a:rPr lang="en-US" smtClean="0"/>
+              <a:rPr lang="en-US"/>
               <a:t>Second level</a:t>
             </a:r>
           </a:p>
           <a:p>
             <a:pPr lvl="2"/>
             <a:r>
-              <a:rPr lang="en-US" smtClean="0"/>
+              <a:rPr lang="en-US"/>
               <a:t>Third level</a:t>
             </a:r>
           </a:p>
           <a:p>
             <a:pPr lvl="3"/>
             <a:r>
-              <a:rPr lang="en-US" smtClean="0"/>
+              <a:rPr lang="en-US"/>
               <a:t>Fourth level</a:t>
             </a:r>
           </a:p>
           <a:p>
             <a:pPr lvl="4"/>
             <a:r>
-              <a:rPr lang="en-US" smtClean="0"/>
+              <a:rPr lang="en-US"/>
               <a:t>Fifth level</a:t>
             </a:r>
-            <a:endParaRPr lang="en-US"/>
           </a:p>
         </p:txBody>
       </p:sp>
@@ -2917,38 +2700,37 @@
           <a:p>
             <a:pPr lvl="0"/>
             <a:r>
-              <a:rPr lang="en-US" smtClean="0"/>
+              <a:rPr lang="en-US"/>
               <a:t>Click to edit Master text styles</a:t>
             </a:r>
           </a:p>
           <a:p>
             <a:pPr lvl="1"/>
             <a:r>
-              <a:rPr lang="en-US" smtClean="0"/>
+              <a:rPr lang="en-US"/>
               <a:t>Second level</a:t>
             </a:r>
           </a:p>
           <a:p>
             <a:pPr lvl="2"/>
             <a:r>
-              <a:rPr lang="en-US" smtClean="0"/>
+              <a:rPr lang="en-US"/>
               <a:t>Third level</a:t>
             </a:r>
           </a:p>
           <a:p>
             <a:pPr lvl="3"/>
             <a:r>
-              <a:rPr lang="en-US" smtClean="0"/>
+              <a:rPr lang="en-US"/>
               <a:t>Fourth level</a:t>
             </a:r>
           </a:p>
           <a:p>
             <a:pPr lvl="4"/>
             <a:r>
-              <a:rPr lang="en-US" smtClean="0"/>
+              <a:rPr lang="en-US"/>
               <a:t>Fifth level</a:t>
             </a:r>
-            <a:endParaRPr lang="en-US"/>
           </a:p>
         </p:txBody>
       </p:sp>
@@ -2969,7 +2751,7 @@
           <a:p>
             <a:fld id="{5BCAD085-E8A6-8845-BD4E-CB4CCA059FC4}" type="datetimeFigureOut">
               <a:rPr lang="en-US" smtClean="0"/>
-              <a:t>1/27/13</a:t>
+              <a:t>9/21/26</a:t>
             </a:fld>
             <a:endParaRPr lang="en-US"/>
           </a:p>
@@ -3067,10 +2849,9 @@
           </a:lstStyle>
           <a:p>
             <a:r>
-              <a:rPr lang="en-US" smtClean="0"/>
+              <a:rPr lang="en-US"/>
               <a:t>Click to edit Master title style</a:t>
             </a:r>
-            <a:endParaRPr lang="en-US"/>
           </a:p>
         </p:txBody>
       </p:sp>
@@ -3133,7 +2914,7 @@
           <a:p>
             <a:pPr lvl="0"/>
             <a:r>
-              <a:rPr lang="en-US" smtClean="0"/>
+              <a:rPr lang="en-US"/>
               <a:t>Click to edit Master text styles</a:t>
             </a:r>
           </a:p>
@@ -3189,38 +2970,37 @@
           <a:p>
             <a:pPr lvl="0"/>
             <a:r>
-              <a:rPr lang="en-US" smtClean="0"/>
+              <a:rPr lang="en-US"/>
               <a:t>Click to edit Master text styles</a:t>
             </a:r>
           </a:p>
           <a:p>
             <a:pPr lvl="1"/>
             <a:r>
-              <a:rPr lang="en-US" smtClean="0"/>
+              <a:rPr lang="en-US"/>
               <a:t>Second level</a:t>
             </a:r>
           </a:p>
           <a:p>
             <a:pPr lvl="2"/>
             <a:r>
-              <a:rPr lang="en-US" smtClean="0"/>
+              <a:rPr lang="en-US"/>
               <a:t>Third level</a:t>
             </a:r>
           </a:p>
           <a:p>
             <a:pPr lvl="3"/>
             <a:r>
-              <a:rPr lang="en-US" smtClean="0"/>
+              <a:rPr lang="en-US"/>
               <a:t>Fourth level</a:t>
             </a:r>
           </a:p>
           <a:p>
             <a:pPr lvl="4"/>
             <a:r>
-              <a:rPr lang="en-US" smtClean="0"/>
+              <a:rPr lang="en-US"/>
               <a:t>Fifth level</a:t>
             </a:r>
-            <a:endParaRPr lang="en-US"/>
           </a:p>
         </p:txBody>
       </p:sp>
@@ -3283,7 +3063,7 @@
           <a:p>
             <a:pPr lvl="0"/>
             <a:r>
-              <a:rPr lang="en-US" smtClean="0"/>
+              <a:rPr lang="en-US"/>
               <a:t>Click to edit Master text styles</a:t>
             </a:r>
           </a:p>
@@ -3339,38 +3119,37 @@
           <a:p>
             <a:pPr lvl="0"/>
             <a:r>
-              <a:rPr lang="en-US" smtClean="0"/>
+              <a:rPr lang="en-US"/>
               <a:t>Click to edit Master text styles</a:t>
             </a:r>
           </a:p>
           <a:p>
             <a:pPr lvl="1"/>
             <a:r>
-              <a:rPr lang="en-US" smtClean="0"/>
+              <a:rPr lang="en-US"/>
               <a:t>Second level</a:t>
             </a:r>
           </a:p>
           <a:p>
             <a:pPr lvl="2"/>
             <a:r>
-              <a:rPr lang="en-US" smtClean="0"/>
+              <a:rPr lang="en-US"/>
               <a:t>Third level</a:t>
             </a:r>
           </a:p>
           <a:p>
             <a:pPr lvl="3"/>
             <a:r>
-              <a:rPr lang="en-US" smtClean="0"/>
+              <a:rPr lang="en-US"/>
               <a:t>Fourth level</a:t>
             </a:r>
           </a:p>
           <a:p>
             <a:pPr lvl="4"/>
             <a:r>
-              <a:rPr lang="en-US" smtClean="0"/>
+              <a:rPr lang="en-US"/>
               <a:t>Fifth level</a:t>
             </a:r>
-            <a:endParaRPr lang="en-US"/>
           </a:p>
         </p:txBody>
       </p:sp>
@@ -3391,7 +3170,7 @@
           <a:p>
             <a:fld id="{5BCAD085-E8A6-8845-BD4E-CB4CCA059FC4}" type="datetimeFigureOut">
               <a:rPr lang="en-US" smtClean="0"/>
-              <a:t>1/27/13</a:t>
+              <a:t>9/21/26</a:t>
             </a:fld>
             <a:endParaRPr lang="en-US"/>
           </a:p>
@@ -3485,10 +3264,9 @@
           <a:lstStyle/>
           <a:p>
             <a:r>
-              <a:rPr lang="en-US" smtClean="0"/>
+              <a:rPr lang="en-US"/>
               <a:t>Click to edit Master title style</a:t>
             </a:r>
-            <a:endParaRPr lang="en-US"/>
           </a:p>
         </p:txBody>
       </p:sp>
@@ -3509,7 +3287,7 @@
           <a:p>
             <a:fld id="{5BCAD085-E8A6-8845-BD4E-CB4CCA059FC4}" type="datetimeFigureOut">
               <a:rPr lang="en-US" smtClean="0"/>
-              <a:t>1/27/13</a:t>
+              <a:t>9/21/26</a:t>
             </a:fld>
             <a:endParaRPr lang="en-US"/>
           </a:p>
@@ -3604,7 +3382,7 @@
           <a:p>
             <a:fld id="{5BCAD085-E8A6-8845-BD4E-CB4CCA059FC4}" type="datetimeFigureOut">
               <a:rPr lang="en-US" smtClean="0"/>
-              <a:t>1/27/13</a:t>
+              <a:t>9/21/26</a:t>
             </a:fld>
             <a:endParaRPr lang="en-US"/>
           </a:p>
@@ -3707,10 +3485,9 @@
           </a:lstStyle>
           <a:p>
             <a:r>
-              <a:rPr lang="en-US" smtClean="0"/>
+              <a:rPr lang="en-US"/>
               <a:t>Click to edit Master title style</a:t>
             </a:r>
-            <a:endParaRPr lang="en-US"/>
           </a:p>
         </p:txBody>
       </p:sp>
@@ -3764,38 +3541,37 @@
           <a:p>
             <a:pPr lvl="0"/>
             <a:r>
-              <a:rPr lang="en-US" smtClean="0"/>
+              <a:rPr lang="en-US"/>
               <a:t>Click to edit Master text styles</a:t>
             </a:r>
           </a:p>
           <a:p>
             <a:pPr lvl="1"/>
             <a:r>
-              <a:rPr lang="en-US" smtClean="0"/>
+              <a:rPr lang="en-US"/>
               <a:t>Second level</a:t>
             </a:r>
           </a:p>
           <a:p>
             <a:pPr lvl="2"/>
             <a:r>
-              <a:rPr lang="en-US" smtClean="0"/>
+              <a:rPr lang="en-US"/>
               <a:t>Third level</a:t>
             </a:r>
           </a:p>
           <a:p>
             <a:pPr lvl="3"/>
             <a:r>
-              <a:rPr lang="en-US" smtClean="0"/>
+              <a:rPr lang="en-US"/>
               <a:t>Fourth level</a:t>
             </a:r>
           </a:p>
           <a:p>
             <a:pPr lvl="4"/>
             <a:r>
-              <a:rPr lang="en-US" smtClean="0"/>
+              <a:rPr lang="en-US"/>
               <a:t>Fifth level</a:t>
             </a:r>
-            <a:endParaRPr lang="en-US"/>
           </a:p>
         </p:txBody>
       </p:sp>
@@ -3858,7 +3634,7 @@
           <a:p>
             <a:pPr lvl="0"/>
             <a:r>
-              <a:rPr lang="en-US" smtClean="0"/>
+              <a:rPr lang="en-US"/>
               <a:t>Click to edit Master text styles</a:t>
             </a:r>
           </a:p>
@@ -3881,7 +3657,7 @@
           <a:p>
             <a:fld id="{5BCAD085-E8A6-8845-BD4E-CB4CCA059FC4}" type="datetimeFigureOut">
               <a:rPr lang="en-US" smtClean="0"/>
-              <a:t>1/27/13</a:t>
+              <a:t>9/21/26</a:t>
             </a:fld>
             <a:endParaRPr lang="en-US"/>
           </a:p>
@@ -3984,10 +3760,9 @@
           </a:lstStyle>
           <a:p>
             <a:r>
-              <a:rPr lang="en-US" smtClean="0"/>
+              <a:rPr lang="en-US"/>
               <a:t>Click to edit Master title style</a:t>
             </a:r>
-            <a:endParaRPr lang="en-US"/>
           </a:p>
         </p:txBody>
       </p:sp>
@@ -4111,7 +3886,7 @@
           <a:p>
             <a:pPr lvl="0"/>
             <a:r>
-              <a:rPr lang="en-US" smtClean="0"/>
+              <a:rPr lang="en-US"/>
               <a:t>Click to edit Master text styles</a:t>
             </a:r>
           </a:p>
@@ -4134,7 +3909,7 @@
           <a:p>
             <a:fld id="{5BCAD085-E8A6-8845-BD4E-CB4CCA059FC4}" type="datetimeFigureOut">
               <a:rPr lang="en-US" smtClean="0"/>
-              <a:t>1/27/13</a:t>
+              <a:t>9/21/26</a:t>
             </a:fld>
             <a:endParaRPr lang="en-US"/>
           </a:p>
@@ -4243,10 +4018,9 @@
           <a:lstStyle/>
           <a:p>
             <a:r>
-              <a:rPr lang="en-US" smtClean="0"/>
+              <a:rPr lang="en-US"/>
               <a:t>Click to edit Master title style</a:t>
             </a:r>
-            <a:endParaRPr lang="en-US"/>
           </a:p>
         </p:txBody>
       </p:sp>
@@ -4277,38 +4051,37 @@
           <a:p>
             <a:pPr lvl="0"/>
             <a:r>
-              <a:rPr lang="en-US" smtClean="0"/>
+              <a:rPr lang="en-US"/>
               <a:t>Click to edit Master text styles</a:t>
             </a:r>
           </a:p>
           <a:p>
             <a:pPr lvl="1"/>
             <a:r>
-              <a:rPr lang="en-US" smtClean="0"/>
+              <a:rPr lang="en-US"/>
               <a:t>Second level</a:t>
             </a:r>
           </a:p>
           <a:p>
             <a:pPr lvl="2"/>
             <a:r>
-              <a:rPr lang="en-US" smtClean="0"/>
+              <a:rPr lang="en-US"/>
               <a:t>Third level</a:t>
             </a:r>
           </a:p>
           <a:p>
             <a:pPr lvl="3"/>
             <a:r>
-              <a:rPr lang="en-US" smtClean="0"/>
+              <a:rPr lang="en-US"/>
               <a:t>Fourth level</a:t>
             </a:r>
           </a:p>
           <a:p>
             <a:pPr lvl="4"/>
             <a:r>
-              <a:rPr lang="en-US" smtClean="0"/>
+              <a:rPr lang="en-US"/>
               <a:t>Fifth level</a:t>
             </a:r>
-            <a:endParaRPr lang="en-US"/>
           </a:p>
         </p:txBody>
       </p:sp>
@@ -4347,7 +4120,7 @@
           <a:p>
             <a:fld id="{5BCAD085-E8A6-8845-BD4E-CB4CCA059FC4}" type="datetimeFigureOut">
               <a:rPr lang="en-US" smtClean="0"/>
-              <a:t>1/27/13</a:t>
+              <a:t>9/21/26</a:t>
             </a:fld>
             <a:endParaRPr lang="en-US"/>
           </a:p>
@@ -4706,7 +4479,7 @@
 </file>
 
 <file path=ppt/slides/slide1.xml><?xml version="1.0" encoding="utf-8"?>
-<p:sld xmlns:a="http://schemas.openxmlformats.org/drawingml/2006/main" xmlns:p="http://schemas.openxmlformats.org/presentationml/2006/main" xmlns:r="http://schemas.openxmlformats.org/officeDocument/2006/relationships">
+<p:sld xmlns:a="http://schemas.openxmlformats.org/drawingml/2006/main" xmlns:r="http://schemas.openxmlformats.org/officeDocument/2006/relationships" xmlns:p="http://schemas.openxmlformats.org/presentationml/2006/main">
   <p:cSld>
     <p:bg>
       <p:bgPr>
@@ -4722,7 +4495,14 @@
         <p:cNvGrpSpPr/>
         <p:nvPr/>
       </p:nvGrpSpPr>
-      <p:grpSpPr/>
+      <p:grpSpPr>
+        <a:xfrm>
+          <a:off x="0" y="0"/>
+          <a:ext cx="0" cy="0"/>
+          <a:chOff x="0" y="0"/>
+          <a:chExt cx="0" cy="0"/>
+        </a:xfrm>
+      </p:grpSpPr>
       <p:sp>
         <p:nvSpPr>
           <p:cNvPr id="2" name="Rectangle 1"/>
@@ -4764,6 +4544,7 @@
           <a:lstStyle/>
           <a:p>
             <a:pPr algn="ctr"/>
+            <a:endParaRPr/>
           </a:p>
         </p:txBody>
       </p:sp>
@@ -4784,7 +4565,7 @@
           <a:noFill/>
         </p:spPr>
         <p:txBody>
-          <a:bodyPr wrap="square" lIns="0" rIns="0" tIns="0" bIns="0">
+          <a:bodyPr wrap="square" lIns="0" tIns="0" rIns="0" bIns="0">
             <a:spAutoFit/>
           </a:bodyPr>
           <a:lstStyle/>
@@ -4848,6 +4629,7 @@
           <a:lstStyle/>
           <a:p>
             <a:pPr algn="ctr"/>
+            <a:endParaRPr/>
           </a:p>
         </p:txBody>
       </p:sp>
@@ -4860,7 +4642,7 @@
         <p:spPr>
           <a:xfrm>
             <a:off x="1234440" y="3913632"/>
-            <a:ext cx="9692640" cy="365760"/>
+            <a:ext cx="9692640" cy="261610"/>
           </a:xfrm>
           <a:prstGeom prst="rect">
             <a:avLst/>
@@ -4868,20 +4650,179 @@
           <a:noFill/>
         </p:spPr>
         <p:txBody>
-          <a:bodyPr wrap="square" lIns="0" rIns="0" tIns="0" bIns="0">
+          <a:bodyPr wrap="square" lIns="0" tIns="0" rIns="0" bIns="0">
             <a:spAutoFit/>
           </a:bodyPr>
           <a:lstStyle/>
           <a:p>
             <a:r>
-              <a:rPr sz="1700" b="0" i="0">
+              <a:rPr sz="1700" b="0" i="0" dirty="0" err="1">
                 <a:solidFill>
                   <a:srgbClr val="5EEAD4"/>
                 </a:solidFill>
                 <a:latin typeface="Calibri"/>
               </a:rPr>
-              <a:t>Đồ án môn Xử lý ngôn ngữ tự nhiên</a:t>
-            </a:r>
+              <a:t>Đồ</a:t>
+            </a:r>
+            <a:r>
+              <a:rPr sz="1700" b="0" i="0" dirty="0">
+                <a:solidFill>
+                  <a:srgbClr val="5EEAD4"/>
+                </a:solidFill>
+                <a:latin typeface="Calibri"/>
+              </a:rPr>
+              <a:t> </a:t>
+            </a:r>
+            <a:r>
+              <a:rPr sz="1700" b="0" i="0" dirty="0" err="1">
+                <a:solidFill>
+                  <a:srgbClr val="5EEAD4"/>
+                </a:solidFill>
+                <a:latin typeface="Calibri"/>
+              </a:rPr>
+              <a:t>án</a:t>
+            </a:r>
+            <a:r>
+              <a:rPr sz="1700" b="0" i="0" dirty="0">
+                <a:solidFill>
+                  <a:srgbClr val="5EEAD4"/>
+                </a:solidFill>
+                <a:latin typeface="Calibri"/>
+              </a:rPr>
+              <a:t> </a:t>
+            </a:r>
+            <a:r>
+              <a:rPr sz="1700" b="0" i="0" dirty="0" err="1">
+                <a:solidFill>
+                  <a:srgbClr val="5EEAD4"/>
+                </a:solidFill>
+                <a:latin typeface="Calibri"/>
+              </a:rPr>
+              <a:t>môn</a:t>
+            </a:r>
+            <a:r>
+              <a:rPr lang="en-US" sz="1700" b="0" i="0" dirty="0">
+                <a:solidFill>
+                  <a:srgbClr val="5EEAD4"/>
+                </a:solidFill>
+                <a:latin typeface="Calibri"/>
+              </a:rPr>
+              <a:t>:</a:t>
+            </a:r>
+            <a:r>
+              <a:rPr sz="1700" b="0" i="0" dirty="0">
+                <a:solidFill>
+                  <a:srgbClr val="5EEAD4"/>
+                </a:solidFill>
+                <a:latin typeface="Calibri"/>
+              </a:rPr>
+              <a:t> </a:t>
+            </a:r>
+            <a:r>
+              <a:rPr sz="1700" b="0" i="0" dirty="0" err="1">
+                <a:solidFill>
+                  <a:srgbClr val="5EEAD4"/>
+                </a:solidFill>
+                <a:latin typeface="Calibri"/>
+              </a:rPr>
+              <a:t>Xử</a:t>
+            </a:r>
+            <a:r>
+              <a:rPr sz="1700" b="0" i="0" dirty="0">
+                <a:solidFill>
+                  <a:srgbClr val="5EEAD4"/>
+                </a:solidFill>
+                <a:latin typeface="Calibri"/>
+              </a:rPr>
+              <a:t> </a:t>
+            </a:r>
+            <a:r>
+              <a:rPr sz="1700" b="0" i="0" dirty="0" err="1">
+                <a:solidFill>
+                  <a:srgbClr val="5EEAD4"/>
+                </a:solidFill>
+                <a:latin typeface="Calibri"/>
+              </a:rPr>
+              <a:t>lý</a:t>
+            </a:r>
+            <a:r>
+              <a:rPr sz="1700" b="0" i="0" dirty="0">
+                <a:solidFill>
+                  <a:srgbClr val="5EEAD4"/>
+                </a:solidFill>
+                <a:latin typeface="Calibri"/>
+              </a:rPr>
+              <a:t> </a:t>
+            </a:r>
+            <a:r>
+              <a:rPr sz="1700" b="0" i="0" dirty="0" err="1">
+                <a:solidFill>
+                  <a:srgbClr val="5EEAD4"/>
+                </a:solidFill>
+                <a:latin typeface="Calibri"/>
+              </a:rPr>
+              <a:t>ngôn</a:t>
+            </a:r>
+            <a:r>
+              <a:rPr sz="1700" b="0" i="0" dirty="0">
+                <a:solidFill>
+                  <a:srgbClr val="5EEAD4"/>
+                </a:solidFill>
+                <a:latin typeface="Calibri"/>
+              </a:rPr>
+              <a:t> </a:t>
+            </a:r>
+            <a:r>
+              <a:rPr sz="1700" b="0" i="0" dirty="0" err="1">
+                <a:solidFill>
+                  <a:srgbClr val="5EEAD4"/>
+                </a:solidFill>
+                <a:latin typeface="Calibri"/>
+              </a:rPr>
+              <a:t>ngữ</a:t>
+            </a:r>
+            <a:r>
+              <a:rPr sz="1700" b="0" i="0" dirty="0">
+                <a:solidFill>
+                  <a:srgbClr val="5EEAD4"/>
+                </a:solidFill>
+                <a:latin typeface="Calibri"/>
+              </a:rPr>
+              <a:t> </a:t>
+            </a:r>
+            <a:r>
+              <a:rPr sz="1700" b="0" i="0" dirty="0" err="1">
+                <a:solidFill>
+                  <a:srgbClr val="5EEAD4"/>
+                </a:solidFill>
+                <a:latin typeface="Calibri"/>
+              </a:rPr>
+              <a:t>tự</a:t>
+            </a:r>
+            <a:r>
+              <a:rPr sz="1700" b="0" i="0" dirty="0">
+                <a:solidFill>
+                  <a:srgbClr val="5EEAD4"/>
+                </a:solidFill>
+                <a:latin typeface="Calibri"/>
+              </a:rPr>
+              <a:t> </a:t>
+            </a:r>
+            <a:r>
+              <a:rPr sz="1700" b="0" i="0" dirty="0" err="1">
+                <a:solidFill>
+                  <a:srgbClr val="5EEAD4"/>
+                </a:solidFill>
+                <a:latin typeface="Calibri"/>
+              </a:rPr>
+              <a:t>nhiên</a:t>
+            </a:r>
+            <a:endParaRPr sz="1700" b="0" i="0" dirty="0">
+              <a:solidFill>
+                <a:srgbClr val="5EEAD4"/>
+              </a:solidFill>
+              <a:latin typeface="Calibri"/>
+            </a:endParaRPr>
           </a:p>
         </p:txBody>
       </p:sp>
@@ -4902,7 +4843,7 @@
           <a:noFill/>
         </p:spPr>
         <p:txBody>
-          <a:bodyPr wrap="square" lIns="0" rIns="0" tIns="0" bIns="0">
+          <a:bodyPr wrap="square" lIns="0" tIns="0" rIns="0" bIns="0">
             <a:spAutoFit/>
           </a:bodyPr>
           <a:lstStyle/>
@@ -4945,7 +4886,7 @@
           <a:noFill/>
         </p:spPr>
         <p:txBody>
-          <a:bodyPr wrap="square" lIns="0" rIns="0" tIns="0" bIns="0">
+          <a:bodyPr wrap="square" lIns="0" tIns="0" rIns="0" bIns="0">
             <a:spAutoFit/>
           </a:bodyPr>
           <a:lstStyle/>
@@ -4979,7 +4920,7 @@
           <a:noFill/>
         </p:spPr>
         <p:txBody>
-          <a:bodyPr wrap="square" lIns="0" rIns="0" tIns="0" bIns="0">
+          <a:bodyPr wrap="square" lIns="0" tIns="0" rIns="0" bIns="0">
             <a:spAutoFit/>
           </a:bodyPr>
           <a:lstStyle/>
@@ -5050,7 +4991,7 @@
           <a:noFill/>
         </p:spPr>
         <p:txBody>
-          <a:bodyPr wrap="square" lIns="0" rIns="0" tIns="0" bIns="0">
+          <a:bodyPr wrap="square" lIns="0" tIns="0" rIns="0" bIns="0">
             <a:spAutoFit/>
           </a:bodyPr>
           <a:lstStyle/>
@@ -5097,7 +5038,7 @@
 </file>
 
 <file path=ppt/slides/slide10.xml><?xml version="1.0" encoding="utf-8"?>
-<p:sld xmlns:a="http://schemas.openxmlformats.org/drawingml/2006/main" xmlns:p="http://schemas.openxmlformats.org/presentationml/2006/main" xmlns:r="http://schemas.openxmlformats.org/officeDocument/2006/relationships">
+<p:sld xmlns:a="http://schemas.openxmlformats.org/drawingml/2006/main" xmlns:r="http://schemas.openxmlformats.org/officeDocument/2006/relationships" xmlns:p="http://schemas.openxmlformats.org/presentationml/2006/main">
   <p:cSld>
     <p:bg>
       <p:bgPr>
@@ -5113,7 +5054,14 @@
         <p:cNvGrpSpPr/>
         <p:nvPr/>
       </p:nvGrpSpPr>
-      <p:grpSpPr/>
+      <p:grpSpPr>
+        <a:xfrm>
+          <a:off x="0" y="0"/>
+          <a:ext cx="0" cy="0"/>
+          <a:chOff x="0" y="0"/>
+          <a:chExt cx="0" cy="0"/>
+        </a:xfrm>
+      </p:grpSpPr>
       <p:sp>
         <p:nvSpPr>
           <p:cNvPr id="2" name="TextBox 1"/>
@@ -5131,7 +5079,7 @@
           <a:noFill/>
         </p:spPr>
         <p:txBody>
-          <a:bodyPr wrap="square" lIns="0" rIns="0" tIns="0" bIns="0">
+          <a:bodyPr wrap="square" lIns="0" tIns="0" rIns="0" bIns="0">
             <a:spAutoFit/>
           </a:bodyPr>
           <a:lstStyle/>
@@ -5165,7 +5113,7 @@
           <a:noFill/>
         </p:spPr>
         <p:txBody>
-          <a:bodyPr wrap="square" lIns="0" rIns="0" tIns="0" bIns="0">
+          <a:bodyPr wrap="square" lIns="0" tIns="0" rIns="0" bIns="0">
             <a:spAutoFit/>
           </a:bodyPr>
           <a:lstStyle/>
@@ -5228,6 +5176,7 @@
           <a:lstStyle/>
           <a:p>
             <a:pPr algn="ctr"/>
+            <a:endParaRPr/>
           </a:p>
         </p:txBody>
       </p:sp>
@@ -5248,7 +5197,7 @@
           <a:noFill/>
         </p:spPr>
         <p:txBody>
-          <a:bodyPr wrap="square" lIns="0" rIns="0" tIns="0" bIns="0">
+          <a:bodyPr wrap="square" lIns="0" tIns="0" rIns="0" bIns="0">
             <a:spAutoFit/>
           </a:bodyPr>
           <a:lstStyle/>
@@ -5285,15 +5234,39 @@
                 <a:tableStyleId>{2D5ABB26-0587-4C30-8999-92F81FD0307C}</a:tableStyleId>
               </a:tblPr>
               <a:tblGrid>
-                <a:gridCol w="2011680"/>
-                <a:gridCol w="1143000"/>
-                <a:gridCol w="1005840"/>
-                <a:gridCol w="960120"/>
+                <a:gridCol w="2011680">
+                  <a:extLst>
+                    <a:ext uri="{9D8B030D-6E8A-4147-A177-3AD203B41FA5}">
+                      <a16:colId xmlns:a16="http://schemas.microsoft.com/office/drawing/2014/main" val="20000"/>
+                    </a:ext>
+                  </a:extLst>
+                </a:gridCol>
+                <a:gridCol w="1143000">
+                  <a:extLst>
+                    <a:ext uri="{9D8B030D-6E8A-4147-A177-3AD203B41FA5}">
+                      <a16:colId xmlns:a16="http://schemas.microsoft.com/office/drawing/2014/main" val="20001"/>
+                    </a:ext>
+                  </a:extLst>
+                </a:gridCol>
+                <a:gridCol w="1005840">
+                  <a:extLst>
+                    <a:ext uri="{9D8B030D-6E8A-4147-A177-3AD203B41FA5}">
+                      <a16:colId xmlns:a16="http://schemas.microsoft.com/office/drawing/2014/main" val="20002"/>
+                    </a:ext>
+                  </a:extLst>
+                </a:gridCol>
+                <a:gridCol w="960120">
+                  <a:extLst>
+                    <a:ext uri="{9D8B030D-6E8A-4147-A177-3AD203B41FA5}">
+                      <a16:colId xmlns:a16="http://schemas.microsoft.com/office/drawing/2014/main" val="20003"/>
+                    </a:ext>
+                  </a:extLst>
+                </a:gridCol>
               </a:tblGrid>
               <a:tr h="548640">
                 <a:tc>
                   <a:txBody>
-                    <a:bodyPr wrap="square"/>
+                    <a:bodyPr/>
                     <a:lstStyle/>
                     <a:p>
                       <a:pPr algn="l"/>
@@ -5308,7 +5281,7 @@
                       </a:r>
                     </a:p>
                   </a:txBody>
-                  <a:tcPr anchor="ctr" marL="100584" marR="100584" marT="36576" marB="36576">
+                  <a:tcPr marL="100584" marR="100584" marT="36576" marB="36576" anchor="ctr">
                     <a:solidFill>
                       <a:srgbClr val="334155"/>
                     </a:solidFill>
@@ -5316,7 +5289,7 @@
                 </a:tc>
                 <a:tc>
                   <a:txBody>
-                    <a:bodyPr wrap="square"/>
+                    <a:bodyPr/>
                     <a:lstStyle/>
                     <a:p>
                       <a:pPr algn="r"/>
@@ -5331,7 +5304,7 @@
                       </a:r>
                     </a:p>
                   </a:txBody>
-                  <a:tcPr anchor="ctr" marL="100584" marR="100584" marT="36576" marB="36576">
+                  <a:tcPr marL="100584" marR="100584" marT="36576" marB="36576" anchor="ctr">
                     <a:solidFill>
                       <a:srgbClr val="334155"/>
                     </a:solidFill>
@@ -5339,7 +5312,7 @@
                 </a:tc>
                 <a:tc>
                   <a:txBody>
-                    <a:bodyPr wrap="square"/>
+                    <a:bodyPr/>
                     <a:lstStyle/>
                     <a:p>
                       <a:pPr algn="r"/>
@@ -5354,7 +5327,7 @@
                       </a:r>
                     </a:p>
                   </a:txBody>
-                  <a:tcPr anchor="ctr" marL="100584" marR="100584" marT="36576" marB="36576">
+                  <a:tcPr marL="100584" marR="100584" marT="36576" marB="36576" anchor="ctr">
                     <a:solidFill>
                       <a:srgbClr val="334155"/>
                     </a:solidFill>
@@ -5362,7 +5335,7 @@
                 </a:tc>
                 <a:tc>
                   <a:txBody>
-                    <a:bodyPr wrap="square"/>
+                    <a:bodyPr/>
                     <a:lstStyle/>
                     <a:p>
                       <a:pPr algn="r"/>
@@ -5377,17 +5350,22 @@
                       </a:r>
                     </a:p>
                   </a:txBody>
-                  <a:tcPr anchor="ctr" marL="100584" marR="100584" marT="36576" marB="36576">
+                  <a:tcPr marL="100584" marR="100584" marT="36576" marB="36576" anchor="ctr">
                     <a:solidFill>
                       <a:srgbClr val="334155"/>
                     </a:solidFill>
                   </a:tcPr>
                 </a:tc>
+                <a:extLst>
+                  <a:ext uri="{0D108BD9-81ED-4DB2-BD59-A6C34878D82A}">
+                    <a16:rowId xmlns:a16="http://schemas.microsoft.com/office/drawing/2014/main" val="10000"/>
+                  </a:ext>
+                </a:extLst>
               </a:tr>
               <a:tr h="512064">
                 <a:tc>
                   <a:txBody>
-                    <a:bodyPr wrap="square"/>
+                    <a:bodyPr/>
                     <a:lstStyle/>
                     <a:p>
                       <a:pPr algn="l"/>
@@ -5402,7 +5380,7 @@
                       </a:r>
                     </a:p>
                   </a:txBody>
-                  <a:tcPr anchor="ctr" marL="100584" marR="100584" marT="36576" marB="36576">
+                  <a:tcPr marL="100584" marR="100584" marT="36576" marB="36576" anchor="ctr">
                     <a:solidFill>
                       <a:srgbClr val="243247"/>
                     </a:solidFill>
@@ -5410,7 +5388,7 @@
                 </a:tc>
                 <a:tc>
                   <a:txBody>
-                    <a:bodyPr wrap="square"/>
+                    <a:bodyPr/>
                     <a:lstStyle/>
                     <a:p>
                       <a:pPr algn="r"/>
@@ -5425,7 +5403,7 @@
                       </a:r>
                     </a:p>
                   </a:txBody>
-                  <a:tcPr anchor="ctr" marL="100584" marR="100584" marT="36576" marB="36576">
+                  <a:tcPr marL="100584" marR="100584" marT="36576" marB="36576" anchor="ctr">
                     <a:solidFill>
                       <a:srgbClr val="243247"/>
                     </a:solidFill>
@@ -5433,7 +5411,7 @@
                 </a:tc>
                 <a:tc>
                   <a:txBody>
-                    <a:bodyPr wrap="square"/>
+                    <a:bodyPr/>
                     <a:lstStyle/>
                     <a:p>
                       <a:pPr algn="r"/>
@@ -5448,7 +5426,7 @@
                       </a:r>
                     </a:p>
                   </a:txBody>
-                  <a:tcPr anchor="ctr" marL="100584" marR="100584" marT="36576" marB="36576">
+                  <a:tcPr marL="100584" marR="100584" marT="36576" marB="36576" anchor="ctr">
                     <a:solidFill>
                       <a:srgbClr val="243247"/>
                     </a:solidFill>
@@ -5456,7 +5434,7 @@
                 </a:tc>
                 <a:tc>
                   <a:txBody>
-                    <a:bodyPr wrap="square"/>
+                    <a:bodyPr/>
                     <a:lstStyle/>
                     <a:p>
                       <a:pPr algn="r"/>
@@ -5471,17 +5449,22 @@
                       </a:r>
                     </a:p>
                   </a:txBody>
-                  <a:tcPr anchor="ctr" marL="100584" marR="100584" marT="36576" marB="36576">
+                  <a:tcPr marL="100584" marR="100584" marT="36576" marB="36576" anchor="ctr">
                     <a:solidFill>
                       <a:srgbClr val="243247"/>
                     </a:solidFill>
                   </a:tcPr>
                 </a:tc>
+                <a:extLst>
+                  <a:ext uri="{0D108BD9-81ED-4DB2-BD59-A6C34878D82A}">
+                    <a16:rowId xmlns:a16="http://schemas.microsoft.com/office/drawing/2014/main" val="10001"/>
+                  </a:ext>
+                </a:extLst>
               </a:tr>
               <a:tr h="512064">
                 <a:tc>
                   <a:txBody>
-                    <a:bodyPr wrap="square"/>
+                    <a:bodyPr/>
                     <a:lstStyle/>
                     <a:p>
                       <a:pPr algn="l"/>
@@ -5496,7 +5479,7 @@
                       </a:r>
                     </a:p>
                   </a:txBody>
-                  <a:tcPr anchor="ctr" marL="100584" marR="100584" marT="36576" marB="36576">
+                  <a:tcPr marL="100584" marR="100584" marT="36576" marB="36576" anchor="ctr">
                     <a:solidFill>
                       <a:srgbClr val="334155"/>
                     </a:solidFill>
@@ -5504,7 +5487,7 @@
                 </a:tc>
                 <a:tc>
                   <a:txBody>
-                    <a:bodyPr wrap="square"/>
+                    <a:bodyPr/>
                     <a:lstStyle/>
                     <a:p>
                       <a:pPr algn="r"/>
@@ -5519,7 +5502,7 @@
                       </a:r>
                     </a:p>
                   </a:txBody>
-                  <a:tcPr anchor="ctr" marL="100584" marR="100584" marT="36576" marB="36576">
+                  <a:tcPr marL="100584" marR="100584" marT="36576" marB="36576" anchor="ctr">
                     <a:solidFill>
                       <a:srgbClr val="334155"/>
                     </a:solidFill>
@@ -5527,7 +5510,7 @@
                 </a:tc>
                 <a:tc>
                   <a:txBody>
-                    <a:bodyPr wrap="square"/>
+                    <a:bodyPr/>
                     <a:lstStyle/>
                     <a:p>
                       <a:pPr algn="r"/>
@@ -5542,7 +5525,7 @@
                       </a:r>
                     </a:p>
                   </a:txBody>
-                  <a:tcPr anchor="ctr" marL="100584" marR="100584" marT="36576" marB="36576">
+                  <a:tcPr marL="100584" marR="100584" marT="36576" marB="36576" anchor="ctr">
                     <a:solidFill>
                       <a:srgbClr val="334155"/>
                     </a:solidFill>
@@ -5550,7 +5533,7 @@
                 </a:tc>
                 <a:tc>
                   <a:txBody>
-                    <a:bodyPr wrap="square"/>
+                    <a:bodyPr/>
                     <a:lstStyle/>
                     <a:p>
                       <a:pPr algn="r"/>
@@ -5565,17 +5548,22 @@
                       </a:r>
                     </a:p>
                   </a:txBody>
-                  <a:tcPr anchor="ctr" marL="100584" marR="100584" marT="36576" marB="36576">
+                  <a:tcPr marL="100584" marR="100584" marT="36576" marB="36576" anchor="ctr">
                     <a:solidFill>
                       <a:srgbClr val="334155"/>
                     </a:solidFill>
                   </a:tcPr>
                 </a:tc>
+                <a:extLst>
+                  <a:ext uri="{0D108BD9-81ED-4DB2-BD59-A6C34878D82A}">
+                    <a16:rowId xmlns:a16="http://schemas.microsoft.com/office/drawing/2014/main" val="10002"/>
+                  </a:ext>
+                </a:extLst>
               </a:tr>
               <a:tr h="512064">
                 <a:tc>
                   <a:txBody>
-                    <a:bodyPr wrap="square"/>
+                    <a:bodyPr/>
                     <a:lstStyle/>
                     <a:p>
                       <a:pPr algn="l"/>
@@ -5590,7 +5578,7 @@
                       </a:r>
                     </a:p>
                   </a:txBody>
-                  <a:tcPr anchor="ctr" marL="100584" marR="100584" marT="36576" marB="36576">
+                  <a:tcPr marL="100584" marR="100584" marT="36576" marB="36576" anchor="ctr">
                     <a:solidFill>
                       <a:srgbClr val="243247"/>
                     </a:solidFill>
@@ -5598,7 +5586,7 @@
                 </a:tc>
                 <a:tc>
                   <a:txBody>
-                    <a:bodyPr wrap="square"/>
+                    <a:bodyPr/>
                     <a:lstStyle/>
                     <a:p>
                       <a:pPr algn="r"/>
@@ -5613,7 +5601,7 @@
                       </a:r>
                     </a:p>
                   </a:txBody>
-                  <a:tcPr anchor="ctr" marL="100584" marR="100584" marT="36576" marB="36576">
+                  <a:tcPr marL="100584" marR="100584" marT="36576" marB="36576" anchor="ctr">
                     <a:solidFill>
                       <a:srgbClr val="243247"/>
                     </a:solidFill>
@@ -5621,7 +5609,7 @@
                 </a:tc>
                 <a:tc>
                   <a:txBody>
-                    <a:bodyPr wrap="square"/>
+                    <a:bodyPr/>
                     <a:lstStyle/>
                     <a:p>
                       <a:pPr algn="r"/>
@@ -5636,7 +5624,7 @@
                       </a:r>
                     </a:p>
                   </a:txBody>
-                  <a:tcPr anchor="ctr" marL="100584" marR="100584" marT="36576" marB="36576">
+                  <a:tcPr marL="100584" marR="100584" marT="36576" marB="36576" anchor="ctr">
                     <a:solidFill>
                       <a:srgbClr val="243247"/>
                     </a:solidFill>
@@ -5644,7 +5632,7 @@
                 </a:tc>
                 <a:tc>
                   <a:txBody>
-                    <a:bodyPr wrap="square"/>
+                    <a:bodyPr/>
                     <a:lstStyle/>
                     <a:p>
                       <a:pPr algn="r"/>
@@ -5659,12 +5647,17 @@
                       </a:r>
                     </a:p>
                   </a:txBody>
-                  <a:tcPr anchor="ctr" marL="100584" marR="100584" marT="36576" marB="36576">
+                  <a:tcPr marL="100584" marR="100584" marT="36576" marB="36576" anchor="ctr">
                     <a:solidFill>
                       <a:srgbClr val="243247"/>
                     </a:solidFill>
                   </a:tcPr>
                 </a:tc>
+                <a:extLst>
+                  <a:ext uri="{0D108BD9-81ED-4DB2-BD59-A6C34878D82A}">
+                    <a16:rowId xmlns:a16="http://schemas.microsoft.com/office/drawing/2014/main" val="10003"/>
+                  </a:ext>
+                </a:extLst>
               </a:tr>
             </a:tbl>
           </a:graphicData>
@@ -5679,7 +5672,7 @@
           <p:nvPr/>
         </p:nvPicPr>
         <p:blipFill>
-          <a:blip r:embed="rId2"/>
+          <a:blip r:embed="rId3"/>
           <a:stretch>
             <a:fillRect/>
           </a:stretch>
@@ -5711,7 +5704,7 @@
           <a:noFill/>
         </p:spPr>
         <p:txBody>
-          <a:bodyPr wrap="square" lIns="0" rIns="0" tIns="0" bIns="0">
+          <a:bodyPr wrap="square" lIns="0" tIns="0" rIns="0" bIns="0">
             <a:spAutoFit/>
           </a:bodyPr>
           <a:lstStyle/>
@@ -5798,7 +5791,7 @@
 </file>
 
 <file path=ppt/slides/slide11.xml><?xml version="1.0" encoding="utf-8"?>
-<p:sld xmlns:a="http://schemas.openxmlformats.org/drawingml/2006/main" xmlns:p="http://schemas.openxmlformats.org/presentationml/2006/main" xmlns:r="http://schemas.openxmlformats.org/officeDocument/2006/relationships">
+<p:sld xmlns:a="http://schemas.openxmlformats.org/drawingml/2006/main" xmlns:r="http://schemas.openxmlformats.org/officeDocument/2006/relationships" xmlns:p="http://schemas.openxmlformats.org/presentationml/2006/main">
   <p:cSld>
     <p:bg>
       <p:bgPr>
@@ -5814,7 +5807,14 @@
         <p:cNvGrpSpPr/>
         <p:nvPr/>
       </p:nvGrpSpPr>
-      <p:grpSpPr/>
+      <p:grpSpPr>
+        <a:xfrm>
+          <a:off x="0" y="0"/>
+          <a:ext cx="0" cy="0"/>
+          <a:chOff x="0" y="0"/>
+          <a:chExt cx="0" cy="0"/>
+        </a:xfrm>
+      </p:grpSpPr>
       <p:sp>
         <p:nvSpPr>
           <p:cNvPr id="2" name="TextBox 1"/>
@@ -5832,7 +5832,7 @@
           <a:noFill/>
         </p:spPr>
         <p:txBody>
-          <a:bodyPr wrap="square" lIns="0" rIns="0" tIns="0" bIns="0">
+          <a:bodyPr wrap="square" lIns="0" tIns="0" rIns="0" bIns="0">
             <a:spAutoFit/>
           </a:bodyPr>
           <a:lstStyle/>
@@ -5866,7 +5866,7 @@
           <a:noFill/>
         </p:spPr>
         <p:txBody>
-          <a:bodyPr wrap="square" lIns="0" rIns="0" tIns="0" bIns="0">
+          <a:bodyPr wrap="square" lIns="0" tIns="0" rIns="0" bIns="0">
             <a:spAutoFit/>
           </a:bodyPr>
           <a:lstStyle/>
@@ -5929,6 +5929,7 @@
           <a:lstStyle/>
           <a:p>
             <a:pPr algn="ctr"/>
+            <a:endParaRPr/>
           </a:p>
         </p:txBody>
       </p:sp>
@@ -5949,7 +5950,7 @@
           <a:noFill/>
         </p:spPr>
         <p:txBody>
-          <a:bodyPr wrap="square" lIns="0" rIns="0" tIns="0" bIns="0">
+          <a:bodyPr wrap="square" lIns="0" tIns="0" rIns="0" bIns="0">
             <a:spAutoFit/>
           </a:bodyPr>
           <a:lstStyle/>
@@ -5986,17 +5987,53 @@
                 <a:tableStyleId>{2D5ABB26-0587-4C30-8999-92F81FD0307C}</a:tableStyleId>
               </a:tblPr>
               <a:tblGrid>
-                <a:gridCol w="2834640"/>
-                <a:gridCol w="1600200"/>
-                <a:gridCol w="1600200"/>
-                <a:gridCol w="1234440"/>
-                <a:gridCol w="1737360"/>
-                <a:gridCol w="1758391"/>
+                <a:gridCol w="2834640">
+                  <a:extLst>
+                    <a:ext uri="{9D8B030D-6E8A-4147-A177-3AD203B41FA5}">
+                      <a16:colId xmlns:a16="http://schemas.microsoft.com/office/drawing/2014/main" val="20000"/>
+                    </a:ext>
+                  </a:extLst>
+                </a:gridCol>
+                <a:gridCol w="1600200">
+                  <a:extLst>
+                    <a:ext uri="{9D8B030D-6E8A-4147-A177-3AD203B41FA5}">
+                      <a16:colId xmlns:a16="http://schemas.microsoft.com/office/drawing/2014/main" val="20001"/>
+                    </a:ext>
+                  </a:extLst>
+                </a:gridCol>
+                <a:gridCol w="1600200">
+                  <a:extLst>
+                    <a:ext uri="{9D8B030D-6E8A-4147-A177-3AD203B41FA5}">
+                      <a16:colId xmlns:a16="http://schemas.microsoft.com/office/drawing/2014/main" val="20002"/>
+                    </a:ext>
+                  </a:extLst>
+                </a:gridCol>
+                <a:gridCol w="1234440">
+                  <a:extLst>
+                    <a:ext uri="{9D8B030D-6E8A-4147-A177-3AD203B41FA5}">
+                      <a16:colId xmlns:a16="http://schemas.microsoft.com/office/drawing/2014/main" val="20003"/>
+                    </a:ext>
+                  </a:extLst>
+                </a:gridCol>
+                <a:gridCol w="1737360">
+                  <a:extLst>
+                    <a:ext uri="{9D8B030D-6E8A-4147-A177-3AD203B41FA5}">
+                      <a16:colId xmlns:a16="http://schemas.microsoft.com/office/drawing/2014/main" val="20004"/>
+                    </a:ext>
+                  </a:extLst>
+                </a:gridCol>
+                <a:gridCol w="1758391">
+                  <a:extLst>
+                    <a:ext uri="{9D8B030D-6E8A-4147-A177-3AD203B41FA5}">
+                      <a16:colId xmlns:a16="http://schemas.microsoft.com/office/drawing/2014/main" val="20005"/>
+                    </a:ext>
+                  </a:extLst>
+                </a:gridCol>
               </a:tblGrid>
               <a:tr h="429768">
                 <a:tc>
                   <a:txBody>
-                    <a:bodyPr wrap="square"/>
+                    <a:bodyPr/>
                     <a:lstStyle/>
                     <a:p>
                       <a:pPr algn="l"/>
@@ -6011,7 +6048,7 @@
                       </a:r>
                     </a:p>
                   </a:txBody>
-                  <a:tcPr anchor="ctr" marL="100584" marR="100584" marT="36576" marB="36576">
+                  <a:tcPr marL="100584" marR="100584" marT="36576" marB="36576" anchor="ctr">
                     <a:solidFill>
                       <a:srgbClr val="334155"/>
                     </a:solidFill>
@@ -6019,7 +6056,7 @@
                 </a:tc>
                 <a:tc>
                   <a:txBody>
-                    <a:bodyPr wrap="square"/>
+                    <a:bodyPr/>
                     <a:lstStyle/>
                     <a:p>
                       <a:pPr algn="r"/>
@@ -6034,7 +6071,7 @@
                       </a:r>
                     </a:p>
                   </a:txBody>
-                  <a:tcPr anchor="ctr" marL="100584" marR="100584" marT="36576" marB="36576">
+                  <a:tcPr marL="100584" marR="100584" marT="36576" marB="36576" anchor="ctr">
                     <a:solidFill>
                       <a:srgbClr val="334155"/>
                     </a:solidFill>
@@ -6042,7 +6079,7 @@
                 </a:tc>
                 <a:tc>
                   <a:txBody>
-                    <a:bodyPr wrap="square"/>
+                    <a:bodyPr/>
                     <a:lstStyle/>
                     <a:p>
                       <a:pPr algn="r"/>
@@ -6057,7 +6094,7 @@
                       </a:r>
                     </a:p>
                   </a:txBody>
-                  <a:tcPr anchor="ctr" marL="100584" marR="100584" marT="36576" marB="36576">
+                  <a:tcPr marL="100584" marR="100584" marT="36576" marB="36576" anchor="ctr">
                     <a:solidFill>
                       <a:srgbClr val="334155"/>
                     </a:solidFill>
@@ -6065,7 +6102,7 @@
                 </a:tc>
                 <a:tc>
                   <a:txBody>
-                    <a:bodyPr wrap="square"/>
+                    <a:bodyPr/>
                     <a:lstStyle/>
                     <a:p>
                       <a:pPr algn="r"/>
@@ -6080,7 +6117,7 @@
                       </a:r>
                     </a:p>
                   </a:txBody>
-                  <a:tcPr anchor="ctr" marL="100584" marR="100584" marT="36576" marB="36576">
+                  <a:tcPr marL="100584" marR="100584" marT="36576" marB="36576" anchor="ctr">
                     <a:solidFill>
                       <a:srgbClr val="334155"/>
                     </a:solidFill>
@@ -6088,7 +6125,7 @@
                 </a:tc>
                 <a:tc>
                   <a:txBody>
-                    <a:bodyPr wrap="square"/>
+                    <a:bodyPr/>
                     <a:lstStyle/>
                     <a:p>
                       <a:pPr algn="r"/>
@@ -6103,7 +6140,7 @@
                       </a:r>
                     </a:p>
                   </a:txBody>
-                  <a:tcPr anchor="ctr" marL="100584" marR="100584" marT="36576" marB="36576">
+                  <a:tcPr marL="100584" marR="100584" marT="36576" marB="36576" anchor="ctr">
                     <a:solidFill>
                       <a:srgbClr val="334155"/>
                     </a:solidFill>
@@ -6111,7 +6148,7 @@
                 </a:tc>
                 <a:tc>
                   <a:txBody>
-                    <a:bodyPr wrap="square"/>
+                    <a:bodyPr/>
                     <a:lstStyle/>
                     <a:p>
                       <a:pPr algn="r"/>
@@ -6126,17 +6163,22 @@
                       </a:r>
                     </a:p>
                   </a:txBody>
-                  <a:tcPr anchor="ctr" marL="100584" marR="100584" marT="36576" marB="36576">
+                  <a:tcPr marL="100584" marR="100584" marT="36576" marB="36576" anchor="ctr">
                     <a:solidFill>
                       <a:srgbClr val="334155"/>
                     </a:solidFill>
                   </a:tcPr>
                 </a:tc>
+                <a:extLst>
+                  <a:ext uri="{0D108BD9-81ED-4DB2-BD59-A6C34878D82A}">
+                    <a16:rowId xmlns:a16="http://schemas.microsoft.com/office/drawing/2014/main" val="10000"/>
+                  </a:ext>
+                </a:extLst>
               </a:tr>
               <a:tr h="393192">
                 <a:tc>
                   <a:txBody>
-                    <a:bodyPr wrap="square"/>
+                    <a:bodyPr/>
                     <a:lstStyle/>
                     <a:p>
                       <a:pPr algn="l"/>
@@ -6151,7 +6193,7 @@
                       </a:r>
                     </a:p>
                   </a:txBody>
-                  <a:tcPr anchor="ctr" marL="100584" marR="100584" marT="36576" marB="36576">
+                  <a:tcPr marL="100584" marR="100584" marT="36576" marB="36576" anchor="ctr">
                     <a:solidFill>
                       <a:srgbClr val="243247"/>
                     </a:solidFill>
@@ -6159,7 +6201,7 @@
                 </a:tc>
                 <a:tc>
                   <a:txBody>
-                    <a:bodyPr wrap="square"/>
+                    <a:bodyPr/>
                     <a:lstStyle/>
                     <a:p>
                       <a:pPr algn="r"/>
@@ -6174,7 +6216,7 @@
                       </a:r>
                     </a:p>
                   </a:txBody>
-                  <a:tcPr anchor="ctr" marL="100584" marR="100584" marT="36576" marB="36576">
+                  <a:tcPr marL="100584" marR="100584" marT="36576" marB="36576" anchor="ctr">
                     <a:solidFill>
                       <a:srgbClr val="243247"/>
                     </a:solidFill>
@@ -6182,7 +6224,7 @@
                 </a:tc>
                 <a:tc>
                   <a:txBody>
-                    <a:bodyPr wrap="square"/>
+                    <a:bodyPr/>
                     <a:lstStyle/>
                     <a:p>
                       <a:pPr algn="r"/>
@@ -6197,7 +6239,7 @@
                       </a:r>
                     </a:p>
                   </a:txBody>
-                  <a:tcPr anchor="ctr" marL="100584" marR="100584" marT="36576" marB="36576">
+                  <a:tcPr marL="100584" marR="100584" marT="36576" marB="36576" anchor="ctr">
                     <a:solidFill>
                       <a:srgbClr val="243247"/>
                     </a:solidFill>
@@ -6205,7 +6247,7 @@
                 </a:tc>
                 <a:tc>
                   <a:txBody>
-                    <a:bodyPr wrap="square"/>
+                    <a:bodyPr/>
                     <a:lstStyle/>
                     <a:p>
                       <a:pPr algn="r"/>
@@ -6220,7 +6262,7 @@
                       </a:r>
                     </a:p>
                   </a:txBody>
-                  <a:tcPr anchor="ctr" marL="100584" marR="100584" marT="36576" marB="36576">
+                  <a:tcPr marL="100584" marR="100584" marT="36576" marB="36576" anchor="ctr">
                     <a:solidFill>
                       <a:srgbClr val="243247"/>
                     </a:solidFill>
@@ -6228,7 +6270,7 @@
                 </a:tc>
                 <a:tc>
                   <a:txBody>
-                    <a:bodyPr wrap="square"/>
+                    <a:bodyPr/>
                     <a:lstStyle/>
                     <a:p>
                       <a:pPr algn="r"/>
@@ -6243,7 +6285,7 @@
                       </a:r>
                     </a:p>
                   </a:txBody>
-                  <a:tcPr anchor="ctr" marL="100584" marR="100584" marT="36576" marB="36576">
+                  <a:tcPr marL="100584" marR="100584" marT="36576" marB="36576" anchor="ctr">
                     <a:solidFill>
                       <a:srgbClr val="243247"/>
                     </a:solidFill>
@@ -6251,7 +6293,7 @@
                 </a:tc>
                 <a:tc>
                   <a:txBody>
-                    <a:bodyPr wrap="square"/>
+                    <a:bodyPr/>
                     <a:lstStyle/>
                     <a:p>
                       <a:pPr algn="r"/>
@@ -6266,17 +6308,22 @@
                       </a:r>
                     </a:p>
                   </a:txBody>
-                  <a:tcPr anchor="ctr" marL="100584" marR="100584" marT="36576" marB="36576">
+                  <a:tcPr marL="100584" marR="100584" marT="36576" marB="36576" anchor="ctr">
                     <a:solidFill>
                       <a:srgbClr val="243247"/>
                     </a:solidFill>
                   </a:tcPr>
                 </a:tc>
+                <a:extLst>
+                  <a:ext uri="{0D108BD9-81ED-4DB2-BD59-A6C34878D82A}">
+                    <a16:rowId xmlns:a16="http://schemas.microsoft.com/office/drawing/2014/main" val="10001"/>
+                  </a:ext>
+                </a:extLst>
               </a:tr>
               <a:tr h="393192">
                 <a:tc>
                   <a:txBody>
-                    <a:bodyPr wrap="square"/>
+                    <a:bodyPr/>
                     <a:lstStyle/>
                     <a:p>
                       <a:pPr algn="l"/>
@@ -6291,7 +6338,7 @@
                       </a:r>
                     </a:p>
                   </a:txBody>
-                  <a:tcPr anchor="ctr" marL="100584" marR="100584" marT="36576" marB="36576">
+                  <a:tcPr marL="100584" marR="100584" marT="36576" marB="36576" anchor="ctr">
                     <a:solidFill>
                       <a:srgbClr val="2B3A50"/>
                     </a:solidFill>
@@ -6299,7 +6346,7 @@
                 </a:tc>
                 <a:tc>
                   <a:txBody>
-                    <a:bodyPr wrap="square"/>
+                    <a:bodyPr/>
                     <a:lstStyle/>
                     <a:p>
                       <a:pPr algn="r"/>
@@ -6314,7 +6361,7 @@
                       </a:r>
                     </a:p>
                   </a:txBody>
-                  <a:tcPr anchor="ctr" marL="100584" marR="100584" marT="36576" marB="36576">
+                  <a:tcPr marL="100584" marR="100584" marT="36576" marB="36576" anchor="ctr">
                     <a:solidFill>
                       <a:srgbClr val="2B3A50"/>
                     </a:solidFill>
@@ -6322,7 +6369,7 @@
                 </a:tc>
                 <a:tc>
                   <a:txBody>
-                    <a:bodyPr wrap="square"/>
+                    <a:bodyPr/>
                     <a:lstStyle/>
                     <a:p>
                       <a:pPr algn="r"/>
@@ -6337,7 +6384,7 @@
                       </a:r>
                     </a:p>
                   </a:txBody>
-                  <a:tcPr anchor="ctr" marL="100584" marR="100584" marT="36576" marB="36576">
+                  <a:tcPr marL="100584" marR="100584" marT="36576" marB="36576" anchor="ctr">
                     <a:solidFill>
                       <a:srgbClr val="2B3A50"/>
                     </a:solidFill>
@@ -6345,7 +6392,7 @@
                 </a:tc>
                 <a:tc>
                   <a:txBody>
-                    <a:bodyPr wrap="square"/>
+                    <a:bodyPr/>
                     <a:lstStyle/>
                     <a:p>
                       <a:pPr algn="r"/>
@@ -6360,7 +6407,7 @@
                       </a:r>
                     </a:p>
                   </a:txBody>
-                  <a:tcPr anchor="ctr" marL="100584" marR="100584" marT="36576" marB="36576">
+                  <a:tcPr marL="100584" marR="100584" marT="36576" marB="36576" anchor="ctr">
                     <a:solidFill>
                       <a:srgbClr val="2B3A50"/>
                     </a:solidFill>
@@ -6368,7 +6415,7 @@
                 </a:tc>
                 <a:tc>
                   <a:txBody>
-                    <a:bodyPr wrap="square"/>
+                    <a:bodyPr/>
                     <a:lstStyle/>
                     <a:p>
                       <a:pPr algn="r"/>
@@ -6383,7 +6430,7 @@
                       </a:r>
                     </a:p>
                   </a:txBody>
-                  <a:tcPr anchor="ctr" marL="100584" marR="100584" marT="36576" marB="36576">
+                  <a:tcPr marL="100584" marR="100584" marT="36576" marB="36576" anchor="ctr">
                     <a:solidFill>
                       <a:srgbClr val="2B3A50"/>
                     </a:solidFill>
@@ -6391,7 +6438,7 @@
                 </a:tc>
                 <a:tc>
                   <a:txBody>
-                    <a:bodyPr wrap="square"/>
+                    <a:bodyPr/>
                     <a:lstStyle/>
                     <a:p>
                       <a:pPr algn="r"/>
@@ -6406,17 +6453,22 @@
                       </a:r>
                     </a:p>
                   </a:txBody>
-                  <a:tcPr anchor="ctr" marL="100584" marR="100584" marT="36576" marB="36576">
+                  <a:tcPr marL="100584" marR="100584" marT="36576" marB="36576" anchor="ctr">
                     <a:solidFill>
                       <a:srgbClr val="2B3A50"/>
                     </a:solidFill>
                   </a:tcPr>
                 </a:tc>
+                <a:extLst>
+                  <a:ext uri="{0D108BD9-81ED-4DB2-BD59-A6C34878D82A}">
+                    <a16:rowId xmlns:a16="http://schemas.microsoft.com/office/drawing/2014/main" val="10002"/>
+                  </a:ext>
+                </a:extLst>
               </a:tr>
               <a:tr h="393192">
                 <a:tc>
                   <a:txBody>
-                    <a:bodyPr wrap="square"/>
+                    <a:bodyPr/>
                     <a:lstStyle/>
                     <a:p>
                       <a:pPr algn="l"/>
@@ -6431,7 +6483,7 @@
                       </a:r>
                     </a:p>
                   </a:txBody>
-                  <a:tcPr anchor="ctr" marL="100584" marR="100584" marT="36576" marB="36576">
+                  <a:tcPr marL="100584" marR="100584" marT="36576" marB="36576" anchor="ctr">
                     <a:solidFill>
                       <a:srgbClr val="334155"/>
                     </a:solidFill>
@@ -6439,7 +6491,7 @@
                 </a:tc>
                 <a:tc>
                   <a:txBody>
-                    <a:bodyPr wrap="square"/>
+                    <a:bodyPr/>
                     <a:lstStyle/>
                     <a:p>
                       <a:pPr algn="r"/>
@@ -6454,7 +6506,7 @@
                       </a:r>
                     </a:p>
                   </a:txBody>
-                  <a:tcPr anchor="ctr" marL="100584" marR="100584" marT="36576" marB="36576">
+                  <a:tcPr marL="100584" marR="100584" marT="36576" marB="36576" anchor="ctr">
                     <a:solidFill>
                       <a:srgbClr val="334155"/>
                     </a:solidFill>
@@ -6462,7 +6514,7 @@
                 </a:tc>
                 <a:tc>
                   <a:txBody>
-                    <a:bodyPr wrap="square"/>
+                    <a:bodyPr/>
                     <a:lstStyle/>
                     <a:p>
                       <a:pPr algn="r"/>
@@ -6477,7 +6529,7 @@
                       </a:r>
                     </a:p>
                   </a:txBody>
-                  <a:tcPr anchor="ctr" marL="100584" marR="100584" marT="36576" marB="36576">
+                  <a:tcPr marL="100584" marR="100584" marT="36576" marB="36576" anchor="ctr">
                     <a:solidFill>
                       <a:srgbClr val="334155"/>
                     </a:solidFill>
@@ -6485,7 +6537,7 @@
                 </a:tc>
                 <a:tc>
                   <a:txBody>
-                    <a:bodyPr wrap="square"/>
+                    <a:bodyPr/>
                     <a:lstStyle/>
                     <a:p>
                       <a:pPr algn="r"/>
@@ -6500,7 +6552,7 @@
                       </a:r>
                     </a:p>
                   </a:txBody>
-                  <a:tcPr anchor="ctr" marL="100584" marR="100584" marT="36576" marB="36576">
+                  <a:tcPr marL="100584" marR="100584" marT="36576" marB="36576" anchor="ctr">
                     <a:solidFill>
                       <a:srgbClr val="334155"/>
                     </a:solidFill>
@@ -6508,7 +6560,7 @@
                 </a:tc>
                 <a:tc>
                   <a:txBody>
-                    <a:bodyPr wrap="square"/>
+                    <a:bodyPr/>
                     <a:lstStyle/>
                     <a:p>
                       <a:pPr algn="r"/>
@@ -6523,7 +6575,7 @@
                       </a:r>
                     </a:p>
                   </a:txBody>
-                  <a:tcPr anchor="ctr" marL="100584" marR="100584" marT="36576" marB="36576">
+                  <a:tcPr marL="100584" marR="100584" marT="36576" marB="36576" anchor="ctr">
                     <a:solidFill>
                       <a:srgbClr val="334155"/>
                     </a:solidFill>
@@ -6531,7 +6583,7 @@
                 </a:tc>
                 <a:tc>
                   <a:txBody>
-                    <a:bodyPr wrap="square"/>
+                    <a:bodyPr/>
                     <a:lstStyle/>
                     <a:p>
                       <a:pPr algn="r"/>
@@ -6546,17 +6598,22 @@
                       </a:r>
                     </a:p>
                   </a:txBody>
-                  <a:tcPr anchor="ctr" marL="100584" marR="100584" marT="36576" marB="36576">
+                  <a:tcPr marL="100584" marR="100584" marT="36576" marB="36576" anchor="ctr">
                     <a:solidFill>
                       <a:srgbClr val="334155"/>
                     </a:solidFill>
                   </a:tcPr>
                 </a:tc>
+                <a:extLst>
+                  <a:ext uri="{0D108BD9-81ED-4DB2-BD59-A6C34878D82A}">
+                    <a16:rowId xmlns:a16="http://schemas.microsoft.com/office/drawing/2014/main" val="10003"/>
+                  </a:ext>
+                </a:extLst>
               </a:tr>
               <a:tr h="393192">
                 <a:tc>
                   <a:txBody>
-                    <a:bodyPr wrap="square"/>
+                    <a:bodyPr/>
                     <a:lstStyle/>
                     <a:p>
                       <a:pPr algn="l"/>
@@ -6571,7 +6628,7 @@
                       </a:r>
                     </a:p>
                   </a:txBody>
-                  <a:tcPr anchor="ctr" marL="100584" marR="100584" marT="36576" marB="36576">
+                  <a:tcPr marL="100584" marR="100584" marT="36576" marB="36576" anchor="ctr">
                     <a:solidFill>
                       <a:srgbClr val="2B3A50"/>
                     </a:solidFill>
@@ -6579,7 +6636,7 @@
                 </a:tc>
                 <a:tc>
                   <a:txBody>
-                    <a:bodyPr wrap="square"/>
+                    <a:bodyPr/>
                     <a:lstStyle/>
                     <a:p>
                       <a:pPr algn="r"/>
@@ -6594,7 +6651,7 @@
                       </a:r>
                     </a:p>
                   </a:txBody>
-                  <a:tcPr anchor="ctr" marL="100584" marR="100584" marT="36576" marB="36576">
+                  <a:tcPr marL="100584" marR="100584" marT="36576" marB="36576" anchor="ctr">
                     <a:solidFill>
                       <a:srgbClr val="2B3A50"/>
                     </a:solidFill>
@@ -6602,7 +6659,7 @@
                 </a:tc>
                 <a:tc>
                   <a:txBody>
-                    <a:bodyPr wrap="square"/>
+                    <a:bodyPr/>
                     <a:lstStyle/>
                     <a:p>
                       <a:pPr algn="r"/>
@@ -6617,7 +6674,7 @@
                       </a:r>
                     </a:p>
                   </a:txBody>
-                  <a:tcPr anchor="ctr" marL="100584" marR="100584" marT="36576" marB="36576">
+                  <a:tcPr marL="100584" marR="100584" marT="36576" marB="36576" anchor="ctr">
                     <a:solidFill>
                       <a:srgbClr val="2B3A50"/>
                     </a:solidFill>
@@ -6625,7 +6682,7 @@
                 </a:tc>
                 <a:tc>
                   <a:txBody>
-                    <a:bodyPr wrap="square"/>
+                    <a:bodyPr/>
                     <a:lstStyle/>
                     <a:p>
                       <a:pPr algn="r"/>
@@ -6640,7 +6697,7 @@
                       </a:r>
                     </a:p>
                   </a:txBody>
-                  <a:tcPr anchor="ctr" marL="100584" marR="100584" marT="36576" marB="36576">
+                  <a:tcPr marL="100584" marR="100584" marT="36576" marB="36576" anchor="ctr">
                     <a:solidFill>
                       <a:srgbClr val="2B3A50"/>
                     </a:solidFill>
@@ -6648,7 +6705,7 @@
                 </a:tc>
                 <a:tc>
                   <a:txBody>
-                    <a:bodyPr wrap="square"/>
+                    <a:bodyPr/>
                     <a:lstStyle/>
                     <a:p>
                       <a:pPr algn="r"/>
@@ -6663,7 +6720,7 @@
                       </a:r>
                     </a:p>
                   </a:txBody>
-                  <a:tcPr anchor="ctr" marL="100584" marR="100584" marT="36576" marB="36576">
+                  <a:tcPr marL="100584" marR="100584" marT="36576" marB="36576" anchor="ctr">
                     <a:solidFill>
                       <a:srgbClr val="2B3A50"/>
                     </a:solidFill>
@@ -6671,7 +6728,7 @@
                 </a:tc>
                 <a:tc>
                   <a:txBody>
-                    <a:bodyPr wrap="square"/>
+                    <a:bodyPr/>
                     <a:lstStyle/>
                     <a:p>
                       <a:pPr algn="r"/>
@@ -6686,17 +6743,22 @@
                       </a:r>
                     </a:p>
                   </a:txBody>
-                  <a:tcPr anchor="ctr" marL="100584" marR="100584" marT="36576" marB="36576">
+                  <a:tcPr marL="100584" marR="100584" marT="36576" marB="36576" anchor="ctr">
                     <a:solidFill>
                       <a:srgbClr val="2B3A50"/>
                     </a:solidFill>
                   </a:tcPr>
                 </a:tc>
+                <a:extLst>
+                  <a:ext uri="{0D108BD9-81ED-4DB2-BD59-A6C34878D82A}">
+                    <a16:rowId xmlns:a16="http://schemas.microsoft.com/office/drawing/2014/main" val="10004"/>
+                  </a:ext>
+                </a:extLst>
               </a:tr>
               <a:tr h="393192">
                 <a:tc>
                   <a:txBody>
-                    <a:bodyPr wrap="square"/>
+                    <a:bodyPr/>
                     <a:lstStyle/>
                     <a:p>
                       <a:pPr algn="l"/>
@@ -6711,7 +6773,7 @@
                       </a:r>
                     </a:p>
                   </a:txBody>
-                  <a:tcPr anchor="ctr" marL="100584" marR="100584" marT="36576" marB="36576">
+                  <a:tcPr marL="100584" marR="100584" marT="36576" marB="36576" anchor="ctr">
                     <a:solidFill>
                       <a:srgbClr val="243247"/>
                     </a:solidFill>
@@ -6719,7 +6781,7 @@
                 </a:tc>
                 <a:tc>
                   <a:txBody>
-                    <a:bodyPr wrap="square"/>
+                    <a:bodyPr/>
                     <a:lstStyle/>
                     <a:p>
                       <a:pPr algn="r"/>
@@ -6734,7 +6796,7 @@
                       </a:r>
                     </a:p>
                   </a:txBody>
-                  <a:tcPr anchor="ctr" marL="100584" marR="100584" marT="36576" marB="36576">
+                  <a:tcPr marL="100584" marR="100584" marT="36576" marB="36576" anchor="ctr">
                     <a:solidFill>
                       <a:srgbClr val="243247"/>
                     </a:solidFill>
@@ -6742,7 +6804,7 @@
                 </a:tc>
                 <a:tc>
                   <a:txBody>
-                    <a:bodyPr wrap="square"/>
+                    <a:bodyPr/>
                     <a:lstStyle/>
                     <a:p>
                       <a:pPr algn="r"/>
@@ -6757,7 +6819,7 @@
                       </a:r>
                     </a:p>
                   </a:txBody>
-                  <a:tcPr anchor="ctr" marL="100584" marR="100584" marT="36576" marB="36576">
+                  <a:tcPr marL="100584" marR="100584" marT="36576" marB="36576" anchor="ctr">
                     <a:solidFill>
                       <a:srgbClr val="243247"/>
                     </a:solidFill>
@@ -6765,7 +6827,7 @@
                 </a:tc>
                 <a:tc>
                   <a:txBody>
-                    <a:bodyPr wrap="square"/>
+                    <a:bodyPr/>
                     <a:lstStyle/>
                     <a:p>
                       <a:pPr algn="r"/>
@@ -6780,7 +6842,7 @@
                       </a:r>
                     </a:p>
                   </a:txBody>
-                  <a:tcPr anchor="ctr" marL="100584" marR="100584" marT="36576" marB="36576">
+                  <a:tcPr marL="100584" marR="100584" marT="36576" marB="36576" anchor="ctr">
                     <a:solidFill>
                       <a:srgbClr val="243247"/>
                     </a:solidFill>
@@ -6788,7 +6850,7 @@
                 </a:tc>
                 <a:tc>
                   <a:txBody>
-                    <a:bodyPr wrap="square"/>
+                    <a:bodyPr/>
                     <a:lstStyle/>
                     <a:p>
                       <a:pPr algn="r"/>
@@ -6803,7 +6865,7 @@
                       </a:r>
                     </a:p>
                   </a:txBody>
-                  <a:tcPr anchor="ctr" marL="100584" marR="100584" marT="36576" marB="36576">
+                  <a:tcPr marL="100584" marR="100584" marT="36576" marB="36576" anchor="ctr">
                     <a:solidFill>
                       <a:srgbClr val="243247"/>
                     </a:solidFill>
@@ -6811,7 +6873,7 @@
                 </a:tc>
                 <a:tc>
                   <a:txBody>
-                    <a:bodyPr wrap="square"/>
+                    <a:bodyPr/>
                     <a:lstStyle/>
                     <a:p>
                       <a:pPr algn="r"/>
@@ -6826,12 +6888,17 @@
                       </a:r>
                     </a:p>
                   </a:txBody>
-                  <a:tcPr anchor="ctr" marL="100584" marR="100584" marT="36576" marB="36576">
+                  <a:tcPr marL="100584" marR="100584" marT="36576" marB="36576" anchor="ctr">
                     <a:solidFill>
                       <a:srgbClr val="243247"/>
                     </a:solidFill>
                   </a:tcPr>
                 </a:tc>
+                <a:extLst>
+                  <a:ext uri="{0D108BD9-81ED-4DB2-BD59-A6C34878D82A}">
+                    <a16:rowId xmlns:a16="http://schemas.microsoft.com/office/drawing/2014/main" val="10005"/>
+                  </a:ext>
+                </a:extLst>
               </a:tr>
             </a:tbl>
           </a:graphicData>
@@ -6854,7 +6921,7 @@
           <a:noFill/>
         </p:spPr>
         <p:txBody>
-          <a:bodyPr wrap="square" lIns="0" rIns="0" tIns="0" bIns="0">
+          <a:bodyPr wrap="square" lIns="0" tIns="0" rIns="0" bIns="0">
             <a:spAutoFit/>
           </a:bodyPr>
           <a:lstStyle/>
@@ -6941,7 +7008,7 @@
 </file>
 
 <file path=ppt/slides/slide12.xml><?xml version="1.0" encoding="utf-8"?>
-<p:sld xmlns:a="http://schemas.openxmlformats.org/drawingml/2006/main" xmlns:p="http://schemas.openxmlformats.org/presentationml/2006/main" xmlns:r="http://schemas.openxmlformats.org/officeDocument/2006/relationships">
+<p:sld xmlns:a="http://schemas.openxmlformats.org/drawingml/2006/main" xmlns:r="http://schemas.openxmlformats.org/officeDocument/2006/relationships" xmlns:p="http://schemas.openxmlformats.org/presentationml/2006/main">
   <p:cSld>
     <p:bg>
       <p:bgPr>
@@ -6957,7 +7024,14 @@
         <p:cNvGrpSpPr/>
         <p:nvPr/>
       </p:nvGrpSpPr>
-      <p:grpSpPr/>
+      <p:grpSpPr>
+        <a:xfrm>
+          <a:off x="0" y="0"/>
+          <a:ext cx="0" cy="0"/>
+          <a:chOff x="0" y="0"/>
+          <a:chExt cx="0" cy="0"/>
+        </a:xfrm>
+      </p:grpSpPr>
       <p:sp>
         <p:nvSpPr>
           <p:cNvPr id="2" name="TextBox 1"/>
@@ -6975,7 +7049,7 @@
           <a:noFill/>
         </p:spPr>
         <p:txBody>
-          <a:bodyPr wrap="square" lIns="0" rIns="0" tIns="0" bIns="0">
+          <a:bodyPr wrap="square" lIns="0" tIns="0" rIns="0" bIns="0">
             <a:spAutoFit/>
           </a:bodyPr>
           <a:lstStyle/>
@@ -7009,7 +7083,7 @@
           <a:noFill/>
         </p:spPr>
         <p:txBody>
-          <a:bodyPr wrap="square" lIns="0" rIns="0" tIns="0" bIns="0">
+          <a:bodyPr wrap="square" lIns="0" tIns="0" rIns="0" bIns="0">
             <a:spAutoFit/>
           </a:bodyPr>
           <a:lstStyle/>
@@ -7072,6 +7146,7 @@
           <a:lstStyle/>
           <a:p>
             <a:pPr algn="ctr"/>
+            <a:endParaRPr/>
           </a:p>
         </p:txBody>
       </p:sp>
@@ -7092,7 +7167,7 @@
           <a:noFill/>
         </p:spPr>
         <p:txBody>
-          <a:bodyPr wrap="square" lIns="0" rIns="0" tIns="0" bIns="0">
+          <a:bodyPr wrap="square" lIns="0" tIns="0" rIns="0" bIns="0">
             <a:spAutoFit/>
           </a:bodyPr>
           <a:lstStyle/>
@@ -7119,7 +7194,7 @@
           <p:nvPr/>
         </p:nvPicPr>
         <p:blipFill>
-          <a:blip r:embed="rId2"/>
+          <a:blip r:embed="rId3"/>
           <a:stretch>
             <a:fillRect/>
           </a:stretch>
@@ -7156,7 +7231,7 @@
           <a:noFill/>
         </p:spPr>
         <p:txBody>
-          <a:bodyPr wrap="square" lIns="0" rIns="0" tIns="0" bIns="0">
+          <a:bodyPr wrap="square" lIns="0" tIns="0" rIns="0" bIns="0">
             <a:spAutoFit/>
           </a:bodyPr>
           <a:lstStyle/>
@@ -7285,7 +7360,7 @@
 </file>
 
 <file path=ppt/slides/slide13.xml><?xml version="1.0" encoding="utf-8"?>
-<p:sld xmlns:a="http://schemas.openxmlformats.org/drawingml/2006/main" xmlns:p="http://schemas.openxmlformats.org/presentationml/2006/main" xmlns:r="http://schemas.openxmlformats.org/officeDocument/2006/relationships">
+<p:sld xmlns:a="http://schemas.openxmlformats.org/drawingml/2006/main" xmlns:r="http://schemas.openxmlformats.org/officeDocument/2006/relationships" xmlns:p="http://schemas.openxmlformats.org/presentationml/2006/main">
   <p:cSld>
     <p:bg>
       <p:bgPr>
@@ -7301,7 +7376,14 @@
         <p:cNvGrpSpPr/>
         <p:nvPr/>
       </p:nvGrpSpPr>
-      <p:grpSpPr/>
+      <p:grpSpPr>
+        <a:xfrm>
+          <a:off x="0" y="0"/>
+          <a:ext cx="0" cy="0"/>
+          <a:chOff x="0" y="0"/>
+          <a:chExt cx="0" cy="0"/>
+        </a:xfrm>
+      </p:grpSpPr>
       <p:sp>
         <p:nvSpPr>
           <p:cNvPr id="2" name="TextBox 1"/>
@@ -7319,7 +7401,7 @@
           <a:noFill/>
         </p:spPr>
         <p:txBody>
-          <a:bodyPr wrap="square" lIns="0" rIns="0" tIns="0" bIns="0">
+          <a:bodyPr wrap="square" lIns="0" tIns="0" rIns="0" bIns="0">
             <a:spAutoFit/>
           </a:bodyPr>
           <a:lstStyle/>
@@ -7353,7 +7435,7 @@
           <a:noFill/>
         </p:spPr>
         <p:txBody>
-          <a:bodyPr wrap="square" lIns="0" rIns="0" tIns="0" bIns="0">
+          <a:bodyPr wrap="square" lIns="0" tIns="0" rIns="0" bIns="0">
             <a:spAutoFit/>
           </a:bodyPr>
           <a:lstStyle/>
@@ -7416,6 +7498,7 @@
           <a:lstStyle/>
           <a:p>
             <a:pPr algn="ctr"/>
+            <a:endParaRPr/>
           </a:p>
         </p:txBody>
       </p:sp>
@@ -7436,7 +7519,7 @@
           <a:noFill/>
         </p:spPr>
         <p:txBody>
-          <a:bodyPr wrap="square" lIns="0" rIns="0" tIns="0" bIns="0">
+          <a:bodyPr wrap="square" lIns="0" tIns="0" rIns="0" bIns="0">
             <a:spAutoFit/>
           </a:bodyPr>
           <a:lstStyle/>
@@ -7473,16 +7556,46 @@
                 <a:tableStyleId>{2D5ABB26-0587-4C30-8999-92F81FD0307C}</a:tableStyleId>
               </a:tblPr>
               <a:tblGrid>
-                <a:gridCol w="3200400"/>
-                <a:gridCol w="822960"/>
-                <a:gridCol w="1097280"/>
-                <a:gridCol w="1097280"/>
-                <a:gridCol w="1005840"/>
+                <a:gridCol w="3200400">
+                  <a:extLst>
+                    <a:ext uri="{9D8B030D-6E8A-4147-A177-3AD203B41FA5}">
+                      <a16:colId xmlns:a16="http://schemas.microsoft.com/office/drawing/2014/main" val="20000"/>
+                    </a:ext>
+                  </a:extLst>
+                </a:gridCol>
+                <a:gridCol w="822960">
+                  <a:extLst>
+                    <a:ext uri="{9D8B030D-6E8A-4147-A177-3AD203B41FA5}">
+                      <a16:colId xmlns:a16="http://schemas.microsoft.com/office/drawing/2014/main" val="20001"/>
+                    </a:ext>
+                  </a:extLst>
+                </a:gridCol>
+                <a:gridCol w="1097280">
+                  <a:extLst>
+                    <a:ext uri="{9D8B030D-6E8A-4147-A177-3AD203B41FA5}">
+                      <a16:colId xmlns:a16="http://schemas.microsoft.com/office/drawing/2014/main" val="20002"/>
+                    </a:ext>
+                  </a:extLst>
+                </a:gridCol>
+                <a:gridCol w="1097280">
+                  <a:extLst>
+                    <a:ext uri="{9D8B030D-6E8A-4147-A177-3AD203B41FA5}">
+                      <a16:colId xmlns:a16="http://schemas.microsoft.com/office/drawing/2014/main" val="20003"/>
+                    </a:ext>
+                  </a:extLst>
+                </a:gridCol>
+                <a:gridCol w="1005840">
+                  <a:extLst>
+                    <a:ext uri="{9D8B030D-6E8A-4147-A177-3AD203B41FA5}">
+                      <a16:colId xmlns:a16="http://schemas.microsoft.com/office/drawing/2014/main" val="20004"/>
+                    </a:ext>
+                  </a:extLst>
+                </a:gridCol>
               </a:tblGrid>
               <a:tr h="493776">
                 <a:tc>
                   <a:txBody>
-                    <a:bodyPr wrap="square"/>
+                    <a:bodyPr/>
                     <a:lstStyle/>
                     <a:p>
                       <a:pPr algn="l"/>
@@ -7497,7 +7610,7 @@
                       </a:r>
                     </a:p>
                   </a:txBody>
-                  <a:tcPr anchor="ctr" marL="100584" marR="100584" marT="36576" marB="36576">
+                  <a:tcPr marL="100584" marR="100584" marT="36576" marB="36576" anchor="ctr">
                     <a:solidFill>
                       <a:srgbClr val="334155"/>
                     </a:solidFill>
@@ -7505,7 +7618,7 @@
                 </a:tc>
                 <a:tc>
                   <a:txBody>
-                    <a:bodyPr wrap="square"/>
+                    <a:bodyPr/>
                     <a:lstStyle/>
                     <a:p>
                       <a:pPr algn="r"/>
@@ -7520,7 +7633,7 @@
                       </a:r>
                     </a:p>
                   </a:txBody>
-                  <a:tcPr anchor="ctr" marL="100584" marR="100584" marT="36576" marB="36576">
+                  <a:tcPr marL="100584" marR="100584" marT="36576" marB="36576" anchor="ctr">
                     <a:solidFill>
                       <a:srgbClr val="334155"/>
                     </a:solidFill>
@@ -7528,7 +7641,7 @@
                 </a:tc>
                 <a:tc>
                   <a:txBody>
-                    <a:bodyPr wrap="square"/>
+                    <a:bodyPr/>
                     <a:lstStyle/>
                     <a:p>
                       <a:pPr algn="r"/>
@@ -7543,7 +7656,7 @@
                       </a:r>
                     </a:p>
                   </a:txBody>
-                  <a:tcPr anchor="ctr" marL="100584" marR="100584" marT="36576" marB="36576">
+                  <a:tcPr marL="100584" marR="100584" marT="36576" marB="36576" anchor="ctr">
                     <a:solidFill>
                       <a:srgbClr val="334155"/>
                     </a:solidFill>
@@ -7551,7 +7664,7 @@
                 </a:tc>
                 <a:tc>
                   <a:txBody>
-                    <a:bodyPr wrap="square"/>
+                    <a:bodyPr/>
                     <a:lstStyle/>
                     <a:p>
                       <a:pPr algn="r"/>
@@ -7566,7 +7679,7 @@
                       </a:r>
                     </a:p>
                   </a:txBody>
-                  <a:tcPr anchor="ctr" marL="100584" marR="100584" marT="36576" marB="36576">
+                  <a:tcPr marL="100584" marR="100584" marT="36576" marB="36576" anchor="ctr">
                     <a:solidFill>
                       <a:srgbClr val="334155"/>
                     </a:solidFill>
@@ -7574,7 +7687,7 @@
                 </a:tc>
                 <a:tc>
                   <a:txBody>
-                    <a:bodyPr wrap="square"/>
+                    <a:bodyPr/>
                     <a:lstStyle/>
                     <a:p>
                       <a:pPr algn="r"/>
@@ -7589,17 +7702,22 @@
                       </a:r>
                     </a:p>
                   </a:txBody>
-                  <a:tcPr anchor="ctr" marL="100584" marR="100584" marT="36576" marB="36576">
+                  <a:tcPr marL="100584" marR="100584" marT="36576" marB="36576" anchor="ctr">
                     <a:solidFill>
                       <a:srgbClr val="334155"/>
                     </a:solidFill>
                   </a:tcPr>
                 </a:tc>
+                <a:extLst>
+                  <a:ext uri="{0D108BD9-81ED-4DB2-BD59-A6C34878D82A}">
+                    <a16:rowId xmlns:a16="http://schemas.microsoft.com/office/drawing/2014/main" val="10000"/>
+                  </a:ext>
+                </a:extLst>
               </a:tr>
               <a:tr h="457200">
                 <a:tc>
                   <a:txBody>
-                    <a:bodyPr wrap="square"/>
+                    <a:bodyPr/>
                     <a:lstStyle/>
                     <a:p>
                       <a:pPr algn="l"/>
@@ -7614,7 +7732,7 @@
                       </a:r>
                     </a:p>
                   </a:txBody>
-                  <a:tcPr anchor="ctr" marL="100584" marR="100584" marT="36576" marB="36576">
+                  <a:tcPr marL="100584" marR="100584" marT="36576" marB="36576" anchor="ctr">
                     <a:solidFill>
                       <a:srgbClr val="243247"/>
                     </a:solidFill>
@@ -7622,7 +7740,7 @@
                 </a:tc>
                 <a:tc>
                   <a:txBody>
-                    <a:bodyPr wrap="square"/>
+                    <a:bodyPr/>
                     <a:lstStyle/>
                     <a:p>
                       <a:pPr algn="r"/>
@@ -7637,7 +7755,7 @@
                       </a:r>
                     </a:p>
                   </a:txBody>
-                  <a:tcPr anchor="ctr" marL="100584" marR="100584" marT="36576" marB="36576">
+                  <a:tcPr marL="100584" marR="100584" marT="36576" marB="36576" anchor="ctr">
                     <a:solidFill>
                       <a:srgbClr val="243247"/>
                     </a:solidFill>
@@ -7645,7 +7763,7 @@
                 </a:tc>
                 <a:tc>
                   <a:txBody>
-                    <a:bodyPr wrap="square"/>
+                    <a:bodyPr/>
                     <a:lstStyle/>
                     <a:p>
                       <a:pPr algn="r"/>
@@ -7660,7 +7778,7 @@
                       </a:r>
                     </a:p>
                   </a:txBody>
-                  <a:tcPr anchor="ctr" marL="100584" marR="100584" marT="36576" marB="36576">
+                  <a:tcPr marL="100584" marR="100584" marT="36576" marB="36576" anchor="ctr">
                     <a:solidFill>
                       <a:srgbClr val="243247"/>
                     </a:solidFill>
@@ -7668,7 +7786,7 @@
                 </a:tc>
                 <a:tc>
                   <a:txBody>
-                    <a:bodyPr wrap="square"/>
+                    <a:bodyPr/>
                     <a:lstStyle/>
                     <a:p>
                       <a:pPr algn="r"/>
@@ -7683,7 +7801,7 @@
                       </a:r>
                     </a:p>
                   </a:txBody>
-                  <a:tcPr anchor="ctr" marL="100584" marR="100584" marT="36576" marB="36576">
+                  <a:tcPr marL="100584" marR="100584" marT="36576" marB="36576" anchor="ctr">
                     <a:solidFill>
                       <a:srgbClr val="243247"/>
                     </a:solidFill>
@@ -7691,7 +7809,7 @@
                 </a:tc>
                 <a:tc>
                   <a:txBody>
-                    <a:bodyPr wrap="square"/>
+                    <a:bodyPr/>
                     <a:lstStyle/>
                     <a:p>
                       <a:pPr algn="r"/>
@@ -7706,17 +7824,22 @@
                       </a:r>
                     </a:p>
                   </a:txBody>
-                  <a:tcPr anchor="ctr" marL="100584" marR="100584" marT="36576" marB="36576">
+                  <a:tcPr marL="100584" marR="100584" marT="36576" marB="36576" anchor="ctr">
                     <a:solidFill>
                       <a:srgbClr val="243247"/>
                     </a:solidFill>
                   </a:tcPr>
                 </a:tc>
+                <a:extLst>
+                  <a:ext uri="{0D108BD9-81ED-4DB2-BD59-A6C34878D82A}">
+                    <a16:rowId xmlns:a16="http://schemas.microsoft.com/office/drawing/2014/main" val="10001"/>
+                  </a:ext>
+                </a:extLst>
               </a:tr>
               <a:tr h="457200">
                 <a:tc>
                   <a:txBody>
-                    <a:bodyPr wrap="square"/>
+                    <a:bodyPr/>
                     <a:lstStyle/>
                     <a:p>
                       <a:pPr algn="l"/>
@@ -7731,7 +7854,7 @@
                       </a:r>
                     </a:p>
                   </a:txBody>
-                  <a:tcPr anchor="ctr" marL="100584" marR="100584" marT="36576" marB="36576">
+                  <a:tcPr marL="100584" marR="100584" marT="36576" marB="36576" anchor="ctr">
                     <a:solidFill>
                       <a:srgbClr val="2B3A50"/>
                     </a:solidFill>
@@ -7739,7 +7862,7 @@
                 </a:tc>
                 <a:tc>
                   <a:txBody>
-                    <a:bodyPr wrap="square"/>
+                    <a:bodyPr/>
                     <a:lstStyle/>
                     <a:p>
                       <a:pPr algn="r"/>
@@ -7754,7 +7877,7 @@
                       </a:r>
                     </a:p>
                   </a:txBody>
-                  <a:tcPr anchor="ctr" marL="100584" marR="100584" marT="36576" marB="36576">
+                  <a:tcPr marL="100584" marR="100584" marT="36576" marB="36576" anchor="ctr">
                     <a:solidFill>
                       <a:srgbClr val="2B3A50"/>
                     </a:solidFill>
@@ -7762,7 +7885,7 @@
                 </a:tc>
                 <a:tc>
                   <a:txBody>
-                    <a:bodyPr wrap="square"/>
+                    <a:bodyPr/>
                     <a:lstStyle/>
                     <a:p>
                       <a:pPr algn="r"/>
@@ -7777,7 +7900,7 @@
                       </a:r>
                     </a:p>
                   </a:txBody>
-                  <a:tcPr anchor="ctr" marL="100584" marR="100584" marT="36576" marB="36576">
+                  <a:tcPr marL="100584" marR="100584" marT="36576" marB="36576" anchor="ctr">
                     <a:solidFill>
                       <a:srgbClr val="2B3A50"/>
                     </a:solidFill>
@@ -7785,7 +7908,7 @@
                 </a:tc>
                 <a:tc>
                   <a:txBody>
-                    <a:bodyPr wrap="square"/>
+                    <a:bodyPr/>
                     <a:lstStyle/>
                     <a:p>
                       <a:pPr algn="r"/>
@@ -7800,7 +7923,7 @@
                       </a:r>
                     </a:p>
                   </a:txBody>
-                  <a:tcPr anchor="ctr" marL="100584" marR="100584" marT="36576" marB="36576">
+                  <a:tcPr marL="100584" marR="100584" marT="36576" marB="36576" anchor="ctr">
                     <a:solidFill>
                       <a:srgbClr val="2B3A50"/>
                     </a:solidFill>
@@ -7808,7 +7931,7 @@
                 </a:tc>
                 <a:tc>
                   <a:txBody>
-                    <a:bodyPr wrap="square"/>
+                    <a:bodyPr/>
                     <a:lstStyle/>
                     <a:p>
                       <a:pPr algn="r"/>
@@ -7823,17 +7946,22 @@
                       </a:r>
                     </a:p>
                   </a:txBody>
-                  <a:tcPr anchor="ctr" marL="100584" marR="100584" marT="36576" marB="36576">
+                  <a:tcPr marL="100584" marR="100584" marT="36576" marB="36576" anchor="ctr">
                     <a:solidFill>
                       <a:srgbClr val="2B3A50"/>
                     </a:solidFill>
                   </a:tcPr>
                 </a:tc>
+                <a:extLst>
+                  <a:ext uri="{0D108BD9-81ED-4DB2-BD59-A6C34878D82A}">
+                    <a16:rowId xmlns:a16="http://schemas.microsoft.com/office/drawing/2014/main" val="10002"/>
+                  </a:ext>
+                </a:extLst>
               </a:tr>
               <a:tr h="457200">
                 <a:tc>
                   <a:txBody>
-                    <a:bodyPr wrap="square"/>
+                    <a:bodyPr/>
                     <a:lstStyle/>
                     <a:p>
                       <a:pPr algn="l"/>
@@ -7848,7 +7976,7 @@
                       </a:r>
                     </a:p>
                   </a:txBody>
-                  <a:tcPr anchor="ctr" marL="100584" marR="100584" marT="36576" marB="36576">
+                  <a:tcPr marL="100584" marR="100584" marT="36576" marB="36576" anchor="ctr">
                     <a:solidFill>
                       <a:srgbClr val="243247"/>
                     </a:solidFill>
@@ -7856,7 +7984,7 @@
                 </a:tc>
                 <a:tc>
                   <a:txBody>
-                    <a:bodyPr wrap="square"/>
+                    <a:bodyPr/>
                     <a:lstStyle/>
                     <a:p>
                       <a:pPr algn="r"/>
@@ -7871,7 +7999,7 @@
                       </a:r>
                     </a:p>
                   </a:txBody>
-                  <a:tcPr anchor="ctr" marL="100584" marR="100584" marT="36576" marB="36576">
+                  <a:tcPr marL="100584" marR="100584" marT="36576" marB="36576" anchor="ctr">
                     <a:solidFill>
                       <a:srgbClr val="243247"/>
                     </a:solidFill>
@@ -7879,7 +8007,7 @@
                 </a:tc>
                 <a:tc>
                   <a:txBody>
-                    <a:bodyPr wrap="square"/>
+                    <a:bodyPr/>
                     <a:lstStyle/>
                     <a:p>
                       <a:pPr algn="r"/>
@@ -7894,7 +8022,7 @@
                       </a:r>
                     </a:p>
                   </a:txBody>
-                  <a:tcPr anchor="ctr" marL="100584" marR="100584" marT="36576" marB="36576">
+                  <a:tcPr marL="100584" marR="100584" marT="36576" marB="36576" anchor="ctr">
                     <a:solidFill>
                       <a:srgbClr val="243247"/>
                     </a:solidFill>
@@ -7902,7 +8030,7 @@
                 </a:tc>
                 <a:tc>
                   <a:txBody>
-                    <a:bodyPr wrap="square"/>
+                    <a:bodyPr/>
                     <a:lstStyle/>
                     <a:p>
                       <a:pPr algn="r"/>
@@ -7917,7 +8045,7 @@
                       </a:r>
                     </a:p>
                   </a:txBody>
-                  <a:tcPr anchor="ctr" marL="100584" marR="100584" marT="36576" marB="36576">
+                  <a:tcPr marL="100584" marR="100584" marT="36576" marB="36576" anchor="ctr">
                     <a:solidFill>
                       <a:srgbClr val="243247"/>
                     </a:solidFill>
@@ -7925,7 +8053,7 @@
                 </a:tc>
                 <a:tc>
                   <a:txBody>
-                    <a:bodyPr wrap="square"/>
+                    <a:bodyPr/>
                     <a:lstStyle/>
                     <a:p>
                       <a:pPr algn="r"/>
@@ -7940,17 +8068,22 @@
                       </a:r>
                     </a:p>
                   </a:txBody>
-                  <a:tcPr anchor="ctr" marL="100584" marR="100584" marT="36576" marB="36576">
+                  <a:tcPr marL="100584" marR="100584" marT="36576" marB="36576" anchor="ctr">
                     <a:solidFill>
                       <a:srgbClr val="243247"/>
                     </a:solidFill>
                   </a:tcPr>
                 </a:tc>
+                <a:extLst>
+                  <a:ext uri="{0D108BD9-81ED-4DB2-BD59-A6C34878D82A}">
+                    <a16:rowId xmlns:a16="http://schemas.microsoft.com/office/drawing/2014/main" val="10003"/>
+                  </a:ext>
+                </a:extLst>
               </a:tr>
               <a:tr h="457200">
                 <a:tc>
                   <a:txBody>
-                    <a:bodyPr wrap="square"/>
+                    <a:bodyPr/>
                     <a:lstStyle/>
                     <a:p>
                       <a:pPr algn="l"/>
@@ -7965,7 +8098,7 @@
                       </a:r>
                     </a:p>
                   </a:txBody>
-                  <a:tcPr anchor="ctr" marL="100584" marR="100584" marT="36576" marB="36576">
+                  <a:tcPr marL="100584" marR="100584" marT="36576" marB="36576" anchor="ctr">
                     <a:solidFill>
                       <a:srgbClr val="2B3A50"/>
                     </a:solidFill>
@@ -7973,7 +8106,7 @@
                 </a:tc>
                 <a:tc>
                   <a:txBody>
-                    <a:bodyPr wrap="square"/>
+                    <a:bodyPr/>
                     <a:lstStyle/>
                     <a:p>
                       <a:pPr algn="r"/>
@@ -7988,7 +8121,7 @@
                       </a:r>
                     </a:p>
                   </a:txBody>
-                  <a:tcPr anchor="ctr" marL="100584" marR="100584" marT="36576" marB="36576">
+                  <a:tcPr marL="100584" marR="100584" marT="36576" marB="36576" anchor="ctr">
                     <a:solidFill>
                       <a:srgbClr val="2B3A50"/>
                     </a:solidFill>
@@ -7996,7 +8129,7 @@
                 </a:tc>
                 <a:tc>
                   <a:txBody>
-                    <a:bodyPr wrap="square"/>
+                    <a:bodyPr/>
                     <a:lstStyle/>
                     <a:p>
                       <a:pPr algn="r"/>
@@ -8011,7 +8144,7 @@
                       </a:r>
                     </a:p>
                   </a:txBody>
-                  <a:tcPr anchor="ctr" marL="100584" marR="100584" marT="36576" marB="36576">
+                  <a:tcPr marL="100584" marR="100584" marT="36576" marB="36576" anchor="ctr">
                     <a:solidFill>
                       <a:srgbClr val="2B3A50"/>
                     </a:solidFill>
@@ -8019,7 +8152,7 @@
                 </a:tc>
                 <a:tc>
                   <a:txBody>
-                    <a:bodyPr wrap="square"/>
+                    <a:bodyPr/>
                     <a:lstStyle/>
                     <a:p>
                       <a:pPr algn="r"/>
@@ -8034,7 +8167,7 @@
                       </a:r>
                     </a:p>
                   </a:txBody>
-                  <a:tcPr anchor="ctr" marL="100584" marR="100584" marT="36576" marB="36576">
+                  <a:tcPr marL="100584" marR="100584" marT="36576" marB="36576" anchor="ctr">
                     <a:solidFill>
                       <a:srgbClr val="2B3A50"/>
                     </a:solidFill>
@@ -8042,7 +8175,7 @@
                 </a:tc>
                 <a:tc>
                   <a:txBody>
-                    <a:bodyPr wrap="square"/>
+                    <a:bodyPr/>
                     <a:lstStyle/>
                     <a:p>
                       <a:pPr algn="r"/>
@@ -8057,17 +8190,22 @@
                       </a:r>
                     </a:p>
                   </a:txBody>
-                  <a:tcPr anchor="ctr" marL="100584" marR="100584" marT="36576" marB="36576">
+                  <a:tcPr marL="100584" marR="100584" marT="36576" marB="36576" anchor="ctr">
                     <a:solidFill>
                       <a:srgbClr val="2B3A50"/>
                     </a:solidFill>
                   </a:tcPr>
                 </a:tc>
+                <a:extLst>
+                  <a:ext uri="{0D108BD9-81ED-4DB2-BD59-A6C34878D82A}">
+                    <a16:rowId xmlns:a16="http://schemas.microsoft.com/office/drawing/2014/main" val="10004"/>
+                  </a:ext>
+                </a:extLst>
               </a:tr>
               <a:tr h="457200">
                 <a:tc>
                   <a:txBody>
-                    <a:bodyPr wrap="square"/>
+                    <a:bodyPr/>
                     <a:lstStyle/>
                     <a:p>
                       <a:pPr algn="l"/>
@@ -8082,7 +8220,7 @@
                       </a:r>
                     </a:p>
                   </a:txBody>
-                  <a:tcPr anchor="ctr" marL="100584" marR="100584" marT="36576" marB="36576">
+                  <a:tcPr marL="100584" marR="100584" marT="36576" marB="36576" anchor="ctr">
                     <a:solidFill>
                       <a:srgbClr val="243247"/>
                     </a:solidFill>
@@ -8090,7 +8228,7 @@
                 </a:tc>
                 <a:tc>
                   <a:txBody>
-                    <a:bodyPr wrap="square"/>
+                    <a:bodyPr/>
                     <a:lstStyle/>
                     <a:p>
                       <a:pPr algn="r"/>
@@ -8105,7 +8243,7 @@
                       </a:r>
                     </a:p>
                   </a:txBody>
-                  <a:tcPr anchor="ctr" marL="100584" marR="100584" marT="36576" marB="36576">
+                  <a:tcPr marL="100584" marR="100584" marT="36576" marB="36576" anchor="ctr">
                     <a:solidFill>
                       <a:srgbClr val="243247"/>
                     </a:solidFill>
@@ -8113,7 +8251,7 @@
                 </a:tc>
                 <a:tc>
                   <a:txBody>
-                    <a:bodyPr wrap="square"/>
+                    <a:bodyPr/>
                     <a:lstStyle/>
                     <a:p>
                       <a:pPr algn="r"/>
@@ -8128,7 +8266,7 @@
                       </a:r>
                     </a:p>
                   </a:txBody>
-                  <a:tcPr anchor="ctr" marL="100584" marR="100584" marT="36576" marB="36576">
+                  <a:tcPr marL="100584" marR="100584" marT="36576" marB="36576" anchor="ctr">
                     <a:solidFill>
                       <a:srgbClr val="243247"/>
                     </a:solidFill>
@@ -8136,7 +8274,7 @@
                 </a:tc>
                 <a:tc>
                   <a:txBody>
-                    <a:bodyPr wrap="square"/>
+                    <a:bodyPr/>
                     <a:lstStyle/>
                     <a:p>
                       <a:pPr algn="r"/>
@@ -8151,7 +8289,7 @@
                       </a:r>
                     </a:p>
                   </a:txBody>
-                  <a:tcPr anchor="ctr" marL="100584" marR="100584" marT="36576" marB="36576">
+                  <a:tcPr marL="100584" marR="100584" marT="36576" marB="36576" anchor="ctr">
                     <a:solidFill>
                       <a:srgbClr val="243247"/>
                     </a:solidFill>
@@ -8159,7 +8297,7 @@
                 </a:tc>
                 <a:tc>
                   <a:txBody>
-                    <a:bodyPr wrap="square"/>
+                    <a:bodyPr/>
                     <a:lstStyle/>
                     <a:p>
                       <a:pPr algn="r"/>
@@ -8174,17 +8312,22 @@
                       </a:r>
                     </a:p>
                   </a:txBody>
-                  <a:tcPr anchor="ctr" marL="100584" marR="100584" marT="36576" marB="36576">
+                  <a:tcPr marL="100584" marR="100584" marT="36576" marB="36576" anchor="ctr">
                     <a:solidFill>
                       <a:srgbClr val="243247"/>
                     </a:solidFill>
                   </a:tcPr>
                 </a:tc>
+                <a:extLst>
+                  <a:ext uri="{0D108BD9-81ED-4DB2-BD59-A6C34878D82A}">
+                    <a16:rowId xmlns:a16="http://schemas.microsoft.com/office/drawing/2014/main" val="10005"/>
+                  </a:ext>
+                </a:extLst>
               </a:tr>
               <a:tr h="457200">
                 <a:tc>
                   <a:txBody>
-                    <a:bodyPr wrap="square"/>
+                    <a:bodyPr/>
                     <a:lstStyle/>
                     <a:p>
                       <a:pPr algn="l"/>
@@ -8199,7 +8342,7 @@
                       </a:r>
                     </a:p>
                   </a:txBody>
-                  <a:tcPr anchor="ctr" marL="100584" marR="100584" marT="36576" marB="36576">
+                  <a:tcPr marL="100584" marR="100584" marT="36576" marB="36576" anchor="ctr">
                     <a:solidFill>
                       <a:srgbClr val="2B3A50"/>
                     </a:solidFill>
@@ -8207,7 +8350,7 @@
                 </a:tc>
                 <a:tc>
                   <a:txBody>
-                    <a:bodyPr wrap="square"/>
+                    <a:bodyPr/>
                     <a:lstStyle/>
                     <a:p>
                       <a:pPr algn="r"/>
@@ -8222,7 +8365,7 @@
                       </a:r>
                     </a:p>
                   </a:txBody>
-                  <a:tcPr anchor="ctr" marL="100584" marR="100584" marT="36576" marB="36576">
+                  <a:tcPr marL="100584" marR="100584" marT="36576" marB="36576" anchor="ctr">
                     <a:solidFill>
                       <a:srgbClr val="2B3A50"/>
                     </a:solidFill>
@@ -8230,7 +8373,7 @@
                 </a:tc>
                 <a:tc>
                   <a:txBody>
-                    <a:bodyPr wrap="square"/>
+                    <a:bodyPr/>
                     <a:lstStyle/>
                     <a:p>
                       <a:pPr algn="r"/>
@@ -8245,7 +8388,7 @@
                       </a:r>
                     </a:p>
                   </a:txBody>
-                  <a:tcPr anchor="ctr" marL="100584" marR="100584" marT="36576" marB="36576">
+                  <a:tcPr marL="100584" marR="100584" marT="36576" marB="36576" anchor="ctr">
                     <a:solidFill>
                       <a:srgbClr val="2B3A50"/>
                     </a:solidFill>
@@ -8253,7 +8396,7 @@
                 </a:tc>
                 <a:tc>
                   <a:txBody>
-                    <a:bodyPr wrap="square"/>
+                    <a:bodyPr/>
                     <a:lstStyle/>
                     <a:p>
                       <a:pPr algn="r"/>
@@ -8268,7 +8411,7 @@
                       </a:r>
                     </a:p>
                   </a:txBody>
-                  <a:tcPr anchor="ctr" marL="100584" marR="100584" marT="36576" marB="36576">
+                  <a:tcPr marL="100584" marR="100584" marT="36576" marB="36576" anchor="ctr">
                     <a:solidFill>
                       <a:srgbClr val="2B3A50"/>
                     </a:solidFill>
@@ -8276,7 +8419,7 @@
                 </a:tc>
                 <a:tc>
                   <a:txBody>
-                    <a:bodyPr wrap="square"/>
+                    <a:bodyPr/>
                     <a:lstStyle/>
                     <a:p>
                       <a:pPr algn="r"/>
@@ -8291,17 +8434,22 @@
                       </a:r>
                     </a:p>
                   </a:txBody>
-                  <a:tcPr anchor="ctr" marL="100584" marR="100584" marT="36576" marB="36576">
+                  <a:tcPr marL="100584" marR="100584" marT="36576" marB="36576" anchor="ctr">
                     <a:solidFill>
                       <a:srgbClr val="2B3A50"/>
                     </a:solidFill>
                   </a:tcPr>
                 </a:tc>
+                <a:extLst>
+                  <a:ext uri="{0D108BD9-81ED-4DB2-BD59-A6C34878D82A}">
+                    <a16:rowId xmlns:a16="http://schemas.microsoft.com/office/drawing/2014/main" val="10006"/>
+                  </a:ext>
+                </a:extLst>
               </a:tr>
               <a:tr h="457200">
                 <a:tc>
                   <a:txBody>
-                    <a:bodyPr wrap="square"/>
+                    <a:bodyPr/>
                     <a:lstStyle/>
                     <a:p>
                       <a:pPr algn="l"/>
@@ -8316,7 +8464,7 @@
                       </a:r>
                     </a:p>
                   </a:txBody>
-                  <a:tcPr anchor="ctr" marL="100584" marR="100584" marT="36576" marB="36576">
+                  <a:tcPr marL="100584" marR="100584" marT="36576" marB="36576" anchor="ctr">
                     <a:solidFill>
                       <a:srgbClr val="243247"/>
                     </a:solidFill>
@@ -8324,7 +8472,7 @@
                 </a:tc>
                 <a:tc>
                   <a:txBody>
-                    <a:bodyPr wrap="square"/>
+                    <a:bodyPr/>
                     <a:lstStyle/>
                     <a:p>
                       <a:pPr algn="r"/>
@@ -8339,7 +8487,7 @@
                       </a:r>
                     </a:p>
                   </a:txBody>
-                  <a:tcPr anchor="ctr" marL="100584" marR="100584" marT="36576" marB="36576">
+                  <a:tcPr marL="100584" marR="100584" marT="36576" marB="36576" anchor="ctr">
                     <a:solidFill>
                       <a:srgbClr val="243247"/>
                     </a:solidFill>
@@ -8347,7 +8495,7 @@
                 </a:tc>
                 <a:tc>
                   <a:txBody>
-                    <a:bodyPr wrap="square"/>
+                    <a:bodyPr/>
                     <a:lstStyle/>
                     <a:p>
                       <a:pPr algn="r"/>
@@ -8362,7 +8510,7 @@
                       </a:r>
                     </a:p>
                   </a:txBody>
-                  <a:tcPr anchor="ctr" marL="100584" marR="100584" marT="36576" marB="36576">
+                  <a:tcPr marL="100584" marR="100584" marT="36576" marB="36576" anchor="ctr">
                     <a:solidFill>
                       <a:srgbClr val="243247"/>
                     </a:solidFill>
@@ -8370,7 +8518,7 @@
                 </a:tc>
                 <a:tc>
                   <a:txBody>
-                    <a:bodyPr wrap="square"/>
+                    <a:bodyPr/>
                     <a:lstStyle/>
                     <a:p>
                       <a:pPr algn="r"/>
@@ -8385,7 +8533,7 @@
                       </a:r>
                     </a:p>
                   </a:txBody>
-                  <a:tcPr anchor="ctr" marL="100584" marR="100584" marT="36576" marB="36576">
+                  <a:tcPr marL="100584" marR="100584" marT="36576" marB="36576" anchor="ctr">
                     <a:solidFill>
                       <a:srgbClr val="243247"/>
                     </a:solidFill>
@@ -8393,7 +8541,7 @@
                 </a:tc>
                 <a:tc>
                   <a:txBody>
-                    <a:bodyPr wrap="square"/>
+                    <a:bodyPr/>
                     <a:lstStyle/>
                     <a:p>
                       <a:pPr algn="r"/>
@@ -8408,17 +8556,22 @@
                       </a:r>
                     </a:p>
                   </a:txBody>
-                  <a:tcPr anchor="ctr" marL="100584" marR="100584" marT="36576" marB="36576">
+                  <a:tcPr marL="100584" marR="100584" marT="36576" marB="36576" anchor="ctr">
                     <a:solidFill>
                       <a:srgbClr val="243247"/>
                     </a:solidFill>
                   </a:tcPr>
                 </a:tc>
+                <a:extLst>
+                  <a:ext uri="{0D108BD9-81ED-4DB2-BD59-A6C34878D82A}">
+                    <a16:rowId xmlns:a16="http://schemas.microsoft.com/office/drawing/2014/main" val="10007"/>
+                  </a:ext>
+                </a:extLst>
               </a:tr>
               <a:tr h="457200">
                 <a:tc>
                   <a:txBody>
-                    <a:bodyPr wrap="square"/>
+                    <a:bodyPr/>
                     <a:lstStyle/>
                     <a:p>
                       <a:pPr algn="l"/>
@@ -8433,7 +8586,7 @@
                       </a:r>
                     </a:p>
                   </a:txBody>
-                  <a:tcPr anchor="ctr" marL="100584" marR="100584" marT="36576" marB="36576">
+                  <a:tcPr marL="100584" marR="100584" marT="36576" marB="36576" anchor="ctr">
                     <a:solidFill>
                       <a:srgbClr val="2B3A50"/>
                     </a:solidFill>
@@ -8441,7 +8594,7 @@
                 </a:tc>
                 <a:tc>
                   <a:txBody>
-                    <a:bodyPr wrap="square"/>
+                    <a:bodyPr/>
                     <a:lstStyle/>
                     <a:p>
                       <a:pPr algn="r"/>
@@ -8456,7 +8609,7 @@
                       </a:r>
                     </a:p>
                   </a:txBody>
-                  <a:tcPr anchor="ctr" marL="100584" marR="100584" marT="36576" marB="36576">
+                  <a:tcPr marL="100584" marR="100584" marT="36576" marB="36576" anchor="ctr">
                     <a:solidFill>
                       <a:srgbClr val="2B3A50"/>
                     </a:solidFill>
@@ -8464,7 +8617,7 @@
                 </a:tc>
                 <a:tc>
                   <a:txBody>
-                    <a:bodyPr wrap="square"/>
+                    <a:bodyPr/>
                     <a:lstStyle/>
                     <a:p>
                       <a:pPr algn="r"/>
@@ -8479,7 +8632,7 @@
                       </a:r>
                     </a:p>
                   </a:txBody>
-                  <a:tcPr anchor="ctr" marL="100584" marR="100584" marT="36576" marB="36576">
+                  <a:tcPr marL="100584" marR="100584" marT="36576" marB="36576" anchor="ctr">
                     <a:solidFill>
                       <a:srgbClr val="2B3A50"/>
                     </a:solidFill>
@@ -8487,7 +8640,7 @@
                 </a:tc>
                 <a:tc>
                   <a:txBody>
-                    <a:bodyPr wrap="square"/>
+                    <a:bodyPr/>
                     <a:lstStyle/>
                     <a:p>
                       <a:pPr algn="r"/>
@@ -8502,7 +8655,7 @@
                       </a:r>
                     </a:p>
                   </a:txBody>
-                  <a:tcPr anchor="ctr" marL="100584" marR="100584" marT="36576" marB="36576">
+                  <a:tcPr marL="100584" marR="100584" marT="36576" marB="36576" anchor="ctr">
                     <a:solidFill>
                       <a:srgbClr val="2B3A50"/>
                     </a:solidFill>
@@ -8510,7 +8663,7 @@
                 </a:tc>
                 <a:tc>
                   <a:txBody>
-                    <a:bodyPr wrap="square"/>
+                    <a:bodyPr/>
                     <a:lstStyle/>
                     <a:p>
                       <a:pPr algn="r"/>
@@ -8525,12 +8678,17 @@
                       </a:r>
                     </a:p>
                   </a:txBody>
-                  <a:tcPr anchor="ctr" marL="100584" marR="100584" marT="36576" marB="36576">
+                  <a:tcPr marL="100584" marR="100584" marT="36576" marB="36576" anchor="ctr">
                     <a:solidFill>
                       <a:srgbClr val="2B3A50"/>
                     </a:solidFill>
                   </a:tcPr>
                 </a:tc>
+                <a:extLst>
+                  <a:ext uri="{0D108BD9-81ED-4DB2-BD59-A6C34878D82A}">
+                    <a16:rowId xmlns:a16="http://schemas.microsoft.com/office/drawing/2014/main" val="10008"/>
+                  </a:ext>
+                </a:extLst>
               </a:tr>
             </a:tbl>
           </a:graphicData>
@@ -8553,7 +8711,7 @@
           <a:noFill/>
         </p:spPr>
         <p:txBody>
-          <a:bodyPr wrap="square" lIns="0" rIns="0" tIns="0" bIns="0">
+          <a:bodyPr wrap="square" lIns="0" tIns="0" rIns="0" bIns="0">
             <a:spAutoFit/>
           </a:bodyPr>
           <a:lstStyle/>
@@ -8640,7 +8798,7 @@
 </file>
 
 <file path=ppt/slides/slide14.xml><?xml version="1.0" encoding="utf-8"?>
-<p:sld xmlns:a="http://schemas.openxmlformats.org/drawingml/2006/main" xmlns:p="http://schemas.openxmlformats.org/presentationml/2006/main" xmlns:r="http://schemas.openxmlformats.org/officeDocument/2006/relationships">
+<p:sld xmlns:a="http://schemas.openxmlformats.org/drawingml/2006/main" xmlns:r="http://schemas.openxmlformats.org/officeDocument/2006/relationships" xmlns:p="http://schemas.openxmlformats.org/presentationml/2006/main">
   <p:cSld>
     <p:bg>
       <p:bgPr>
@@ -8656,7 +8814,14 @@
         <p:cNvGrpSpPr/>
         <p:nvPr/>
       </p:nvGrpSpPr>
-      <p:grpSpPr/>
+      <p:grpSpPr>
+        <a:xfrm>
+          <a:off x="0" y="0"/>
+          <a:ext cx="0" cy="0"/>
+          <a:chOff x="0" y="0"/>
+          <a:chExt cx="0" cy="0"/>
+        </a:xfrm>
+      </p:grpSpPr>
       <p:sp>
         <p:nvSpPr>
           <p:cNvPr id="2" name="TextBox 1"/>
@@ -8674,7 +8839,7 @@
           <a:noFill/>
         </p:spPr>
         <p:txBody>
-          <a:bodyPr wrap="square" lIns="0" rIns="0" tIns="0" bIns="0">
+          <a:bodyPr wrap="square" lIns="0" tIns="0" rIns="0" bIns="0">
             <a:spAutoFit/>
           </a:bodyPr>
           <a:lstStyle/>
@@ -8708,7 +8873,7 @@
           <a:noFill/>
         </p:spPr>
         <p:txBody>
-          <a:bodyPr wrap="square" lIns="0" rIns="0" tIns="0" bIns="0">
+          <a:bodyPr wrap="square" lIns="0" tIns="0" rIns="0" bIns="0">
             <a:spAutoFit/>
           </a:bodyPr>
           <a:lstStyle/>
@@ -8771,6 +8936,7 @@
           <a:lstStyle/>
           <a:p>
             <a:pPr algn="ctr"/>
+            <a:endParaRPr/>
           </a:p>
         </p:txBody>
       </p:sp>
@@ -8791,7 +8957,7 @@
           <a:noFill/>
         </p:spPr>
         <p:txBody>
-          <a:bodyPr wrap="square" lIns="0" rIns="0" tIns="0" bIns="0">
+          <a:bodyPr wrap="square" lIns="0" tIns="0" rIns="0" bIns="0">
             <a:spAutoFit/>
           </a:bodyPr>
           <a:lstStyle/>
@@ -8826,7 +8992,7 @@
           <a:noFill/>
         </p:spPr>
         <p:txBody>
-          <a:bodyPr wrap="square" lIns="0" rIns="0" tIns="0" bIns="0">
+          <a:bodyPr wrap="square" lIns="0" tIns="0" rIns="0" bIns="0">
             <a:spAutoFit/>
           </a:bodyPr>
           <a:lstStyle/>
@@ -8954,7 +9120,7 @@
           <a:noFill/>
         </p:spPr>
         <p:txBody>
-          <a:bodyPr wrap="square" lIns="0" rIns="0" tIns="0" bIns="0">
+          <a:bodyPr wrap="square" lIns="0" tIns="0" rIns="0" bIns="0">
             <a:spAutoFit/>
           </a:bodyPr>
           <a:lstStyle/>
@@ -8980,7 +9146,7 @@
 </file>
 
 <file path=ppt/slides/slide15.xml><?xml version="1.0" encoding="utf-8"?>
-<p:sld xmlns:a="http://schemas.openxmlformats.org/drawingml/2006/main" xmlns:p="http://schemas.openxmlformats.org/presentationml/2006/main" xmlns:r="http://schemas.openxmlformats.org/officeDocument/2006/relationships">
+<p:sld xmlns:a="http://schemas.openxmlformats.org/drawingml/2006/main" xmlns:r="http://schemas.openxmlformats.org/officeDocument/2006/relationships" xmlns:p="http://schemas.openxmlformats.org/presentationml/2006/main">
   <p:cSld>
     <p:bg>
       <p:bgPr>
@@ -8996,7 +9162,14 @@
         <p:cNvGrpSpPr/>
         <p:nvPr/>
       </p:nvGrpSpPr>
-      <p:grpSpPr/>
+      <p:grpSpPr>
+        <a:xfrm>
+          <a:off x="0" y="0"/>
+          <a:ext cx="0" cy="0"/>
+          <a:chOff x="0" y="0"/>
+          <a:chExt cx="0" cy="0"/>
+        </a:xfrm>
+      </p:grpSpPr>
       <p:sp>
         <p:nvSpPr>
           <p:cNvPr id="2" name="TextBox 1"/>
@@ -9014,7 +9187,7 @@
           <a:noFill/>
         </p:spPr>
         <p:txBody>
-          <a:bodyPr wrap="square" lIns="0" rIns="0" tIns="0" bIns="0">
+          <a:bodyPr wrap="square" lIns="0" tIns="0" rIns="0" bIns="0">
             <a:spAutoFit/>
           </a:bodyPr>
           <a:lstStyle/>
@@ -9049,7 +9222,7 @@
           <a:noFill/>
         </p:spPr>
         <p:txBody>
-          <a:bodyPr wrap="square" lIns="0" rIns="0" tIns="0" bIns="0">
+          <a:bodyPr wrap="square" lIns="0" tIns="0" rIns="0" bIns="0">
             <a:spAutoFit/>
           </a:bodyPr>
           <a:lstStyle/>
@@ -9107,6 +9280,7 @@
           <a:lstStyle/>
           <a:p>
             <a:pPr algn="ctr"/>
+            <a:endParaRPr/>
           </a:p>
         </p:txBody>
       </p:sp>
@@ -9127,7 +9301,7 @@
           <a:noFill/>
         </p:spPr>
         <p:txBody>
-          <a:bodyPr wrap="square" lIns="0" rIns="0" tIns="0" bIns="0">
+          <a:bodyPr wrap="square" lIns="0" tIns="0" rIns="0" bIns="0">
             <a:spAutoFit/>
           </a:bodyPr>
           <a:lstStyle/>
@@ -9182,7 +9356,7 @@
           <a:noFill/>
         </p:spPr>
         <p:txBody>
-          <a:bodyPr wrap="square" lIns="0" rIns="0" tIns="0" bIns="0">
+          <a:bodyPr wrap="square" lIns="0" tIns="0" rIns="0" bIns="0">
             <a:spAutoFit/>
           </a:bodyPr>
           <a:lstStyle/>
@@ -9209,7 +9383,7 @@
 </file>
 
 <file path=ppt/slides/slide16.xml><?xml version="1.0" encoding="utf-8"?>
-<p:sld xmlns:a="http://schemas.openxmlformats.org/drawingml/2006/main" xmlns:p="http://schemas.openxmlformats.org/presentationml/2006/main" xmlns:r="http://schemas.openxmlformats.org/officeDocument/2006/relationships">
+<p:sld xmlns:a="http://schemas.openxmlformats.org/drawingml/2006/main" xmlns:r="http://schemas.openxmlformats.org/officeDocument/2006/relationships" xmlns:p="http://schemas.openxmlformats.org/presentationml/2006/main">
   <p:cSld>
     <p:bg>
       <p:bgPr>
@@ -9225,7 +9399,14 @@
         <p:cNvGrpSpPr/>
         <p:nvPr/>
       </p:nvGrpSpPr>
-      <p:grpSpPr/>
+      <p:grpSpPr>
+        <a:xfrm>
+          <a:off x="0" y="0"/>
+          <a:ext cx="0" cy="0"/>
+          <a:chOff x="0" y="0"/>
+          <a:chExt cx="0" cy="0"/>
+        </a:xfrm>
+      </p:grpSpPr>
       <p:sp>
         <p:nvSpPr>
           <p:cNvPr id="2" name="TextBox 1"/>
@@ -9243,7 +9424,7 @@
           <a:noFill/>
         </p:spPr>
         <p:txBody>
-          <a:bodyPr wrap="square" lIns="0" rIns="0" tIns="0" bIns="0">
+          <a:bodyPr wrap="square" lIns="0" tIns="0" rIns="0" bIns="0">
             <a:spAutoFit/>
           </a:bodyPr>
           <a:lstStyle/>
@@ -9277,7 +9458,7 @@
           <a:noFill/>
         </p:spPr>
         <p:txBody>
-          <a:bodyPr wrap="square" lIns="0" rIns="0" tIns="0" bIns="0">
+          <a:bodyPr wrap="square" lIns="0" tIns="0" rIns="0" bIns="0">
             <a:spAutoFit/>
           </a:bodyPr>
           <a:lstStyle/>
@@ -9340,6 +9521,7 @@
           <a:lstStyle/>
           <a:p>
             <a:pPr algn="ctr"/>
+            <a:endParaRPr/>
           </a:p>
         </p:txBody>
       </p:sp>
@@ -9360,7 +9542,7 @@
           <a:noFill/>
         </p:spPr>
         <p:txBody>
-          <a:bodyPr wrap="square" lIns="0" rIns="0" tIns="0" bIns="0">
+          <a:bodyPr wrap="square" lIns="0" tIns="0" rIns="0" bIns="0">
             <a:spAutoFit/>
           </a:bodyPr>
           <a:lstStyle/>
@@ -9395,7 +9577,7 @@
           <a:noFill/>
         </p:spPr>
         <p:txBody>
-          <a:bodyPr wrap="square" lIns="0" rIns="0" tIns="0" bIns="0">
+          <a:bodyPr wrap="square" lIns="0" tIns="0" rIns="0" bIns="0">
             <a:spAutoFit/>
           </a:bodyPr>
           <a:lstStyle/>
@@ -9634,7 +9816,7 @@
 </file>
 
 <file path=ppt/slides/slide17.xml><?xml version="1.0" encoding="utf-8"?>
-<p:sld xmlns:a="http://schemas.openxmlformats.org/drawingml/2006/main" xmlns:p="http://schemas.openxmlformats.org/presentationml/2006/main" xmlns:r="http://schemas.openxmlformats.org/officeDocument/2006/relationships">
+<p:sld xmlns:a="http://schemas.openxmlformats.org/drawingml/2006/main" xmlns:r="http://schemas.openxmlformats.org/officeDocument/2006/relationships" xmlns:p="http://schemas.openxmlformats.org/presentationml/2006/main">
   <p:cSld>
     <p:bg>
       <p:bgPr>
@@ -9650,7 +9832,14 @@
         <p:cNvGrpSpPr/>
         <p:nvPr/>
       </p:nvGrpSpPr>
-      <p:grpSpPr/>
+      <p:grpSpPr>
+        <a:xfrm>
+          <a:off x="0" y="0"/>
+          <a:ext cx="0" cy="0"/>
+          <a:chOff x="0" y="0"/>
+          <a:chExt cx="0" cy="0"/>
+        </a:xfrm>
+      </p:grpSpPr>
       <p:sp>
         <p:nvSpPr>
           <p:cNvPr id="2" name="TextBox 1"/>
@@ -9668,7 +9857,7 @@
           <a:noFill/>
         </p:spPr>
         <p:txBody>
-          <a:bodyPr wrap="square" lIns="0" rIns="0" tIns="0" bIns="0">
+          <a:bodyPr wrap="square" lIns="0" tIns="0" rIns="0" bIns="0">
             <a:spAutoFit/>
           </a:bodyPr>
           <a:lstStyle/>
@@ -9702,7 +9891,7 @@
           <a:noFill/>
         </p:spPr>
         <p:txBody>
-          <a:bodyPr wrap="square" lIns="0" rIns="0" tIns="0" bIns="0">
+          <a:bodyPr wrap="square" lIns="0" tIns="0" rIns="0" bIns="0">
             <a:spAutoFit/>
           </a:bodyPr>
           <a:lstStyle/>
@@ -9765,6 +9954,7 @@
           <a:lstStyle/>
           <a:p>
             <a:pPr algn="ctr"/>
+            <a:endParaRPr/>
           </a:p>
         </p:txBody>
       </p:sp>
@@ -9785,7 +9975,7 @@
           <a:noFill/>
         </p:spPr>
         <p:txBody>
-          <a:bodyPr wrap="square" lIns="0" rIns="0" tIns="0" bIns="0">
+          <a:bodyPr wrap="square" lIns="0" tIns="0" rIns="0" bIns="0">
             <a:spAutoFit/>
           </a:bodyPr>
           <a:lstStyle/>
@@ -9820,7 +10010,7 @@
           <a:noFill/>
         </p:spPr>
         <p:txBody>
-          <a:bodyPr wrap="square" lIns="0" rIns="0" tIns="0" bIns="0">
+          <a:bodyPr wrap="square" lIns="0" tIns="0" rIns="0" bIns="0">
             <a:spAutoFit/>
           </a:bodyPr>
           <a:lstStyle/>
@@ -9856,17 +10046,53 @@
                 <a:tableStyleId>{2D5ABB26-0587-4C30-8999-92F81FD0307C}</a:tableStyleId>
               </a:tblPr>
               <a:tblGrid>
-                <a:gridCol w="1828800"/>
-                <a:gridCol w="1097280"/>
-                <a:gridCol w="1097280"/>
-                <a:gridCol w="1097280"/>
-                <a:gridCol w="1005840"/>
-                <a:gridCol w="2377440"/>
+                <a:gridCol w="1828800">
+                  <a:extLst>
+                    <a:ext uri="{9D8B030D-6E8A-4147-A177-3AD203B41FA5}">
+                      <a16:colId xmlns:a16="http://schemas.microsoft.com/office/drawing/2014/main" val="20000"/>
+                    </a:ext>
+                  </a:extLst>
+                </a:gridCol>
+                <a:gridCol w="1097280">
+                  <a:extLst>
+                    <a:ext uri="{9D8B030D-6E8A-4147-A177-3AD203B41FA5}">
+                      <a16:colId xmlns:a16="http://schemas.microsoft.com/office/drawing/2014/main" val="20001"/>
+                    </a:ext>
+                  </a:extLst>
+                </a:gridCol>
+                <a:gridCol w="1097280">
+                  <a:extLst>
+                    <a:ext uri="{9D8B030D-6E8A-4147-A177-3AD203B41FA5}">
+                      <a16:colId xmlns:a16="http://schemas.microsoft.com/office/drawing/2014/main" val="20002"/>
+                    </a:ext>
+                  </a:extLst>
+                </a:gridCol>
+                <a:gridCol w="1097280">
+                  <a:extLst>
+                    <a:ext uri="{9D8B030D-6E8A-4147-A177-3AD203B41FA5}">
+                      <a16:colId xmlns:a16="http://schemas.microsoft.com/office/drawing/2014/main" val="20003"/>
+                    </a:ext>
+                  </a:extLst>
+                </a:gridCol>
+                <a:gridCol w="1005840">
+                  <a:extLst>
+                    <a:ext uri="{9D8B030D-6E8A-4147-A177-3AD203B41FA5}">
+                      <a16:colId xmlns:a16="http://schemas.microsoft.com/office/drawing/2014/main" val="20004"/>
+                    </a:ext>
+                  </a:extLst>
+                </a:gridCol>
+                <a:gridCol w="2377440">
+                  <a:extLst>
+                    <a:ext uri="{9D8B030D-6E8A-4147-A177-3AD203B41FA5}">
+                      <a16:colId xmlns:a16="http://schemas.microsoft.com/office/drawing/2014/main" val="20005"/>
+                    </a:ext>
+                  </a:extLst>
+                </a:gridCol>
               </a:tblGrid>
               <a:tr h="429768">
                 <a:tc>
                   <a:txBody>
-                    <a:bodyPr wrap="square"/>
+                    <a:bodyPr/>
                     <a:lstStyle/>
                     <a:p>
                       <a:pPr algn="l"/>
@@ -9881,7 +10107,7 @@
                       </a:r>
                     </a:p>
                   </a:txBody>
-                  <a:tcPr anchor="ctr" marL="100584" marR="100584" marT="36576" marB="36576">
+                  <a:tcPr marL="100584" marR="100584" marT="36576" marB="36576" anchor="ctr">
                     <a:solidFill>
                       <a:srgbClr val="334155"/>
                     </a:solidFill>
@@ -9889,7 +10115,7 @@
                 </a:tc>
                 <a:tc>
                   <a:txBody>
-                    <a:bodyPr wrap="square"/>
+                    <a:bodyPr/>
                     <a:lstStyle/>
                     <a:p>
                       <a:pPr algn="r"/>
@@ -9904,7 +10130,7 @@
                       </a:r>
                     </a:p>
                   </a:txBody>
-                  <a:tcPr anchor="ctr" marL="100584" marR="100584" marT="36576" marB="36576">
+                  <a:tcPr marL="100584" marR="100584" marT="36576" marB="36576" anchor="ctr">
                     <a:solidFill>
                       <a:srgbClr val="334155"/>
                     </a:solidFill>
@@ -9912,7 +10138,7 @@
                 </a:tc>
                 <a:tc>
                   <a:txBody>
-                    <a:bodyPr wrap="square"/>
+                    <a:bodyPr/>
                     <a:lstStyle/>
                     <a:p>
                       <a:pPr algn="r"/>
@@ -9927,7 +10153,7 @@
                       </a:r>
                     </a:p>
                   </a:txBody>
-                  <a:tcPr anchor="ctr" marL="100584" marR="100584" marT="36576" marB="36576">
+                  <a:tcPr marL="100584" marR="100584" marT="36576" marB="36576" anchor="ctr">
                     <a:solidFill>
                       <a:srgbClr val="334155"/>
                     </a:solidFill>
@@ -9935,7 +10161,7 @@
                 </a:tc>
                 <a:tc>
                   <a:txBody>
-                    <a:bodyPr wrap="square"/>
+                    <a:bodyPr/>
                     <a:lstStyle/>
                     <a:p>
                       <a:pPr algn="r"/>
@@ -9950,7 +10176,7 @@
                       </a:r>
                     </a:p>
                   </a:txBody>
-                  <a:tcPr anchor="ctr" marL="100584" marR="100584" marT="36576" marB="36576">
+                  <a:tcPr marL="100584" marR="100584" marT="36576" marB="36576" anchor="ctr">
                     <a:solidFill>
                       <a:srgbClr val="334155"/>
                     </a:solidFill>
@@ -9958,7 +10184,7 @@
                 </a:tc>
                 <a:tc>
                   <a:txBody>
-                    <a:bodyPr wrap="square"/>
+                    <a:bodyPr/>
                     <a:lstStyle/>
                     <a:p>
                       <a:pPr algn="r"/>
@@ -9973,7 +10199,7 @@
                       </a:r>
                     </a:p>
                   </a:txBody>
-                  <a:tcPr anchor="ctr" marL="100584" marR="100584" marT="36576" marB="36576">
+                  <a:tcPr marL="100584" marR="100584" marT="36576" marB="36576" anchor="ctr">
                     <a:solidFill>
                       <a:srgbClr val="334155"/>
                     </a:solidFill>
@@ -9981,7 +10207,7 @@
                 </a:tc>
                 <a:tc>
                   <a:txBody>
-                    <a:bodyPr wrap="square"/>
+                    <a:bodyPr/>
                     <a:lstStyle/>
                     <a:p>
                       <a:pPr algn="r"/>
@@ -9996,17 +10222,22 @@
                       </a:r>
                     </a:p>
                   </a:txBody>
-                  <a:tcPr anchor="ctr" marL="100584" marR="100584" marT="36576" marB="36576">
+                  <a:tcPr marL="100584" marR="100584" marT="36576" marB="36576" anchor="ctr">
                     <a:solidFill>
                       <a:srgbClr val="334155"/>
                     </a:solidFill>
                   </a:tcPr>
                 </a:tc>
+                <a:extLst>
+                  <a:ext uri="{0D108BD9-81ED-4DB2-BD59-A6C34878D82A}">
+                    <a16:rowId xmlns:a16="http://schemas.microsoft.com/office/drawing/2014/main" val="10000"/>
+                  </a:ext>
+                </a:extLst>
               </a:tr>
               <a:tr h="393192">
                 <a:tc>
                   <a:txBody>
-                    <a:bodyPr wrap="square"/>
+                    <a:bodyPr/>
                     <a:lstStyle/>
                     <a:p>
                       <a:pPr algn="l"/>
@@ -10021,7 +10252,7 @@
                       </a:r>
                     </a:p>
                   </a:txBody>
-                  <a:tcPr anchor="ctr" marL="100584" marR="100584" marT="36576" marB="36576">
+                  <a:tcPr marL="100584" marR="100584" marT="36576" marB="36576" anchor="ctr">
                     <a:solidFill>
                       <a:srgbClr val="243247"/>
                     </a:solidFill>
@@ -10029,7 +10260,7 @@
                 </a:tc>
                 <a:tc>
                   <a:txBody>
-                    <a:bodyPr wrap="square"/>
+                    <a:bodyPr/>
                     <a:lstStyle/>
                     <a:p>
                       <a:pPr algn="r"/>
@@ -10044,7 +10275,7 @@
                       </a:r>
                     </a:p>
                   </a:txBody>
-                  <a:tcPr anchor="ctr" marL="100584" marR="100584" marT="36576" marB="36576">
+                  <a:tcPr marL="100584" marR="100584" marT="36576" marB="36576" anchor="ctr">
                     <a:solidFill>
                       <a:srgbClr val="243247"/>
                     </a:solidFill>
@@ -10052,7 +10283,7 @@
                 </a:tc>
                 <a:tc>
                   <a:txBody>
-                    <a:bodyPr wrap="square"/>
+                    <a:bodyPr/>
                     <a:lstStyle/>
                     <a:p>
                       <a:pPr algn="r"/>
@@ -10067,7 +10298,7 @@
                       </a:r>
                     </a:p>
                   </a:txBody>
-                  <a:tcPr anchor="ctr" marL="100584" marR="100584" marT="36576" marB="36576">
+                  <a:tcPr marL="100584" marR="100584" marT="36576" marB="36576" anchor="ctr">
                     <a:solidFill>
                       <a:srgbClr val="243247"/>
                     </a:solidFill>
@@ -10075,7 +10306,7 @@
                 </a:tc>
                 <a:tc>
                   <a:txBody>
-                    <a:bodyPr wrap="square"/>
+                    <a:bodyPr/>
                     <a:lstStyle/>
                     <a:p>
                       <a:pPr algn="r"/>
@@ -10090,7 +10321,7 @@
                       </a:r>
                     </a:p>
                   </a:txBody>
-                  <a:tcPr anchor="ctr" marL="100584" marR="100584" marT="36576" marB="36576">
+                  <a:tcPr marL="100584" marR="100584" marT="36576" marB="36576" anchor="ctr">
                     <a:solidFill>
                       <a:srgbClr val="243247"/>
                     </a:solidFill>
@@ -10098,7 +10329,7 @@
                 </a:tc>
                 <a:tc>
                   <a:txBody>
-                    <a:bodyPr wrap="square"/>
+                    <a:bodyPr/>
                     <a:lstStyle/>
                     <a:p>
                       <a:pPr algn="r"/>
@@ -10113,7 +10344,7 @@
                       </a:r>
                     </a:p>
                   </a:txBody>
-                  <a:tcPr anchor="ctr" marL="100584" marR="100584" marT="36576" marB="36576">
+                  <a:tcPr marL="100584" marR="100584" marT="36576" marB="36576" anchor="ctr">
                     <a:solidFill>
                       <a:srgbClr val="243247"/>
                     </a:solidFill>
@@ -10121,7 +10352,7 @@
                 </a:tc>
                 <a:tc>
                   <a:txBody>
-                    <a:bodyPr wrap="square"/>
+                    <a:bodyPr/>
                     <a:lstStyle/>
                     <a:p>
                       <a:pPr algn="r"/>
@@ -10136,17 +10367,22 @@
                       </a:r>
                     </a:p>
                   </a:txBody>
-                  <a:tcPr anchor="ctr" marL="100584" marR="100584" marT="36576" marB="36576">
+                  <a:tcPr marL="100584" marR="100584" marT="36576" marB="36576" anchor="ctr">
                     <a:solidFill>
                       <a:srgbClr val="243247"/>
                     </a:solidFill>
                   </a:tcPr>
                 </a:tc>
+                <a:extLst>
+                  <a:ext uri="{0D108BD9-81ED-4DB2-BD59-A6C34878D82A}">
+                    <a16:rowId xmlns:a16="http://schemas.microsoft.com/office/drawing/2014/main" val="10001"/>
+                  </a:ext>
+                </a:extLst>
               </a:tr>
               <a:tr h="393192">
                 <a:tc>
                   <a:txBody>
-                    <a:bodyPr wrap="square"/>
+                    <a:bodyPr/>
                     <a:lstStyle/>
                     <a:p>
                       <a:pPr algn="l"/>
@@ -10161,7 +10397,7 @@
                       </a:r>
                     </a:p>
                   </a:txBody>
-                  <a:tcPr anchor="ctr" marL="100584" marR="100584" marT="36576" marB="36576">
+                  <a:tcPr marL="100584" marR="100584" marT="36576" marB="36576" anchor="ctr">
                     <a:solidFill>
                       <a:srgbClr val="2B3A50"/>
                     </a:solidFill>
@@ -10169,7 +10405,7 @@
                 </a:tc>
                 <a:tc>
                   <a:txBody>
-                    <a:bodyPr wrap="square"/>
+                    <a:bodyPr/>
                     <a:lstStyle/>
                     <a:p>
                       <a:pPr algn="r"/>
@@ -10184,7 +10420,7 @@
                       </a:r>
                     </a:p>
                   </a:txBody>
-                  <a:tcPr anchor="ctr" marL="100584" marR="100584" marT="36576" marB="36576">
+                  <a:tcPr marL="100584" marR="100584" marT="36576" marB="36576" anchor="ctr">
                     <a:solidFill>
                       <a:srgbClr val="2B3A50"/>
                     </a:solidFill>
@@ -10192,7 +10428,7 @@
                 </a:tc>
                 <a:tc>
                   <a:txBody>
-                    <a:bodyPr wrap="square"/>
+                    <a:bodyPr/>
                     <a:lstStyle/>
                     <a:p>
                       <a:pPr algn="r"/>
@@ -10207,7 +10443,7 @@
                       </a:r>
                     </a:p>
                   </a:txBody>
-                  <a:tcPr anchor="ctr" marL="100584" marR="100584" marT="36576" marB="36576">
+                  <a:tcPr marL="100584" marR="100584" marT="36576" marB="36576" anchor="ctr">
                     <a:solidFill>
                       <a:srgbClr val="2B3A50"/>
                     </a:solidFill>
@@ -10215,7 +10451,7 @@
                 </a:tc>
                 <a:tc>
                   <a:txBody>
-                    <a:bodyPr wrap="square"/>
+                    <a:bodyPr/>
                     <a:lstStyle/>
                     <a:p>
                       <a:pPr algn="r"/>
@@ -10230,7 +10466,7 @@
                       </a:r>
                     </a:p>
                   </a:txBody>
-                  <a:tcPr anchor="ctr" marL="100584" marR="100584" marT="36576" marB="36576">
+                  <a:tcPr marL="100584" marR="100584" marT="36576" marB="36576" anchor="ctr">
                     <a:solidFill>
                       <a:srgbClr val="2B3A50"/>
                     </a:solidFill>
@@ -10238,7 +10474,7 @@
                 </a:tc>
                 <a:tc>
                   <a:txBody>
-                    <a:bodyPr wrap="square"/>
+                    <a:bodyPr/>
                     <a:lstStyle/>
                     <a:p>
                       <a:pPr algn="r"/>
@@ -10253,7 +10489,7 @@
                       </a:r>
                     </a:p>
                   </a:txBody>
-                  <a:tcPr anchor="ctr" marL="100584" marR="100584" marT="36576" marB="36576">
+                  <a:tcPr marL="100584" marR="100584" marT="36576" marB="36576" anchor="ctr">
                     <a:solidFill>
                       <a:srgbClr val="2B3A50"/>
                     </a:solidFill>
@@ -10261,7 +10497,7 @@
                 </a:tc>
                 <a:tc>
                   <a:txBody>
-                    <a:bodyPr wrap="square"/>
+                    <a:bodyPr/>
                     <a:lstStyle/>
                     <a:p>
                       <a:pPr algn="r"/>
@@ -10276,17 +10512,22 @@
                       </a:r>
                     </a:p>
                   </a:txBody>
-                  <a:tcPr anchor="ctr" marL="100584" marR="100584" marT="36576" marB="36576">
+                  <a:tcPr marL="100584" marR="100584" marT="36576" marB="36576" anchor="ctr">
                     <a:solidFill>
                       <a:srgbClr val="2B3A50"/>
                     </a:solidFill>
                   </a:tcPr>
                 </a:tc>
+                <a:extLst>
+                  <a:ext uri="{0D108BD9-81ED-4DB2-BD59-A6C34878D82A}">
+                    <a16:rowId xmlns:a16="http://schemas.microsoft.com/office/drawing/2014/main" val="10002"/>
+                  </a:ext>
+                </a:extLst>
               </a:tr>
               <a:tr h="393192">
                 <a:tc>
                   <a:txBody>
-                    <a:bodyPr wrap="square"/>
+                    <a:bodyPr/>
                     <a:lstStyle/>
                     <a:p>
                       <a:pPr algn="l"/>
@@ -10301,7 +10542,7 @@
                       </a:r>
                     </a:p>
                   </a:txBody>
-                  <a:tcPr anchor="ctr" marL="100584" marR="100584" marT="36576" marB="36576">
+                  <a:tcPr marL="100584" marR="100584" marT="36576" marB="36576" anchor="ctr">
                     <a:solidFill>
                       <a:srgbClr val="243247"/>
                     </a:solidFill>
@@ -10309,7 +10550,7 @@
                 </a:tc>
                 <a:tc>
                   <a:txBody>
-                    <a:bodyPr wrap="square"/>
+                    <a:bodyPr/>
                     <a:lstStyle/>
                     <a:p>
                       <a:pPr algn="r"/>
@@ -10324,7 +10565,7 @@
                       </a:r>
                     </a:p>
                   </a:txBody>
-                  <a:tcPr anchor="ctr" marL="100584" marR="100584" marT="36576" marB="36576">
+                  <a:tcPr marL="100584" marR="100584" marT="36576" marB="36576" anchor="ctr">
                     <a:solidFill>
                       <a:srgbClr val="243247"/>
                     </a:solidFill>
@@ -10332,7 +10573,7 @@
                 </a:tc>
                 <a:tc>
                   <a:txBody>
-                    <a:bodyPr wrap="square"/>
+                    <a:bodyPr/>
                     <a:lstStyle/>
                     <a:p>
                       <a:pPr algn="r"/>
@@ -10347,7 +10588,7 @@
                       </a:r>
                     </a:p>
                   </a:txBody>
-                  <a:tcPr anchor="ctr" marL="100584" marR="100584" marT="36576" marB="36576">
+                  <a:tcPr marL="100584" marR="100584" marT="36576" marB="36576" anchor="ctr">
                     <a:solidFill>
                       <a:srgbClr val="243247"/>
                     </a:solidFill>
@@ -10355,7 +10596,7 @@
                 </a:tc>
                 <a:tc>
                   <a:txBody>
-                    <a:bodyPr wrap="square"/>
+                    <a:bodyPr/>
                     <a:lstStyle/>
                     <a:p>
                       <a:pPr algn="r"/>
@@ -10370,7 +10611,7 @@
                       </a:r>
                     </a:p>
                   </a:txBody>
-                  <a:tcPr anchor="ctr" marL="100584" marR="100584" marT="36576" marB="36576">
+                  <a:tcPr marL="100584" marR="100584" marT="36576" marB="36576" anchor="ctr">
                     <a:solidFill>
                       <a:srgbClr val="243247"/>
                     </a:solidFill>
@@ -10378,7 +10619,7 @@
                 </a:tc>
                 <a:tc>
                   <a:txBody>
-                    <a:bodyPr wrap="square"/>
+                    <a:bodyPr/>
                     <a:lstStyle/>
                     <a:p>
                       <a:pPr algn="r"/>
@@ -10393,7 +10634,7 @@
                       </a:r>
                     </a:p>
                   </a:txBody>
-                  <a:tcPr anchor="ctr" marL="100584" marR="100584" marT="36576" marB="36576">
+                  <a:tcPr marL="100584" marR="100584" marT="36576" marB="36576" anchor="ctr">
                     <a:solidFill>
                       <a:srgbClr val="243247"/>
                     </a:solidFill>
@@ -10401,7 +10642,7 @@
                 </a:tc>
                 <a:tc>
                   <a:txBody>
-                    <a:bodyPr wrap="square"/>
+                    <a:bodyPr/>
                     <a:lstStyle/>
                     <a:p>
                       <a:pPr algn="r"/>
@@ -10416,17 +10657,22 @@
                       </a:r>
                     </a:p>
                   </a:txBody>
-                  <a:tcPr anchor="ctr" marL="100584" marR="100584" marT="36576" marB="36576">
+                  <a:tcPr marL="100584" marR="100584" marT="36576" marB="36576" anchor="ctr">
                     <a:solidFill>
                       <a:srgbClr val="243247"/>
                     </a:solidFill>
                   </a:tcPr>
                 </a:tc>
+                <a:extLst>
+                  <a:ext uri="{0D108BD9-81ED-4DB2-BD59-A6C34878D82A}">
+                    <a16:rowId xmlns:a16="http://schemas.microsoft.com/office/drawing/2014/main" val="10003"/>
+                  </a:ext>
+                </a:extLst>
               </a:tr>
               <a:tr h="393192">
                 <a:tc>
                   <a:txBody>
-                    <a:bodyPr wrap="square"/>
+                    <a:bodyPr/>
                     <a:lstStyle/>
                     <a:p>
                       <a:pPr algn="l"/>
@@ -10441,7 +10687,7 @@
                       </a:r>
                     </a:p>
                   </a:txBody>
-                  <a:tcPr anchor="ctr" marL="100584" marR="100584" marT="36576" marB="36576">
+                  <a:tcPr marL="100584" marR="100584" marT="36576" marB="36576" anchor="ctr">
                     <a:solidFill>
                       <a:srgbClr val="334155"/>
                     </a:solidFill>
@@ -10449,7 +10695,7 @@
                 </a:tc>
                 <a:tc>
                   <a:txBody>
-                    <a:bodyPr wrap="square"/>
+                    <a:bodyPr/>
                     <a:lstStyle/>
                     <a:p>
                       <a:pPr algn="r"/>
@@ -10464,7 +10710,7 @@
                       </a:r>
                     </a:p>
                   </a:txBody>
-                  <a:tcPr anchor="ctr" marL="100584" marR="100584" marT="36576" marB="36576">
+                  <a:tcPr marL="100584" marR="100584" marT="36576" marB="36576" anchor="ctr">
                     <a:solidFill>
                       <a:srgbClr val="334155"/>
                     </a:solidFill>
@@ -10472,7 +10718,7 @@
                 </a:tc>
                 <a:tc>
                   <a:txBody>
-                    <a:bodyPr wrap="square"/>
+                    <a:bodyPr/>
                     <a:lstStyle/>
                     <a:p>
                       <a:pPr algn="r"/>
@@ -10487,7 +10733,7 @@
                       </a:r>
                     </a:p>
                   </a:txBody>
-                  <a:tcPr anchor="ctr" marL="100584" marR="100584" marT="36576" marB="36576">
+                  <a:tcPr marL="100584" marR="100584" marT="36576" marB="36576" anchor="ctr">
                     <a:solidFill>
                       <a:srgbClr val="334155"/>
                     </a:solidFill>
@@ -10495,7 +10741,7 @@
                 </a:tc>
                 <a:tc>
                   <a:txBody>
-                    <a:bodyPr wrap="square"/>
+                    <a:bodyPr/>
                     <a:lstStyle/>
                     <a:p>
                       <a:pPr algn="r"/>
@@ -10510,7 +10756,7 @@
                       </a:r>
                     </a:p>
                   </a:txBody>
-                  <a:tcPr anchor="ctr" marL="100584" marR="100584" marT="36576" marB="36576">
+                  <a:tcPr marL="100584" marR="100584" marT="36576" marB="36576" anchor="ctr">
                     <a:solidFill>
                       <a:srgbClr val="334155"/>
                     </a:solidFill>
@@ -10518,7 +10764,7 @@
                 </a:tc>
                 <a:tc>
                   <a:txBody>
-                    <a:bodyPr wrap="square"/>
+                    <a:bodyPr/>
                     <a:lstStyle/>
                     <a:p>
                       <a:pPr algn="r"/>
@@ -10533,7 +10779,7 @@
                       </a:r>
                     </a:p>
                   </a:txBody>
-                  <a:tcPr anchor="ctr" marL="100584" marR="100584" marT="36576" marB="36576">
+                  <a:tcPr marL="100584" marR="100584" marT="36576" marB="36576" anchor="ctr">
                     <a:solidFill>
                       <a:srgbClr val="334155"/>
                     </a:solidFill>
@@ -10541,7 +10787,7 @@
                 </a:tc>
                 <a:tc>
                   <a:txBody>
-                    <a:bodyPr wrap="square"/>
+                    <a:bodyPr/>
                     <a:lstStyle/>
                     <a:p>
                       <a:pPr algn="r"/>
@@ -10556,12 +10802,17 @@
                       </a:r>
                     </a:p>
                   </a:txBody>
-                  <a:tcPr anchor="ctr" marL="100584" marR="100584" marT="36576" marB="36576">
+                  <a:tcPr marL="100584" marR="100584" marT="36576" marB="36576" anchor="ctr">
                     <a:solidFill>
                       <a:srgbClr val="334155"/>
                     </a:solidFill>
                   </a:tcPr>
                 </a:tc>
+                <a:extLst>
+                  <a:ext uri="{0D108BD9-81ED-4DB2-BD59-A6C34878D82A}">
+                    <a16:rowId xmlns:a16="http://schemas.microsoft.com/office/drawing/2014/main" val="10004"/>
+                  </a:ext>
+                </a:extLst>
               </a:tr>
             </a:tbl>
           </a:graphicData>
@@ -10584,7 +10835,7 @@
           <a:noFill/>
         </p:spPr>
         <p:txBody>
-          <a:bodyPr wrap="square" lIns="0" rIns="0" tIns="0" bIns="0">
+          <a:bodyPr wrap="square" lIns="0" tIns="0" rIns="0" bIns="0">
             <a:spAutoFit/>
           </a:bodyPr>
           <a:lstStyle/>
@@ -10671,7 +10922,7 @@
 </file>
 
 <file path=ppt/slides/slide18.xml><?xml version="1.0" encoding="utf-8"?>
-<p:sld xmlns:a="http://schemas.openxmlformats.org/drawingml/2006/main" xmlns:p="http://schemas.openxmlformats.org/presentationml/2006/main" xmlns:r="http://schemas.openxmlformats.org/officeDocument/2006/relationships">
+<p:sld xmlns:a="http://schemas.openxmlformats.org/drawingml/2006/main" xmlns:r="http://schemas.openxmlformats.org/officeDocument/2006/relationships" xmlns:p="http://schemas.openxmlformats.org/presentationml/2006/main">
   <p:cSld>
     <p:bg>
       <p:bgPr>
@@ -10687,7 +10938,14 @@
         <p:cNvGrpSpPr/>
         <p:nvPr/>
       </p:nvGrpSpPr>
-      <p:grpSpPr/>
+      <p:grpSpPr>
+        <a:xfrm>
+          <a:off x="0" y="0"/>
+          <a:ext cx="0" cy="0"/>
+          <a:chOff x="0" y="0"/>
+          <a:chExt cx="0" cy="0"/>
+        </a:xfrm>
+      </p:grpSpPr>
       <p:sp>
         <p:nvSpPr>
           <p:cNvPr id="2" name="TextBox 1"/>
@@ -10705,7 +10963,7 @@
           <a:noFill/>
         </p:spPr>
         <p:txBody>
-          <a:bodyPr wrap="square" lIns="0" rIns="0" tIns="0" bIns="0">
+          <a:bodyPr wrap="square" lIns="0" tIns="0" rIns="0" bIns="0">
             <a:spAutoFit/>
           </a:bodyPr>
           <a:lstStyle/>
@@ -10739,7 +10997,7 @@
           <a:noFill/>
         </p:spPr>
         <p:txBody>
-          <a:bodyPr wrap="square" lIns="0" rIns="0" tIns="0" bIns="0">
+          <a:bodyPr wrap="square" lIns="0" tIns="0" rIns="0" bIns="0">
             <a:spAutoFit/>
           </a:bodyPr>
           <a:lstStyle/>
@@ -10802,6 +11060,7 @@
           <a:lstStyle/>
           <a:p>
             <a:pPr algn="ctr"/>
+            <a:endParaRPr/>
           </a:p>
         </p:txBody>
       </p:sp>
@@ -10822,7 +11081,7 @@
           <a:noFill/>
         </p:spPr>
         <p:txBody>
-          <a:bodyPr wrap="square" lIns="0" rIns="0" tIns="0" bIns="0">
+          <a:bodyPr wrap="square" lIns="0" tIns="0" rIns="0" bIns="0">
             <a:spAutoFit/>
           </a:bodyPr>
           <a:lstStyle/>
@@ -10857,7 +11116,7 @@
           <a:noFill/>
         </p:spPr>
         <p:txBody>
-          <a:bodyPr wrap="square" lIns="0" rIns="0" tIns="0" bIns="0">
+          <a:bodyPr wrap="square" lIns="0" tIns="0" rIns="0" bIns="0">
             <a:spAutoFit/>
           </a:bodyPr>
           <a:lstStyle/>
@@ -11031,7 +11290,7 @@
 </file>
 
 <file path=ppt/slides/slide2.xml><?xml version="1.0" encoding="utf-8"?>
-<p:sld xmlns:a="http://schemas.openxmlformats.org/drawingml/2006/main" xmlns:p="http://schemas.openxmlformats.org/presentationml/2006/main" xmlns:r="http://schemas.openxmlformats.org/officeDocument/2006/relationships">
+<p:sld xmlns:a="http://schemas.openxmlformats.org/drawingml/2006/main" xmlns:r="http://schemas.openxmlformats.org/officeDocument/2006/relationships" xmlns:p="http://schemas.openxmlformats.org/presentationml/2006/main">
   <p:cSld>
     <p:bg>
       <p:bgPr>
@@ -11047,7 +11306,14 @@
         <p:cNvGrpSpPr/>
         <p:nvPr/>
       </p:nvGrpSpPr>
-      <p:grpSpPr/>
+      <p:grpSpPr>
+        <a:xfrm>
+          <a:off x="0" y="0"/>
+          <a:ext cx="0" cy="0"/>
+          <a:chOff x="0" y="0"/>
+          <a:chExt cx="0" cy="0"/>
+        </a:xfrm>
+      </p:grpSpPr>
       <p:sp>
         <p:nvSpPr>
           <p:cNvPr id="2" name="TextBox 1"/>
@@ -11065,7 +11331,7 @@
           <a:noFill/>
         </p:spPr>
         <p:txBody>
-          <a:bodyPr wrap="square" lIns="0" rIns="0" tIns="0" bIns="0">
+          <a:bodyPr wrap="square" lIns="0" tIns="0" rIns="0" bIns="0">
             <a:spAutoFit/>
           </a:bodyPr>
           <a:lstStyle/>
@@ -11099,7 +11365,7 @@
           <a:noFill/>
         </p:spPr>
         <p:txBody>
-          <a:bodyPr wrap="square" lIns="0" rIns="0" tIns="0" bIns="0">
+          <a:bodyPr wrap="square" lIns="0" tIns="0" rIns="0" bIns="0">
             <a:spAutoFit/>
           </a:bodyPr>
           <a:lstStyle/>
@@ -11162,6 +11428,7 @@
           <a:lstStyle/>
           <a:p>
             <a:pPr algn="ctr"/>
+            <a:endParaRPr/>
           </a:p>
         </p:txBody>
       </p:sp>
@@ -11182,7 +11449,7 @@
           <a:noFill/>
         </p:spPr>
         <p:txBody>
-          <a:bodyPr wrap="square" lIns="0" rIns="0" tIns="0" bIns="0">
+          <a:bodyPr wrap="square" lIns="0" tIns="0" rIns="0" bIns="0">
             <a:spAutoFit/>
           </a:bodyPr>
           <a:lstStyle/>
@@ -11217,7 +11484,7 @@
           <a:noFill/>
         </p:spPr>
         <p:txBody>
-          <a:bodyPr wrap="square" lIns="0" rIns="0" tIns="0" bIns="0">
+          <a:bodyPr wrap="square" lIns="0" tIns="0" rIns="0" bIns="0">
             <a:spAutoFit/>
           </a:bodyPr>
           <a:lstStyle/>
@@ -11388,7 +11655,7 @@
 </file>
 
 <file path=ppt/slides/slide3.xml><?xml version="1.0" encoding="utf-8"?>
-<p:sld xmlns:a="http://schemas.openxmlformats.org/drawingml/2006/main" xmlns:p="http://schemas.openxmlformats.org/presentationml/2006/main" xmlns:r="http://schemas.openxmlformats.org/officeDocument/2006/relationships">
+<p:sld xmlns:a="http://schemas.openxmlformats.org/drawingml/2006/main" xmlns:r="http://schemas.openxmlformats.org/officeDocument/2006/relationships" xmlns:p="http://schemas.openxmlformats.org/presentationml/2006/main">
   <p:cSld>
     <p:bg>
       <p:bgPr>
@@ -11404,7 +11671,14 @@
         <p:cNvGrpSpPr/>
         <p:nvPr/>
       </p:nvGrpSpPr>
-      <p:grpSpPr/>
+      <p:grpSpPr>
+        <a:xfrm>
+          <a:off x="0" y="0"/>
+          <a:ext cx="0" cy="0"/>
+          <a:chOff x="0" y="0"/>
+          <a:chExt cx="0" cy="0"/>
+        </a:xfrm>
+      </p:grpSpPr>
       <p:sp>
         <p:nvSpPr>
           <p:cNvPr id="2" name="TextBox 1"/>
@@ -11422,7 +11696,7 @@
           <a:noFill/>
         </p:spPr>
         <p:txBody>
-          <a:bodyPr wrap="square" lIns="0" rIns="0" tIns="0" bIns="0">
+          <a:bodyPr wrap="square" lIns="0" tIns="0" rIns="0" bIns="0">
             <a:spAutoFit/>
           </a:bodyPr>
           <a:lstStyle/>
@@ -11456,7 +11730,7 @@
           <a:noFill/>
         </p:spPr>
         <p:txBody>
-          <a:bodyPr wrap="square" lIns="0" rIns="0" tIns="0" bIns="0">
+          <a:bodyPr wrap="square" lIns="0" tIns="0" rIns="0" bIns="0">
             <a:spAutoFit/>
           </a:bodyPr>
           <a:lstStyle/>
@@ -11519,6 +11793,7 @@
           <a:lstStyle/>
           <a:p>
             <a:pPr algn="ctr"/>
+            <a:endParaRPr/>
           </a:p>
         </p:txBody>
       </p:sp>
@@ -11539,7 +11814,7 @@
           <a:noFill/>
         </p:spPr>
         <p:txBody>
-          <a:bodyPr wrap="square" lIns="0" rIns="0" tIns="0" bIns="0">
+          <a:bodyPr wrap="square" lIns="0" tIns="0" rIns="0" bIns="0">
             <a:spAutoFit/>
           </a:bodyPr>
           <a:lstStyle/>
@@ -11566,7 +11841,7 @@
           <p:nvPr/>
         </p:nvPicPr>
         <p:blipFill>
-          <a:blip r:embed="rId2"/>
+          <a:blip r:embed="rId3"/>
           <a:stretch>
             <a:fillRect/>
           </a:stretch>
@@ -11590,7 +11865,7 @@
 </file>
 
 <file path=ppt/slides/slide4.xml><?xml version="1.0" encoding="utf-8"?>
-<p:sld xmlns:a="http://schemas.openxmlformats.org/drawingml/2006/main" xmlns:p="http://schemas.openxmlformats.org/presentationml/2006/main" xmlns:r="http://schemas.openxmlformats.org/officeDocument/2006/relationships">
+<p:sld xmlns:a="http://schemas.openxmlformats.org/drawingml/2006/main" xmlns:r="http://schemas.openxmlformats.org/officeDocument/2006/relationships" xmlns:p="http://schemas.openxmlformats.org/presentationml/2006/main">
   <p:cSld>
     <p:bg>
       <p:bgPr>
@@ -11606,7 +11881,14 @@
         <p:cNvGrpSpPr/>
         <p:nvPr/>
       </p:nvGrpSpPr>
-      <p:grpSpPr/>
+      <p:grpSpPr>
+        <a:xfrm>
+          <a:off x="0" y="0"/>
+          <a:ext cx="0" cy="0"/>
+          <a:chOff x="0" y="0"/>
+          <a:chExt cx="0" cy="0"/>
+        </a:xfrm>
+      </p:grpSpPr>
       <p:sp>
         <p:nvSpPr>
           <p:cNvPr id="2" name="TextBox 1"/>
@@ -11624,7 +11906,7 @@
           <a:noFill/>
         </p:spPr>
         <p:txBody>
-          <a:bodyPr wrap="square" lIns="0" rIns="0" tIns="0" bIns="0">
+          <a:bodyPr wrap="square" lIns="0" tIns="0" rIns="0" bIns="0">
             <a:spAutoFit/>
           </a:bodyPr>
           <a:lstStyle/>
@@ -11658,7 +11940,7 @@
           <a:noFill/>
         </p:spPr>
         <p:txBody>
-          <a:bodyPr wrap="square" lIns="0" rIns="0" tIns="0" bIns="0">
+          <a:bodyPr wrap="square" lIns="0" tIns="0" rIns="0" bIns="0">
             <a:spAutoFit/>
           </a:bodyPr>
           <a:lstStyle/>
@@ -11721,6 +12003,7 @@
           <a:lstStyle/>
           <a:p>
             <a:pPr algn="ctr"/>
+            <a:endParaRPr/>
           </a:p>
         </p:txBody>
       </p:sp>
@@ -11741,7 +12024,7 @@
           <a:noFill/>
         </p:spPr>
         <p:txBody>
-          <a:bodyPr wrap="square" lIns="0" rIns="0" tIns="0" bIns="0">
+          <a:bodyPr wrap="square" lIns="0" tIns="0" rIns="0" bIns="0">
             <a:spAutoFit/>
           </a:bodyPr>
           <a:lstStyle/>
@@ -11778,14 +12061,32 @@
                 <a:tableStyleId>{2D5ABB26-0587-4C30-8999-92F81FD0307C}</a:tableStyleId>
               </a:tblPr>
               <a:tblGrid>
-                <a:gridCol w="2286000"/>
-                <a:gridCol w="1371600"/>
-                <a:gridCol w="1371600"/>
+                <a:gridCol w="2286000">
+                  <a:extLst>
+                    <a:ext uri="{9D8B030D-6E8A-4147-A177-3AD203B41FA5}">
+                      <a16:colId xmlns:a16="http://schemas.microsoft.com/office/drawing/2014/main" val="20000"/>
+                    </a:ext>
+                  </a:extLst>
+                </a:gridCol>
+                <a:gridCol w="1371600">
+                  <a:extLst>
+                    <a:ext uri="{9D8B030D-6E8A-4147-A177-3AD203B41FA5}">
+                      <a16:colId xmlns:a16="http://schemas.microsoft.com/office/drawing/2014/main" val="20001"/>
+                    </a:ext>
+                  </a:extLst>
+                </a:gridCol>
+                <a:gridCol w="1371600">
+                  <a:extLst>
+                    <a:ext uri="{9D8B030D-6E8A-4147-A177-3AD203B41FA5}">
+                      <a16:colId xmlns:a16="http://schemas.microsoft.com/office/drawing/2014/main" val="20002"/>
+                    </a:ext>
+                  </a:extLst>
+                </a:gridCol>
               </a:tblGrid>
               <a:tr h="585216">
                 <a:tc>
                   <a:txBody>
-                    <a:bodyPr wrap="square"/>
+                    <a:bodyPr/>
                     <a:lstStyle/>
                     <a:p>
                       <a:pPr algn="l"/>
@@ -11800,7 +12101,7 @@
                       </a:r>
                     </a:p>
                   </a:txBody>
-                  <a:tcPr anchor="ctr" marL="100584" marR="100584" marT="36576" marB="36576">
+                  <a:tcPr marL="100584" marR="100584" marT="36576" marB="36576" anchor="ctr">
                     <a:solidFill>
                       <a:srgbClr val="334155"/>
                     </a:solidFill>
@@ -11808,7 +12109,7 @@
                 </a:tc>
                 <a:tc>
                   <a:txBody>
-                    <a:bodyPr wrap="square"/>
+                    <a:bodyPr/>
                     <a:lstStyle/>
                     <a:p>
                       <a:pPr algn="r"/>
@@ -11823,7 +12124,7 @@
                       </a:r>
                     </a:p>
                   </a:txBody>
-                  <a:tcPr anchor="ctr" marL="100584" marR="100584" marT="36576" marB="36576">
+                  <a:tcPr marL="100584" marR="100584" marT="36576" marB="36576" anchor="ctr">
                     <a:solidFill>
                       <a:srgbClr val="334155"/>
                     </a:solidFill>
@@ -11831,7 +12132,7 @@
                 </a:tc>
                 <a:tc>
                   <a:txBody>
-                    <a:bodyPr wrap="square"/>
+                    <a:bodyPr/>
                     <a:lstStyle/>
                     <a:p>
                       <a:pPr algn="r"/>
@@ -11846,17 +12147,22 @@
                       </a:r>
                     </a:p>
                   </a:txBody>
-                  <a:tcPr anchor="ctr" marL="100584" marR="100584" marT="36576" marB="36576">
+                  <a:tcPr marL="100584" marR="100584" marT="36576" marB="36576" anchor="ctr">
                     <a:solidFill>
                       <a:srgbClr val="334155"/>
                     </a:solidFill>
                   </a:tcPr>
                 </a:tc>
+                <a:extLst>
+                  <a:ext uri="{0D108BD9-81ED-4DB2-BD59-A6C34878D82A}">
+                    <a16:rowId xmlns:a16="http://schemas.microsoft.com/office/drawing/2014/main" val="10000"/>
+                  </a:ext>
+                </a:extLst>
               </a:tr>
               <a:tr h="548640">
                 <a:tc>
                   <a:txBody>
-                    <a:bodyPr wrap="square"/>
+                    <a:bodyPr/>
                     <a:lstStyle/>
                     <a:p>
                       <a:pPr algn="l"/>
@@ -11871,7 +12177,7 @@
                       </a:r>
                     </a:p>
                   </a:txBody>
-                  <a:tcPr anchor="ctr" marL="100584" marR="100584" marT="36576" marB="36576">
+                  <a:tcPr marL="100584" marR="100584" marT="36576" marB="36576" anchor="ctr">
                     <a:solidFill>
                       <a:srgbClr val="243247"/>
                     </a:solidFill>
@@ -11879,7 +12185,7 @@
                 </a:tc>
                 <a:tc>
                   <a:txBody>
-                    <a:bodyPr wrap="square"/>
+                    <a:bodyPr/>
                     <a:lstStyle/>
                     <a:p>
                       <a:pPr algn="r"/>
@@ -11894,7 +12200,7 @@
                       </a:r>
                     </a:p>
                   </a:txBody>
-                  <a:tcPr anchor="ctr" marL="100584" marR="100584" marT="36576" marB="36576">
+                  <a:tcPr marL="100584" marR="100584" marT="36576" marB="36576" anchor="ctr">
                     <a:solidFill>
                       <a:srgbClr val="243247"/>
                     </a:solidFill>
@@ -11902,7 +12208,7 @@
                 </a:tc>
                 <a:tc>
                   <a:txBody>
-                    <a:bodyPr wrap="square"/>
+                    <a:bodyPr/>
                     <a:lstStyle/>
                     <a:p>
                       <a:pPr algn="r"/>
@@ -11917,17 +12223,22 @@
                       </a:r>
                     </a:p>
                   </a:txBody>
-                  <a:tcPr anchor="ctr" marL="100584" marR="100584" marT="36576" marB="36576">
+                  <a:tcPr marL="100584" marR="100584" marT="36576" marB="36576" anchor="ctr">
                     <a:solidFill>
                       <a:srgbClr val="243247"/>
                     </a:solidFill>
                   </a:tcPr>
                 </a:tc>
+                <a:extLst>
+                  <a:ext uri="{0D108BD9-81ED-4DB2-BD59-A6C34878D82A}">
+                    <a16:rowId xmlns:a16="http://schemas.microsoft.com/office/drawing/2014/main" val="10001"/>
+                  </a:ext>
+                </a:extLst>
               </a:tr>
               <a:tr h="548640">
                 <a:tc>
                   <a:txBody>
-                    <a:bodyPr wrap="square"/>
+                    <a:bodyPr/>
                     <a:lstStyle/>
                     <a:p>
                       <a:pPr algn="l"/>
@@ -11942,7 +12253,7 @@
                       </a:r>
                     </a:p>
                   </a:txBody>
-                  <a:tcPr anchor="ctr" marL="100584" marR="100584" marT="36576" marB="36576">
+                  <a:tcPr marL="100584" marR="100584" marT="36576" marB="36576" anchor="ctr">
                     <a:solidFill>
                       <a:srgbClr val="2B3A50"/>
                     </a:solidFill>
@@ -11950,7 +12261,7 @@
                 </a:tc>
                 <a:tc>
                   <a:txBody>
-                    <a:bodyPr wrap="square"/>
+                    <a:bodyPr/>
                     <a:lstStyle/>
                     <a:p>
                       <a:pPr algn="r"/>
@@ -11965,7 +12276,7 @@
                       </a:r>
                     </a:p>
                   </a:txBody>
-                  <a:tcPr anchor="ctr" marL="100584" marR="100584" marT="36576" marB="36576">
+                  <a:tcPr marL="100584" marR="100584" marT="36576" marB="36576" anchor="ctr">
                     <a:solidFill>
                       <a:srgbClr val="2B3A50"/>
                     </a:solidFill>
@@ -11973,7 +12284,7 @@
                 </a:tc>
                 <a:tc>
                   <a:txBody>
-                    <a:bodyPr wrap="square"/>
+                    <a:bodyPr/>
                     <a:lstStyle/>
                     <a:p>
                       <a:pPr algn="r"/>
@@ -11988,17 +12299,22 @@
                       </a:r>
                     </a:p>
                   </a:txBody>
-                  <a:tcPr anchor="ctr" marL="100584" marR="100584" marT="36576" marB="36576">
+                  <a:tcPr marL="100584" marR="100584" marT="36576" marB="36576" anchor="ctr">
                     <a:solidFill>
                       <a:srgbClr val="2B3A50"/>
                     </a:solidFill>
                   </a:tcPr>
                 </a:tc>
+                <a:extLst>
+                  <a:ext uri="{0D108BD9-81ED-4DB2-BD59-A6C34878D82A}">
+                    <a16:rowId xmlns:a16="http://schemas.microsoft.com/office/drawing/2014/main" val="10002"/>
+                  </a:ext>
+                </a:extLst>
               </a:tr>
               <a:tr h="548640">
                 <a:tc>
                   <a:txBody>
-                    <a:bodyPr wrap="square"/>
+                    <a:bodyPr/>
                     <a:lstStyle/>
                     <a:p>
                       <a:pPr algn="l"/>
@@ -12013,7 +12329,7 @@
                       </a:r>
                     </a:p>
                   </a:txBody>
-                  <a:tcPr anchor="ctr" marL="100584" marR="100584" marT="36576" marB="36576">
+                  <a:tcPr marL="100584" marR="100584" marT="36576" marB="36576" anchor="ctr">
                     <a:solidFill>
                       <a:srgbClr val="243247"/>
                     </a:solidFill>
@@ -12021,7 +12337,7 @@
                 </a:tc>
                 <a:tc>
                   <a:txBody>
-                    <a:bodyPr wrap="square"/>
+                    <a:bodyPr/>
                     <a:lstStyle/>
                     <a:p>
                       <a:pPr algn="r"/>
@@ -12036,7 +12352,7 @@
                       </a:r>
                     </a:p>
                   </a:txBody>
-                  <a:tcPr anchor="ctr" marL="100584" marR="100584" marT="36576" marB="36576">
+                  <a:tcPr marL="100584" marR="100584" marT="36576" marB="36576" anchor="ctr">
                     <a:solidFill>
                       <a:srgbClr val="243247"/>
                     </a:solidFill>
@@ -12044,7 +12360,7 @@
                 </a:tc>
                 <a:tc>
                   <a:txBody>
-                    <a:bodyPr wrap="square"/>
+                    <a:bodyPr/>
                     <a:lstStyle/>
                     <a:p>
                       <a:pPr algn="r"/>
@@ -12059,17 +12375,22 @@
                       </a:r>
                     </a:p>
                   </a:txBody>
-                  <a:tcPr anchor="ctr" marL="100584" marR="100584" marT="36576" marB="36576">
+                  <a:tcPr marL="100584" marR="100584" marT="36576" marB="36576" anchor="ctr">
                     <a:solidFill>
                       <a:srgbClr val="243247"/>
                     </a:solidFill>
                   </a:tcPr>
                 </a:tc>
+                <a:extLst>
+                  <a:ext uri="{0D108BD9-81ED-4DB2-BD59-A6C34878D82A}">
+                    <a16:rowId xmlns:a16="http://schemas.microsoft.com/office/drawing/2014/main" val="10003"/>
+                  </a:ext>
+                </a:extLst>
               </a:tr>
               <a:tr h="548640">
                 <a:tc>
                   <a:txBody>
-                    <a:bodyPr wrap="square"/>
+                    <a:bodyPr/>
                     <a:lstStyle/>
                     <a:p>
                       <a:pPr algn="l"/>
@@ -12084,7 +12405,7 @@
                       </a:r>
                     </a:p>
                   </a:txBody>
-                  <a:tcPr anchor="ctr" marL="100584" marR="100584" marT="36576" marB="36576">
+                  <a:tcPr marL="100584" marR="100584" marT="36576" marB="36576" anchor="ctr">
                     <a:solidFill>
                       <a:srgbClr val="2B3A50"/>
                     </a:solidFill>
@@ -12092,7 +12413,7 @@
                 </a:tc>
                 <a:tc>
                   <a:txBody>
-                    <a:bodyPr wrap="square"/>
+                    <a:bodyPr/>
                     <a:lstStyle/>
                     <a:p>
                       <a:pPr algn="r"/>
@@ -12107,7 +12428,7 @@
                       </a:r>
                     </a:p>
                   </a:txBody>
-                  <a:tcPr anchor="ctr" marL="100584" marR="100584" marT="36576" marB="36576">
+                  <a:tcPr marL="100584" marR="100584" marT="36576" marB="36576" anchor="ctr">
                     <a:solidFill>
                       <a:srgbClr val="2B3A50"/>
                     </a:solidFill>
@@ -12115,7 +12436,7 @@
                 </a:tc>
                 <a:tc>
                   <a:txBody>
-                    <a:bodyPr wrap="square"/>
+                    <a:bodyPr/>
                     <a:lstStyle/>
                     <a:p>
                       <a:pPr algn="r"/>
@@ -12130,12 +12451,17 @@
                       </a:r>
                     </a:p>
                   </a:txBody>
-                  <a:tcPr anchor="ctr" marL="100584" marR="100584" marT="36576" marB="36576">
+                  <a:tcPr marL="100584" marR="100584" marT="36576" marB="36576" anchor="ctr">
                     <a:solidFill>
                       <a:srgbClr val="2B3A50"/>
                     </a:solidFill>
                   </a:tcPr>
                 </a:tc>
+                <a:extLst>
+                  <a:ext uri="{0D108BD9-81ED-4DB2-BD59-A6C34878D82A}">
+                    <a16:rowId xmlns:a16="http://schemas.microsoft.com/office/drawing/2014/main" val="10004"/>
+                  </a:ext>
+                </a:extLst>
               </a:tr>
             </a:tbl>
           </a:graphicData>
@@ -12158,7 +12484,7 @@
           <a:noFill/>
         </p:spPr>
         <p:txBody>
-          <a:bodyPr wrap="square" lIns="0" rIns="0" tIns="0" bIns="0">
+          <a:bodyPr wrap="square" lIns="0" tIns="0" rIns="0" bIns="0">
             <a:spAutoFit/>
           </a:bodyPr>
           <a:lstStyle/>
@@ -12269,7 +12595,7 @@
 </file>
 
 <file path=ppt/slides/slide5.xml><?xml version="1.0" encoding="utf-8"?>
-<p:sld xmlns:a="http://schemas.openxmlformats.org/drawingml/2006/main" xmlns:p="http://schemas.openxmlformats.org/presentationml/2006/main" xmlns:r="http://schemas.openxmlformats.org/officeDocument/2006/relationships">
+<p:sld xmlns:a="http://schemas.openxmlformats.org/drawingml/2006/main" xmlns:r="http://schemas.openxmlformats.org/officeDocument/2006/relationships" xmlns:p="http://schemas.openxmlformats.org/presentationml/2006/main">
   <p:cSld>
     <p:bg>
       <p:bgPr>
@@ -12285,7 +12611,14 @@
         <p:cNvGrpSpPr/>
         <p:nvPr/>
       </p:nvGrpSpPr>
-      <p:grpSpPr/>
+      <p:grpSpPr>
+        <a:xfrm>
+          <a:off x="0" y="0"/>
+          <a:ext cx="0" cy="0"/>
+          <a:chOff x="0" y="0"/>
+          <a:chExt cx="0" cy="0"/>
+        </a:xfrm>
+      </p:grpSpPr>
       <p:sp>
         <p:nvSpPr>
           <p:cNvPr id="2" name="TextBox 1"/>
@@ -12303,7 +12636,7 @@
           <a:noFill/>
         </p:spPr>
         <p:txBody>
-          <a:bodyPr wrap="square" lIns="0" rIns="0" tIns="0" bIns="0">
+          <a:bodyPr wrap="square" lIns="0" tIns="0" rIns="0" bIns="0">
             <a:spAutoFit/>
           </a:bodyPr>
           <a:lstStyle/>
@@ -12337,7 +12670,7 @@
           <a:noFill/>
         </p:spPr>
         <p:txBody>
-          <a:bodyPr wrap="square" lIns="0" rIns="0" tIns="0" bIns="0">
+          <a:bodyPr wrap="square" lIns="0" tIns="0" rIns="0" bIns="0">
             <a:spAutoFit/>
           </a:bodyPr>
           <a:lstStyle/>
@@ -12400,6 +12733,7 @@
           <a:lstStyle/>
           <a:p>
             <a:pPr algn="ctr"/>
+            <a:endParaRPr/>
           </a:p>
         </p:txBody>
       </p:sp>
@@ -12420,7 +12754,7 @@
           <a:noFill/>
         </p:spPr>
         <p:txBody>
-          <a:bodyPr wrap="square" lIns="0" rIns="0" tIns="0" bIns="0">
+          <a:bodyPr wrap="square" lIns="0" tIns="0" rIns="0" bIns="0">
             <a:spAutoFit/>
           </a:bodyPr>
           <a:lstStyle/>
@@ -12455,7 +12789,7 @@
           <a:noFill/>
         </p:spPr>
         <p:txBody>
-          <a:bodyPr wrap="square" lIns="0" rIns="0" tIns="0" bIns="0">
+          <a:bodyPr wrap="square" lIns="0" tIns="0" rIns="0" bIns="0">
             <a:spAutoFit/>
           </a:bodyPr>
           <a:lstStyle/>
@@ -12656,7 +12990,7 @@
 </file>
 
 <file path=ppt/slides/slide6.xml><?xml version="1.0" encoding="utf-8"?>
-<p:sld xmlns:a="http://schemas.openxmlformats.org/drawingml/2006/main" xmlns:p="http://schemas.openxmlformats.org/presentationml/2006/main" xmlns:r="http://schemas.openxmlformats.org/officeDocument/2006/relationships">
+<p:sld xmlns:a="http://schemas.openxmlformats.org/drawingml/2006/main" xmlns:r="http://schemas.openxmlformats.org/officeDocument/2006/relationships" xmlns:p="http://schemas.openxmlformats.org/presentationml/2006/main">
   <p:cSld>
     <p:bg>
       <p:bgPr>
@@ -12672,7 +13006,14 @@
         <p:cNvGrpSpPr/>
         <p:nvPr/>
       </p:nvGrpSpPr>
-      <p:grpSpPr/>
+      <p:grpSpPr>
+        <a:xfrm>
+          <a:off x="0" y="0"/>
+          <a:ext cx="0" cy="0"/>
+          <a:chOff x="0" y="0"/>
+          <a:chExt cx="0" cy="0"/>
+        </a:xfrm>
+      </p:grpSpPr>
       <p:sp>
         <p:nvSpPr>
           <p:cNvPr id="2" name="TextBox 1"/>
@@ -12690,7 +13031,7 @@
           <a:noFill/>
         </p:spPr>
         <p:txBody>
-          <a:bodyPr wrap="square" lIns="0" rIns="0" tIns="0" bIns="0">
+          <a:bodyPr wrap="square" lIns="0" tIns="0" rIns="0" bIns="0">
             <a:spAutoFit/>
           </a:bodyPr>
           <a:lstStyle/>
@@ -12724,7 +13065,7 @@
           <a:noFill/>
         </p:spPr>
         <p:txBody>
-          <a:bodyPr wrap="square" lIns="0" rIns="0" tIns="0" bIns="0">
+          <a:bodyPr wrap="square" lIns="0" tIns="0" rIns="0" bIns="0">
             <a:spAutoFit/>
           </a:bodyPr>
           <a:lstStyle/>
@@ -12787,6 +13128,7 @@
           <a:lstStyle/>
           <a:p>
             <a:pPr algn="ctr"/>
+            <a:endParaRPr/>
           </a:p>
         </p:txBody>
       </p:sp>
@@ -12807,7 +13149,7 @@
           <a:noFill/>
         </p:spPr>
         <p:txBody>
-          <a:bodyPr wrap="square" lIns="0" rIns="0" tIns="0" bIns="0">
+          <a:bodyPr wrap="square" lIns="0" tIns="0" rIns="0" bIns="0">
             <a:spAutoFit/>
           </a:bodyPr>
           <a:lstStyle/>
@@ -12844,16 +13186,46 @@
                 <a:tableStyleId>{2D5ABB26-0587-4C30-8999-92F81FD0307C}</a:tableStyleId>
               </a:tblPr>
               <a:tblGrid>
-                <a:gridCol w="1828800"/>
-                <a:gridCol w="822960"/>
-                <a:gridCol w="2834640"/>
-                <a:gridCol w="2834640"/>
-                <a:gridCol w="2444191"/>
+                <a:gridCol w="1828800">
+                  <a:extLst>
+                    <a:ext uri="{9D8B030D-6E8A-4147-A177-3AD203B41FA5}">
+                      <a16:colId xmlns:a16="http://schemas.microsoft.com/office/drawing/2014/main" val="20000"/>
+                    </a:ext>
+                  </a:extLst>
+                </a:gridCol>
+                <a:gridCol w="822960">
+                  <a:extLst>
+                    <a:ext uri="{9D8B030D-6E8A-4147-A177-3AD203B41FA5}">
+                      <a16:colId xmlns:a16="http://schemas.microsoft.com/office/drawing/2014/main" val="20001"/>
+                    </a:ext>
+                  </a:extLst>
+                </a:gridCol>
+                <a:gridCol w="2834640">
+                  <a:extLst>
+                    <a:ext uri="{9D8B030D-6E8A-4147-A177-3AD203B41FA5}">
+                      <a16:colId xmlns:a16="http://schemas.microsoft.com/office/drawing/2014/main" val="20002"/>
+                    </a:ext>
+                  </a:extLst>
+                </a:gridCol>
+                <a:gridCol w="2834640">
+                  <a:extLst>
+                    <a:ext uri="{9D8B030D-6E8A-4147-A177-3AD203B41FA5}">
+                      <a16:colId xmlns:a16="http://schemas.microsoft.com/office/drawing/2014/main" val="20003"/>
+                    </a:ext>
+                  </a:extLst>
+                </a:gridCol>
+                <a:gridCol w="2444191">
+                  <a:extLst>
+                    <a:ext uri="{9D8B030D-6E8A-4147-A177-3AD203B41FA5}">
+                      <a16:colId xmlns:a16="http://schemas.microsoft.com/office/drawing/2014/main" val="20004"/>
+                    </a:ext>
+                  </a:extLst>
+                </a:gridCol>
               </a:tblGrid>
               <a:tr h="457200">
                 <a:tc>
                   <a:txBody>
-                    <a:bodyPr wrap="square"/>
+                    <a:bodyPr/>
                     <a:lstStyle/>
                     <a:p>
                       <a:pPr algn="l"/>
@@ -12868,7 +13240,7 @@
                       </a:r>
                     </a:p>
                   </a:txBody>
-                  <a:tcPr anchor="ctr" marL="100584" marR="100584" marT="36576" marB="36576">
+                  <a:tcPr marL="100584" marR="100584" marT="36576" marB="36576" anchor="ctr">
                     <a:solidFill>
                       <a:srgbClr val="334155"/>
                     </a:solidFill>
@@ -12876,7 +13248,7 @@
                 </a:tc>
                 <a:tc>
                   <a:txBody>
-                    <a:bodyPr wrap="square"/>
+                    <a:bodyPr/>
                     <a:lstStyle/>
                     <a:p>
                       <a:pPr algn="l"/>
@@ -12891,7 +13263,7 @@
                       </a:r>
                     </a:p>
                   </a:txBody>
-                  <a:tcPr anchor="ctr" marL="100584" marR="100584" marT="36576" marB="36576">
+                  <a:tcPr marL="100584" marR="100584" marT="36576" marB="36576" anchor="ctr">
                     <a:solidFill>
                       <a:srgbClr val="334155"/>
                     </a:solidFill>
@@ -12899,7 +13271,7 @@
                 </a:tc>
                 <a:tc>
                   <a:txBody>
-                    <a:bodyPr wrap="square"/>
+                    <a:bodyPr/>
                     <a:lstStyle/>
                     <a:p>
                       <a:pPr algn="r"/>
@@ -12914,7 +13286,7 @@
                       </a:r>
                     </a:p>
                   </a:txBody>
-                  <a:tcPr anchor="ctr" marL="100584" marR="100584" marT="36576" marB="36576">
+                  <a:tcPr marL="100584" marR="100584" marT="36576" marB="36576" anchor="ctr">
                     <a:solidFill>
                       <a:srgbClr val="334155"/>
                     </a:solidFill>
@@ -12922,7 +13294,7 @@
                 </a:tc>
                 <a:tc>
                   <a:txBody>
-                    <a:bodyPr wrap="square"/>
+                    <a:bodyPr/>
                     <a:lstStyle/>
                     <a:p>
                       <a:pPr algn="r"/>
@@ -12937,7 +13309,7 @@
                       </a:r>
                     </a:p>
                   </a:txBody>
-                  <a:tcPr anchor="ctr" marL="100584" marR="100584" marT="36576" marB="36576">
+                  <a:tcPr marL="100584" marR="100584" marT="36576" marB="36576" anchor="ctr">
                     <a:solidFill>
                       <a:srgbClr val="334155"/>
                     </a:solidFill>
@@ -12945,7 +13317,7 @@
                 </a:tc>
                 <a:tc>
                   <a:txBody>
-                    <a:bodyPr wrap="square"/>
+                    <a:bodyPr/>
                     <a:lstStyle/>
                     <a:p>
                       <a:pPr algn="r"/>
@@ -12960,17 +13332,22 @@
                       </a:r>
                     </a:p>
                   </a:txBody>
-                  <a:tcPr anchor="ctr" marL="100584" marR="100584" marT="36576" marB="36576">
+                  <a:tcPr marL="100584" marR="100584" marT="36576" marB="36576" anchor="ctr">
                     <a:solidFill>
                       <a:srgbClr val="334155"/>
                     </a:solidFill>
                   </a:tcPr>
                 </a:tc>
+                <a:extLst>
+                  <a:ext uri="{0D108BD9-81ED-4DB2-BD59-A6C34878D82A}">
+                    <a16:rowId xmlns:a16="http://schemas.microsoft.com/office/drawing/2014/main" val="10000"/>
+                  </a:ext>
+                </a:extLst>
               </a:tr>
               <a:tr h="420624">
                 <a:tc>
                   <a:txBody>
-                    <a:bodyPr wrap="square"/>
+                    <a:bodyPr/>
                     <a:lstStyle/>
                     <a:p>
                       <a:pPr algn="l"/>
@@ -12985,7 +13362,7 @@
                       </a:r>
                     </a:p>
                   </a:txBody>
-                  <a:tcPr anchor="ctr" marL="100584" marR="100584" marT="36576" marB="36576">
+                  <a:tcPr marL="100584" marR="100584" marT="36576" marB="36576" anchor="ctr">
                     <a:solidFill>
                       <a:srgbClr val="243247"/>
                     </a:solidFill>
@@ -12993,7 +13370,7 @@
                 </a:tc>
                 <a:tc>
                   <a:txBody>
-                    <a:bodyPr wrap="square"/>
+                    <a:bodyPr/>
                     <a:lstStyle/>
                     <a:p>
                       <a:pPr algn="l"/>
@@ -13008,7 +13385,7 @@
                       </a:r>
                     </a:p>
                   </a:txBody>
-                  <a:tcPr anchor="ctr" marL="100584" marR="100584" marT="36576" marB="36576">
+                  <a:tcPr marL="100584" marR="100584" marT="36576" marB="36576" anchor="ctr">
                     <a:solidFill>
                       <a:srgbClr val="243247"/>
                     </a:solidFill>
@@ -13016,7 +13393,7 @@
                 </a:tc>
                 <a:tc>
                   <a:txBody>
-                    <a:bodyPr wrap="square"/>
+                    <a:bodyPr/>
                     <a:lstStyle/>
                     <a:p>
                       <a:pPr algn="r"/>
@@ -13031,7 +13408,7 @@
                       </a:r>
                     </a:p>
                   </a:txBody>
-                  <a:tcPr anchor="ctr" marL="100584" marR="100584" marT="36576" marB="36576">
+                  <a:tcPr marL="100584" marR="100584" marT="36576" marB="36576" anchor="ctr">
                     <a:solidFill>
                       <a:srgbClr val="243247"/>
                     </a:solidFill>
@@ -13039,7 +13416,7 @@
                 </a:tc>
                 <a:tc>
                   <a:txBody>
-                    <a:bodyPr wrap="square"/>
+                    <a:bodyPr/>
                     <a:lstStyle/>
                     <a:p>
                       <a:pPr algn="r"/>
@@ -13054,7 +13431,7 @@
                       </a:r>
                     </a:p>
                   </a:txBody>
-                  <a:tcPr anchor="ctr" marL="100584" marR="100584" marT="36576" marB="36576">
+                  <a:tcPr marL="100584" marR="100584" marT="36576" marB="36576" anchor="ctr">
                     <a:solidFill>
                       <a:srgbClr val="243247"/>
                     </a:solidFill>
@@ -13062,7 +13439,7 @@
                 </a:tc>
                 <a:tc>
                   <a:txBody>
-                    <a:bodyPr wrap="square"/>
+                    <a:bodyPr/>
                     <a:lstStyle/>
                     <a:p>
                       <a:pPr algn="r"/>
@@ -13077,17 +13454,22 @@
                       </a:r>
                     </a:p>
                   </a:txBody>
-                  <a:tcPr anchor="ctr" marL="100584" marR="100584" marT="36576" marB="36576">
+                  <a:tcPr marL="100584" marR="100584" marT="36576" marB="36576" anchor="ctr">
                     <a:solidFill>
                       <a:srgbClr val="243247"/>
                     </a:solidFill>
                   </a:tcPr>
                 </a:tc>
+                <a:extLst>
+                  <a:ext uri="{0D108BD9-81ED-4DB2-BD59-A6C34878D82A}">
+                    <a16:rowId xmlns:a16="http://schemas.microsoft.com/office/drawing/2014/main" val="10001"/>
+                  </a:ext>
+                </a:extLst>
               </a:tr>
               <a:tr h="420624">
                 <a:tc>
                   <a:txBody>
-                    <a:bodyPr wrap="square"/>
+                    <a:bodyPr/>
                     <a:lstStyle/>
                     <a:p>
                       <a:pPr algn="l"/>
@@ -13102,7 +13484,7 @@
                       </a:r>
                     </a:p>
                   </a:txBody>
-                  <a:tcPr anchor="ctr" marL="100584" marR="100584" marT="36576" marB="36576">
+                  <a:tcPr marL="100584" marR="100584" marT="36576" marB="36576" anchor="ctr">
                     <a:solidFill>
                       <a:srgbClr val="2B3A50"/>
                     </a:solidFill>
@@ -13110,7 +13492,7 @@
                 </a:tc>
                 <a:tc>
                   <a:txBody>
-                    <a:bodyPr wrap="square"/>
+                    <a:bodyPr/>
                     <a:lstStyle/>
                     <a:p>
                       <a:pPr algn="l"/>
@@ -13125,7 +13507,7 @@
                       </a:r>
                     </a:p>
                   </a:txBody>
-                  <a:tcPr anchor="ctr" marL="100584" marR="100584" marT="36576" marB="36576">
+                  <a:tcPr marL="100584" marR="100584" marT="36576" marB="36576" anchor="ctr">
                     <a:solidFill>
                       <a:srgbClr val="2B3A50"/>
                     </a:solidFill>
@@ -13133,7 +13515,7 @@
                 </a:tc>
                 <a:tc>
                   <a:txBody>
-                    <a:bodyPr wrap="square"/>
+                    <a:bodyPr/>
                     <a:lstStyle/>
                     <a:p>
                       <a:pPr algn="r"/>
@@ -13148,7 +13530,7 @@
                       </a:r>
                     </a:p>
                   </a:txBody>
-                  <a:tcPr anchor="ctr" marL="100584" marR="100584" marT="36576" marB="36576">
+                  <a:tcPr marL="100584" marR="100584" marT="36576" marB="36576" anchor="ctr">
                     <a:solidFill>
                       <a:srgbClr val="2B3A50"/>
                     </a:solidFill>
@@ -13156,7 +13538,7 @@
                 </a:tc>
                 <a:tc>
                   <a:txBody>
-                    <a:bodyPr wrap="square"/>
+                    <a:bodyPr/>
                     <a:lstStyle/>
                     <a:p>
                       <a:pPr algn="r"/>
@@ -13171,7 +13553,7 @@
                       </a:r>
                     </a:p>
                   </a:txBody>
-                  <a:tcPr anchor="ctr" marL="100584" marR="100584" marT="36576" marB="36576">
+                  <a:tcPr marL="100584" marR="100584" marT="36576" marB="36576" anchor="ctr">
                     <a:solidFill>
                       <a:srgbClr val="2B3A50"/>
                     </a:solidFill>
@@ -13179,7 +13561,7 @@
                 </a:tc>
                 <a:tc>
                   <a:txBody>
-                    <a:bodyPr wrap="square"/>
+                    <a:bodyPr/>
                     <a:lstStyle/>
                     <a:p>
                       <a:pPr algn="r"/>
@@ -13194,17 +13576,22 @@
                       </a:r>
                     </a:p>
                   </a:txBody>
-                  <a:tcPr anchor="ctr" marL="100584" marR="100584" marT="36576" marB="36576">
+                  <a:tcPr marL="100584" marR="100584" marT="36576" marB="36576" anchor="ctr">
                     <a:solidFill>
                       <a:srgbClr val="2B3A50"/>
                     </a:solidFill>
                   </a:tcPr>
                 </a:tc>
+                <a:extLst>
+                  <a:ext uri="{0D108BD9-81ED-4DB2-BD59-A6C34878D82A}">
+                    <a16:rowId xmlns:a16="http://schemas.microsoft.com/office/drawing/2014/main" val="10002"/>
+                  </a:ext>
+                </a:extLst>
               </a:tr>
               <a:tr h="420624">
                 <a:tc>
                   <a:txBody>
-                    <a:bodyPr wrap="square"/>
+                    <a:bodyPr/>
                     <a:lstStyle/>
                     <a:p>
                       <a:pPr algn="l"/>
@@ -13219,7 +13606,7 @@
                       </a:r>
                     </a:p>
                   </a:txBody>
-                  <a:tcPr anchor="ctr" marL="100584" marR="100584" marT="36576" marB="36576">
+                  <a:tcPr marL="100584" marR="100584" marT="36576" marB="36576" anchor="ctr">
                     <a:solidFill>
                       <a:srgbClr val="243247"/>
                     </a:solidFill>
@@ -13227,7 +13614,7 @@
                 </a:tc>
                 <a:tc>
                   <a:txBody>
-                    <a:bodyPr wrap="square"/>
+                    <a:bodyPr/>
                     <a:lstStyle/>
                     <a:p>
                       <a:pPr algn="l"/>
@@ -13242,7 +13629,7 @@
                       </a:r>
                     </a:p>
                   </a:txBody>
-                  <a:tcPr anchor="ctr" marL="100584" marR="100584" marT="36576" marB="36576">
+                  <a:tcPr marL="100584" marR="100584" marT="36576" marB="36576" anchor="ctr">
                     <a:solidFill>
                       <a:srgbClr val="243247"/>
                     </a:solidFill>
@@ -13250,7 +13637,7 @@
                 </a:tc>
                 <a:tc>
                   <a:txBody>
-                    <a:bodyPr wrap="square"/>
+                    <a:bodyPr/>
                     <a:lstStyle/>
                     <a:p>
                       <a:pPr algn="r"/>
@@ -13265,7 +13652,7 @@
                       </a:r>
                     </a:p>
                   </a:txBody>
-                  <a:tcPr anchor="ctr" marL="100584" marR="100584" marT="36576" marB="36576">
+                  <a:tcPr marL="100584" marR="100584" marT="36576" marB="36576" anchor="ctr">
                     <a:solidFill>
                       <a:srgbClr val="243247"/>
                     </a:solidFill>
@@ -13273,7 +13660,7 @@
                 </a:tc>
                 <a:tc>
                   <a:txBody>
-                    <a:bodyPr wrap="square"/>
+                    <a:bodyPr/>
                     <a:lstStyle/>
                     <a:p>
                       <a:pPr algn="r"/>
@@ -13288,7 +13675,7 @@
                       </a:r>
                     </a:p>
                   </a:txBody>
-                  <a:tcPr anchor="ctr" marL="100584" marR="100584" marT="36576" marB="36576">
+                  <a:tcPr marL="100584" marR="100584" marT="36576" marB="36576" anchor="ctr">
                     <a:solidFill>
                       <a:srgbClr val="243247"/>
                     </a:solidFill>
@@ -13296,7 +13683,7 @@
                 </a:tc>
                 <a:tc>
                   <a:txBody>
-                    <a:bodyPr wrap="square"/>
+                    <a:bodyPr/>
                     <a:lstStyle/>
                     <a:p>
                       <a:pPr algn="r"/>
@@ -13311,17 +13698,22 @@
                       </a:r>
                     </a:p>
                   </a:txBody>
-                  <a:tcPr anchor="ctr" marL="100584" marR="100584" marT="36576" marB="36576">
+                  <a:tcPr marL="100584" marR="100584" marT="36576" marB="36576" anchor="ctr">
                     <a:solidFill>
                       <a:srgbClr val="243247"/>
                     </a:solidFill>
                   </a:tcPr>
                 </a:tc>
+                <a:extLst>
+                  <a:ext uri="{0D108BD9-81ED-4DB2-BD59-A6C34878D82A}">
+                    <a16:rowId xmlns:a16="http://schemas.microsoft.com/office/drawing/2014/main" val="10003"/>
+                  </a:ext>
+                </a:extLst>
               </a:tr>
               <a:tr h="420624">
                 <a:tc>
                   <a:txBody>
-                    <a:bodyPr wrap="square"/>
+                    <a:bodyPr/>
                     <a:lstStyle/>
                     <a:p>
                       <a:pPr algn="l"/>
@@ -13336,7 +13728,7 @@
                       </a:r>
                     </a:p>
                   </a:txBody>
-                  <a:tcPr anchor="ctr" marL="100584" marR="100584" marT="36576" marB="36576">
+                  <a:tcPr marL="100584" marR="100584" marT="36576" marB="36576" anchor="ctr">
                     <a:solidFill>
                       <a:srgbClr val="2B3A50"/>
                     </a:solidFill>
@@ -13344,7 +13736,7 @@
                 </a:tc>
                 <a:tc>
                   <a:txBody>
-                    <a:bodyPr wrap="square"/>
+                    <a:bodyPr/>
                     <a:lstStyle/>
                     <a:p>
                       <a:pPr algn="l"/>
@@ -13359,7 +13751,7 @@
                       </a:r>
                     </a:p>
                   </a:txBody>
-                  <a:tcPr anchor="ctr" marL="100584" marR="100584" marT="36576" marB="36576">
+                  <a:tcPr marL="100584" marR="100584" marT="36576" marB="36576" anchor="ctr">
                     <a:solidFill>
                       <a:srgbClr val="2B3A50"/>
                     </a:solidFill>
@@ -13367,7 +13759,7 @@
                 </a:tc>
                 <a:tc>
                   <a:txBody>
-                    <a:bodyPr wrap="square"/>
+                    <a:bodyPr/>
                     <a:lstStyle/>
                     <a:p>
                       <a:pPr algn="r"/>
@@ -13382,7 +13774,7 @@
                       </a:r>
                     </a:p>
                   </a:txBody>
-                  <a:tcPr anchor="ctr" marL="100584" marR="100584" marT="36576" marB="36576">
+                  <a:tcPr marL="100584" marR="100584" marT="36576" marB="36576" anchor="ctr">
                     <a:solidFill>
                       <a:srgbClr val="2B3A50"/>
                     </a:solidFill>
@@ -13390,7 +13782,7 @@
                 </a:tc>
                 <a:tc>
                   <a:txBody>
-                    <a:bodyPr wrap="square"/>
+                    <a:bodyPr/>
                     <a:lstStyle/>
                     <a:p>
                       <a:pPr algn="r"/>
@@ -13405,7 +13797,7 @@
                       </a:r>
                     </a:p>
                   </a:txBody>
-                  <a:tcPr anchor="ctr" marL="100584" marR="100584" marT="36576" marB="36576">
+                  <a:tcPr marL="100584" marR="100584" marT="36576" marB="36576" anchor="ctr">
                     <a:solidFill>
                       <a:srgbClr val="2B3A50"/>
                     </a:solidFill>
@@ -13413,7 +13805,7 @@
                 </a:tc>
                 <a:tc>
                   <a:txBody>
-                    <a:bodyPr wrap="square"/>
+                    <a:bodyPr/>
                     <a:lstStyle/>
                     <a:p>
                       <a:pPr algn="r"/>
@@ -13428,12 +13820,17 @@
                       </a:r>
                     </a:p>
                   </a:txBody>
-                  <a:tcPr anchor="ctr" marL="100584" marR="100584" marT="36576" marB="36576">
+                  <a:tcPr marL="100584" marR="100584" marT="36576" marB="36576" anchor="ctr">
                     <a:solidFill>
                       <a:srgbClr val="2B3A50"/>
                     </a:solidFill>
                   </a:tcPr>
                 </a:tc>
+                <a:extLst>
+                  <a:ext uri="{0D108BD9-81ED-4DB2-BD59-A6C34878D82A}">
+                    <a16:rowId xmlns:a16="http://schemas.microsoft.com/office/drawing/2014/main" val="10004"/>
+                  </a:ext>
+                </a:extLst>
               </a:tr>
             </a:tbl>
           </a:graphicData>
@@ -13456,7 +13853,7 @@
           <a:noFill/>
         </p:spPr>
         <p:txBody>
-          <a:bodyPr wrap="square" lIns="0" rIns="0" tIns="0" bIns="0">
+          <a:bodyPr wrap="square" lIns="0" tIns="0" rIns="0" bIns="0">
             <a:spAutoFit/>
           </a:bodyPr>
           <a:lstStyle/>
@@ -13543,7 +13940,7 @@
 </file>
 
 <file path=ppt/slides/slide7.xml><?xml version="1.0" encoding="utf-8"?>
-<p:sld xmlns:a="http://schemas.openxmlformats.org/drawingml/2006/main" xmlns:p="http://schemas.openxmlformats.org/presentationml/2006/main" xmlns:r="http://schemas.openxmlformats.org/officeDocument/2006/relationships">
+<p:sld xmlns:a="http://schemas.openxmlformats.org/drawingml/2006/main" xmlns:r="http://schemas.openxmlformats.org/officeDocument/2006/relationships" xmlns:p="http://schemas.openxmlformats.org/presentationml/2006/main">
   <p:cSld>
     <p:bg>
       <p:bgPr>
@@ -13559,7 +13956,14 @@
         <p:cNvGrpSpPr/>
         <p:nvPr/>
       </p:nvGrpSpPr>
-      <p:grpSpPr/>
+      <p:grpSpPr>
+        <a:xfrm>
+          <a:off x="0" y="0"/>
+          <a:ext cx="0" cy="0"/>
+          <a:chOff x="0" y="0"/>
+          <a:chExt cx="0" cy="0"/>
+        </a:xfrm>
+      </p:grpSpPr>
       <p:sp>
         <p:nvSpPr>
           <p:cNvPr id="2" name="TextBox 1"/>
@@ -13577,7 +13981,7 @@
           <a:noFill/>
         </p:spPr>
         <p:txBody>
-          <a:bodyPr wrap="square" lIns="0" rIns="0" tIns="0" bIns="0">
+          <a:bodyPr wrap="square" lIns="0" tIns="0" rIns="0" bIns="0">
             <a:spAutoFit/>
           </a:bodyPr>
           <a:lstStyle/>
@@ -13611,7 +14015,7 @@
           <a:noFill/>
         </p:spPr>
         <p:txBody>
-          <a:bodyPr wrap="square" lIns="0" rIns="0" tIns="0" bIns="0">
+          <a:bodyPr wrap="square" lIns="0" tIns="0" rIns="0" bIns="0">
             <a:spAutoFit/>
           </a:bodyPr>
           <a:lstStyle/>
@@ -13674,6 +14078,7 @@
           <a:lstStyle/>
           <a:p>
             <a:pPr algn="ctr"/>
+            <a:endParaRPr/>
           </a:p>
         </p:txBody>
       </p:sp>
@@ -13694,7 +14099,7 @@
           <a:noFill/>
         </p:spPr>
         <p:txBody>
-          <a:bodyPr wrap="square" lIns="0" rIns="0" tIns="0" bIns="0">
+          <a:bodyPr wrap="square" lIns="0" tIns="0" rIns="0" bIns="0">
             <a:spAutoFit/>
           </a:bodyPr>
           <a:lstStyle/>
@@ -13729,7 +14134,7 @@
           <a:noFill/>
         </p:spPr>
         <p:txBody>
-          <a:bodyPr wrap="square" lIns="0" rIns="0" tIns="0" bIns="0">
+          <a:bodyPr wrap="square" lIns="0" tIns="0" rIns="0" bIns="0">
             <a:spAutoFit/>
           </a:bodyPr>
           <a:lstStyle/>
@@ -13930,7 +14335,7 @@
 </file>
 
 <file path=ppt/slides/slide8.xml><?xml version="1.0" encoding="utf-8"?>
-<p:sld xmlns:a="http://schemas.openxmlformats.org/drawingml/2006/main" xmlns:p="http://schemas.openxmlformats.org/presentationml/2006/main" xmlns:r="http://schemas.openxmlformats.org/officeDocument/2006/relationships">
+<p:sld xmlns:a="http://schemas.openxmlformats.org/drawingml/2006/main" xmlns:r="http://schemas.openxmlformats.org/officeDocument/2006/relationships" xmlns:p="http://schemas.openxmlformats.org/presentationml/2006/main">
   <p:cSld>
     <p:bg>
       <p:bgPr>
@@ -13946,7 +14351,14 @@
         <p:cNvGrpSpPr/>
         <p:nvPr/>
       </p:nvGrpSpPr>
-      <p:grpSpPr/>
+      <p:grpSpPr>
+        <a:xfrm>
+          <a:off x="0" y="0"/>
+          <a:ext cx="0" cy="0"/>
+          <a:chOff x="0" y="0"/>
+          <a:chExt cx="0" cy="0"/>
+        </a:xfrm>
+      </p:grpSpPr>
       <p:sp>
         <p:nvSpPr>
           <p:cNvPr id="2" name="TextBox 1"/>
@@ -13964,7 +14376,7 @@
           <a:noFill/>
         </p:spPr>
         <p:txBody>
-          <a:bodyPr wrap="square" lIns="0" rIns="0" tIns="0" bIns="0">
+          <a:bodyPr wrap="square" lIns="0" tIns="0" rIns="0" bIns="0">
             <a:spAutoFit/>
           </a:bodyPr>
           <a:lstStyle/>
@@ -13998,7 +14410,7 @@
           <a:noFill/>
         </p:spPr>
         <p:txBody>
-          <a:bodyPr wrap="square" lIns="0" rIns="0" tIns="0" bIns="0">
+          <a:bodyPr wrap="square" lIns="0" tIns="0" rIns="0" bIns="0">
             <a:spAutoFit/>
           </a:bodyPr>
           <a:lstStyle/>
@@ -14061,6 +14473,7 @@
           <a:lstStyle/>
           <a:p>
             <a:pPr algn="ctr"/>
+            <a:endParaRPr/>
           </a:p>
         </p:txBody>
       </p:sp>
@@ -14081,7 +14494,7 @@
           <a:noFill/>
         </p:spPr>
         <p:txBody>
-          <a:bodyPr wrap="square" lIns="0" rIns="0" tIns="0" bIns="0">
+          <a:bodyPr wrap="square" lIns="0" tIns="0" rIns="0" bIns="0">
             <a:spAutoFit/>
           </a:bodyPr>
           <a:lstStyle/>
@@ -14108,7 +14521,7 @@
           <p:nvPr/>
         </p:nvPicPr>
         <p:blipFill>
-          <a:blip r:embed="rId2"/>
+          <a:blip r:embed="rId3"/>
           <a:stretch>
             <a:fillRect/>
           </a:stretch>
@@ -14132,7 +14545,7 @@
 </file>
 
 <file path=ppt/slides/slide9.xml><?xml version="1.0" encoding="utf-8"?>
-<p:sld xmlns:a="http://schemas.openxmlformats.org/drawingml/2006/main" xmlns:p="http://schemas.openxmlformats.org/presentationml/2006/main" xmlns:r="http://schemas.openxmlformats.org/officeDocument/2006/relationships">
+<p:sld xmlns:a="http://schemas.openxmlformats.org/drawingml/2006/main" xmlns:r="http://schemas.openxmlformats.org/officeDocument/2006/relationships" xmlns:p="http://schemas.openxmlformats.org/presentationml/2006/main">
   <p:cSld>
     <p:bg>
       <p:bgPr>
@@ -14148,7 +14561,14 @@
         <p:cNvGrpSpPr/>
         <p:nvPr/>
       </p:nvGrpSpPr>
-      <p:grpSpPr/>
+      <p:grpSpPr>
+        <a:xfrm>
+          <a:off x="0" y="0"/>
+          <a:ext cx="0" cy="0"/>
+          <a:chOff x="0" y="0"/>
+          <a:chExt cx="0" cy="0"/>
+        </a:xfrm>
+      </p:grpSpPr>
       <p:sp>
         <p:nvSpPr>
           <p:cNvPr id="2" name="TextBox 1"/>
@@ -14166,7 +14586,7 @@
           <a:noFill/>
         </p:spPr>
         <p:txBody>
-          <a:bodyPr wrap="square" lIns="0" rIns="0" tIns="0" bIns="0">
+          <a:bodyPr wrap="square" lIns="0" tIns="0" rIns="0" bIns="0">
             <a:spAutoFit/>
           </a:bodyPr>
           <a:lstStyle/>
@@ -14200,7 +14620,7 @@
           <a:noFill/>
         </p:spPr>
         <p:txBody>
-          <a:bodyPr wrap="square" lIns="0" rIns="0" tIns="0" bIns="0">
+          <a:bodyPr wrap="square" lIns="0" tIns="0" rIns="0" bIns="0">
             <a:spAutoFit/>
           </a:bodyPr>
           <a:lstStyle/>
@@ -14263,6 +14683,7 @@
           <a:lstStyle/>
           <a:p>
             <a:pPr algn="ctr"/>
+            <a:endParaRPr/>
           </a:p>
         </p:txBody>
       </p:sp>
@@ -14283,7 +14704,7 @@
           <a:noFill/>
         </p:spPr>
         <p:txBody>
-          <a:bodyPr wrap="square" lIns="0" rIns="0" tIns="0" bIns="0">
+          <a:bodyPr wrap="square" lIns="0" tIns="0" rIns="0" bIns="0">
             <a:spAutoFit/>
           </a:bodyPr>
           <a:lstStyle/>
@@ -14320,14 +14741,32 @@
                 <a:tableStyleId>{2D5ABB26-0587-4C30-8999-92F81FD0307C}</a:tableStyleId>
               </a:tblPr>
               <a:tblGrid>
-                <a:gridCol w="3840480"/>
-                <a:gridCol w="2468880"/>
-                <a:gridCol w="2468880"/>
+                <a:gridCol w="3840480">
+                  <a:extLst>
+                    <a:ext uri="{9D8B030D-6E8A-4147-A177-3AD203B41FA5}">
+                      <a16:colId xmlns:a16="http://schemas.microsoft.com/office/drawing/2014/main" val="20000"/>
+                    </a:ext>
+                  </a:extLst>
+                </a:gridCol>
+                <a:gridCol w="2468880">
+                  <a:extLst>
+                    <a:ext uri="{9D8B030D-6E8A-4147-A177-3AD203B41FA5}">
+                      <a16:colId xmlns:a16="http://schemas.microsoft.com/office/drawing/2014/main" val="20001"/>
+                    </a:ext>
+                  </a:extLst>
+                </a:gridCol>
+                <a:gridCol w="2468880">
+                  <a:extLst>
+                    <a:ext uri="{9D8B030D-6E8A-4147-A177-3AD203B41FA5}">
+                      <a16:colId xmlns:a16="http://schemas.microsoft.com/office/drawing/2014/main" val="20002"/>
+                    </a:ext>
+                  </a:extLst>
+                </a:gridCol>
               </a:tblGrid>
               <a:tr h="438912">
                 <a:tc>
                   <a:txBody>
-                    <a:bodyPr wrap="square"/>
+                    <a:bodyPr/>
                     <a:lstStyle/>
                     <a:p>
                       <a:pPr algn="l"/>
@@ -14342,7 +14781,7 @@
                       </a:r>
                     </a:p>
                   </a:txBody>
-                  <a:tcPr anchor="ctr" marL="100584" marR="100584" marT="36576" marB="36576">
+                  <a:tcPr marL="100584" marR="100584" marT="36576" marB="36576" anchor="ctr">
                     <a:solidFill>
                       <a:srgbClr val="334155"/>
                     </a:solidFill>
@@ -14350,7 +14789,7 @@
                 </a:tc>
                 <a:tc>
                   <a:txBody>
-                    <a:bodyPr wrap="square"/>
+                    <a:bodyPr/>
                     <a:lstStyle/>
                     <a:p>
                       <a:pPr algn="r"/>
@@ -14365,7 +14804,7 @@
                       </a:r>
                     </a:p>
                   </a:txBody>
-                  <a:tcPr anchor="ctr" marL="100584" marR="100584" marT="36576" marB="36576">
+                  <a:tcPr marL="100584" marR="100584" marT="36576" marB="36576" anchor="ctr">
                     <a:solidFill>
                       <a:srgbClr val="334155"/>
                     </a:solidFill>
@@ -14373,7 +14812,7 @@
                 </a:tc>
                 <a:tc>
                   <a:txBody>
-                    <a:bodyPr wrap="square"/>
+                    <a:bodyPr/>
                     <a:lstStyle/>
                     <a:p>
                       <a:pPr algn="r"/>
@@ -14388,17 +14827,22 @@
                       </a:r>
                     </a:p>
                   </a:txBody>
-                  <a:tcPr anchor="ctr" marL="100584" marR="100584" marT="36576" marB="36576">
+                  <a:tcPr marL="100584" marR="100584" marT="36576" marB="36576" anchor="ctr">
                     <a:solidFill>
                       <a:srgbClr val="334155"/>
                     </a:solidFill>
                   </a:tcPr>
                 </a:tc>
+                <a:extLst>
+                  <a:ext uri="{0D108BD9-81ED-4DB2-BD59-A6C34878D82A}">
+                    <a16:rowId xmlns:a16="http://schemas.microsoft.com/office/drawing/2014/main" val="10000"/>
+                  </a:ext>
+                </a:extLst>
               </a:tr>
               <a:tr h="402336">
                 <a:tc>
                   <a:txBody>
-                    <a:bodyPr wrap="square"/>
+                    <a:bodyPr/>
                     <a:lstStyle/>
                     <a:p>
                       <a:pPr algn="l"/>
@@ -14413,7 +14857,7 @@
                       </a:r>
                     </a:p>
                   </a:txBody>
-                  <a:tcPr anchor="ctr" marL="100584" marR="100584" marT="36576" marB="36576">
+                  <a:tcPr marL="100584" marR="100584" marT="36576" marB="36576" anchor="ctr">
                     <a:solidFill>
                       <a:srgbClr val="243247"/>
                     </a:solidFill>
@@ -14421,7 +14865,7 @@
                 </a:tc>
                 <a:tc>
                   <a:txBody>
-                    <a:bodyPr wrap="square"/>
+                    <a:bodyPr/>
                     <a:lstStyle/>
                     <a:p>
                       <a:pPr algn="r"/>
@@ -14436,7 +14880,7 @@
                       </a:r>
                     </a:p>
                   </a:txBody>
-                  <a:tcPr anchor="ctr" marL="100584" marR="100584" marT="36576" marB="36576">
+                  <a:tcPr marL="100584" marR="100584" marT="36576" marB="36576" anchor="ctr">
                     <a:solidFill>
                       <a:srgbClr val="243247"/>
                     </a:solidFill>
@@ -14444,7 +14888,7 @@
                 </a:tc>
                 <a:tc>
                   <a:txBody>
-                    <a:bodyPr wrap="square"/>
+                    <a:bodyPr/>
                     <a:lstStyle/>
                     <a:p>
                       <a:pPr algn="r"/>
@@ -14459,17 +14903,22 @@
                       </a:r>
                     </a:p>
                   </a:txBody>
-                  <a:tcPr anchor="ctr" marL="100584" marR="100584" marT="36576" marB="36576">
+                  <a:tcPr marL="100584" marR="100584" marT="36576" marB="36576" anchor="ctr">
                     <a:solidFill>
                       <a:srgbClr val="243247"/>
                     </a:solidFill>
                   </a:tcPr>
                 </a:tc>
+                <a:extLst>
+                  <a:ext uri="{0D108BD9-81ED-4DB2-BD59-A6C34878D82A}">
+                    <a16:rowId xmlns:a16="http://schemas.microsoft.com/office/drawing/2014/main" val="10001"/>
+                  </a:ext>
+                </a:extLst>
               </a:tr>
               <a:tr h="402336">
                 <a:tc>
                   <a:txBody>
-                    <a:bodyPr wrap="square"/>
+                    <a:bodyPr/>
                     <a:lstStyle/>
                     <a:p>
                       <a:pPr algn="l"/>
@@ -14484,7 +14933,7 @@
                       </a:r>
                     </a:p>
                   </a:txBody>
-                  <a:tcPr anchor="ctr" marL="100584" marR="100584" marT="36576" marB="36576">
+                  <a:tcPr marL="100584" marR="100584" marT="36576" marB="36576" anchor="ctr">
                     <a:solidFill>
                       <a:srgbClr val="2B3A50"/>
                     </a:solidFill>
@@ -14492,7 +14941,7 @@
                 </a:tc>
                 <a:tc>
                   <a:txBody>
-                    <a:bodyPr wrap="square"/>
+                    <a:bodyPr/>
                     <a:lstStyle/>
                     <a:p>
                       <a:pPr algn="r"/>
@@ -14507,7 +14956,7 @@
                       </a:r>
                     </a:p>
                   </a:txBody>
-                  <a:tcPr anchor="ctr" marL="100584" marR="100584" marT="36576" marB="36576">
+                  <a:tcPr marL="100584" marR="100584" marT="36576" marB="36576" anchor="ctr">
                     <a:solidFill>
                       <a:srgbClr val="2B3A50"/>
                     </a:solidFill>
@@ -14515,7 +14964,7 @@
                 </a:tc>
                 <a:tc>
                   <a:txBody>
-                    <a:bodyPr wrap="square"/>
+                    <a:bodyPr/>
                     <a:lstStyle/>
                     <a:p>
                       <a:pPr algn="r"/>
@@ -14530,17 +14979,22 @@
                       </a:r>
                     </a:p>
                   </a:txBody>
-                  <a:tcPr anchor="ctr" marL="100584" marR="100584" marT="36576" marB="36576">
+                  <a:tcPr marL="100584" marR="100584" marT="36576" marB="36576" anchor="ctr">
                     <a:solidFill>
                       <a:srgbClr val="2B3A50"/>
                     </a:solidFill>
                   </a:tcPr>
                 </a:tc>
+                <a:extLst>
+                  <a:ext uri="{0D108BD9-81ED-4DB2-BD59-A6C34878D82A}">
+                    <a16:rowId xmlns:a16="http://schemas.microsoft.com/office/drawing/2014/main" val="10002"/>
+                  </a:ext>
+                </a:extLst>
               </a:tr>
               <a:tr h="402336">
                 <a:tc>
                   <a:txBody>
-                    <a:bodyPr wrap="square"/>
+                    <a:bodyPr/>
                     <a:lstStyle/>
                     <a:p>
                       <a:pPr algn="l"/>
@@ -14555,7 +15009,7 @@
                       </a:r>
                     </a:p>
                   </a:txBody>
-                  <a:tcPr anchor="ctr" marL="100584" marR="100584" marT="36576" marB="36576">
+                  <a:tcPr marL="100584" marR="100584" marT="36576" marB="36576" anchor="ctr">
                     <a:solidFill>
                       <a:srgbClr val="243247"/>
                     </a:solidFill>
@@ -14563,7 +15017,7 @@
                 </a:tc>
                 <a:tc>
                   <a:txBody>
-                    <a:bodyPr wrap="square"/>
+                    <a:bodyPr/>
                     <a:lstStyle/>
                     <a:p>
                       <a:pPr algn="r"/>
@@ -14578,7 +15032,7 @@
                       </a:r>
                     </a:p>
                   </a:txBody>
-                  <a:tcPr anchor="ctr" marL="100584" marR="100584" marT="36576" marB="36576">
+                  <a:tcPr marL="100584" marR="100584" marT="36576" marB="36576" anchor="ctr">
                     <a:solidFill>
                       <a:srgbClr val="243247"/>
                     </a:solidFill>
@@ -14586,7 +15040,7 @@
                 </a:tc>
                 <a:tc>
                   <a:txBody>
-                    <a:bodyPr wrap="square"/>
+                    <a:bodyPr/>
                     <a:lstStyle/>
                     <a:p>
                       <a:pPr algn="r"/>
@@ -14601,17 +15055,22 @@
                       </a:r>
                     </a:p>
                   </a:txBody>
-                  <a:tcPr anchor="ctr" marL="100584" marR="100584" marT="36576" marB="36576">
+                  <a:tcPr marL="100584" marR="100584" marT="36576" marB="36576" anchor="ctr">
                     <a:solidFill>
                       <a:srgbClr val="243247"/>
                     </a:solidFill>
                   </a:tcPr>
                 </a:tc>
+                <a:extLst>
+                  <a:ext uri="{0D108BD9-81ED-4DB2-BD59-A6C34878D82A}">
+                    <a16:rowId xmlns:a16="http://schemas.microsoft.com/office/drawing/2014/main" val="10003"/>
+                  </a:ext>
+                </a:extLst>
               </a:tr>
               <a:tr h="402336">
                 <a:tc>
                   <a:txBody>
-                    <a:bodyPr wrap="square"/>
+                    <a:bodyPr/>
                     <a:lstStyle/>
                     <a:p>
                       <a:pPr algn="l"/>
@@ -14626,7 +15085,7 @@
                       </a:r>
                     </a:p>
                   </a:txBody>
-                  <a:tcPr anchor="ctr" marL="100584" marR="100584" marT="36576" marB="36576">
+                  <a:tcPr marL="100584" marR="100584" marT="36576" marB="36576" anchor="ctr">
                     <a:solidFill>
                       <a:srgbClr val="2B3A50"/>
                     </a:solidFill>
@@ -14634,7 +15093,7 @@
                 </a:tc>
                 <a:tc>
                   <a:txBody>
-                    <a:bodyPr wrap="square"/>
+                    <a:bodyPr/>
                     <a:lstStyle/>
                     <a:p>
                       <a:pPr algn="r"/>
@@ -14649,7 +15108,7 @@
                       </a:r>
                     </a:p>
                   </a:txBody>
-                  <a:tcPr anchor="ctr" marL="100584" marR="100584" marT="36576" marB="36576">
+                  <a:tcPr marL="100584" marR="100584" marT="36576" marB="36576" anchor="ctr">
                     <a:solidFill>
                       <a:srgbClr val="2B3A50"/>
                     </a:solidFill>
@@ -14657,7 +15116,7 @@
                 </a:tc>
                 <a:tc>
                   <a:txBody>
-                    <a:bodyPr wrap="square"/>
+                    <a:bodyPr/>
                     <a:lstStyle/>
                     <a:p>
                       <a:pPr algn="r"/>
@@ -14672,17 +15131,22 @@
                       </a:r>
                     </a:p>
                   </a:txBody>
-                  <a:tcPr anchor="ctr" marL="100584" marR="100584" marT="36576" marB="36576">
+                  <a:tcPr marL="100584" marR="100584" marT="36576" marB="36576" anchor="ctr">
                     <a:solidFill>
                       <a:srgbClr val="2B3A50"/>
                     </a:solidFill>
                   </a:tcPr>
                 </a:tc>
+                <a:extLst>
+                  <a:ext uri="{0D108BD9-81ED-4DB2-BD59-A6C34878D82A}">
+                    <a16:rowId xmlns:a16="http://schemas.microsoft.com/office/drawing/2014/main" val="10004"/>
+                  </a:ext>
+                </a:extLst>
               </a:tr>
               <a:tr h="402336">
                 <a:tc>
                   <a:txBody>
-                    <a:bodyPr wrap="square"/>
+                    <a:bodyPr/>
                     <a:lstStyle/>
                     <a:p>
                       <a:pPr algn="l"/>
@@ -14697,7 +15161,7 @@
                       </a:r>
                     </a:p>
                   </a:txBody>
-                  <a:tcPr anchor="ctr" marL="100584" marR="100584" marT="36576" marB="36576">
+                  <a:tcPr marL="100584" marR="100584" marT="36576" marB="36576" anchor="ctr">
                     <a:solidFill>
                       <a:srgbClr val="334155"/>
                     </a:solidFill>
@@ -14705,7 +15169,7 @@
                 </a:tc>
                 <a:tc>
                   <a:txBody>
-                    <a:bodyPr wrap="square"/>
+                    <a:bodyPr/>
                     <a:lstStyle/>
                     <a:p>
                       <a:pPr algn="r"/>
@@ -14720,7 +15184,7 @@
                       </a:r>
                     </a:p>
                   </a:txBody>
-                  <a:tcPr anchor="ctr" marL="100584" marR="100584" marT="36576" marB="36576">
+                  <a:tcPr marL="100584" marR="100584" marT="36576" marB="36576" anchor="ctr">
                     <a:solidFill>
                       <a:srgbClr val="334155"/>
                     </a:solidFill>
@@ -14728,7 +15192,7 @@
                 </a:tc>
                 <a:tc>
                   <a:txBody>
-                    <a:bodyPr wrap="square"/>
+                    <a:bodyPr/>
                     <a:lstStyle/>
                     <a:p>
                       <a:pPr algn="r"/>
@@ -14743,12 +15207,17 @@
                       </a:r>
                     </a:p>
                   </a:txBody>
-                  <a:tcPr anchor="ctr" marL="100584" marR="100584" marT="36576" marB="36576">
+                  <a:tcPr marL="100584" marR="100584" marT="36576" marB="36576" anchor="ctr">
                     <a:solidFill>
                       <a:srgbClr val="334155"/>
                     </a:solidFill>
                   </a:tcPr>
                 </a:tc>
+                <a:extLst>
+                  <a:ext uri="{0D108BD9-81ED-4DB2-BD59-A6C34878D82A}">
+                    <a16:rowId xmlns:a16="http://schemas.microsoft.com/office/drawing/2014/main" val="10005"/>
+                  </a:ext>
+                </a:extLst>
               </a:tr>
             </a:tbl>
           </a:graphicData>
@@ -14771,7 +15240,7 @@
           <a:noFill/>
         </p:spPr>
         <p:txBody>
-          <a:bodyPr wrap="square" lIns="0" rIns="0" tIns="0" bIns="0">
+          <a:bodyPr wrap="square" lIns="0" tIns="0" rIns="0" bIns="0">
             <a:spAutoFit/>
           </a:bodyPr>
           <a:lstStyle/>
@@ -15188,44 +15657,44 @@
         <a:sysClr val="window" lastClr="FFFFFF"/>
       </a:lt1>
       <a:dk2>
-        <a:srgbClr val="1F497D"/>
+        <a:srgbClr val="0E2841"/>
       </a:dk2>
       <a:lt2>
-        <a:srgbClr val="EEECE1"/>
+        <a:srgbClr val="E8E8E8"/>
       </a:lt2>
       <a:accent1>
-        <a:srgbClr val="4F81BD"/>
+        <a:srgbClr val="156082"/>
       </a:accent1>
       <a:accent2>
-        <a:srgbClr val="C0504D"/>
+        <a:srgbClr val="E97132"/>
       </a:accent2>
       <a:accent3>
-        <a:srgbClr val="9BBB59"/>
+        <a:srgbClr val="196B24"/>
       </a:accent3>
       <a:accent4>
-        <a:srgbClr val="8064A2"/>
+        <a:srgbClr val="0F9ED5"/>
       </a:accent4>
       <a:accent5>
-        <a:srgbClr val="4BACC6"/>
+        <a:srgbClr val="A02B93"/>
       </a:accent5>
       <a:accent6>
-        <a:srgbClr val="F79646"/>
+        <a:srgbClr val="4EA72E"/>
       </a:accent6>
       <a:hlink>
-        <a:srgbClr val="0000FF"/>
+        <a:srgbClr val="467886"/>
       </a:hlink>
       <a:folHlink>
-        <a:srgbClr val="800080"/>
+        <a:srgbClr val="96607D"/>
       </a:folHlink>
     </a:clrScheme>
     <a:fontScheme name="Office">
       <a:majorFont>
-        <a:latin typeface="Calibri"/>
+        <a:latin typeface="Aptos Display" panose="02110004020202020204"/>
         <a:ea typeface=""/>
         <a:cs typeface=""/>
-        <a:font script="Jpan" typeface="ＭＳ Ｐゴシック"/>
+        <a:font script="Jpan" typeface="游ゴシック Light"/>
         <a:font script="Hang" typeface="맑은 고딕"/>
-        <a:font script="Hans" typeface="宋体"/>
+        <a:font script="Hans" typeface="等线 Light"/>
         <a:font script="Hant" typeface="新細明體"/>
         <a:font script="Arab" typeface="Times New Roman"/>
         <a:font script="Hebr" typeface="Times New Roman"/>
@@ -15253,14 +15722,31 @@
         <a:font script="Viet" typeface="Times New Roman"/>
         <a:font script="Uigh" typeface="Microsoft Uighur"/>
         <a:font script="Geor" typeface="Sylfaen"/>
+        <a:font script="Armn" typeface="Arial"/>
+        <a:font script="Bugi" typeface="Leelawadee UI"/>
+        <a:font script="Bopo" typeface="Microsoft JhengHei"/>
+        <a:font script="Java" typeface="Javanese Text"/>
+        <a:font script="Lisu" typeface="Segoe UI"/>
+        <a:font script="Mymr" typeface="Myanmar Text"/>
+        <a:font script="Nkoo" typeface="Ebrima"/>
+        <a:font script="Olck" typeface="Nirmala UI"/>
+        <a:font script="Osma" typeface="Ebrima"/>
+        <a:font script="Phag" typeface="Phagspa"/>
+        <a:font script="Syrn" typeface="Estrangelo Edessa"/>
+        <a:font script="Syrj" typeface="Estrangelo Edessa"/>
+        <a:font script="Syre" typeface="Estrangelo Edessa"/>
+        <a:font script="Sora" typeface="Nirmala UI"/>
+        <a:font script="Tale" typeface="Microsoft Tai Le"/>
+        <a:font script="Talu" typeface="Microsoft New Tai Lue"/>
+        <a:font script="Tfng" typeface="Ebrima"/>
       </a:majorFont>
       <a:minorFont>
-        <a:latin typeface="Calibri"/>
+        <a:latin typeface="Aptos" panose="02110004020202020204"/>
         <a:ea typeface=""/>
         <a:cs typeface=""/>
-        <a:font script="Jpan" typeface="ＭＳ Ｐゴシック"/>
+        <a:font script="Jpan" typeface="游ゴシック"/>
         <a:font script="Hang" typeface="맑은 고딕"/>
-        <a:font script="Hans" typeface="宋体"/>
+        <a:font script="Hans" typeface="等线"/>
         <a:font script="Hant" typeface="新細明體"/>
         <a:font script="Arab" typeface="Arial"/>
         <a:font script="Hebr" typeface="Arial"/>
@@ -15288,6 +15774,23 @@
         <a:font script="Viet" typeface="Arial"/>
         <a:font script="Uigh" typeface="Microsoft Uighur"/>
         <a:font script="Geor" typeface="Sylfaen"/>
+        <a:font script="Armn" typeface="Arial"/>
+        <a:font script="Bugi" typeface="Leelawadee UI"/>
+        <a:font script="Bopo" typeface="Microsoft JhengHei"/>
+        <a:font script="Java" typeface="Javanese Text"/>
+        <a:font script="Lisu" typeface="Segoe UI"/>
+        <a:font script="Mymr" typeface="Myanmar Text"/>
+        <a:font script="Nkoo" typeface="Ebrima"/>
+        <a:font script="Olck" typeface="Nirmala UI"/>
+        <a:font script="Osma" typeface="Ebrima"/>
+        <a:font script="Phag" typeface="Phagspa"/>
+        <a:font script="Syrn" typeface="Estrangelo Edessa"/>
+        <a:font script="Syrj" typeface="Estrangelo Edessa"/>
+        <a:font script="Syre" typeface="Estrangelo Edessa"/>
+        <a:font script="Sora" typeface="Nirmala UI"/>
+        <a:font script="Tale" typeface="Microsoft Tai Le"/>
+        <a:font script="Talu" typeface="Microsoft New Tai Lue"/>
+        <a:font script="Tfng" typeface="Ebrima"/>
       </a:minorFont>
     </a:fontScheme>
     <a:fmtScheme name="Office">
@@ -15299,180 +15802,136 @@
           <a:gsLst>
             <a:gs pos="0">
               <a:schemeClr val="phClr">
-                <a:tint val="50000"/>
-                <a:satMod val="300000"/>
+                <a:lumMod val="110000"/>
+                <a:satMod val="105000"/>
+                <a:tint val="67000"/>
               </a:schemeClr>
             </a:gs>
-            <a:gs pos="35000">
+            <a:gs pos="50000">
               <a:schemeClr val="phClr">
-                <a:tint val="37000"/>
-                <a:satMod val="300000"/>
+                <a:lumMod val="105000"/>
+                <a:satMod val="103000"/>
+                <a:tint val="73000"/>
               </a:schemeClr>
             </a:gs>
             <a:gs pos="100000">
               <a:schemeClr val="phClr">
-                <a:tint val="15000"/>
-                <a:satMod val="350000"/>
+                <a:lumMod val="105000"/>
+                <a:satMod val="109000"/>
+                <a:tint val="81000"/>
               </a:schemeClr>
             </a:gs>
           </a:gsLst>
-          <a:lin ang="16200000" scaled="1"/>
+          <a:lin ang="5400000" scaled="0"/>
         </a:gradFill>
         <a:gradFill rotWithShape="1">
           <a:gsLst>
             <a:gs pos="0">
               <a:schemeClr val="phClr">
-                <a:tint val="100000"/>
+                <a:satMod val="103000"/>
+                <a:lumMod val="102000"/>
+                <a:tint val="94000"/>
+              </a:schemeClr>
+            </a:gs>
+            <a:gs pos="50000">
+              <a:schemeClr val="phClr">
+                <a:satMod val="110000"/>
+                <a:lumMod val="100000"/>
                 <a:shade val="100000"/>
-                <a:satMod val="130000"/>
               </a:schemeClr>
             </a:gs>
             <a:gs pos="100000">
               <a:schemeClr val="phClr">
-                <a:tint val="50000"/>
-                <a:shade val="100000"/>
-                <a:satMod val="350000"/>
+                <a:lumMod val="99000"/>
+                <a:satMod val="120000"/>
+                <a:shade val="78000"/>
               </a:schemeClr>
             </a:gs>
           </a:gsLst>
-          <a:lin ang="16200000" scaled="0"/>
+          <a:lin ang="5400000" scaled="0"/>
         </a:gradFill>
       </a:fillStyleLst>
       <a:lnStyleLst>
-        <a:ln w="9525" cap="flat" cmpd="sng" algn="ctr">
+        <a:ln w="12700" cap="flat" cmpd="sng" algn="ctr">
           <a:solidFill>
-            <a:schemeClr val="phClr">
-              <a:shade val="95000"/>
-              <a:satMod val="105000"/>
-            </a:schemeClr>
+            <a:schemeClr val="phClr"/>
           </a:solidFill>
           <a:prstDash val="solid"/>
+          <a:miter lim="800000"/>
+        </a:ln>
+        <a:ln w="19050" cap="flat" cmpd="sng" algn="ctr">
+          <a:solidFill>
+            <a:schemeClr val="phClr"/>
+          </a:solidFill>
+          <a:prstDash val="solid"/>
+          <a:miter lim="800000"/>
         </a:ln>
         <a:ln w="25400" cap="flat" cmpd="sng" algn="ctr">
           <a:solidFill>
             <a:schemeClr val="phClr"/>
           </a:solidFill>
           <a:prstDash val="solid"/>
-        </a:ln>
-        <a:ln w="38100" cap="flat" cmpd="sng" algn="ctr">
-          <a:solidFill>
-            <a:schemeClr val="phClr"/>
-          </a:solidFill>
-          <a:prstDash val="solid"/>
+          <a:miter lim="800000"/>
         </a:ln>
       </a:lnStyleLst>
       <a:effectStyleLst>
         <a:effectStyle>
+          <a:effectLst/>
+        </a:effectStyle>
+        <a:effectStyle>
+          <a:effectLst/>
+        </a:effectStyle>
+        <a:effectStyle>
           <a:effectLst>
-            <a:outerShdw blurRad="40000" dist="20000" dir="5400000" rotWithShape="0">
+            <a:outerShdw blurRad="57150" dist="19050" dir="5400000" algn="ctr" rotWithShape="0">
               <a:srgbClr val="000000">
-                <a:alpha val="38000"/>
+                <a:alpha val="63000"/>
               </a:srgbClr>
             </a:outerShdw>
           </a:effectLst>
-        </a:effectStyle>
-        <a:effectStyle>
-          <a:effectLst>
-            <a:outerShdw blurRad="40000" dist="23000" dir="5400000" rotWithShape="0">
-              <a:srgbClr val="000000">
-                <a:alpha val="35000"/>
-              </a:srgbClr>
-            </a:outerShdw>
-          </a:effectLst>
-        </a:effectStyle>
-        <a:effectStyle>
-          <a:effectLst>
-            <a:outerShdw blurRad="40000" dist="23000" dir="5400000" rotWithShape="0">
-              <a:srgbClr val="000000">
-                <a:alpha val="35000"/>
-              </a:srgbClr>
-            </a:outerShdw>
-          </a:effectLst>
-          <a:scene3d>
-            <a:camera prst="orthographicFront">
-              <a:rot lat="0" lon="0" rev="0"/>
-            </a:camera>
-            <a:lightRig rig="threePt" dir="t">
-              <a:rot lat="0" lon="0" rev="1200000"/>
-            </a:lightRig>
-          </a:scene3d>
-          <a:sp3d>
-            <a:bevelT w="63500" h="25400"/>
-          </a:sp3d>
         </a:effectStyle>
       </a:effectStyleLst>
       <a:bgFillStyleLst>
         <a:solidFill>
           <a:schemeClr val="phClr"/>
         </a:solidFill>
+        <a:solidFill>
+          <a:schemeClr val="phClr">
+            <a:tint val="95000"/>
+            <a:satMod val="170000"/>
+          </a:schemeClr>
+        </a:solidFill>
         <a:gradFill rotWithShape="1">
           <a:gsLst>
             <a:gs pos="0">
               <a:schemeClr val="phClr">
-                <a:tint val="40000"/>
-                <a:satMod val="350000"/>
+                <a:tint val="93000"/>
+                <a:satMod val="150000"/>
+                <a:shade val="98000"/>
+                <a:lumMod val="102000"/>
               </a:schemeClr>
             </a:gs>
-            <a:gs pos="40000">
+            <a:gs pos="50000">
               <a:schemeClr val="phClr">
-                <a:tint val="45000"/>
-                <a:shade val="99000"/>
-                <a:satMod val="350000"/>
+                <a:tint val="98000"/>
+                <a:satMod val="130000"/>
+                <a:shade val="90000"/>
+                <a:lumMod val="103000"/>
               </a:schemeClr>
             </a:gs>
             <a:gs pos="100000">
               <a:schemeClr val="phClr">
-                <a:shade val="20000"/>
-                <a:satMod val="255000"/>
+                <a:shade val="63000"/>
+                <a:satMod val="120000"/>
               </a:schemeClr>
             </a:gs>
           </a:gsLst>
-          <a:path path="circle">
-            <a:fillToRect l="50000" t="-80000" r="50000" b="180000"/>
-          </a:path>
-        </a:gradFill>
-        <a:gradFill rotWithShape="1">
-          <a:gsLst>
-            <a:gs pos="0">
-              <a:schemeClr val="phClr">
-                <a:tint val="80000"/>
-                <a:satMod val="300000"/>
-              </a:schemeClr>
-            </a:gs>
-            <a:gs pos="100000">
-              <a:schemeClr val="phClr">
-                <a:shade val="30000"/>
-                <a:satMod val="200000"/>
-              </a:schemeClr>
-            </a:gs>
-          </a:gsLst>
-          <a:path path="circle">
-            <a:fillToRect l="50000" t="50000" r="50000" b="50000"/>
-          </a:path>
+          <a:lin ang="5400000" scaled="0"/>
         </a:gradFill>
       </a:bgFillStyleLst>
     </a:fmtScheme>
   </a:themeElements>
   <a:objectDefaults>
-    <a:spDef>
-      <a:spPr/>
-      <a:bodyPr/>
-      <a:lstStyle/>
-      <a:style>
-        <a:lnRef idx="1">
-          <a:schemeClr val="accent1"/>
-        </a:lnRef>
-        <a:fillRef idx="3">
-          <a:schemeClr val="accent1"/>
-        </a:fillRef>
-        <a:effectRef idx="2">
-          <a:schemeClr val="accent1"/>
-        </a:effectRef>
-        <a:fontRef idx="minor">
-          <a:schemeClr val="lt1"/>
-        </a:fontRef>
-      </a:style>
-    </a:spDef>
     <a:lnDef>
       <a:spPr/>
       <a:bodyPr/>
@@ -15494,5 +15953,10 @@
     </a:lnDef>
   </a:objectDefaults>
   <a:extraClrSchemeLst/>
+  <a:extLst>
+    <a:ext uri="{05A4C25C-085E-4340-85A3-A5531E510DB2}">
+      <thm15:themeFamily xmlns:thm15="http://schemas.microsoft.com/office/thememl/2012/main" name="Office Theme" id="{2E142A2C-CD16-42D6-873A-C26D2A0506FA}" vid="{1BDDFF52-6CD6-40A5-AB3C-68EB2F1E4D0A}"/>
+    </a:ext>
+  </a:extLst>
 </a:theme>
 </file>